--- a/ML_ppt.pptx
+++ b/ML_ppt.pptx
@@ -18,11 +18,17 @@
     <p:sldId id="256" r:id="rId12"/>
     <p:sldId id="257" r:id="rId13"/>
     <p:sldId id="259" r:id="rId14"/>
-    <p:sldId id="260" r:id="rId15"/>
-    <p:sldId id="258" r:id="rId16"/>
-    <p:sldId id="263" r:id="rId17"/>
-    <p:sldId id="265" r:id="rId18"/>
-    <p:sldId id="261" r:id="rId19"/>
+    <p:sldId id="266" r:id="rId15"/>
+    <p:sldId id="268" r:id="rId16"/>
+    <p:sldId id="269" r:id="rId17"/>
+    <p:sldId id="271" r:id="rId18"/>
+    <p:sldId id="270" r:id="rId19"/>
+    <p:sldId id="267" r:id="rId20"/>
+    <p:sldId id="260" r:id="rId21"/>
+    <p:sldId id="258" r:id="rId22"/>
+    <p:sldId id="263" r:id="rId23"/>
+    <p:sldId id="265" r:id="rId24"/>
+    <p:sldId id="261" r:id="rId25"/>
   </p:sldIdLst>
   <p:sldSz cx="12192000" cy="6858000"/>
   <p:notesSz cx="7559675" cy="10691813"/>
@@ -121,6 +127,11 @@
       </a:defRPr>
     </a:lvl9pPr>
   </p:defaultTextStyle>
+  <p:extLst>
+    <p:ext uri="{EFAFB233-063F-42B5-8137-9DF3F51BA10A}">
+      <p15:sldGuideLst xmlns:p15="http://schemas.microsoft.com/office/powerpoint/2012/main"/>
+    </p:ext>
+  </p:extLst>
 </p:presentation>
 </file>
 
@@ -8339,6 +8350,2861 @@
 </p:sld>
 </file>
 
+<file path=ppt/slides/slide10.xml><?xml version="1.0" encoding="utf-8"?>
+<p:sld xmlns:a="http://schemas.openxmlformats.org/drawingml/2006/main" xmlns:r="http://schemas.openxmlformats.org/officeDocument/2006/relationships" xmlns:p="http://schemas.openxmlformats.org/presentationml/2006/main">
+  <p:cSld>
+    <p:spTree>
+      <p:nvGrpSpPr>
+        <p:cNvPr id="1" name=""/>
+        <p:cNvGrpSpPr/>
+        <p:nvPr/>
+      </p:nvGrpSpPr>
+      <p:grpSpPr>
+        <a:xfrm>
+          <a:off x="0" y="0"/>
+          <a:ext cx="0" cy="0"/>
+          <a:chOff x="0" y="0"/>
+          <a:chExt cx="0" cy="0"/>
+        </a:xfrm>
+      </p:grpSpPr>
+      <p:sp>
+        <p:nvSpPr>
+          <p:cNvPr id="73" name="Rectángulo 3"/>
+          <p:cNvSpPr/>
+          <p:nvPr/>
+        </p:nvSpPr>
+        <p:spPr>
+          <a:xfrm>
+            <a:off x="960" y="0"/>
+            <a:ext cx="12191040" cy="6856920"/>
+          </a:xfrm>
+          <a:prstGeom prst="rect">
+            <a:avLst/>
+          </a:prstGeom>
+          <a:solidFill>
+            <a:schemeClr val="accent2">
+              <a:lumMod val="20000"/>
+              <a:lumOff val="80000"/>
+            </a:schemeClr>
+          </a:solidFill>
+          <a:ln>
+            <a:solidFill>
+              <a:srgbClr val="325490"/>
+            </a:solidFill>
+          </a:ln>
+        </p:spPr>
+        <p:style>
+          <a:lnRef idx="2">
+            <a:schemeClr val="accent1">
+              <a:shade val="50000"/>
+            </a:schemeClr>
+          </a:lnRef>
+          <a:fillRef idx="1">
+            <a:schemeClr val="accent1"/>
+          </a:fillRef>
+          <a:effectRef idx="0">
+            <a:schemeClr val="accent1"/>
+          </a:effectRef>
+          <a:fontRef idx="minor"/>
+        </p:style>
+        <p:txBody>
+          <a:bodyPr lIns="90000" tIns="45000" rIns="90000" bIns="45000" anchor="ctr">
+            <a:noAutofit/>
+          </a:bodyPr>
+          <a:lstStyle/>
+          <a:p>
+            <a:endParaRPr lang="es-ES" sz="1800" b="0" strike="noStrike" spc="-1">
+              <a:solidFill>
+                <a:schemeClr val="lt1"/>
+              </a:solidFill>
+              <a:latin typeface="Calibri"/>
+            </a:endParaRPr>
+          </a:p>
+        </p:txBody>
+      </p:sp>
+      <p:sp>
+        <p:nvSpPr>
+          <p:cNvPr id="74" name="CuadroTexto 15"/>
+          <p:cNvSpPr/>
+          <p:nvPr/>
+        </p:nvSpPr>
+        <p:spPr>
+          <a:xfrm>
+            <a:off x="527760" y="479520"/>
+            <a:ext cx="11135160" cy="623160"/>
+          </a:xfrm>
+          <a:prstGeom prst="rect">
+            <a:avLst/>
+          </a:prstGeom>
+          <a:noFill/>
+          <a:ln w="0">
+            <a:noFill/>
+          </a:ln>
+        </p:spPr>
+        <p:style>
+          <a:lnRef idx="0">
+            <a:scrgbClr r="0" g="0" b="0"/>
+          </a:lnRef>
+          <a:fillRef idx="0">
+            <a:scrgbClr r="0" g="0" b="0"/>
+          </a:fillRef>
+          <a:effectRef idx="0">
+            <a:scrgbClr r="0" g="0" b="0"/>
+          </a:effectRef>
+          <a:fontRef idx="minor"/>
+        </p:style>
+        <p:txBody>
+          <a:bodyPr lIns="90000" tIns="45000" rIns="90000" bIns="45000" anchor="t">
+            <a:spAutoFit/>
+          </a:bodyPr>
+          <a:lstStyle/>
+          <a:p>
+            <a:pPr defTabSz="914400">
+              <a:lnSpc>
+                <a:spcPct val="100000"/>
+              </a:lnSpc>
+            </a:pPr>
+            <a:r>
+              <a:rPr lang="es-ES" sz="3500" b="1" strike="noStrike" spc="-1">
+                <a:solidFill>
+                  <a:srgbClr val="582808"/>
+                </a:solidFill>
+                <a:latin typeface="Calibri Light"/>
+                <a:ea typeface="Microsoft YaHei"/>
+              </a:rPr>
+              <a:t>EDA – Feature engineering </a:t>
+            </a:r>
+            <a:r>
+              <a:rPr lang="es-ES" sz="3500" b="1" strike="noStrike" spc="-1">
+                <a:solidFill>
+                  <a:srgbClr val="582808"/>
+                </a:solidFill>
+                <a:latin typeface="Calibri Light"/>
+              </a:rPr>
+              <a:t> (JAVI)</a:t>
+            </a:r>
+            <a:endParaRPr lang="es-ES" sz="3500" b="0" strike="noStrike" spc="-1">
+              <a:solidFill>
+                <a:srgbClr val="000000"/>
+              </a:solidFill>
+              <a:latin typeface="Arial"/>
+            </a:endParaRPr>
+          </a:p>
+        </p:txBody>
+      </p:sp>
+      <p:sp>
+        <p:nvSpPr>
+          <p:cNvPr id="75" name="CuadroTexto 16"/>
+          <p:cNvSpPr/>
+          <p:nvPr/>
+        </p:nvSpPr>
+        <p:spPr>
+          <a:xfrm>
+            <a:off x="716400" y="1582200"/>
+            <a:ext cx="10946520" cy="4522861"/>
+          </a:xfrm>
+          <a:prstGeom prst="rect">
+            <a:avLst/>
+          </a:prstGeom>
+          <a:noFill/>
+          <a:ln w="0">
+            <a:noFill/>
+          </a:ln>
+        </p:spPr>
+        <p:style>
+          <a:lnRef idx="0">
+            <a:scrgbClr r="0" g="0" b="0"/>
+          </a:lnRef>
+          <a:fillRef idx="0">
+            <a:scrgbClr r="0" g="0" b="0"/>
+          </a:fillRef>
+          <a:effectRef idx="0">
+            <a:scrgbClr r="0" g="0" b="0"/>
+          </a:effectRef>
+          <a:fontRef idx="minor"/>
+        </p:style>
+        <p:txBody>
+          <a:bodyPr lIns="90000" tIns="45000" rIns="90000" bIns="45000" anchor="t">
+            <a:spAutoFit/>
+          </a:bodyPr>
+          <a:lstStyle/>
+          <a:p>
+            <a:pPr defTabSz="914400">
+              <a:lnSpc>
+                <a:spcPct val="100000"/>
+              </a:lnSpc>
+            </a:pPr>
+            <a:r>
+              <a:rPr lang="es-ES" sz="1600" b="0" strike="noStrike" spc="-1" dirty="0">
+                <a:solidFill>
+                  <a:srgbClr val="582808"/>
+                </a:solidFill>
+                <a:latin typeface="Calibri"/>
+              </a:rPr>
+              <a:t>Dado el objetivo de nuestro modelo de Machine </a:t>
+            </a:r>
+            <a:r>
+              <a:rPr lang="es-ES" sz="1600" b="0" strike="noStrike" spc="-1" dirty="0" err="1">
+                <a:solidFill>
+                  <a:srgbClr val="582808"/>
+                </a:solidFill>
+                <a:latin typeface="Calibri"/>
+              </a:rPr>
+              <a:t>Learning</a:t>
+            </a:r>
+            <a:r>
+              <a:rPr lang="es-ES" sz="1600" b="0" strike="noStrike" spc="-1" dirty="0">
+                <a:solidFill>
+                  <a:srgbClr val="582808"/>
+                </a:solidFill>
+                <a:latin typeface="Calibri"/>
+              </a:rPr>
+              <a:t>, teníamos que tratar las </a:t>
+            </a:r>
+            <a:r>
+              <a:rPr lang="es-ES" sz="1600" b="0" strike="noStrike" spc="-1" dirty="0" err="1">
+                <a:solidFill>
+                  <a:srgbClr val="582808"/>
+                </a:solidFill>
+                <a:latin typeface="Calibri"/>
+              </a:rPr>
+              <a:t>features</a:t>
+            </a:r>
+            <a:r>
+              <a:rPr lang="es-ES" sz="1600" b="0" strike="noStrike" spc="-1" dirty="0">
+                <a:solidFill>
+                  <a:srgbClr val="582808"/>
+                </a:solidFill>
+                <a:latin typeface="Calibri"/>
+              </a:rPr>
+              <a:t> categóricas en numéricas, de forma que pudiésemos dotarlas de sentido y significado para el entrenamiento del modelo.</a:t>
+            </a:r>
+            <a:endParaRPr lang="es-ES" sz="1600" b="0" strike="noStrike" spc="-1" dirty="0">
+              <a:solidFill>
+                <a:srgbClr val="000000"/>
+              </a:solidFill>
+              <a:latin typeface="Arial"/>
+            </a:endParaRPr>
+          </a:p>
+          <a:p>
+            <a:pPr defTabSz="914400">
+              <a:lnSpc>
+                <a:spcPct val="100000"/>
+              </a:lnSpc>
+            </a:pPr>
+            <a:endParaRPr lang="es-ES" sz="1600" b="0" strike="noStrike" spc="-1" dirty="0">
+              <a:solidFill>
+                <a:srgbClr val="000000"/>
+              </a:solidFill>
+              <a:latin typeface="Arial"/>
+            </a:endParaRPr>
+          </a:p>
+          <a:p>
+            <a:pPr defTabSz="914400">
+              <a:lnSpc>
+                <a:spcPct val="100000"/>
+              </a:lnSpc>
+            </a:pPr>
+            <a:r>
+              <a:rPr lang="es-ES" sz="1600" b="0" strike="noStrike" spc="-1" dirty="0">
+                <a:solidFill>
+                  <a:srgbClr val="582808"/>
+                </a:solidFill>
+                <a:latin typeface="Calibri"/>
+              </a:rPr>
+              <a:t>Por ello, tratamos individualmente cada columna categórica y fuimos aplicando el </a:t>
+            </a:r>
+            <a:r>
+              <a:rPr lang="es-ES" sz="1600" b="0" strike="noStrike" spc="-1" dirty="0" err="1">
+                <a:solidFill>
+                  <a:srgbClr val="582808"/>
+                </a:solidFill>
+                <a:latin typeface="Calibri"/>
+              </a:rPr>
+              <a:t>encoding</a:t>
+            </a:r>
+            <a:r>
+              <a:rPr lang="es-ES" sz="1600" b="0" strike="noStrike" spc="-1" dirty="0">
+                <a:solidFill>
+                  <a:srgbClr val="582808"/>
+                </a:solidFill>
+                <a:latin typeface="Calibri"/>
+              </a:rPr>
+              <a:t> más acorde en función de su cardinalidad.</a:t>
+            </a:r>
+            <a:endParaRPr lang="es-ES" sz="1600" b="0" strike="noStrike" spc="-1" dirty="0">
+              <a:solidFill>
+                <a:srgbClr val="000000"/>
+              </a:solidFill>
+              <a:latin typeface="Arial"/>
+            </a:endParaRPr>
+          </a:p>
+          <a:p>
+            <a:pPr defTabSz="914400">
+              <a:lnSpc>
+                <a:spcPct val="100000"/>
+              </a:lnSpc>
+            </a:pPr>
+            <a:endParaRPr lang="es-ES" sz="1600" b="0" strike="noStrike" spc="-1" dirty="0">
+              <a:solidFill>
+                <a:srgbClr val="000000"/>
+              </a:solidFill>
+              <a:latin typeface="Arial"/>
+            </a:endParaRPr>
+          </a:p>
+          <a:p>
+            <a:pPr defTabSz="914400">
+              <a:lnSpc>
+                <a:spcPct val="100000"/>
+              </a:lnSpc>
+            </a:pPr>
+            <a:r>
+              <a:rPr lang="es-ES" sz="1600" b="0" strike="noStrike" spc="-1" dirty="0">
+                <a:solidFill>
+                  <a:srgbClr val="582808"/>
+                </a:solidFill>
+                <a:latin typeface="Calibri"/>
+              </a:rPr>
+              <a:t>Algunas </a:t>
+            </a:r>
+            <a:r>
+              <a:rPr lang="es-ES" sz="1600" b="0" strike="noStrike" spc="-1" dirty="0" err="1">
+                <a:solidFill>
+                  <a:srgbClr val="582808"/>
+                </a:solidFill>
+                <a:latin typeface="Calibri"/>
+              </a:rPr>
+              <a:t>features</a:t>
+            </a:r>
+            <a:r>
+              <a:rPr lang="es-ES" sz="1600" b="0" strike="noStrike" spc="-1" dirty="0">
+                <a:solidFill>
+                  <a:srgbClr val="582808"/>
+                </a:solidFill>
+                <a:latin typeface="Calibri"/>
+              </a:rPr>
+              <a:t> con pocos valores únicos era fácilmente transformables en binarias o aplicándoles </a:t>
+            </a:r>
+            <a:r>
+              <a:rPr lang="es-ES" sz="1600" b="0" strike="noStrike" spc="-1" dirty="0" err="1">
+                <a:solidFill>
+                  <a:srgbClr val="582808"/>
+                </a:solidFill>
+                <a:latin typeface="Calibri"/>
+              </a:rPr>
+              <a:t>one-hot-encoding</a:t>
+            </a:r>
+            <a:r>
+              <a:rPr lang="es-ES" sz="1600" b="0" strike="noStrike" spc="-1" dirty="0">
+                <a:solidFill>
+                  <a:srgbClr val="582808"/>
+                </a:solidFill>
+                <a:latin typeface="Calibri"/>
+              </a:rPr>
+              <a:t> para la generación de estas columnas binarias-numéricas y alguna variable susceptible de mapeo de datos para su conversión en numérica.</a:t>
+            </a:r>
+            <a:endParaRPr lang="es-ES" sz="1600" b="0" strike="noStrike" spc="-1" dirty="0">
+              <a:solidFill>
+                <a:srgbClr val="000000"/>
+              </a:solidFill>
+              <a:latin typeface="Arial"/>
+            </a:endParaRPr>
+          </a:p>
+          <a:p>
+            <a:pPr defTabSz="914400">
+              <a:lnSpc>
+                <a:spcPct val="100000"/>
+              </a:lnSpc>
+            </a:pPr>
+            <a:endParaRPr lang="es-ES" sz="1600" b="0" strike="noStrike" spc="-1" dirty="0">
+              <a:solidFill>
+                <a:srgbClr val="000000"/>
+              </a:solidFill>
+              <a:latin typeface="Arial"/>
+            </a:endParaRPr>
+          </a:p>
+          <a:p>
+            <a:pPr defTabSz="914400">
+              <a:lnSpc>
+                <a:spcPct val="100000"/>
+              </a:lnSpc>
+            </a:pPr>
+            <a:r>
+              <a:rPr lang="es-ES" sz="1600" b="0" strike="noStrike" spc="-1" dirty="0">
+                <a:solidFill>
+                  <a:srgbClr val="582808"/>
+                </a:solidFill>
+                <a:latin typeface="Calibri"/>
+              </a:rPr>
+              <a:t>En el caso de otras </a:t>
+            </a:r>
+            <a:r>
+              <a:rPr lang="es-ES" sz="1600" b="0" strike="noStrike" spc="-1" dirty="0" err="1">
+                <a:solidFill>
+                  <a:srgbClr val="582808"/>
+                </a:solidFill>
+                <a:latin typeface="Calibri"/>
+              </a:rPr>
+              <a:t>features</a:t>
+            </a:r>
+            <a:r>
+              <a:rPr lang="es-ES" sz="1600" b="0" strike="noStrike" spc="-1" dirty="0">
+                <a:solidFill>
+                  <a:srgbClr val="582808"/>
+                </a:solidFill>
+                <a:latin typeface="Calibri"/>
+              </a:rPr>
+              <a:t> de tipo texto, extrajimos parte numérica que podía tener sentido para el modelo y también tratamos la parte de texto generando una columna binaria si por ejemplo la fila del </a:t>
+            </a:r>
+            <a:r>
+              <a:rPr lang="es-ES" sz="1600" b="0" strike="noStrike" spc="-1" dirty="0" err="1">
+                <a:solidFill>
+                  <a:srgbClr val="582808"/>
+                </a:solidFill>
+                <a:latin typeface="Calibri"/>
+              </a:rPr>
+              <a:t>dataset</a:t>
+            </a:r>
+            <a:r>
+              <a:rPr lang="es-ES" sz="1600" b="0" strike="noStrike" spc="-1" dirty="0">
+                <a:solidFill>
+                  <a:srgbClr val="582808"/>
+                </a:solidFill>
+                <a:latin typeface="Calibri"/>
+              </a:rPr>
+              <a:t> tenía una característica o no.</a:t>
+            </a:r>
+            <a:endParaRPr lang="es-ES" sz="1600" b="0" strike="noStrike" spc="-1" dirty="0">
+              <a:solidFill>
+                <a:srgbClr val="000000"/>
+              </a:solidFill>
+              <a:latin typeface="Arial"/>
+            </a:endParaRPr>
+          </a:p>
+          <a:p>
+            <a:pPr defTabSz="914400">
+              <a:lnSpc>
+                <a:spcPct val="100000"/>
+              </a:lnSpc>
+            </a:pPr>
+            <a:endParaRPr lang="es-ES" sz="1600" b="0" strike="noStrike" spc="-1" dirty="0">
+              <a:solidFill>
+                <a:srgbClr val="000000"/>
+              </a:solidFill>
+              <a:latin typeface="Arial"/>
+            </a:endParaRPr>
+          </a:p>
+          <a:p>
+            <a:pPr defTabSz="914400">
+              <a:lnSpc>
+                <a:spcPct val="100000"/>
+              </a:lnSpc>
+            </a:pPr>
+            <a:r>
+              <a:rPr lang="es-ES" sz="1600" b="0" strike="noStrike" spc="-1" dirty="0">
+                <a:solidFill>
+                  <a:srgbClr val="582808"/>
+                </a:solidFill>
+                <a:latin typeface="Calibri"/>
+              </a:rPr>
+              <a:t>Con todo ello, fuimos transformando las categóricas en numéricas, aportando valor a las </a:t>
+            </a:r>
+            <a:r>
+              <a:rPr lang="es-ES" sz="1600" b="0" strike="noStrike" spc="-1" dirty="0" err="1">
+                <a:solidFill>
+                  <a:srgbClr val="582808"/>
+                </a:solidFill>
+                <a:latin typeface="Calibri"/>
+              </a:rPr>
+              <a:t>features</a:t>
+            </a:r>
+            <a:r>
+              <a:rPr lang="es-ES" sz="1600" b="0" strike="noStrike" spc="-1" dirty="0">
+                <a:solidFill>
+                  <a:srgbClr val="582808"/>
+                </a:solidFill>
+                <a:latin typeface="Calibri"/>
+              </a:rPr>
+              <a:t> para mejorar el aprendizaje del modelo.</a:t>
+            </a:r>
+            <a:endParaRPr lang="es-ES" sz="1600" b="0" strike="noStrike" spc="-1" dirty="0">
+              <a:solidFill>
+                <a:srgbClr val="000000"/>
+              </a:solidFill>
+              <a:latin typeface="Arial"/>
+            </a:endParaRPr>
+          </a:p>
+          <a:p>
+            <a:pPr defTabSz="914400">
+              <a:lnSpc>
+                <a:spcPct val="100000"/>
+              </a:lnSpc>
+            </a:pPr>
+            <a:r>
+              <a:rPr lang="es-ES" sz="1600" b="0" strike="noStrike" spc="-1" dirty="0">
+                <a:solidFill>
+                  <a:srgbClr val="582808"/>
+                </a:solidFill>
+                <a:latin typeface="Calibri"/>
+              </a:rPr>
+              <a:t>Por último, alguna </a:t>
+            </a:r>
+            <a:r>
+              <a:rPr lang="es-ES" sz="1600" b="0" strike="noStrike" spc="-1" dirty="0" err="1">
+                <a:solidFill>
+                  <a:srgbClr val="582808"/>
+                </a:solidFill>
+                <a:latin typeface="Calibri"/>
+              </a:rPr>
+              <a:t>feature</a:t>
+            </a:r>
+            <a:r>
+              <a:rPr lang="es-ES" sz="1600" b="0" strike="noStrike" spc="-1" dirty="0">
+                <a:solidFill>
+                  <a:srgbClr val="582808"/>
+                </a:solidFill>
+                <a:latin typeface="Calibri"/>
+              </a:rPr>
+              <a:t> con alta cardinalidad, tuvimos que aplicarle </a:t>
+            </a:r>
+            <a:r>
+              <a:rPr lang="es-ES" sz="1600" b="0" strike="noStrike" spc="-1" dirty="0" err="1">
+                <a:solidFill>
+                  <a:srgbClr val="582808"/>
+                </a:solidFill>
+                <a:latin typeface="Calibri"/>
+              </a:rPr>
+              <a:t>feature</a:t>
+            </a:r>
+            <a:r>
+              <a:rPr lang="es-ES" sz="1600" b="0" strike="noStrike" spc="-1" dirty="0">
+                <a:solidFill>
+                  <a:srgbClr val="582808"/>
+                </a:solidFill>
+                <a:latin typeface="Calibri"/>
+              </a:rPr>
+              <a:t> </a:t>
+            </a:r>
+            <a:r>
+              <a:rPr lang="es-ES" sz="1600" b="0" strike="noStrike" spc="-1" dirty="0" err="1">
+                <a:solidFill>
+                  <a:srgbClr val="582808"/>
+                </a:solidFill>
+                <a:latin typeface="Calibri"/>
+              </a:rPr>
+              <a:t>encoding</a:t>
+            </a:r>
+            <a:r>
+              <a:rPr lang="es-ES" sz="1600" b="0" strike="noStrike" spc="-1" dirty="0">
+                <a:solidFill>
+                  <a:srgbClr val="582808"/>
+                </a:solidFill>
+                <a:latin typeface="Calibri"/>
+              </a:rPr>
+              <a:t> para dotarla de sentido para el modelo, por lo que este tratamiento lo aplicamos únicamente a </a:t>
+            </a:r>
+            <a:r>
+              <a:rPr lang="es-ES" sz="1600" b="0" strike="noStrike" spc="-1" dirty="0" err="1">
+                <a:solidFill>
+                  <a:srgbClr val="582808"/>
+                </a:solidFill>
+                <a:latin typeface="Calibri"/>
+              </a:rPr>
+              <a:t>train</a:t>
+            </a:r>
+            <a:r>
+              <a:rPr lang="es-ES" sz="1600" b="0" strike="noStrike" spc="-1" dirty="0">
+                <a:solidFill>
+                  <a:srgbClr val="582808"/>
+                </a:solidFill>
+                <a:latin typeface="Calibri"/>
+              </a:rPr>
+              <a:t> para no provocar un “</a:t>
+            </a:r>
+            <a:r>
+              <a:rPr lang="es-ES" sz="1600" b="0" i="1" strike="noStrike" spc="-1" dirty="0">
+                <a:solidFill>
+                  <a:srgbClr val="582808"/>
+                </a:solidFill>
+                <a:latin typeface="Calibri"/>
+              </a:rPr>
+              <a:t>data </a:t>
+            </a:r>
+            <a:r>
+              <a:rPr lang="es-ES" sz="1600" b="0" i="1" strike="noStrike" spc="-1" dirty="0" err="1">
+                <a:solidFill>
+                  <a:srgbClr val="582808"/>
+                </a:solidFill>
+                <a:latin typeface="Calibri"/>
+              </a:rPr>
+              <a:t>leakage</a:t>
+            </a:r>
+            <a:r>
+              <a:rPr lang="es-ES" sz="1600" b="0" strike="noStrike" spc="-1" dirty="0">
+                <a:solidFill>
+                  <a:srgbClr val="582808"/>
+                </a:solidFill>
+                <a:latin typeface="Calibri"/>
+              </a:rPr>
+              <a:t>” en los datos sobre los que predeciríamos.</a:t>
+            </a:r>
+            <a:endParaRPr lang="es-ES" sz="1600" b="0" strike="noStrike" spc="-1" dirty="0">
+              <a:solidFill>
+                <a:srgbClr val="000000"/>
+              </a:solidFill>
+              <a:latin typeface="Arial"/>
+            </a:endParaRPr>
+          </a:p>
+        </p:txBody>
+      </p:sp>
+      <p:pic>
+        <p:nvPicPr>
+          <p:cNvPr id="76" name="Imagen 9"/>
+          <p:cNvPicPr/>
+          <p:nvPr/>
+        </p:nvPicPr>
+        <p:blipFill>
+          <a:blip r:embed="rId2"/>
+          <a:stretch/>
+        </p:blipFill>
+        <p:spPr>
+          <a:xfrm>
+            <a:off x="10348920" y="479520"/>
+            <a:ext cx="1314000" cy="987840"/>
+          </a:xfrm>
+          <a:prstGeom prst="rect">
+            <a:avLst/>
+          </a:prstGeom>
+          <a:ln w="0">
+            <a:noFill/>
+          </a:ln>
+        </p:spPr>
+      </p:pic>
+    </p:spTree>
+  </p:cSld>
+  <p:clrMapOvr>
+    <a:masterClrMapping/>
+  </p:clrMapOvr>
+</p:sld>
+</file>
+
+<file path=ppt/slides/slide11.xml><?xml version="1.0" encoding="utf-8"?>
+<p:sld xmlns:a="http://schemas.openxmlformats.org/drawingml/2006/main" xmlns:r="http://schemas.openxmlformats.org/officeDocument/2006/relationships" xmlns:p="http://schemas.openxmlformats.org/presentationml/2006/main">
+  <p:cSld>
+    <p:spTree>
+      <p:nvGrpSpPr>
+        <p:cNvPr id="1" name=""/>
+        <p:cNvGrpSpPr/>
+        <p:nvPr/>
+      </p:nvGrpSpPr>
+      <p:grpSpPr>
+        <a:xfrm>
+          <a:off x="0" y="0"/>
+          <a:ext cx="0" cy="0"/>
+          <a:chOff x="0" y="0"/>
+          <a:chExt cx="0" cy="0"/>
+        </a:xfrm>
+      </p:grpSpPr>
+      <p:sp>
+        <p:nvSpPr>
+          <p:cNvPr id="65" name="Rectángulo 5"/>
+          <p:cNvSpPr/>
+          <p:nvPr/>
+        </p:nvSpPr>
+        <p:spPr>
+          <a:xfrm>
+            <a:off x="960" y="0"/>
+            <a:ext cx="12191040" cy="6856920"/>
+          </a:xfrm>
+          <a:prstGeom prst="rect">
+            <a:avLst/>
+          </a:prstGeom>
+          <a:solidFill>
+            <a:schemeClr val="accent2">
+              <a:lumMod val="20000"/>
+              <a:lumOff val="80000"/>
+            </a:schemeClr>
+          </a:solidFill>
+          <a:ln>
+            <a:solidFill>
+              <a:srgbClr val="325490"/>
+            </a:solidFill>
+          </a:ln>
+        </p:spPr>
+        <p:style>
+          <a:lnRef idx="2">
+            <a:schemeClr val="accent1">
+              <a:shade val="50000"/>
+            </a:schemeClr>
+          </a:lnRef>
+          <a:fillRef idx="1">
+            <a:schemeClr val="accent1"/>
+          </a:fillRef>
+          <a:effectRef idx="0">
+            <a:schemeClr val="accent1"/>
+          </a:effectRef>
+          <a:fontRef idx="minor"/>
+        </p:style>
+        <p:txBody>
+          <a:bodyPr lIns="90000" tIns="45000" rIns="90000" bIns="45000" anchor="ctr">
+            <a:noAutofit/>
+          </a:bodyPr>
+          <a:lstStyle/>
+          <a:p>
+            <a:pPr algn="ctr" defTabSz="914400">
+              <a:lnSpc>
+                <a:spcPct val="100000"/>
+              </a:lnSpc>
+            </a:pPr>
+            <a:endParaRPr lang="es-ES" sz="1800" b="0" strike="noStrike" spc="-1" dirty="0">
+              <a:solidFill>
+                <a:schemeClr val="lt1"/>
+              </a:solidFill>
+              <a:latin typeface="Calibri"/>
+            </a:endParaRPr>
+          </a:p>
+        </p:txBody>
+      </p:sp>
+      <p:sp>
+        <p:nvSpPr>
+          <p:cNvPr id="66" name="CuadroTexto 7"/>
+          <p:cNvSpPr/>
+          <p:nvPr/>
+        </p:nvSpPr>
+        <p:spPr>
+          <a:xfrm>
+            <a:off x="527760" y="479520"/>
+            <a:ext cx="11135160" cy="1014209"/>
+          </a:xfrm>
+          <a:prstGeom prst="rect">
+            <a:avLst/>
+          </a:prstGeom>
+          <a:noFill/>
+          <a:ln w="0">
+            <a:noFill/>
+          </a:ln>
+        </p:spPr>
+        <p:style>
+          <a:lnRef idx="0">
+            <a:scrgbClr r="0" g="0" b="0"/>
+          </a:lnRef>
+          <a:fillRef idx="0">
+            <a:scrgbClr r="0" g="0" b="0"/>
+          </a:fillRef>
+          <a:effectRef idx="0">
+            <a:scrgbClr r="0" g="0" b="0"/>
+          </a:effectRef>
+          <a:fontRef idx="minor"/>
+        </p:style>
+        <p:txBody>
+          <a:bodyPr lIns="90000" tIns="45000" rIns="90000" bIns="45000" anchor="t">
+            <a:spAutoFit/>
+          </a:bodyPr>
+          <a:lstStyle/>
+          <a:p>
+            <a:r>
+              <a:rPr lang="es-ES" sz="3500" b="1" spc="-1" dirty="0">
+                <a:solidFill>
+                  <a:schemeClr val="accent2">
+                    <a:lumMod val="50000"/>
+                  </a:schemeClr>
+                </a:solidFill>
+                <a:latin typeface="+mj-lt"/>
+              </a:rPr>
+              <a:t>Modelado y resultados </a:t>
+            </a:r>
+            <a:r>
+              <a:rPr lang="es-ES" sz="2500" b="1" spc="-1" dirty="0">
+                <a:solidFill>
+                  <a:schemeClr val="accent2">
+                    <a:lumMod val="50000"/>
+                  </a:schemeClr>
+                </a:solidFill>
+                <a:latin typeface="+mj-lt"/>
+              </a:rPr>
+              <a:t>(Selección de métricas y Cross Validation)</a:t>
+            </a:r>
+          </a:p>
+          <a:p>
+            <a:endParaRPr lang="es-ES" sz="2500" b="1" spc="-1" dirty="0">
+              <a:solidFill>
+                <a:schemeClr val="accent2">
+                  <a:lumMod val="50000"/>
+                </a:schemeClr>
+              </a:solidFill>
+              <a:latin typeface="+mj-lt"/>
+            </a:endParaRPr>
+          </a:p>
+        </p:txBody>
+      </p:sp>
+      <p:sp>
+        <p:nvSpPr>
+          <p:cNvPr id="67" name="CuadroTexto 2"/>
+          <p:cNvSpPr/>
+          <p:nvPr/>
+        </p:nvSpPr>
+        <p:spPr>
+          <a:xfrm>
+            <a:off x="716400" y="1947960"/>
+            <a:ext cx="10946520" cy="364680"/>
+          </a:xfrm>
+          <a:prstGeom prst="rect">
+            <a:avLst/>
+          </a:prstGeom>
+          <a:noFill/>
+          <a:ln w="0">
+            <a:noFill/>
+          </a:ln>
+        </p:spPr>
+        <p:style>
+          <a:lnRef idx="0">
+            <a:scrgbClr r="0" g="0" b="0"/>
+          </a:lnRef>
+          <a:fillRef idx="0">
+            <a:scrgbClr r="0" g="0" b="0"/>
+          </a:fillRef>
+          <a:effectRef idx="0">
+            <a:scrgbClr r="0" g="0" b="0"/>
+          </a:effectRef>
+          <a:fontRef idx="minor"/>
+        </p:style>
+        <p:txBody>
+          <a:bodyPr lIns="90000" tIns="45000" rIns="90000" bIns="45000" anchor="t">
+            <a:spAutoFit/>
+          </a:bodyPr>
+          <a:lstStyle/>
+          <a:p>
+            <a:pPr defTabSz="914400">
+              <a:lnSpc>
+                <a:spcPct val="100000"/>
+              </a:lnSpc>
+            </a:pPr>
+            <a:endParaRPr lang="es-ES" sz="1800" b="0" strike="noStrike" spc="-1" dirty="0">
+              <a:solidFill>
+                <a:srgbClr val="000000"/>
+              </a:solidFill>
+              <a:latin typeface="Arial"/>
+            </a:endParaRPr>
+          </a:p>
+        </p:txBody>
+      </p:sp>
+      <p:sp>
+        <p:nvSpPr>
+          <p:cNvPr id="6" name="Rectangle 3">
+            <a:extLst>
+              <a:ext uri="{FF2B5EF4-FFF2-40B4-BE49-F238E27FC236}">
+                <a16:creationId xmlns:a16="http://schemas.microsoft.com/office/drawing/2014/main" id="{837AF994-6692-B983-CB34-D40E8FFF1DA6}"/>
+              </a:ext>
+            </a:extLst>
+          </p:cNvPr>
+          <p:cNvSpPr>
+            <a:spLocks noChangeArrowheads="1"/>
+          </p:cNvSpPr>
+          <p:nvPr/>
+        </p:nvSpPr>
+        <p:spPr bwMode="auto">
+          <a:xfrm>
+            <a:off x="458159" y="1558252"/>
+            <a:ext cx="11733841" cy="4093428"/>
+          </a:xfrm>
+          <a:prstGeom prst="rect">
+            <a:avLst/>
+          </a:prstGeom>
+          <a:noFill/>
+          <a:ln>
+            <a:noFill/>
+          </a:ln>
+          <a:effectLst/>
+          <a:extLst>
+            <a:ext uri="{909E8E84-426E-40DD-AFC4-6F175D3DCCD1}">
+              <a14:hiddenFill xmlns:a14="http://schemas.microsoft.com/office/drawing/2010/main">
+                <a:solidFill>
+                  <a:schemeClr val="accent1"/>
+                </a:solidFill>
+              </a14:hiddenFill>
+            </a:ext>
+            <a:ext uri="{91240B29-F687-4F45-9708-019B960494DF}">
+              <a14:hiddenLine xmlns:a14="http://schemas.microsoft.com/office/drawing/2010/main" w="9525">
+                <a:solidFill>
+                  <a:schemeClr val="tx1"/>
+                </a:solidFill>
+                <a:miter lim="800000"/>
+                <a:headEnd/>
+                <a:tailEnd/>
+              </a14:hiddenLine>
+            </a:ext>
+            <a:ext uri="{AF507438-7753-43E0-B8FC-AC1667EBCBE1}">
+              <a14:hiddenEffects xmlns:a14="http://schemas.microsoft.com/office/drawing/2010/main">
+                <a:effectLst>
+                  <a:outerShdw dist="35921" dir="2700000" algn="ctr" rotWithShape="0">
+                    <a:schemeClr val="bg2"/>
+                  </a:outerShdw>
+                </a:effectLst>
+              </a14:hiddenEffects>
+            </a:ext>
+          </a:extLst>
+        </p:spPr>
+        <p:txBody>
+          <a:bodyPr vert="horz" wrap="square" lIns="91440" tIns="45720" rIns="91440" bIns="45720" numCol="1" anchor="ctr" anchorCtr="0" compatLnSpc="1">
+            <a:prstTxWarp prst="textNoShape">
+              <a:avLst/>
+            </a:prstTxWarp>
+            <a:spAutoFit/>
+          </a:bodyPr>
+          <a:lstStyle/>
+          <a:p>
+            <a:pPr marL="0" marR="0" lvl="0" indent="0" algn="l" defTabSz="914400" rtl="0" eaLnBrk="0" fontAlgn="base" latinLnBrk="0" hangingPunct="0">
+              <a:lnSpc>
+                <a:spcPct val="100000"/>
+              </a:lnSpc>
+              <a:spcBef>
+                <a:spcPct val="0"/>
+              </a:spcBef>
+              <a:spcAft>
+                <a:spcPct val="0"/>
+              </a:spcAft>
+              <a:buClrTx/>
+              <a:buSzTx/>
+              <a:buFontTx/>
+              <a:buChar char="•"/>
+              <a:tabLst/>
+            </a:pPr>
+            <a:r>
+              <a:rPr kumimoji="0" lang="es-CL" altLang="es-CL" sz="2000" b="0" i="0" u="none" strike="noStrike" cap="none" normalizeH="0" baseline="0" dirty="0">
+                <a:ln>
+                  <a:noFill/>
+                </a:ln>
+                <a:solidFill>
+                  <a:schemeClr val="accent2">
+                    <a:lumMod val="50000"/>
+                  </a:schemeClr>
+                </a:solidFill>
+                <a:effectLst/>
+                <a:latin typeface="+mj-lt"/>
+              </a:rPr>
+              <a:t>Transformamos el target a </a:t>
+            </a:r>
+            <a:r>
+              <a:rPr kumimoji="0" lang="es-CL" altLang="es-CL" sz="2000" b="0" i="0" u="none" strike="noStrike" cap="none" normalizeH="0" baseline="0" dirty="0" err="1">
+                <a:ln>
+                  <a:noFill/>
+                </a:ln>
+                <a:solidFill>
+                  <a:schemeClr val="accent2">
+                    <a:lumMod val="50000"/>
+                  </a:schemeClr>
+                </a:solidFill>
+                <a:effectLst/>
+                <a:latin typeface="+mj-lt"/>
+              </a:rPr>
+              <a:t>revenue_log</a:t>
+            </a:r>
+            <a:r>
+              <a:rPr kumimoji="0" lang="es-CL" altLang="es-CL" sz="2000" b="0" i="0" u="none" strike="noStrike" cap="none" normalizeH="0" baseline="0" dirty="0">
+                <a:ln>
+                  <a:noFill/>
+                </a:ln>
+                <a:solidFill>
+                  <a:schemeClr val="accent2">
+                    <a:lumMod val="50000"/>
+                  </a:schemeClr>
+                </a:solidFill>
+                <a:effectLst/>
+                <a:latin typeface="+mj-lt"/>
+              </a:rPr>
+              <a:t> = log1p(revenue) para reducir asimetría y el impacto de outliers en una variable monetaria.</a:t>
+            </a:r>
+          </a:p>
+          <a:p>
+            <a:pPr marL="0" marR="0" lvl="0" indent="0" algn="l" defTabSz="914400" rtl="0" eaLnBrk="0" fontAlgn="base" latinLnBrk="0" hangingPunct="0">
+              <a:lnSpc>
+                <a:spcPct val="100000"/>
+              </a:lnSpc>
+              <a:spcBef>
+                <a:spcPct val="0"/>
+              </a:spcBef>
+              <a:spcAft>
+                <a:spcPct val="0"/>
+              </a:spcAft>
+              <a:buClrTx/>
+              <a:buSzTx/>
+              <a:tabLst/>
+            </a:pPr>
+            <a:endParaRPr kumimoji="0" lang="es-CL" altLang="es-CL" sz="2000" b="0" i="0" u="none" strike="noStrike" cap="none" normalizeH="0" baseline="0" dirty="0">
+              <a:ln>
+                <a:noFill/>
+              </a:ln>
+              <a:solidFill>
+                <a:schemeClr val="accent2">
+                  <a:lumMod val="50000"/>
+                </a:schemeClr>
+              </a:solidFill>
+              <a:effectLst/>
+              <a:latin typeface="+mj-lt"/>
+            </a:endParaRPr>
+          </a:p>
+          <a:p>
+            <a:pPr marL="0" marR="0" lvl="0" indent="0" algn="l" defTabSz="914400" rtl="0" eaLnBrk="0" fontAlgn="base" latinLnBrk="0" hangingPunct="0">
+              <a:lnSpc>
+                <a:spcPct val="100000"/>
+              </a:lnSpc>
+              <a:spcBef>
+                <a:spcPct val="0"/>
+              </a:spcBef>
+              <a:spcAft>
+                <a:spcPct val="0"/>
+              </a:spcAft>
+              <a:buClrTx/>
+              <a:buSzTx/>
+              <a:buFontTx/>
+              <a:buChar char="•"/>
+              <a:tabLst/>
+            </a:pPr>
+            <a:r>
+              <a:rPr kumimoji="0" lang="es-CL" altLang="es-CL" sz="2000" b="0" i="0" u="none" strike="noStrike" cap="none" normalizeH="0" baseline="0" dirty="0">
+                <a:ln>
+                  <a:noFill/>
+                </a:ln>
+                <a:solidFill>
+                  <a:schemeClr val="accent2">
+                    <a:lumMod val="50000"/>
+                  </a:schemeClr>
+                </a:solidFill>
+                <a:effectLst/>
+                <a:latin typeface="+mj-lt"/>
+              </a:rPr>
+              <a:t>Elegimos </a:t>
+            </a:r>
+            <a:r>
+              <a:rPr kumimoji="0" lang="es-CL" altLang="es-CL" sz="2000" b="1" i="0" u="none" strike="noStrike" cap="none" normalizeH="0" baseline="0" dirty="0">
+                <a:ln>
+                  <a:noFill/>
+                </a:ln>
+                <a:solidFill>
+                  <a:schemeClr val="accent2">
+                    <a:lumMod val="50000"/>
+                  </a:schemeClr>
+                </a:solidFill>
+                <a:effectLst/>
+                <a:latin typeface="+mj-lt"/>
+              </a:rPr>
+              <a:t>RMSE</a:t>
+            </a:r>
+            <a:r>
+              <a:rPr kumimoji="0" lang="es-CL" altLang="es-CL" sz="2000" b="0" i="0" u="none" strike="noStrike" cap="none" normalizeH="0" baseline="0" dirty="0">
+                <a:ln>
+                  <a:noFill/>
+                </a:ln>
+                <a:solidFill>
+                  <a:schemeClr val="accent2">
+                    <a:lumMod val="50000"/>
+                  </a:schemeClr>
+                </a:solidFill>
+                <a:effectLst/>
+                <a:latin typeface="+mj-lt"/>
+              </a:rPr>
+              <a:t> como métrica principal (sobre </a:t>
+            </a:r>
+            <a:r>
+              <a:rPr kumimoji="0" lang="es-CL" altLang="es-CL" sz="2000" b="0" i="0" u="none" strike="noStrike" cap="none" normalizeH="0" baseline="0" dirty="0" err="1">
+                <a:ln>
+                  <a:noFill/>
+                </a:ln>
+                <a:solidFill>
+                  <a:schemeClr val="accent2">
+                    <a:lumMod val="50000"/>
+                  </a:schemeClr>
+                </a:solidFill>
+                <a:effectLst/>
+                <a:latin typeface="+mj-lt"/>
+              </a:rPr>
+              <a:t>revenue_log</a:t>
+            </a:r>
+            <a:r>
+              <a:rPr kumimoji="0" lang="es-CL" altLang="es-CL" sz="2000" b="0" i="0" u="none" strike="noStrike" cap="none" normalizeH="0" baseline="0" dirty="0">
+                <a:ln>
+                  <a:noFill/>
+                </a:ln>
+                <a:solidFill>
+                  <a:schemeClr val="accent2">
+                    <a:lumMod val="50000"/>
+                  </a:schemeClr>
+                </a:solidFill>
+                <a:effectLst/>
+                <a:latin typeface="+mj-lt"/>
+              </a:rPr>
+              <a:t>) porque penaliza más los errores grandes y permite comparar modelos de forma consistente.</a:t>
+            </a:r>
+          </a:p>
+          <a:p>
+            <a:pPr marL="0" marR="0" lvl="0" indent="0" algn="l" defTabSz="914400" rtl="0" eaLnBrk="0" fontAlgn="base" latinLnBrk="0" hangingPunct="0">
+              <a:lnSpc>
+                <a:spcPct val="100000"/>
+              </a:lnSpc>
+              <a:spcBef>
+                <a:spcPct val="0"/>
+              </a:spcBef>
+              <a:spcAft>
+                <a:spcPct val="0"/>
+              </a:spcAft>
+              <a:buClrTx/>
+              <a:buSzTx/>
+              <a:tabLst/>
+            </a:pPr>
+            <a:endParaRPr kumimoji="0" lang="es-CL" altLang="es-CL" sz="2000" b="0" i="0" u="none" strike="noStrike" cap="none" normalizeH="0" baseline="0" dirty="0">
+              <a:ln>
+                <a:noFill/>
+              </a:ln>
+              <a:solidFill>
+                <a:schemeClr val="accent2">
+                  <a:lumMod val="50000"/>
+                </a:schemeClr>
+              </a:solidFill>
+              <a:effectLst/>
+              <a:latin typeface="+mj-lt"/>
+            </a:endParaRPr>
+          </a:p>
+          <a:p>
+            <a:pPr marL="0" marR="0" lvl="0" indent="0" algn="l" defTabSz="914400" rtl="0" eaLnBrk="0" fontAlgn="base" latinLnBrk="0" hangingPunct="0">
+              <a:lnSpc>
+                <a:spcPct val="100000"/>
+              </a:lnSpc>
+              <a:spcBef>
+                <a:spcPct val="0"/>
+              </a:spcBef>
+              <a:spcAft>
+                <a:spcPct val="0"/>
+              </a:spcAft>
+              <a:buClrTx/>
+              <a:buSzTx/>
+              <a:buFontTx/>
+              <a:buChar char="•"/>
+              <a:tabLst/>
+            </a:pPr>
+            <a:r>
+              <a:rPr kumimoji="0" lang="es-CL" altLang="es-CL" sz="2000" b="0" i="0" u="none" strike="noStrike" cap="none" normalizeH="0" baseline="0" dirty="0">
+                <a:ln>
+                  <a:noFill/>
+                </a:ln>
+                <a:solidFill>
+                  <a:schemeClr val="accent2">
+                    <a:lumMod val="50000"/>
+                  </a:schemeClr>
+                </a:solidFill>
+                <a:effectLst/>
+                <a:latin typeface="+mj-lt"/>
+              </a:rPr>
+              <a:t>Para interpretar resultados en euros, deshacemos la transformación al evaluar: revenue = expm1(</a:t>
+            </a:r>
+            <a:r>
+              <a:rPr kumimoji="0" lang="es-CL" altLang="es-CL" sz="2000" b="0" i="0" u="none" strike="noStrike" cap="none" normalizeH="0" baseline="0" dirty="0" err="1">
+                <a:ln>
+                  <a:noFill/>
+                </a:ln>
+                <a:solidFill>
+                  <a:schemeClr val="accent2">
+                    <a:lumMod val="50000"/>
+                  </a:schemeClr>
+                </a:solidFill>
+                <a:effectLst/>
+                <a:latin typeface="+mj-lt"/>
+              </a:rPr>
+              <a:t>revenue_log</a:t>
+            </a:r>
+            <a:r>
+              <a:rPr kumimoji="0" lang="es-CL" altLang="es-CL" sz="2000" b="0" i="0" u="none" strike="noStrike" cap="none" normalizeH="0" baseline="0" dirty="0">
+                <a:ln>
+                  <a:noFill/>
+                </a:ln>
+                <a:solidFill>
+                  <a:schemeClr val="accent2">
+                    <a:lumMod val="50000"/>
+                  </a:schemeClr>
+                </a:solidFill>
+                <a:effectLst/>
+                <a:latin typeface="+mj-lt"/>
+              </a:rPr>
+              <a:t>).</a:t>
+            </a:r>
+          </a:p>
+          <a:p>
+            <a:pPr marL="0" marR="0" lvl="0" indent="0" algn="l" defTabSz="914400" rtl="0" eaLnBrk="0" fontAlgn="base" latinLnBrk="0" hangingPunct="0">
+              <a:lnSpc>
+                <a:spcPct val="100000"/>
+              </a:lnSpc>
+              <a:spcBef>
+                <a:spcPct val="0"/>
+              </a:spcBef>
+              <a:spcAft>
+                <a:spcPct val="0"/>
+              </a:spcAft>
+              <a:buClrTx/>
+              <a:buSzTx/>
+              <a:tabLst/>
+            </a:pPr>
+            <a:endParaRPr kumimoji="0" lang="es-CL" altLang="es-CL" sz="2000" b="0" i="0" u="none" strike="noStrike" cap="none" normalizeH="0" baseline="0" dirty="0">
+              <a:ln>
+                <a:noFill/>
+              </a:ln>
+              <a:solidFill>
+                <a:schemeClr val="accent2">
+                  <a:lumMod val="50000"/>
+                </a:schemeClr>
+              </a:solidFill>
+              <a:effectLst/>
+              <a:latin typeface="+mj-lt"/>
+            </a:endParaRPr>
+          </a:p>
+          <a:p>
+            <a:pPr marL="0" marR="0" lvl="0" indent="0" algn="l" defTabSz="914400" rtl="0" eaLnBrk="0" fontAlgn="base" latinLnBrk="0" hangingPunct="0">
+              <a:lnSpc>
+                <a:spcPct val="100000"/>
+              </a:lnSpc>
+              <a:spcBef>
+                <a:spcPct val="0"/>
+              </a:spcBef>
+              <a:spcAft>
+                <a:spcPct val="0"/>
+              </a:spcAft>
+              <a:buClrTx/>
+              <a:buSzTx/>
+              <a:buFontTx/>
+              <a:buChar char="•"/>
+              <a:tabLst/>
+            </a:pPr>
+            <a:r>
+              <a:rPr kumimoji="0" lang="es-CL" altLang="es-CL" sz="2000" b="0" i="0" u="none" strike="noStrike" cap="none" normalizeH="0" baseline="0" dirty="0">
+                <a:ln>
+                  <a:noFill/>
+                </a:ln>
+                <a:solidFill>
+                  <a:schemeClr val="accent2">
+                    <a:lumMod val="50000"/>
+                  </a:schemeClr>
+                </a:solidFill>
+                <a:effectLst/>
+                <a:latin typeface="+mj-lt"/>
+              </a:rPr>
+              <a:t>Establecimos un único protocolo de evaluación con </a:t>
+            </a:r>
+            <a:r>
+              <a:rPr kumimoji="0" lang="es-CL" altLang="es-CL" sz="2000" b="1" i="0" u="none" strike="noStrike" cap="none" normalizeH="0" baseline="0" dirty="0">
+                <a:ln>
+                  <a:noFill/>
+                </a:ln>
+                <a:solidFill>
+                  <a:schemeClr val="accent2">
+                    <a:lumMod val="50000"/>
+                  </a:schemeClr>
+                </a:solidFill>
+                <a:effectLst/>
+                <a:latin typeface="+mj-lt"/>
+              </a:rPr>
+              <a:t>K-</a:t>
+            </a:r>
+            <a:r>
+              <a:rPr kumimoji="0" lang="es-CL" altLang="es-CL" sz="2000" b="1" i="0" u="none" strike="noStrike" cap="none" normalizeH="0" baseline="0" dirty="0" err="1">
+                <a:ln>
+                  <a:noFill/>
+                </a:ln>
+                <a:solidFill>
+                  <a:schemeClr val="accent2">
+                    <a:lumMod val="50000"/>
+                  </a:schemeClr>
+                </a:solidFill>
+                <a:effectLst/>
+                <a:latin typeface="+mj-lt"/>
+              </a:rPr>
+              <a:t>Fold</a:t>
+            </a:r>
+            <a:r>
+              <a:rPr kumimoji="0" lang="es-CL" altLang="es-CL" sz="2000" b="1" i="0" u="none" strike="noStrike" cap="none" normalizeH="0" baseline="0" dirty="0">
+                <a:ln>
+                  <a:noFill/>
+                </a:ln>
+                <a:solidFill>
+                  <a:schemeClr val="accent2">
+                    <a:lumMod val="50000"/>
+                  </a:schemeClr>
+                </a:solidFill>
+                <a:effectLst/>
+                <a:latin typeface="+mj-lt"/>
+              </a:rPr>
+              <a:t> Cross-Validation (k=5)</a:t>
+            </a:r>
+            <a:r>
+              <a:rPr kumimoji="0" lang="es-CL" altLang="es-CL" sz="2000" b="0" i="0" u="none" strike="noStrike" cap="none" normalizeH="0" baseline="0" dirty="0">
+                <a:ln>
+                  <a:noFill/>
+                </a:ln>
+                <a:solidFill>
+                  <a:schemeClr val="accent2">
+                    <a:lumMod val="50000"/>
+                  </a:schemeClr>
+                </a:solidFill>
+                <a:effectLst/>
+                <a:latin typeface="+mj-lt"/>
+              </a:rPr>
+              <a:t>, usando shuffle=True y random_state= 42 para reproducibilidad.</a:t>
+            </a:r>
+          </a:p>
+          <a:p>
+            <a:pPr marL="0" marR="0" lvl="0" indent="0" algn="l" defTabSz="914400" rtl="0" eaLnBrk="0" fontAlgn="base" latinLnBrk="0" hangingPunct="0">
+              <a:lnSpc>
+                <a:spcPct val="100000"/>
+              </a:lnSpc>
+              <a:spcBef>
+                <a:spcPct val="0"/>
+              </a:spcBef>
+              <a:spcAft>
+                <a:spcPct val="0"/>
+              </a:spcAft>
+              <a:buClrTx/>
+              <a:buSzTx/>
+              <a:tabLst/>
+            </a:pPr>
+            <a:endParaRPr kumimoji="0" lang="es-CL" altLang="es-CL" sz="2000" b="0" i="0" u="none" strike="noStrike" cap="none" normalizeH="0" baseline="0" dirty="0">
+              <a:ln>
+                <a:noFill/>
+              </a:ln>
+              <a:solidFill>
+                <a:schemeClr val="accent2">
+                  <a:lumMod val="50000"/>
+                </a:schemeClr>
+              </a:solidFill>
+              <a:effectLst/>
+              <a:latin typeface="+mj-lt"/>
+            </a:endParaRPr>
+          </a:p>
+          <a:p>
+            <a:pPr marL="0" marR="0" lvl="0" indent="0" algn="l" defTabSz="914400" rtl="0" eaLnBrk="0" fontAlgn="base" latinLnBrk="0" hangingPunct="0">
+              <a:lnSpc>
+                <a:spcPct val="100000"/>
+              </a:lnSpc>
+              <a:spcBef>
+                <a:spcPct val="0"/>
+              </a:spcBef>
+              <a:spcAft>
+                <a:spcPct val="0"/>
+              </a:spcAft>
+              <a:buClrTx/>
+              <a:buSzTx/>
+              <a:buFontTx/>
+              <a:buChar char="•"/>
+              <a:tabLst/>
+            </a:pPr>
+            <a:r>
+              <a:rPr kumimoji="0" lang="es-CL" altLang="es-CL" sz="2000" b="0" i="0" u="none" strike="noStrike" cap="none" normalizeH="0" baseline="0" dirty="0">
+                <a:ln>
+                  <a:noFill/>
+                </a:ln>
+                <a:solidFill>
+                  <a:schemeClr val="accent2">
+                    <a:lumMod val="50000"/>
+                  </a:schemeClr>
+                </a:solidFill>
+                <a:effectLst/>
+                <a:latin typeface="+mj-lt"/>
+              </a:rPr>
+              <a:t>Regla clave: todos los modelos se evalúan con </a:t>
+            </a:r>
+            <a:r>
+              <a:rPr kumimoji="0" lang="es-CL" altLang="es-CL" sz="2000" b="1" i="0" u="none" strike="noStrike" cap="none" normalizeH="0" baseline="0" dirty="0">
+                <a:ln>
+                  <a:noFill/>
+                </a:ln>
+                <a:solidFill>
+                  <a:schemeClr val="accent2">
+                    <a:lumMod val="50000"/>
+                  </a:schemeClr>
+                </a:solidFill>
+                <a:effectLst/>
+                <a:latin typeface="+mj-lt"/>
+              </a:rPr>
+              <a:t>la misma CV y la misma métrica</a:t>
+            </a:r>
+            <a:r>
+              <a:rPr kumimoji="0" lang="es-CL" altLang="es-CL" sz="2000" b="0" i="0" u="none" strike="noStrike" cap="none" normalizeH="0" baseline="0" dirty="0">
+                <a:ln>
+                  <a:noFill/>
+                </a:ln>
+                <a:solidFill>
+                  <a:schemeClr val="accent2">
+                    <a:lumMod val="50000"/>
+                  </a:schemeClr>
+                </a:solidFill>
+                <a:effectLst/>
+                <a:latin typeface="+mj-lt"/>
+              </a:rPr>
+              <a:t>, evitando comparaciones sesgadas.</a:t>
+            </a:r>
+          </a:p>
+        </p:txBody>
+      </p:sp>
+      <p:pic>
+        <p:nvPicPr>
+          <p:cNvPr id="7" name="Imagen 28">
+            <a:hlinkClick r:id="rId2" action="ppaction://hlinksldjump"/>
+            <a:extLst>
+              <a:ext uri="{FF2B5EF4-FFF2-40B4-BE49-F238E27FC236}">
+                <a16:creationId xmlns:a16="http://schemas.microsoft.com/office/drawing/2014/main" id="{79563867-AB1B-5C56-6DFA-397F157D8854}"/>
+              </a:ext>
+            </a:extLst>
+          </p:cNvPr>
+          <p:cNvPicPr/>
+          <p:nvPr/>
+        </p:nvPicPr>
+        <p:blipFill>
+          <a:blip r:embed="rId3"/>
+          <a:stretch/>
+        </p:blipFill>
+        <p:spPr>
+          <a:xfrm>
+            <a:off x="10294560" y="242092"/>
+            <a:ext cx="1368360" cy="1316160"/>
+          </a:xfrm>
+          <a:prstGeom prst="rect">
+            <a:avLst/>
+          </a:prstGeom>
+          <a:ln w="0">
+            <a:noFill/>
+          </a:ln>
+        </p:spPr>
+      </p:pic>
+    </p:spTree>
+  </p:cSld>
+  <p:clrMapOvr>
+    <a:masterClrMapping/>
+  </p:clrMapOvr>
+</p:sld>
+</file>
+
+<file path=ppt/slides/slide12.xml><?xml version="1.0" encoding="utf-8"?>
+<p:sld xmlns:a="http://schemas.openxmlformats.org/drawingml/2006/main" xmlns:r="http://schemas.openxmlformats.org/officeDocument/2006/relationships" xmlns:p="http://schemas.openxmlformats.org/presentationml/2006/main">
+  <p:cSld>
+    <p:spTree>
+      <p:nvGrpSpPr>
+        <p:cNvPr id="1" name="">
+          <a:extLst>
+            <a:ext uri="{FF2B5EF4-FFF2-40B4-BE49-F238E27FC236}">
+              <a16:creationId xmlns:a16="http://schemas.microsoft.com/office/drawing/2014/main" id="{D04D9308-8FED-78CC-795C-C73711E967AE}"/>
+            </a:ext>
+          </a:extLst>
+        </p:cNvPr>
+        <p:cNvGrpSpPr/>
+        <p:nvPr/>
+      </p:nvGrpSpPr>
+      <p:grpSpPr>
+        <a:xfrm>
+          <a:off x="0" y="0"/>
+          <a:ext cx="0" cy="0"/>
+          <a:chOff x="0" y="0"/>
+          <a:chExt cx="0" cy="0"/>
+        </a:xfrm>
+      </p:grpSpPr>
+      <p:sp>
+        <p:nvSpPr>
+          <p:cNvPr id="65" name="Rectángulo 5">
+            <a:extLst>
+              <a:ext uri="{FF2B5EF4-FFF2-40B4-BE49-F238E27FC236}">
+                <a16:creationId xmlns:a16="http://schemas.microsoft.com/office/drawing/2014/main" id="{E3F3403C-0898-DF37-8E0A-3CB66ED5BE76}"/>
+              </a:ext>
+            </a:extLst>
+          </p:cNvPr>
+          <p:cNvSpPr/>
+          <p:nvPr/>
+        </p:nvSpPr>
+        <p:spPr>
+          <a:xfrm>
+            <a:off x="-180" y="1080"/>
+            <a:ext cx="12191040" cy="6856920"/>
+          </a:xfrm>
+          <a:prstGeom prst="rect">
+            <a:avLst/>
+          </a:prstGeom>
+          <a:solidFill>
+            <a:schemeClr val="accent2">
+              <a:lumMod val="20000"/>
+              <a:lumOff val="80000"/>
+            </a:schemeClr>
+          </a:solidFill>
+          <a:ln>
+            <a:solidFill>
+              <a:srgbClr val="325490"/>
+            </a:solidFill>
+          </a:ln>
+        </p:spPr>
+        <p:style>
+          <a:lnRef idx="2">
+            <a:schemeClr val="accent1">
+              <a:shade val="50000"/>
+            </a:schemeClr>
+          </a:lnRef>
+          <a:fillRef idx="1">
+            <a:schemeClr val="accent1"/>
+          </a:fillRef>
+          <a:effectRef idx="0">
+            <a:schemeClr val="accent1"/>
+          </a:effectRef>
+          <a:fontRef idx="minor"/>
+        </p:style>
+        <p:txBody>
+          <a:bodyPr lIns="90000" tIns="45000" rIns="90000" bIns="45000" anchor="ctr">
+            <a:noAutofit/>
+          </a:bodyPr>
+          <a:lstStyle/>
+          <a:p>
+            <a:pPr algn="ctr" defTabSz="914400">
+              <a:lnSpc>
+                <a:spcPct val="100000"/>
+              </a:lnSpc>
+            </a:pPr>
+            <a:endParaRPr lang="es-ES" sz="1800" b="0" strike="noStrike" spc="-1" dirty="0">
+              <a:solidFill>
+                <a:schemeClr val="lt1"/>
+              </a:solidFill>
+              <a:latin typeface="Calibri"/>
+            </a:endParaRPr>
+          </a:p>
+        </p:txBody>
+      </p:sp>
+      <p:sp>
+        <p:nvSpPr>
+          <p:cNvPr id="66" name="CuadroTexto 7">
+            <a:extLst>
+              <a:ext uri="{FF2B5EF4-FFF2-40B4-BE49-F238E27FC236}">
+                <a16:creationId xmlns:a16="http://schemas.microsoft.com/office/drawing/2014/main" id="{4A8F80E1-C4AD-C455-ACA7-7A77C7151180}"/>
+              </a:ext>
+            </a:extLst>
+          </p:cNvPr>
+          <p:cNvSpPr/>
+          <p:nvPr/>
+        </p:nvSpPr>
+        <p:spPr>
+          <a:xfrm>
+            <a:off x="527760" y="479520"/>
+            <a:ext cx="11135160" cy="644877"/>
+          </a:xfrm>
+          <a:prstGeom prst="rect">
+            <a:avLst/>
+          </a:prstGeom>
+          <a:noFill/>
+          <a:ln w="0">
+            <a:noFill/>
+          </a:ln>
+        </p:spPr>
+        <p:style>
+          <a:lnRef idx="0">
+            <a:scrgbClr r="0" g="0" b="0"/>
+          </a:lnRef>
+          <a:fillRef idx="0">
+            <a:scrgbClr r="0" g="0" b="0"/>
+          </a:fillRef>
+          <a:effectRef idx="0">
+            <a:scrgbClr r="0" g="0" b="0"/>
+          </a:effectRef>
+          <a:fontRef idx="minor"/>
+        </p:style>
+        <p:txBody>
+          <a:bodyPr lIns="90000" tIns="45000" rIns="90000" bIns="45000" anchor="t">
+            <a:spAutoFit/>
+          </a:bodyPr>
+          <a:lstStyle/>
+          <a:p>
+            <a:r>
+              <a:rPr lang="es-ES" sz="3500" b="1" spc="-1" dirty="0">
+                <a:solidFill>
+                  <a:schemeClr val="accent2">
+                    <a:lumMod val="50000"/>
+                  </a:schemeClr>
+                </a:solidFill>
+                <a:latin typeface="+mj-lt"/>
+              </a:rPr>
+              <a:t>Modelado y resultados </a:t>
+            </a:r>
+            <a:r>
+              <a:rPr lang="es-ES" sz="2500" spc="-1" dirty="0">
+                <a:solidFill>
+                  <a:schemeClr val="accent2">
+                    <a:lumMod val="50000"/>
+                  </a:schemeClr>
+                </a:solidFill>
+              </a:rPr>
+              <a:t>(Código/Baselines)</a:t>
+            </a:r>
+            <a:endParaRPr lang="es-ES" sz="2500" spc="-1" dirty="0">
+              <a:solidFill>
+                <a:schemeClr val="accent2">
+                  <a:lumMod val="50000"/>
+                </a:schemeClr>
+              </a:solidFill>
+              <a:latin typeface="+mj-lt"/>
+            </a:endParaRPr>
+          </a:p>
+        </p:txBody>
+      </p:sp>
+      <p:pic>
+        <p:nvPicPr>
+          <p:cNvPr id="9" name="Imagen 8">
+            <a:extLst>
+              <a:ext uri="{FF2B5EF4-FFF2-40B4-BE49-F238E27FC236}">
+                <a16:creationId xmlns:a16="http://schemas.microsoft.com/office/drawing/2014/main" id="{B064AFE3-85B3-17B3-E0BB-40B45DDAAC28}"/>
+              </a:ext>
+            </a:extLst>
+          </p:cNvPr>
+          <p:cNvPicPr>
+            <a:picLocks noChangeAspect="1"/>
+          </p:cNvPicPr>
+          <p:nvPr/>
+        </p:nvPicPr>
+        <p:blipFill>
+          <a:blip r:embed="rId2"/>
+          <a:stretch>
+            <a:fillRect/>
+          </a:stretch>
+        </p:blipFill>
+        <p:spPr>
+          <a:xfrm>
+            <a:off x="322569" y="1178848"/>
+            <a:ext cx="6379789" cy="5199632"/>
+          </a:xfrm>
+          <a:prstGeom prst="rect">
+            <a:avLst/>
+          </a:prstGeom>
+        </p:spPr>
+      </p:pic>
+      <p:pic>
+        <p:nvPicPr>
+          <p:cNvPr id="11" name="Imagen 10">
+            <a:extLst>
+              <a:ext uri="{FF2B5EF4-FFF2-40B4-BE49-F238E27FC236}">
+                <a16:creationId xmlns:a16="http://schemas.microsoft.com/office/drawing/2014/main" id="{0C91C020-F91E-B7DB-E38E-692A91AED81E}"/>
+              </a:ext>
+            </a:extLst>
+          </p:cNvPr>
+          <p:cNvPicPr>
+            <a:picLocks noChangeAspect="1"/>
+          </p:cNvPicPr>
+          <p:nvPr/>
+        </p:nvPicPr>
+        <p:blipFill>
+          <a:blip r:embed="rId3"/>
+          <a:stretch>
+            <a:fillRect/>
+          </a:stretch>
+        </p:blipFill>
+        <p:spPr>
+          <a:xfrm>
+            <a:off x="6931996" y="1178848"/>
+            <a:ext cx="3556179" cy="3118713"/>
+          </a:xfrm>
+          <a:prstGeom prst="rect">
+            <a:avLst/>
+          </a:prstGeom>
+        </p:spPr>
+      </p:pic>
+      <p:pic>
+        <p:nvPicPr>
+          <p:cNvPr id="13" name="Imagen 12">
+            <a:extLst>
+              <a:ext uri="{FF2B5EF4-FFF2-40B4-BE49-F238E27FC236}">
+                <a16:creationId xmlns:a16="http://schemas.microsoft.com/office/drawing/2014/main" id="{DE6A9D79-7F64-0582-1BE4-9B1C18070686}"/>
+              </a:ext>
+            </a:extLst>
+          </p:cNvPr>
+          <p:cNvPicPr>
+            <a:picLocks noChangeAspect="1"/>
+          </p:cNvPicPr>
+          <p:nvPr/>
+        </p:nvPicPr>
+        <p:blipFill>
+          <a:blip r:embed="rId4"/>
+          <a:stretch>
+            <a:fillRect/>
+          </a:stretch>
+        </p:blipFill>
+        <p:spPr>
+          <a:xfrm>
+            <a:off x="6806860" y="4352012"/>
+            <a:ext cx="5279497" cy="2221300"/>
+          </a:xfrm>
+          <a:prstGeom prst="rect">
+            <a:avLst/>
+          </a:prstGeom>
+        </p:spPr>
+      </p:pic>
+      <p:pic>
+        <p:nvPicPr>
+          <p:cNvPr id="14" name="Imagen 28">
+            <a:hlinkClick r:id="rId5" action="ppaction://hlinksldjump"/>
+            <a:extLst>
+              <a:ext uri="{FF2B5EF4-FFF2-40B4-BE49-F238E27FC236}">
+                <a16:creationId xmlns:a16="http://schemas.microsoft.com/office/drawing/2014/main" id="{C696DD92-F277-9756-BA09-D6FA55EAF475}"/>
+              </a:ext>
+            </a:extLst>
+          </p:cNvPr>
+          <p:cNvPicPr/>
+          <p:nvPr/>
+        </p:nvPicPr>
+        <p:blipFill>
+          <a:blip r:embed="rId6"/>
+          <a:stretch/>
+        </p:blipFill>
+        <p:spPr>
+          <a:xfrm>
+            <a:off x="10558530" y="143878"/>
+            <a:ext cx="1368360" cy="1316160"/>
+          </a:xfrm>
+          <a:prstGeom prst="rect">
+            <a:avLst/>
+          </a:prstGeom>
+          <a:ln w="0">
+            <a:noFill/>
+          </a:ln>
+        </p:spPr>
+      </p:pic>
+    </p:spTree>
+    <p:extLst>
+      <p:ext uri="{BB962C8B-B14F-4D97-AF65-F5344CB8AC3E}">
+        <p14:creationId xmlns:p14="http://schemas.microsoft.com/office/powerpoint/2010/main" val="2978231915"/>
+      </p:ext>
+    </p:extLst>
+  </p:cSld>
+  <p:clrMapOvr>
+    <a:masterClrMapping/>
+  </p:clrMapOvr>
+</p:sld>
+</file>
+
+<file path=ppt/slides/slide13.xml><?xml version="1.0" encoding="utf-8"?>
+<p:sld xmlns:a="http://schemas.openxmlformats.org/drawingml/2006/main" xmlns:r="http://schemas.openxmlformats.org/officeDocument/2006/relationships" xmlns:p="http://schemas.openxmlformats.org/presentationml/2006/main">
+  <p:cSld>
+    <p:spTree>
+      <p:nvGrpSpPr>
+        <p:cNvPr id="1" name="">
+          <a:extLst>
+            <a:ext uri="{FF2B5EF4-FFF2-40B4-BE49-F238E27FC236}">
+              <a16:creationId xmlns:a16="http://schemas.microsoft.com/office/drawing/2014/main" id="{DA62F821-4221-8CE2-3E79-8711C2084C04}"/>
+            </a:ext>
+          </a:extLst>
+        </p:cNvPr>
+        <p:cNvGrpSpPr/>
+        <p:nvPr/>
+      </p:nvGrpSpPr>
+      <p:grpSpPr>
+        <a:xfrm>
+          <a:off x="0" y="0"/>
+          <a:ext cx="0" cy="0"/>
+          <a:chOff x="0" y="0"/>
+          <a:chExt cx="0" cy="0"/>
+        </a:xfrm>
+      </p:grpSpPr>
+      <p:sp>
+        <p:nvSpPr>
+          <p:cNvPr id="77" name="Rectángulo 5">
+            <a:extLst>
+              <a:ext uri="{FF2B5EF4-FFF2-40B4-BE49-F238E27FC236}">
+                <a16:creationId xmlns:a16="http://schemas.microsoft.com/office/drawing/2014/main" id="{E96F509D-89D5-7270-4088-76C259A3ADBB}"/>
+              </a:ext>
+            </a:extLst>
+          </p:cNvPr>
+          <p:cNvSpPr/>
+          <p:nvPr/>
+        </p:nvSpPr>
+        <p:spPr>
+          <a:xfrm>
+            <a:off x="960" y="0"/>
+            <a:ext cx="12191040" cy="6856920"/>
+          </a:xfrm>
+          <a:prstGeom prst="rect">
+            <a:avLst/>
+          </a:prstGeom>
+          <a:solidFill>
+            <a:schemeClr val="accent2">
+              <a:lumMod val="20000"/>
+              <a:lumOff val="80000"/>
+            </a:schemeClr>
+          </a:solidFill>
+          <a:ln>
+            <a:solidFill>
+              <a:srgbClr val="325490"/>
+            </a:solidFill>
+          </a:ln>
+        </p:spPr>
+        <p:style>
+          <a:lnRef idx="2">
+            <a:schemeClr val="accent1">
+              <a:shade val="50000"/>
+            </a:schemeClr>
+          </a:lnRef>
+          <a:fillRef idx="1">
+            <a:schemeClr val="accent1"/>
+          </a:fillRef>
+          <a:effectRef idx="0">
+            <a:schemeClr val="accent1"/>
+          </a:effectRef>
+          <a:fontRef idx="minor"/>
+        </p:style>
+        <p:txBody>
+          <a:bodyPr lIns="90000" tIns="45000" rIns="90000" bIns="45000" anchor="ctr">
+            <a:noAutofit/>
+          </a:bodyPr>
+          <a:lstStyle/>
+          <a:p>
+            <a:pPr algn="ctr" defTabSz="914400">
+              <a:lnSpc>
+                <a:spcPct val="100000"/>
+              </a:lnSpc>
+            </a:pPr>
+            <a:endParaRPr lang="es-ES" sz="1800" b="0" strike="noStrike" spc="-1">
+              <a:solidFill>
+                <a:schemeClr val="lt1"/>
+              </a:solidFill>
+              <a:latin typeface="Calibri"/>
+            </a:endParaRPr>
+          </a:p>
+        </p:txBody>
+      </p:sp>
+      <p:sp>
+        <p:nvSpPr>
+          <p:cNvPr id="78" name="CuadroTexto 7">
+            <a:extLst>
+              <a:ext uri="{FF2B5EF4-FFF2-40B4-BE49-F238E27FC236}">
+                <a16:creationId xmlns:a16="http://schemas.microsoft.com/office/drawing/2014/main" id="{DBF75072-AE1B-E16F-DAC5-BEC7F61FC2F7}"/>
+              </a:ext>
+            </a:extLst>
+          </p:cNvPr>
+          <p:cNvSpPr/>
+          <p:nvPr/>
+        </p:nvSpPr>
+        <p:spPr>
+          <a:xfrm>
+            <a:off x="527760" y="479520"/>
+            <a:ext cx="11135160" cy="629488"/>
+          </a:xfrm>
+          <a:prstGeom prst="rect">
+            <a:avLst/>
+          </a:prstGeom>
+          <a:noFill/>
+          <a:ln w="0">
+            <a:noFill/>
+          </a:ln>
+        </p:spPr>
+        <p:style>
+          <a:lnRef idx="0">
+            <a:scrgbClr r="0" g="0" b="0"/>
+          </a:lnRef>
+          <a:fillRef idx="0">
+            <a:scrgbClr r="0" g="0" b="0"/>
+          </a:fillRef>
+          <a:effectRef idx="0">
+            <a:scrgbClr r="0" g="0" b="0"/>
+          </a:effectRef>
+          <a:fontRef idx="minor"/>
+        </p:style>
+        <p:txBody>
+          <a:bodyPr lIns="90000" tIns="45000" rIns="90000" bIns="45000" anchor="t">
+            <a:spAutoFit/>
+          </a:bodyPr>
+          <a:lstStyle/>
+          <a:p>
+            <a:r>
+              <a:rPr lang="es-ES" sz="3500" b="1" spc="-1" dirty="0">
+                <a:solidFill>
+                  <a:schemeClr val="accent2">
+                    <a:lumMod val="50000"/>
+                  </a:schemeClr>
+                </a:solidFill>
+                <a:latin typeface="+mj-lt"/>
+              </a:rPr>
+              <a:t>Modelado y resultados</a:t>
+            </a:r>
+            <a:endParaRPr lang="es-ES" sz="3500" b="1" strike="noStrike" spc="-1" dirty="0">
+              <a:solidFill>
+                <a:srgbClr val="000000"/>
+              </a:solidFill>
+              <a:latin typeface="+mj-lt"/>
+            </a:endParaRPr>
+          </a:p>
+        </p:txBody>
+      </p:sp>
+      <p:sp>
+        <p:nvSpPr>
+          <p:cNvPr id="80" name="CuadroTexto 1">
+            <a:extLst>
+              <a:ext uri="{FF2B5EF4-FFF2-40B4-BE49-F238E27FC236}">
+                <a16:creationId xmlns:a16="http://schemas.microsoft.com/office/drawing/2014/main" id="{6A1C6BDC-BC2D-1A12-3B61-E1A0C6BA88DE}"/>
+              </a:ext>
+            </a:extLst>
+          </p:cNvPr>
+          <p:cNvSpPr/>
+          <p:nvPr/>
+        </p:nvSpPr>
+        <p:spPr>
+          <a:xfrm>
+            <a:off x="646200" y="1411200"/>
+            <a:ext cx="11135160" cy="4204440"/>
+          </a:xfrm>
+          <a:prstGeom prst="rect">
+            <a:avLst/>
+          </a:prstGeom>
+          <a:noFill/>
+          <a:ln w="0">
+            <a:noFill/>
+          </a:ln>
+        </p:spPr>
+        <p:style>
+          <a:lnRef idx="0">
+            <a:scrgbClr r="0" g="0" b="0"/>
+          </a:lnRef>
+          <a:fillRef idx="0">
+            <a:scrgbClr r="0" g="0" b="0"/>
+          </a:fillRef>
+          <a:effectRef idx="0">
+            <a:scrgbClr r="0" g="0" b="0"/>
+          </a:effectRef>
+          <a:fontRef idx="minor"/>
+        </p:style>
+        <p:txBody>
+          <a:bodyPr lIns="90000" tIns="45000" rIns="90000" bIns="45000" anchor="t">
+            <a:spAutoFit/>
+          </a:bodyPr>
+          <a:lstStyle/>
+          <a:p>
+            <a:pPr defTabSz="914400">
+              <a:lnSpc>
+                <a:spcPct val="100000"/>
+              </a:lnSpc>
+            </a:pPr>
+            <a:endParaRPr lang="es-ES" sz="1800" b="0" strike="noStrike" spc="-1">
+              <a:solidFill>
+                <a:srgbClr val="000000"/>
+              </a:solidFill>
+              <a:latin typeface="Arial"/>
+            </a:endParaRPr>
+          </a:p>
+        </p:txBody>
+      </p:sp>
+      <p:sp>
+        <p:nvSpPr>
+          <p:cNvPr id="6" name="Rectangle 4">
+            <a:extLst>
+              <a:ext uri="{FF2B5EF4-FFF2-40B4-BE49-F238E27FC236}">
+                <a16:creationId xmlns:a16="http://schemas.microsoft.com/office/drawing/2014/main" id="{29D6A60C-93B8-2867-C0D4-31E81492AB3B}"/>
+              </a:ext>
+            </a:extLst>
+          </p:cNvPr>
+          <p:cNvSpPr>
+            <a:spLocks noChangeArrowheads="1"/>
+          </p:cNvSpPr>
+          <p:nvPr/>
+        </p:nvSpPr>
+        <p:spPr bwMode="auto">
+          <a:xfrm rot="10800000" flipV="1">
+            <a:off x="105296" y="1242360"/>
+            <a:ext cx="11557624" cy="4708981"/>
+          </a:xfrm>
+          <a:prstGeom prst="rect">
+            <a:avLst/>
+          </a:prstGeom>
+          <a:noFill/>
+          <a:ln>
+            <a:noFill/>
+          </a:ln>
+          <a:effectLst/>
+          <a:extLst>
+            <a:ext uri="{909E8E84-426E-40DD-AFC4-6F175D3DCCD1}">
+              <a14:hiddenFill xmlns:a14="http://schemas.microsoft.com/office/drawing/2010/main">
+                <a:solidFill>
+                  <a:schemeClr val="accent1"/>
+                </a:solidFill>
+              </a14:hiddenFill>
+            </a:ext>
+            <a:ext uri="{91240B29-F687-4F45-9708-019B960494DF}">
+              <a14:hiddenLine xmlns:a14="http://schemas.microsoft.com/office/drawing/2010/main" w="9525">
+                <a:solidFill>
+                  <a:schemeClr val="tx1"/>
+                </a:solidFill>
+                <a:miter lim="800000"/>
+                <a:headEnd/>
+                <a:tailEnd/>
+              </a14:hiddenLine>
+            </a:ext>
+            <a:ext uri="{AF507438-7753-43E0-B8FC-AC1667EBCBE1}">
+              <a14:hiddenEffects xmlns:a14="http://schemas.microsoft.com/office/drawing/2010/main">
+                <a:effectLst>
+                  <a:outerShdw dist="35921" dir="2700000" algn="ctr" rotWithShape="0">
+                    <a:schemeClr val="bg2"/>
+                  </a:outerShdw>
+                </a:effectLst>
+              </a14:hiddenEffects>
+            </a:ext>
+          </a:extLst>
+        </p:spPr>
+        <p:txBody>
+          <a:bodyPr vert="horz" wrap="square" lIns="91440" tIns="45720" rIns="91440" bIns="45720" numCol="1" anchor="ctr" anchorCtr="0" compatLnSpc="1">
+            <a:prstTxWarp prst="textNoShape">
+              <a:avLst/>
+            </a:prstTxWarp>
+            <a:spAutoFit/>
+          </a:bodyPr>
+          <a:lstStyle/>
+          <a:p>
+            <a:pPr marL="0" marR="0" lvl="0" indent="0" algn="l" defTabSz="914400" rtl="0" eaLnBrk="0" fontAlgn="base" latinLnBrk="0" hangingPunct="0">
+              <a:lnSpc>
+                <a:spcPct val="100000"/>
+              </a:lnSpc>
+              <a:spcBef>
+                <a:spcPct val="0"/>
+              </a:spcBef>
+              <a:spcAft>
+                <a:spcPct val="0"/>
+              </a:spcAft>
+              <a:buClrTx/>
+              <a:buSzTx/>
+              <a:buFontTx/>
+              <a:buChar char="•"/>
+              <a:tabLst/>
+            </a:pPr>
+            <a:r>
+              <a:rPr kumimoji="0" lang="es-CL" altLang="es-CL" sz="2000" b="1" i="0" u="none" strike="noStrike" cap="none" normalizeH="0" baseline="0" dirty="0">
+                <a:ln>
+                  <a:noFill/>
+                </a:ln>
+                <a:solidFill>
+                  <a:schemeClr val="tx1"/>
+                </a:solidFill>
+                <a:effectLst/>
+                <a:latin typeface="+mj-lt"/>
+              </a:rPr>
+              <a:t>Pipelines por modelo:</a:t>
+            </a:r>
+            <a:r>
+              <a:rPr kumimoji="0" lang="es-CL" altLang="es-CL" sz="2000" b="0" i="0" u="none" strike="noStrike" cap="none" normalizeH="0" baseline="0" dirty="0">
+                <a:ln>
+                  <a:noFill/>
+                </a:ln>
+                <a:solidFill>
+                  <a:schemeClr val="tx1"/>
+                </a:solidFill>
+                <a:effectLst/>
+                <a:latin typeface="+mj-lt"/>
+              </a:rPr>
+              <a:t> mismo preprocesado (imputación; escalado solo en lineales) para evitar leakage y comparar de forma justa.</a:t>
+            </a:r>
+          </a:p>
+          <a:p>
+            <a:pPr marL="0" marR="0" lvl="0" indent="0" algn="l" defTabSz="914400" rtl="0" eaLnBrk="0" fontAlgn="base" latinLnBrk="0" hangingPunct="0">
+              <a:lnSpc>
+                <a:spcPct val="100000"/>
+              </a:lnSpc>
+              <a:spcBef>
+                <a:spcPct val="0"/>
+              </a:spcBef>
+              <a:spcAft>
+                <a:spcPct val="0"/>
+              </a:spcAft>
+              <a:buClrTx/>
+              <a:buSzTx/>
+              <a:buFontTx/>
+              <a:buChar char="•"/>
+              <a:tabLst/>
+            </a:pPr>
+            <a:endParaRPr kumimoji="0" lang="es-CL" altLang="es-CL" sz="2000" b="0" i="0" u="none" strike="noStrike" cap="none" normalizeH="0" baseline="0" dirty="0">
+              <a:ln>
+                <a:noFill/>
+              </a:ln>
+              <a:solidFill>
+                <a:schemeClr val="tx1"/>
+              </a:solidFill>
+              <a:effectLst/>
+              <a:latin typeface="+mj-lt"/>
+            </a:endParaRPr>
+          </a:p>
+          <a:p>
+            <a:pPr marL="0" marR="0" lvl="0" indent="0" algn="l" defTabSz="914400" rtl="0" eaLnBrk="0" fontAlgn="base" latinLnBrk="0" hangingPunct="0">
+              <a:lnSpc>
+                <a:spcPct val="100000"/>
+              </a:lnSpc>
+              <a:spcBef>
+                <a:spcPct val="0"/>
+              </a:spcBef>
+              <a:spcAft>
+                <a:spcPct val="0"/>
+              </a:spcAft>
+              <a:buClrTx/>
+              <a:buSzTx/>
+              <a:buFontTx/>
+              <a:buChar char="•"/>
+              <a:tabLst/>
+            </a:pPr>
+            <a:r>
+              <a:rPr kumimoji="0" lang="es-CL" altLang="es-CL" sz="2000" b="1" i="0" u="none" strike="noStrike" cap="none" normalizeH="0" baseline="0" dirty="0">
+                <a:ln>
+                  <a:noFill/>
+                </a:ln>
+                <a:solidFill>
+                  <a:schemeClr val="tx1"/>
+                </a:solidFill>
+                <a:effectLst/>
+                <a:latin typeface="+mj-lt"/>
+              </a:rPr>
+              <a:t>Baseline y comparativa:</a:t>
+            </a:r>
+            <a:r>
+              <a:rPr kumimoji="0" lang="es-CL" altLang="es-CL" sz="2000" b="0" i="0" u="none" strike="noStrike" cap="none" normalizeH="0" baseline="0" dirty="0">
+                <a:ln>
+                  <a:noFill/>
+                </a:ln>
+                <a:solidFill>
+                  <a:schemeClr val="tx1"/>
+                </a:solidFill>
+                <a:effectLst/>
+                <a:latin typeface="+mj-lt"/>
+              </a:rPr>
+              <a:t> probamos </a:t>
+            </a:r>
+            <a:r>
+              <a:rPr kumimoji="0" lang="es-CL" altLang="es-CL" sz="2000" b="1" i="0" u="none" strike="noStrike" cap="none" normalizeH="0" baseline="0" dirty="0">
+                <a:ln>
+                  <a:noFill/>
+                </a:ln>
+                <a:solidFill>
+                  <a:schemeClr val="tx1"/>
+                </a:solidFill>
+                <a:effectLst/>
+                <a:latin typeface="+mj-lt"/>
+              </a:rPr>
+              <a:t>Ridge (baseline)</a:t>
+            </a:r>
+            <a:r>
+              <a:rPr kumimoji="0" lang="es-CL" altLang="es-CL" sz="2000" b="0" i="0" u="none" strike="noStrike" cap="none" normalizeH="0" baseline="0" dirty="0">
+                <a:ln>
+                  <a:noFill/>
+                </a:ln>
+                <a:solidFill>
+                  <a:schemeClr val="tx1"/>
+                </a:solidFill>
+                <a:effectLst/>
+                <a:latin typeface="+mj-lt"/>
+              </a:rPr>
+              <a:t>, </a:t>
+            </a:r>
+            <a:r>
+              <a:rPr kumimoji="0" lang="es-CL" altLang="es-CL" sz="2000" b="1" i="0" u="none" strike="noStrike" cap="none" normalizeH="0" baseline="0" dirty="0">
+                <a:ln>
+                  <a:noFill/>
+                </a:ln>
+                <a:solidFill>
+                  <a:schemeClr val="tx1"/>
+                </a:solidFill>
+                <a:effectLst/>
+                <a:latin typeface="+mj-lt"/>
+              </a:rPr>
+              <a:t>Random Forest</a:t>
+            </a:r>
+            <a:r>
+              <a:rPr kumimoji="0" lang="es-CL" altLang="es-CL" sz="2000" b="0" i="0" u="none" strike="noStrike" cap="none" normalizeH="0" baseline="0" dirty="0">
+                <a:ln>
+                  <a:noFill/>
+                </a:ln>
+                <a:solidFill>
+                  <a:schemeClr val="tx1"/>
+                </a:solidFill>
+                <a:effectLst/>
+                <a:latin typeface="+mj-lt"/>
+              </a:rPr>
+              <a:t> y </a:t>
+            </a:r>
+            <a:r>
+              <a:rPr kumimoji="0" lang="es-CL" altLang="es-CL" sz="2000" b="1" i="0" u="none" strike="noStrike" cap="none" normalizeH="0" baseline="0" dirty="0">
+                <a:ln>
+                  <a:noFill/>
+                </a:ln>
+                <a:solidFill>
+                  <a:schemeClr val="tx1"/>
+                </a:solidFill>
+                <a:effectLst/>
+                <a:latin typeface="+mj-lt"/>
+              </a:rPr>
+              <a:t>XGBoost</a:t>
+            </a:r>
+            <a:r>
+              <a:rPr kumimoji="0" lang="es-CL" altLang="es-CL" sz="2000" b="0" i="0" u="none" strike="noStrike" cap="none" normalizeH="0" baseline="0" dirty="0">
+                <a:ln>
+                  <a:noFill/>
+                </a:ln>
+                <a:solidFill>
+                  <a:schemeClr val="tx1"/>
+                </a:solidFill>
+                <a:effectLst/>
+                <a:latin typeface="+mj-lt"/>
+              </a:rPr>
+              <a:t> con </a:t>
+            </a:r>
+            <a:r>
+              <a:rPr kumimoji="0" lang="es-CL" altLang="es-CL" sz="2000" b="1" i="0" u="none" strike="noStrike" cap="none" normalizeH="0" baseline="0" dirty="0">
+                <a:ln>
+                  <a:noFill/>
+                </a:ln>
+                <a:solidFill>
+                  <a:schemeClr val="tx1"/>
+                </a:solidFill>
+                <a:effectLst/>
+                <a:latin typeface="+mj-lt"/>
+              </a:rPr>
+              <a:t>K-</a:t>
+            </a:r>
+            <a:r>
+              <a:rPr kumimoji="0" lang="es-CL" altLang="es-CL" sz="2000" b="1" i="0" u="none" strike="noStrike" cap="none" normalizeH="0" baseline="0" dirty="0" err="1">
+                <a:ln>
+                  <a:noFill/>
+                </a:ln>
+                <a:solidFill>
+                  <a:schemeClr val="tx1"/>
+                </a:solidFill>
+                <a:effectLst/>
+                <a:latin typeface="+mj-lt"/>
+              </a:rPr>
+              <a:t>Fold</a:t>
+            </a:r>
+            <a:r>
+              <a:rPr kumimoji="0" lang="es-CL" altLang="es-CL" sz="2000" b="1" i="0" u="none" strike="noStrike" cap="none" normalizeH="0" baseline="0" dirty="0">
+                <a:ln>
+                  <a:noFill/>
+                </a:ln>
+                <a:solidFill>
+                  <a:schemeClr val="tx1"/>
+                </a:solidFill>
+                <a:effectLst/>
+                <a:latin typeface="+mj-lt"/>
+              </a:rPr>
+              <a:t> CV (k=5)</a:t>
+            </a:r>
+            <a:r>
+              <a:rPr kumimoji="0" lang="es-CL" altLang="es-CL" sz="2000" b="0" i="0" u="none" strike="noStrike" cap="none" normalizeH="0" baseline="0" dirty="0">
+                <a:ln>
+                  <a:noFill/>
+                </a:ln>
+                <a:solidFill>
+                  <a:schemeClr val="tx1"/>
+                </a:solidFill>
+                <a:effectLst/>
+                <a:latin typeface="+mj-lt"/>
+              </a:rPr>
+              <a:t> y </a:t>
+            </a:r>
+            <a:r>
+              <a:rPr kumimoji="0" lang="es-CL" altLang="es-CL" sz="2000" b="1" i="0" u="none" strike="noStrike" cap="none" normalizeH="0" baseline="0" dirty="0">
+                <a:ln>
+                  <a:noFill/>
+                </a:ln>
+                <a:solidFill>
+                  <a:schemeClr val="tx1"/>
+                </a:solidFill>
+                <a:effectLst/>
+                <a:latin typeface="+mj-lt"/>
+              </a:rPr>
+              <a:t>RMSE sobre revenue_log</a:t>
+            </a:r>
+            <a:r>
+              <a:rPr kumimoji="0" lang="es-CL" altLang="es-CL" sz="2000" b="0" i="0" u="none" strike="noStrike" cap="none" normalizeH="0" baseline="0" dirty="0">
+                <a:ln>
+                  <a:noFill/>
+                </a:ln>
+                <a:solidFill>
+                  <a:schemeClr val="tx1"/>
+                </a:solidFill>
+                <a:effectLst/>
+                <a:latin typeface="+mj-lt"/>
+              </a:rPr>
+              <a:t>.</a:t>
+            </a:r>
+          </a:p>
+          <a:p>
+            <a:pPr marL="0" marR="0" lvl="0" indent="0" algn="l" defTabSz="914400" rtl="0" eaLnBrk="0" fontAlgn="base" latinLnBrk="0" hangingPunct="0">
+              <a:lnSpc>
+                <a:spcPct val="100000"/>
+              </a:lnSpc>
+              <a:spcBef>
+                <a:spcPct val="0"/>
+              </a:spcBef>
+              <a:spcAft>
+                <a:spcPct val="0"/>
+              </a:spcAft>
+              <a:buClrTx/>
+              <a:buSzTx/>
+              <a:buFontTx/>
+              <a:buChar char="•"/>
+              <a:tabLst/>
+            </a:pPr>
+            <a:endParaRPr kumimoji="0" lang="es-CL" altLang="es-CL" sz="2000" b="0" i="0" u="none" strike="noStrike" cap="none" normalizeH="0" baseline="0" dirty="0">
+              <a:ln>
+                <a:noFill/>
+              </a:ln>
+              <a:solidFill>
+                <a:schemeClr val="tx1"/>
+              </a:solidFill>
+              <a:effectLst/>
+              <a:latin typeface="+mj-lt"/>
+            </a:endParaRPr>
+          </a:p>
+          <a:p>
+            <a:pPr marL="0" marR="0" lvl="0" indent="0" algn="l" defTabSz="914400" rtl="0" eaLnBrk="0" fontAlgn="base" latinLnBrk="0" hangingPunct="0">
+              <a:lnSpc>
+                <a:spcPct val="100000"/>
+              </a:lnSpc>
+              <a:spcBef>
+                <a:spcPct val="0"/>
+              </a:spcBef>
+              <a:spcAft>
+                <a:spcPct val="0"/>
+              </a:spcAft>
+              <a:buClrTx/>
+              <a:buSzTx/>
+              <a:buFontTx/>
+              <a:buChar char="•"/>
+              <a:tabLst/>
+            </a:pPr>
+            <a:r>
+              <a:rPr kumimoji="0" lang="es-CL" altLang="es-CL" sz="2000" b="1" i="0" u="none" strike="noStrike" cap="none" normalizeH="0" baseline="0" dirty="0">
+                <a:ln>
+                  <a:noFill/>
+                </a:ln>
+                <a:solidFill>
+                  <a:schemeClr val="tx1"/>
+                </a:solidFill>
+                <a:effectLst/>
+                <a:latin typeface="+mj-lt"/>
+              </a:rPr>
+              <a:t>Selección del modelo:</a:t>
+            </a:r>
+            <a:r>
+              <a:rPr kumimoji="0" lang="es-CL" altLang="es-CL" sz="2000" b="0" i="0" u="none" strike="noStrike" cap="none" normalizeH="0" baseline="0" dirty="0">
+                <a:ln>
+                  <a:noFill/>
+                </a:ln>
+                <a:solidFill>
+                  <a:schemeClr val="tx1"/>
+                </a:solidFill>
+                <a:effectLst/>
+                <a:latin typeface="+mj-lt"/>
+              </a:rPr>
+              <a:t> el menor RMSE en CV fue </a:t>
+            </a:r>
+            <a:r>
+              <a:rPr kumimoji="0" lang="es-CL" altLang="es-CL" sz="2000" b="1" i="0" u="none" strike="noStrike" cap="none" normalizeH="0" baseline="0" dirty="0">
+                <a:ln>
+                  <a:noFill/>
+                </a:ln>
+                <a:solidFill>
+                  <a:schemeClr val="tx1"/>
+                </a:solidFill>
+                <a:effectLst/>
+                <a:latin typeface="+mj-lt"/>
+              </a:rPr>
+              <a:t>XGBoost</a:t>
+            </a:r>
+            <a:r>
+              <a:rPr kumimoji="0" lang="es-CL" altLang="es-CL" sz="2000" b="0" i="0" u="none" strike="noStrike" cap="none" normalizeH="0" baseline="0" dirty="0">
+                <a:ln>
+                  <a:noFill/>
+                </a:ln>
+                <a:solidFill>
+                  <a:schemeClr val="tx1"/>
+                </a:solidFill>
+                <a:effectLst/>
+                <a:latin typeface="+mj-lt"/>
+              </a:rPr>
+              <a:t>, por lo que se eligió para entrenamiento final y posterior optimización.</a:t>
+            </a:r>
+          </a:p>
+          <a:p>
+            <a:pPr marL="0" marR="0" lvl="0" indent="0" algn="l" defTabSz="914400" rtl="0" eaLnBrk="0" fontAlgn="base" latinLnBrk="0" hangingPunct="0">
+              <a:lnSpc>
+                <a:spcPct val="100000"/>
+              </a:lnSpc>
+              <a:spcBef>
+                <a:spcPct val="0"/>
+              </a:spcBef>
+              <a:spcAft>
+                <a:spcPct val="0"/>
+              </a:spcAft>
+              <a:buClrTx/>
+              <a:buSzTx/>
+              <a:buFontTx/>
+              <a:buChar char="•"/>
+              <a:tabLst/>
+            </a:pPr>
+            <a:endParaRPr kumimoji="0" lang="es-CL" altLang="es-CL" sz="2000" b="0" i="0" u="none" strike="noStrike" cap="none" normalizeH="0" baseline="0" dirty="0">
+              <a:ln>
+                <a:noFill/>
+              </a:ln>
+              <a:solidFill>
+                <a:schemeClr val="tx1"/>
+              </a:solidFill>
+              <a:effectLst/>
+              <a:latin typeface="+mj-lt"/>
+            </a:endParaRPr>
+          </a:p>
+          <a:p>
+            <a:pPr marL="0" marR="0" lvl="0" indent="0" algn="l" defTabSz="914400" rtl="0" eaLnBrk="0" fontAlgn="base" latinLnBrk="0" hangingPunct="0">
+              <a:lnSpc>
+                <a:spcPct val="100000"/>
+              </a:lnSpc>
+              <a:spcBef>
+                <a:spcPct val="0"/>
+              </a:spcBef>
+              <a:spcAft>
+                <a:spcPct val="0"/>
+              </a:spcAft>
+              <a:buClrTx/>
+              <a:buSzTx/>
+              <a:buFontTx/>
+              <a:buChar char="•"/>
+              <a:tabLst/>
+            </a:pPr>
+            <a:r>
+              <a:rPr kumimoji="0" lang="es-CL" altLang="es-CL" sz="2000" b="1" i="0" u="none" strike="noStrike" cap="none" normalizeH="0" baseline="0" dirty="0">
+                <a:ln>
+                  <a:noFill/>
+                </a:ln>
+                <a:solidFill>
+                  <a:schemeClr val="tx1"/>
+                </a:solidFill>
+                <a:effectLst/>
+                <a:latin typeface="+mj-lt"/>
+              </a:rPr>
+              <a:t>Chequeo del target en euros:</a:t>
+            </a:r>
+            <a:r>
+              <a:rPr kumimoji="0" lang="es-CL" altLang="es-CL" sz="2000" b="0" i="0" u="none" strike="noStrike" cap="none" normalizeH="0" baseline="0" dirty="0">
+                <a:ln>
+                  <a:noFill/>
+                </a:ln>
+                <a:solidFill>
+                  <a:schemeClr val="tx1"/>
+                </a:solidFill>
+                <a:effectLst/>
+                <a:latin typeface="+mj-lt"/>
+              </a:rPr>
+              <a:t> calculamos </a:t>
+            </a:r>
+            <a:r>
+              <a:rPr kumimoji="0" lang="es-CL" altLang="es-CL" sz="2000" b="1" i="0" u="none" strike="noStrike" cap="none" normalizeH="0" baseline="0" dirty="0">
+                <a:ln>
+                  <a:noFill/>
+                </a:ln>
+                <a:solidFill>
+                  <a:schemeClr val="tx1"/>
+                </a:solidFill>
+                <a:effectLst/>
+                <a:latin typeface="+mj-lt"/>
+              </a:rPr>
+              <a:t>media, mediana y percentiles</a:t>
+            </a:r>
+            <a:r>
+              <a:rPr kumimoji="0" lang="es-CL" altLang="es-CL" sz="2000" b="0" i="0" u="none" strike="noStrike" cap="none" normalizeH="0" baseline="0" dirty="0">
+                <a:ln>
+                  <a:noFill/>
+                </a:ln>
+                <a:solidFill>
+                  <a:schemeClr val="tx1"/>
+                </a:solidFill>
+                <a:effectLst/>
+                <a:latin typeface="+mj-lt"/>
+              </a:rPr>
+              <a:t> (tras expm1) para entender la magnitud real del revenue y poder interpretar el error.</a:t>
+            </a:r>
+          </a:p>
+          <a:p>
+            <a:pPr marL="0" marR="0" lvl="0" indent="0" algn="l" defTabSz="914400" rtl="0" eaLnBrk="0" fontAlgn="base" latinLnBrk="0" hangingPunct="0">
+              <a:lnSpc>
+                <a:spcPct val="100000"/>
+              </a:lnSpc>
+              <a:spcBef>
+                <a:spcPct val="0"/>
+              </a:spcBef>
+              <a:spcAft>
+                <a:spcPct val="0"/>
+              </a:spcAft>
+              <a:buClrTx/>
+              <a:buSzTx/>
+              <a:buFontTx/>
+              <a:buChar char="•"/>
+              <a:tabLst/>
+            </a:pPr>
+            <a:endParaRPr kumimoji="0" lang="es-CL" altLang="es-CL" sz="2000" b="0" i="0" u="none" strike="noStrike" cap="none" normalizeH="0" baseline="0" dirty="0">
+              <a:ln>
+                <a:noFill/>
+              </a:ln>
+              <a:solidFill>
+                <a:schemeClr val="tx1"/>
+              </a:solidFill>
+              <a:effectLst/>
+              <a:latin typeface="+mj-lt"/>
+            </a:endParaRPr>
+          </a:p>
+          <a:p>
+            <a:pPr marL="0" marR="0" lvl="0" indent="0" algn="l" defTabSz="914400" rtl="0" eaLnBrk="0" fontAlgn="base" latinLnBrk="0" hangingPunct="0">
+              <a:lnSpc>
+                <a:spcPct val="100000"/>
+              </a:lnSpc>
+              <a:spcBef>
+                <a:spcPct val="0"/>
+              </a:spcBef>
+              <a:spcAft>
+                <a:spcPct val="0"/>
+              </a:spcAft>
+              <a:buClrTx/>
+              <a:buSzTx/>
+              <a:buFontTx/>
+              <a:buChar char="•"/>
+              <a:tabLst/>
+            </a:pPr>
+            <a:r>
+              <a:rPr kumimoji="0" lang="es-CL" altLang="es-CL" sz="2000" b="1" i="0" u="none" strike="noStrike" cap="none" normalizeH="0" baseline="0" dirty="0">
+                <a:ln>
+                  <a:noFill/>
+                </a:ln>
+                <a:solidFill>
+                  <a:schemeClr val="tx1"/>
+                </a:solidFill>
+                <a:effectLst/>
+                <a:latin typeface="+mj-lt"/>
+              </a:rPr>
+              <a:t>Interpretación del RMSE (€):</a:t>
+            </a:r>
+            <a:r>
+              <a:rPr kumimoji="0" lang="es-CL" altLang="es-CL" sz="2000" b="0" i="0" u="none" strike="noStrike" cap="none" normalizeH="0" baseline="0" dirty="0">
+                <a:ln>
+                  <a:noFill/>
+                </a:ln>
+                <a:solidFill>
+                  <a:schemeClr val="tx1"/>
+                </a:solidFill>
+                <a:effectLst/>
+                <a:latin typeface="+mj-lt"/>
+              </a:rPr>
+              <a:t> el revenue tiene </a:t>
+            </a:r>
+            <a:r>
+              <a:rPr kumimoji="0" lang="es-CL" altLang="es-CL" sz="2000" b="1" i="0" u="none" strike="noStrike" cap="none" normalizeH="0" baseline="0" dirty="0">
+                <a:ln>
+                  <a:noFill/>
+                </a:ln>
+                <a:solidFill>
+                  <a:schemeClr val="tx1"/>
+                </a:solidFill>
+                <a:effectLst/>
+                <a:latin typeface="+mj-lt"/>
+              </a:rPr>
+              <a:t>cola muy pesada</a:t>
+            </a:r>
+            <a:r>
+              <a:rPr kumimoji="0" lang="es-CL" altLang="es-CL" sz="2000" b="0" i="0" u="none" strike="noStrike" cap="none" normalizeH="0" baseline="0" dirty="0">
+                <a:ln>
+                  <a:noFill/>
+                </a:ln>
+                <a:solidFill>
+                  <a:schemeClr val="tx1"/>
+                </a:solidFill>
+                <a:effectLst/>
+                <a:latin typeface="+mj-lt"/>
+              </a:rPr>
+              <a:t> (p99 ≈ 84k€ y </a:t>
+            </a:r>
+            <a:r>
+              <a:rPr kumimoji="0" lang="es-CL" altLang="es-CL" sz="2000" b="1" i="0" u="none" strike="noStrike" cap="none" normalizeH="0" baseline="0" dirty="0">
+                <a:ln>
+                  <a:noFill/>
+                </a:ln>
+                <a:solidFill>
+                  <a:schemeClr val="tx1"/>
+                </a:solidFill>
+                <a:effectLst/>
+                <a:latin typeface="+mj-lt"/>
+              </a:rPr>
+              <a:t>máximo ≈ 2M€</a:t>
+            </a:r>
+            <a:r>
+              <a:rPr kumimoji="0" lang="es-CL" altLang="es-CL" sz="2000" b="0" i="0" u="none" strike="noStrike" cap="none" normalizeH="0" baseline="0" dirty="0">
+                <a:ln>
+                  <a:noFill/>
+                </a:ln>
+                <a:solidFill>
+                  <a:schemeClr val="tx1"/>
+                </a:solidFill>
+                <a:effectLst/>
+                <a:latin typeface="+mj-lt"/>
+              </a:rPr>
+              <a:t>). Como RMSE penaliza errores al cuadrado, estos casos extremos pueden inflar el RMSE en euros aunque el modelo funcione bien para la mayoría.</a:t>
+            </a:r>
+          </a:p>
+        </p:txBody>
+      </p:sp>
+      <p:pic>
+        <p:nvPicPr>
+          <p:cNvPr id="7" name="Imagen 28">
+            <a:hlinkClick r:id="rId2" action="ppaction://hlinksldjump"/>
+            <a:extLst>
+              <a:ext uri="{FF2B5EF4-FFF2-40B4-BE49-F238E27FC236}">
+                <a16:creationId xmlns:a16="http://schemas.microsoft.com/office/drawing/2014/main" id="{42F73702-51E5-2631-57CC-D0BB26462C81}"/>
+              </a:ext>
+            </a:extLst>
+          </p:cNvPr>
+          <p:cNvPicPr/>
+          <p:nvPr/>
+        </p:nvPicPr>
+        <p:blipFill>
+          <a:blip r:embed="rId3"/>
+          <a:stretch/>
+        </p:blipFill>
+        <p:spPr>
+          <a:xfrm>
+            <a:off x="10644306" y="131941"/>
+            <a:ext cx="1208156" cy="1147319"/>
+          </a:xfrm>
+          <a:prstGeom prst="rect">
+            <a:avLst/>
+          </a:prstGeom>
+          <a:ln w="0">
+            <a:noFill/>
+          </a:ln>
+        </p:spPr>
+      </p:pic>
+    </p:spTree>
+    <p:extLst>
+      <p:ext uri="{BB962C8B-B14F-4D97-AF65-F5344CB8AC3E}">
+        <p14:creationId xmlns:p14="http://schemas.microsoft.com/office/powerpoint/2010/main" val="3762195791"/>
+      </p:ext>
+    </p:extLst>
+  </p:cSld>
+  <p:clrMapOvr>
+    <a:masterClrMapping/>
+  </p:clrMapOvr>
+</p:sld>
+</file>
+
+<file path=ppt/slides/slide14.xml><?xml version="1.0" encoding="utf-8"?>
+<p:sld xmlns:a="http://schemas.openxmlformats.org/drawingml/2006/main" xmlns:r="http://schemas.openxmlformats.org/officeDocument/2006/relationships" xmlns:p="http://schemas.openxmlformats.org/presentationml/2006/main">
+  <p:cSld>
+    <p:spTree>
+      <p:nvGrpSpPr>
+        <p:cNvPr id="1" name=""/>
+        <p:cNvGrpSpPr/>
+        <p:nvPr/>
+      </p:nvGrpSpPr>
+      <p:grpSpPr>
+        <a:xfrm>
+          <a:off x="0" y="0"/>
+          <a:ext cx="0" cy="0"/>
+          <a:chOff x="0" y="0"/>
+          <a:chExt cx="0" cy="0"/>
+        </a:xfrm>
+      </p:grpSpPr>
+      <p:sp>
+        <p:nvSpPr>
+          <p:cNvPr id="77" name="Rectángulo 5"/>
+          <p:cNvSpPr/>
+          <p:nvPr/>
+        </p:nvSpPr>
+        <p:spPr>
+          <a:xfrm>
+            <a:off x="0" y="0"/>
+            <a:ext cx="12191040" cy="6856920"/>
+          </a:xfrm>
+          <a:prstGeom prst="rect">
+            <a:avLst/>
+          </a:prstGeom>
+          <a:solidFill>
+            <a:schemeClr val="accent2">
+              <a:lumMod val="20000"/>
+              <a:lumOff val="80000"/>
+            </a:schemeClr>
+          </a:solidFill>
+          <a:ln>
+            <a:solidFill>
+              <a:srgbClr val="325490"/>
+            </a:solidFill>
+          </a:ln>
+        </p:spPr>
+        <p:style>
+          <a:lnRef idx="2">
+            <a:schemeClr val="accent1">
+              <a:shade val="50000"/>
+            </a:schemeClr>
+          </a:lnRef>
+          <a:fillRef idx="1">
+            <a:schemeClr val="accent1"/>
+          </a:fillRef>
+          <a:effectRef idx="0">
+            <a:schemeClr val="accent1"/>
+          </a:effectRef>
+          <a:fontRef idx="minor"/>
+        </p:style>
+        <p:txBody>
+          <a:bodyPr lIns="90000" tIns="45000" rIns="90000" bIns="45000" anchor="ctr">
+            <a:noAutofit/>
+          </a:bodyPr>
+          <a:lstStyle/>
+          <a:p>
+            <a:pPr algn="ctr" defTabSz="914400">
+              <a:lnSpc>
+                <a:spcPct val="100000"/>
+              </a:lnSpc>
+            </a:pPr>
+            <a:endParaRPr lang="es-ES" sz="1800" b="0" strike="noStrike" spc="-1">
+              <a:solidFill>
+                <a:schemeClr val="lt1"/>
+              </a:solidFill>
+              <a:latin typeface="Calibri"/>
+            </a:endParaRPr>
+          </a:p>
+        </p:txBody>
+      </p:sp>
+      <p:sp>
+        <p:nvSpPr>
+          <p:cNvPr id="78" name="CuadroTexto 7"/>
+          <p:cNvSpPr/>
+          <p:nvPr/>
+        </p:nvSpPr>
+        <p:spPr>
+          <a:xfrm>
+            <a:off x="527760" y="479520"/>
+            <a:ext cx="11135160" cy="623160"/>
+          </a:xfrm>
+          <a:prstGeom prst="rect">
+            <a:avLst/>
+          </a:prstGeom>
+          <a:noFill/>
+          <a:ln w="0">
+            <a:noFill/>
+          </a:ln>
+        </p:spPr>
+        <p:style>
+          <a:lnRef idx="0">
+            <a:scrgbClr r="0" g="0" b="0"/>
+          </a:lnRef>
+          <a:fillRef idx="0">
+            <a:scrgbClr r="0" g="0" b="0"/>
+          </a:fillRef>
+          <a:effectRef idx="0">
+            <a:scrgbClr r="0" g="0" b="0"/>
+          </a:effectRef>
+          <a:fontRef idx="minor"/>
+        </p:style>
+        <p:txBody>
+          <a:bodyPr lIns="90000" tIns="45000" rIns="90000" bIns="45000" anchor="t">
+            <a:spAutoFit/>
+          </a:bodyPr>
+          <a:lstStyle/>
+          <a:p>
+            <a:pPr defTabSz="914400">
+              <a:lnSpc>
+                <a:spcPct val="100000"/>
+              </a:lnSpc>
+            </a:pPr>
+            <a:r>
+              <a:rPr lang="es-ES" sz="3500" b="1" strike="noStrike" spc="-1">
+                <a:solidFill>
+                  <a:srgbClr val="582808"/>
+                </a:solidFill>
+                <a:latin typeface="Calibri Light"/>
+              </a:rPr>
+              <a:t>5. Conclusiones</a:t>
+            </a:r>
+            <a:endParaRPr lang="es-ES" sz="3500" b="0" strike="noStrike" spc="-1">
+              <a:solidFill>
+                <a:srgbClr val="000000"/>
+              </a:solidFill>
+              <a:latin typeface="Arial"/>
+            </a:endParaRPr>
+          </a:p>
+        </p:txBody>
+      </p:sp>
+      <p:pic>
+        <p:nvPicPr>
+          <p:cNvPr id="79" name="Imagen 6"/>
+          <p:cNvPicPr/>
+          <p:nvPr/>
+        </p:nvPicPr>
+        <p:blipFill>
+          <a:blip r:embed="rId2"/>
+          <a:stretch/>
+        </p:blipFill>
+        <p:spPr>
+          <a:xfrm>
+            <a:off x="10598040" y="479520"/>
+            <a:ext cx="1064880" cy="797760"/>
+          </a:xfrm>
+          <a:prstGeom prst="rect">
+            <a:avLst/>
+          </a:prstGeom>
+          <a:ln w="0">
+            <a:noFill/>
+          </a:ln>
+        </p:spPr>
+      </p:pic>
+      <p:sp>
+        <p:nvSpPr>
+          <p:cNvPr id="80" name="CuadroTexto 1"/>
+          <p:cNvSpPr/>
+          <p:nvPr/>
+        </p:nvSpPr>
+        <p:spPr>
+          <a:xfrm>
+            <a:off x="646200" y="1411200"/>
+            <a:ext cx="11135160" cy="4204440"/>
+          </a:xfrm>
+          <a:prstGeom prst="rect">
+            <a:avLst/>
+          </a:prstGeom>
+          <a:noFill/>
+          <a:ln w="0">
+            <a:noFill/>
+          </a:ln>
+        </p:spPr>
+        <p:style>
+          <a:lnRef idx="0">
+            <a:scrgbClr r="0" g="0" b="0"/>
+          </a:lnRef>
+          <a:fillRef idx="0">
+            <a:scrgbClr r="0" g="0" b="0"/>
+          </a:fillRef>
+          <a:effectRef idx="0">
+            <a:scrgbClr r="0" g="0" b="0"/>
+          </a:effectRef>
+          <a:fontRef idx="minor"/>
+        </p:style>
+        <p:txBody>
+          <a:bodyPr lIns="90000" tIns="45000" rIns="90000" bIns="45000" anchor="t">
+            <a:spAutoFit/>
+          </a:bodyPr>
+          <a:lstStyle/>
+          <a:p>
+            <a:pPr defTabSz="914400">
+              <a:lnSpc>
+                <a:spcPct val="100000"/>
+              </a:lnSpc>
+            </a:pPr>
+            <a:endParaRPr lang="es-ES" sz="1800" b="0" strike="noStrike" spc="-1">
+              <a:solidFill>
+                <a:srgbClr val="000000"/>
+              </a:solidFill>
+              <a:latin typeface="Arial"/>
+            </a:endParaRPr>
+          </a:p>
+        </p:txBody>
+      </p:sp>
+    </p:spTree>
+  </p:cSld>
+  <p:clrMapOvr>
+    <a:masterClrMapping/>
+  </p:clrMapOvr>
+</p:sld>
+</file>
+
 <file path=ppt/slides/slide2.xml><?xml version="1.0" encoding="utf-8"?>
 <p:sld xmlns:a="http://schemas.openxmlformats.org/drawingml/2006/main" xmlns:r="http://schemas.openxmlformats.org/officeDocument/2006/relationships" xmlns:p="http://schemas.openxmlformats.org/presentationml/2006/main">
   <p:cSld>
@@ -8521,7 +11387,7 @@
               </a:lnSpc>
             </a:pPr>
             <a:r>
-              <a:rPr lang="es-ES" sz="1900" b="1" strike="noStrike" spc="-1">
+              <a:rPr lang="es-ES" sz="1900" b="1" strike="noStrike" spc="-1" dirty="0">
                 <a:solidFill>
                   <a:schemeClr val="accent2">
                     <a:lumMod val="50000"/>
@@ -8531,7 +11397,7 @@
               </a:rPr>
               <a:t>1.  Problema de negocio</a:t>
             </a:r>
-            <a:endParaRPr lang="es-ES" sz="1900" b="0" strike="noStrike" spc="-1">
+            <a:endParaRPr lang="es-ES" sz="1900" b="0" strike="noStrike" spc="-1" dirty="0">
               <a:solidFill>
                 <a:srgbClr val="000000"/>
               </a:solidFill>
@@ -8583,7 +11449,7 @@
               </a:lnSpc>
             </a:pPr>
             <a:r>
-              <a:rPr lang="es-ES" sz="1900" b="1" strike="noStrike" spc="-1">
+              <a:rPr lang="es-ES" sz="1900" b="1" strike="noStrike" spc="-1" dirty="0">
                 <a:solidFill>
                   <a:schemeClr val="accent2">
                     <a:lumMod val="50000"/>
@@ -8593,7 +11459,7 @@
               </a:rPr>
               <a:t>2.  Planteamiento técnico</a:t>
             </a:r>
-            <a:endParaRPr lang="es-ES" sz="1900" b="0" strike="noStrike" spc="-1">
+            <a:endParaRPr lang="es-ES" sz="1900" b="0" strike="noStrike" spc="-1" dirty="0">
               <a:solidFill>
                 <a:srgbClr val="000000"/>
               </a:solidFill>
@@ -8946,7 +11812,7 @@
         </p:nvSpPr>
         <p:spPr>
           <a:xfrm>
-            <a:off x="1080" y="0"/>
+            <a:off x="960" y="0"/>
             <a:ext cx="12191040" cy="6856920"/>
           </a:xfrm>
           <a:prstGeom prst="rect">
@@ -8984,7 +11850,7 @@
           </a:bodyPr>
           <a:lstStyle/>
           <a:p>
-            <a:endParaRPr lang="es-ES" sz="1800" b="0" strike="noStrike" spc="-1">
+            <a:endParaRPr lang="es-ES" sz="1800" b="0" strike="noStrike" spc="-1" dirty="0">
               <a:solidFill>
                 <a:schemeClr val="lt1"/>
               </a:solidFill>
@@ -9002,7 +11868,7 @@
         <p:spPr>
           <a:xfrm>
             <a:off x="527760" y="479520"/>
-            <a:ext cx="11135160" cy="623160"/>
+            <a:ext cx="11135160" cy="629488"/>
           </a:xfrm>
           <a:prstGeom prst="rect">
             <a:avLst/>
@@ -9036,380 +11902,15 @@
               </a:lnSpc>
             </a:pPr>
             <a:r>
-              <a:rPr lang="es-ES" sz="3500" b="1" strike="noStrike" spc="-1">
+              <a:rPr lang="es-ES" sz="3500" b="1" strike="noStrike" spc="-1" dirty="0">
                 <a:solidFill>
                   <a:srgbClr val="582808"/>
                 </a:solidFill>
                 <a:latin typeface="Calibri Light"/>
               </a:rPr>
-              <a:t>EDA – Duplicados, missings y outliers (JAVI)</a:t>
-            </a:r>
-            <a:endParaRPr lang="es-ES" sz="3500" b="0" strike="noStrike" spc="-1">
-              <a:solidFill>
-                <a:srgbClr val="000000"/>
-              </a:solidFill>
-              <a:latin typeface="Arial"/>
-            </a:endParaRPr>
-          </a:p>
-        </p:txBody>
-      </p:sp>
-      <p:sp>
-        <p:nvSpPr>
-          <p:cNvPr id="71" name="CuadroTexto 13"/>
-          <p:cNvSpPr/>
-          <p:nvPr/>
-        </p:nvSpPr>
-        <p:spPr>
-          <a:xfrm>
-            <a:off x="716400" y="1839960"/>
-            <a:ext cx="10946520" cy="4478760"/>
-          </a:xfrm>
-          <a:prstGeom prst="rect">
-            <a:avLst/>
-          </a:prstGeom>
-          <a:noFill/>
-          <a:ln w="0">
-            <a:noFill/>
-          </a:ln>
-        </p:spPr>
-        <p:style>
-          <a:lnRef idx="0">
-            <a:scrgbClr r="0" g="0" b="0"/>
-          </a:lnRef>
-          <a:fillRef idx="0">
-            <a:scrgbClr r="0" g="0" b="0"/>
-          </a:fillRef>
-          <a:effectRef idx="0">
-            <a:scrgbClr r="0" g="0" b="0"/>
-          </a:effectRef>
-          <a:fontRef idx="minor"/>
-        </p:style>
-        <p:txBody>
-          <a:bodyPr lIns="90000" tIns="45000" rIns="90000" bIns="45000" anchor="t">
-            <a:spAutoFit/>
-          </a:bodyPr>
-          <a:lstStyle/>
-          <a:p>
-            <a:pPr marL="216000" indent="-216000" defTabSz="914400">
-              <a:lnSpc>
-                <a:spcPct val="100000"/>
-              </a:lnSpc>
-              <a:buClr>
-                <a:srgbClr val="582808"/>
-              </a:buClr>
-              <a:buFont typeface="Wingdings" charset="2"/>
-              <a:buChar char=""/>
-            </a:pPr>
-            <a:r>
-              <a:rPr lang="es-ES" sz="1800" b="0" strike="noStrike" spc="-1" dirty="0">
-                <a:solidFill>
-                  <a:srgbClr val="582808"/>
-                </a:solidFill>
-                <a:latin typeface="Calibri"/>
-              </a:rPr>
-              <a:t>Al partir de tres </a:t>
-            </a:r>
-            <a:r>
-              <a:rPr lang="es-ES" sz="1800" b="0" strike="noStrike" spc="-1" dirty="0" err="1">
-                <a:solidFill>
-                  <a:srgbClr val="582808"/>
-                </a:solidFill>
-                <a:latin typeface="Calibri"/>
-              </a:rPr>
-              <a:t>subdatasets</a:t>
-            </a:r>
-            <a:r>
-              <a:rPr lang="es-ES" sz="1800" b="0" strike="noStrike" spc="-1" dirty="0">
-                <a:solidFill>
-                  <a:srgbClr val="582808"/>
-                </a:solidFill>
-                <a:latin typeface="Calibri"/>
-              </a:rPr>
-              <a:t> que unificamos en el </a:t>
-            </a:r>
-            <a:r>
-              <a:rPr lang="es-ES" sz="1800" b="0" strike="noStrike" spc="-1" dirty="0" err="1">
-                <a:solidFill>
-                  <a:srgbClr val="582808"/>
-                </a:solidFill>
-                <a:latin typeface="Calibri"/>
-              </a:rPr>
-              <a:t>dataset</a:t>
-            </a:r>
-            <a:r>
-              <a:rPr lang="es-ES" sz="1800" b="0" strike="noStrike" spc="-1" dirty="0">
-                <a:solidFill>
-                  <a:srgbClr val="582808"/>
-                </a:solidFill>
-                <a:latin typeface="Calibri"/>
-              </a:rPr>
-              <a:t> definitivo de partida, la mayoría de duplicados ya los eliminamos previamente localizando coincidencias por id. Por lo que en este punto, teníamos un número reducido de duplicados en nuestro </a:t>
-            </a:r>
-            <a:r>
-              <a:rPr lang="es-ES" sz="1800" b="0" strike="noStrike" spc="-1" dirty="0" err="1">
-                <a:solidFill>
-                  <a:srgbClr val="582808"/>
-                </a:solidFill>
-                <a:latin typeface="Calibri"/>
-              </a:rPr>
-              <a:t>dataframe</a:t>
-            </a:r>
-            <a:r>
-              <a:rPr lang="es-ES" sz="1800" b="0" strike="noStrike" spc="-1" dirty="0">
-                <a:solidFill>
-                  <a:srgbClr val="582808"/>
-                </a:solidFill>
-                <a:latin typeface="Calibri"/>
-              </a:rPr>
-              <a:t> que eliminamos.</a:t>
-            </a:r>
-            <a:endParaRPr lang="es-ES" sz="1800" b="0" strike="noStrike" spc="-1" dirty="0">
-              <a:solidFill>
-                <a:srgbClr val="000000"/>
-              </a:solidFill>
-              <a:latin typeface="Arial"/>
-            </a:endParaRPr>
-          </a:p>
-          <a:p>
-            <a:pPr marL="216000" indent="-216000" defTabSz="914400">
-              <a:lnSpc>
-                <a:spcPct val="100000"/>
-              </a:lnSpc>
-              <a:buClr>
-                <a:srgbClr val="582808"/>
-              </a:buClr>
-              <a:buFont typeface="Wingdings" charset="2"/>
-              <a:buChar char=""/>
-            </a:pPr>
-            <a:endParaRPr lang="es-ES" sz="1800" b="0" strike="noStrike" spc="-1" dirty="0">
-              <a:solidFill>
-                <a:srgbClr val="000000"/>
-              </a:solidFill>
-              <a:latin typeface="Arial"/>
-            </a:endParaRPr>
-          </a:p>
-          <a:p>
-            <a:pPr marL="216000" indent="-216000" defTabSz="914400">
-              <a:lnSpc>
-                <a:spcPct val="100000"/>
-              </a:lnSpc>
-              <a:buClr>
-                <a:srgbClr val="582808"/>
-              </a:buClr>
-              <a:buFont typeface="Wingdings" charset="2"/>
-              <a:buChar char=""/>
-            </a:pPr>
-            <a:r>
-              <a:rPr lang="es-ES" sz="1800" b="0" strike="noStrike" spc="-1" dirty="0">
-                <a:solidFill>
-                  <a:srgbClr val="582808"/>
-                </a:solidFill>
-                <a:latin typeface="Calibri"/>
-              </a:rPr>
-              <a:t>Continuamos con el tratamiento de nulos o </a:t>
-            </a:r>
-            <a:r>
-              <a:rPr lang="es-ES" sz="1800" b="0" strike="noStrike" spc="-1" dirty="0" err="1">
-                <a:solidFill>
-                  <a:srgbClr val="582808"/>
-                </a:solidFill>
-                <a:latin typeface="Calibri"/>
-              </a:rPr>
-              <a:t>missings</a:t>
-            </a:r>
-            <a:r>
-              <a:rPr lang="es-ES" sz="1800" b="0" strike="noStrike" spc="-1" dirty="0">
-                <a:solidFill>
-                  <a:srgbClr val="582808"/>
-                </a:solidFill>
-                <a:latin typeface="Calibri"/>
-              </a:rPr>
-              <a:t>, valorando para cada </a:t>
-            </a:r>
-            <a:r>
-              <a:rPr lang="es-ES" sz="1800" b="0" strike="noStrike" spc="-1" dirty="0" err="1">
-                <a:solidFill>
-                  <a:srgbClr val="582808"/>
-                </a:solidFill>
-                <a:latin typeface="Calibri"/>
-              </a:rPr>
-              <a:t>feature</a:t>
-            </a:r>
-            <a:r>
-              <a:rPr lang="es-ES" sz="1800" b="0" strike="noStrike" spc="-1" dirty="0">
-                <a:solidFill>
-                  <a:srgbClr val="582808"/>
-                </a:solidFill>
-                <a:latin typeface="Calibri"/>
-              </a:rPr>
-              <a:t> la solución más acorde en función del porcentaje de nulos y el tipo de la columna.</a:t>
-            </a:r>
-            <a:br>
-              <a:rPr sz="1800" dirty="0"/>
-            </a:br>
-            <a:r>
-              <a:rPr lang="es-ES" sz="1800" b="0" strike="noStrike" spc="-1" dirty="0">
-                <a:solidFill>
-                  <a:srgbClr val="582808"/>
-                </a:solidFill>
-                <a:latin typeface="Calibri"/>
-              </a:rPr>
-              <a:t>Aplicamos tratamientos que van desde la eliminación de una </a:t>
-            </a:r>
-            <a:r>
-              <a:rPr lang="es-ES" sz="1800" b="0" strike="noStrike" spc="-1" dirty="0" err="1">
-                <a:solidFill>
-                  <a:srgbClr val="582808"/>
-                </a:solidFill>
-                <a:latin typeface="Calibri"/>
-              </a:rPr>
-              <a:t>feature</a:t>
-            </a:r>
-            <a:r>
-              <a:rPr lang="es-ES" sz="1800" b="0" strike="noStrike" spc="-1" dirty="0">
-                <a:solidFill>
-                  <a:srgbClr val="582808"/>
-                </a:solidFill>
-                <a:latin typeface="Calibri"/>
-              </a:rPr>
-              <a:t> completa al presentar un porcentaje muy elevado de </a:t>
-            </a:r>
-            <a:r>
-              <a:rPr lang="es-ES" sz="1800" b="0" strike="noStrike" spc="-1" dirty="0" err="1">
-                <a:solidFill>
-                  <a:srgbClr val="582808"/>
-                </a:solidFill>
-                <a:latin typeface="Calibri"/>
-              </a:rPr>
-              <a:t>missings</a:t>
-            </a:r>
-            <a:r>
-              <a:rPr lang="es-ES" sz="1800" b="0" strike="noStrike" spc="-1" dirty="0">
-                <a:solidFill>
-                  <a:srgbClr val="582808"/>
-                </a:solidFill>
-                <a:latin typeface="Calibri"/>
-              </a:rPr>
-              <a:t> y ser de poca relevancia para el objetivo, hasta imputación de medianas, modas, mapeo de datos en función de clasificación de los valores e imputación de 0 u otros valores según la distribución de cada </a:t>
-            </a:r>
-            <a:r>
-              <a:rPr lang="es-ES" sz="1800" b="0" strike="noStrike" spc="-1" dirty="0" err="1">
-                <a:solidFill>
-                  <a:srgbClr val="582808"/>
-                </a:solidFill>
-                <a:latin typeface="Calibri"/>
-              </a:rPr>
-              <a:t>feature</a:t>
-            </a:r>
-            <a:r>
-              <a:rPr lang="es-ES" sz="1800" b="0" strike="noStrike" spc="-1" dirty="0">
-                <a:solidFill>
-                  <a:srgbClr val="582808"/>
-                </a:solidFill>
-                <a:latin typeface="Calibri"/>
-              </a:rPr>
-              <a:t>.</a:t>
-            </a:r>
-            <a:br>
-              <a:rPr sz="1800" dirty="0"/>
-            </a:br>
-            <a:r>
-              <a:rPr lang="es-ES" sz="1800" b="0" strike="noStrike" spc="-1" dirty="0">
-                <a:solidFill>
-                  <a:srgbClr val="582808"/>
-                </a:solidFill>
-                <a:latin typeface="Calibri"/>
-              </a:rPr>
-              <a:t> </a:t>
-            </a:r>
-            <a:endParaRPr lang="es-ES" sz="1800" b="0" strike="noStrike" spc="-1" dirty="0">
-              <a:solidFill>
-                <a:srgbClr val="000000"/>
-              </a:solidFill>
-              <a:latin typeface="Arial"/>
-            </a:endParaRPr>
-          </a:p>
-          <a:p>
-            <a:pPr marL="216000" indent="-216000" defTabSz="914400">
-              <a:lnSpc>
-                <a:spcPct val="100000"/>
-              </a:lnSpc>
-              <a:buClr>
-                <a:srgbClr val="582808"/>
-              </a:buClr>
-              <a:buFont typeface="Wingdings" charset="2"/>
-              <a:buChar char=""/>
-            </a:pPr>
-            <a:r>
-              <a:rPr lang="es-ES" sz="1800" b="0" strike="noStrike" spc="-1" dirty="0">
-                <a:solidFill>
-                  <a:srgbClr val="582808"/>
-                </a:solidFill>
-                <a:latin typeface="Calibri"/>
-              </a:rPr>
-              <a:t>Por último, para concluir con esta evaluación preliminar de features, detectamos los posibles </a:t>
-            </a:r>
-            <a:r>
-              <a:rPr lang="es-ES" sz="1800" b="0" strike="noStrike" spc="-1" dirty="0" err="1">
-                <a:solidFill>
-                  <a:srgbClr val="582808"/>
-                </a:solidFill>
-                <a:latin typeface="Calibri"/>
-              </a:rPr>
-              <a:t>outliers</a:t>
-            </a:r>
-            <a:r>
-              <a:rPr lang="es-ES" sz="1800" b="0" strike="noStrike" spc="-1" dirty="0">
-                <a:solidFill>
-                  <a:srgbClr val="582808"/>
-                </a:solidFill>
-                <a:latin typeface="Calibri"/>
-              </a:rPr>
-              <a:t>.</a:t>
-            </a:r>
-            <a:br>
-              <a:rPr sz="1800" dirty="0"/>
-            </a:br>
-            <a:r>
-              <a:rPr lang="es-ES" sz="1800" b="0" strike="noStrike" spc="-1" dirty="0">
-                <a:solidFill>
-                  <a:srgbClr val="582808"/>
-                </a:solidFill>
-                <a:latin typeface="Calibri"/>
-              </a:rPr>
-              <a:t>En nuestro caso visualizamos los percentiles extremos 1% y 99% para comparar con los valores mínimos y máximos.</a:t>
-            </a:r>
-            <a:br>
-              <a:rPr sz="1800" dirty="0"/>
-            </a:br>
-            <a:r>
-              <a:rPr lang="es-ES" sz="1800" b="0" strike="noStrike" spc="-1" dirty="0">
-                <a:solidFill>
-                  <a:srgbClr val="582808"/>
-                </a:solidFill>
-                <a:latin typeface="Calibri"/>
-              </a:rPr>
-              <a:t>Con esta visualización, igualamos los máximos al valor del percentil 99% de alguna </a:t>
-            </a:r>
-            <a:r>
-              <a:rPr lang="es-ES" sz="1800" b="0" strike="noStrike" spc="-1" dirty="0" err="1">
-                <a:solidFill>
-                  <a:srgbClr val="582808"/>
-                </a:solidFill>
-                <a:latin typeface="Calibri"/>
-              </a:rPr>
-              <a:t>feature</a:t>
-            </a:r>
-            <a:r>
-              <a:rPr lang="es-ES" sz="1800" b="0" strike="noStrike" spc="-1" dirty="0">
-                <a:solidFill>
-                  <a:srgbClr val="582808"/>
-                </a:solidFill>
-                <a:latin typeface="Calibri"/>
-              </a:rPr>
-              <a:t> que carecía de sentido ese valor máximo.</a:t>
-            </a:r>
-            <a:endParaRPr lang="es-ES" sz="1800" b="0" strike="noStrike" spc="-1" dirty="0">
+              <a:t>EDA – Análisis de target y su distribución</a:t>
+            </a:r>
+            <a:endParaRPr lang="es-ES" sz="3500" b="0" strike="noStrike" spc="-1" dirty="0">
               <a:solidFill>
                 <a:srgbClr val="000000"/>
               </a:solidFill>
@@ -9441,6 +11942,158 @@
           </a:ln>
         </p:spPr>
       </p:pic>
+      <p:sp>
+        <p:nvSpPr>
+          <p:cNvPr id="3" name="CuadroTexto 2">
+            <a:extLst>
+              <a:ext uri="{FF2B5EF4-FFF2-40B4-BE49-F238E27FC236}">
+                <a16:creationId xmlns:a16="http://schemas.microsoft.com/office/drawing/2014/main" id="{55E57555-0E29-1849-5539-23A973D3A3FC}"/>
+              </a:ext>
+            </a:extLst>
+          </p:cNvPr>
+          <p:cNvSpPr txBox="1"/>
+          <p:nvPr/>
+        </p:nvSpPr>
+        <p:spPr>
+          <a:xfrm>
+            <a:off x="527760" y="1358900"/>
+            <a:ext cx="11537240" cy="3046988"/>
+          </a:xfrm>
+          <a:prstGeom prst="rect">
+            <a:avLst/>
+          </a:prstGeom>
+          <a:noFill/>
+        </p:spPr>
+        <p:txBody>
+          <a:bodyPr wrap="square" rtlCol="0">
+            <a:spAutoFit/>
+          </a:bodyPr>
+          <a:lstStyle/>
+          <a:p>
+            <a:r>
+              <a:rPr lang="es-ES" sz="1600" dirty="0"/>
+              <a:t>Elegimos </a:t>
+            </a:r>
+            <a:r>
+              <a:rPr lang="es-ES" sz="1600" b="1" dirty="0"/>
+              <a:t>estimated_revenue_l365d </a:t>
+            </a:r>
+            <a:r>
+              <a:rPr lang="es-ES" sz="1600" dirty="0"/>
+              <a:t>como variable objetivo, porque resume el ingreso o beneficio anual estimado que puede generar un anuncio.</a:t>
+            </a:r>
+          </a:p>
+          <a:p>
+            <a:br>
+              <a:rPr lang="es-ES" sz="1600" dirty="0"/>
+            </a:br>
+            <a:r>
+              <a:rPr lang="es-ES" sz="1600" dirty="0"/>
+              <a:t>Con esto, buscamos predecir cuánto dinero produce al año cada propiedad del </a:t>
+            </a:r>
+            <a:r>
+              <a:rPr lang="es-ES" sz="1600" dirty="0" err="1"/>
+              <a:t>dataset</a:t>
+            </a:r>
+            <a:r>
+              <a:rPr lang="es-ES" sz="1600" dirty="0"/>
+              <a:t>, por lo que utilizaremos un </a:t>
+            </a:r>
+            <a:r>
+              <a:rPr lang="es-ES" sz="1600" b="1" dirty="0"/>
+              <a:t>modelo supervisado de regresión.</a:t>
+            </a:r>
+          </a:p>
+          <a:p>
+            <a:endParaRPr lang="es-ES" sz="1600" dirty="0"/>
+          </a:p>
+          <a:p>
+            <a:r>
+              <a:rPr lang="es-ES" sz="1600" dirty="0"/>
+              <a:t>La variable objetivo presenta una distribución fuertemente sesgada a la derecha, con presencia de valores extremos muy elevados. La media es significativamente superior a la mediana, lo que confirma la asimetría. Además, existen valores 0 que deberán analizarse para determinar si corresponden a ausencia de actividad o a posibles errores.</a:t>
+            </a:r>
+          </a:p>
+          <a:p>
+            <a:endParaRPr lang="es-ES" sz="1600" dirty="0"/>
+          </a:p>
+          <a:p>
+            <a:r>
+              <a:rPr lang="es-ES" sz="1600" dirty="0"/>
+              <a:t>Con el fin de reducir la asimetría, hacer la distribución mas "normal" y reducir el impacto de los </a:t>
+            </a:r>
+            <a:r>
+              <a:rPr lang="es-ES" sz="1600" dirty="0" err="1"/>
+              <a:t>outliers</a:t>
+            </a:r>
+            <a:r>
+              <a:rPr lang="es-ES" sz="1600" dirty="0"/>
+              <a:t> vamos a hacer la función logarítmica.</a:t>
+            </a:r>
+          </a:p>
+        </p:txBody>
+      </p:sp>
+      <p:pic>
+        <p:nvPicPr>
+          <p:cNvPr id="9" name="Imagen 8" descr="The diagram illustrates an estimated annual revenue distribution, with a range from $0 to $1,500,000, showing frequencies at intervals of $20,000.&#10;&#10;El contenido generado por IA puede ser incorrecto.">
+            <a:extLst>
+              <a:ext uri="{FF2B5EF4-FFF2-40B4-BE49-F238E27FC236}">
+                <a16:creationId xmlns:a16="http://schemas.microsoft.com/office/drawing/2014/main" id="{6261B4F5-5193-D4D4-9949-90B7EDF9DE1B}"/>
+              </a:ext>
+            </a:extLst>
+          </p:cNvPr>
+          <p:cNvPicPr>
+            <a:picLocks noChangeAspect="1"/>
+          </p:cNvPicPr>
+          <p:nvPr/>
+        </p:nvPicPr>
+        <p:blipFill>
+          <a:blip r:embed="rId3"/>
+          <a:srcRect l="1592" t="2524" r="1760" b="5573"/>
+          <a:stretch>
+            <a:fillRect/>
+          </a:stretch>
+        </p:blipFill>
+        <p:spPr>
+          <a:xfrm>
+            <a:off x="2961077" y="4285382"/>
+            <a:ext cx="3017244" cy="2285148"/>
+          </a:xfrm>
+          <a:prstGeom prst="rect">
+            <a:avLst/>
+          </a:prstGeom>
+        </p:spPr>
+      </p:pic>
+      <p:pic>
+        <p:nvPicPr>
+          <p:cNvPr id="11" name="Imagen 10" descr="The provided text describes a logarithmic distribution of revenue, with values ranging from 0 to 3000, increasing in increments of 2000.&#10;&#10;El contenido generado por IA puede ser incorrecto.">
+            <a:extLst>
+              <a:ext uri="{FF2B5EF4-FFF2-40B4-BE49-F238E27FC236}">
+                <a16:creationId xmlns:a16="http://schemas.microsoft.com/office/drawing/2014/main" id="{BC79AED8-182A-92FA-E449-C1178660DA92}"/>
+              </a:ext>
+            </a:extLst>
+          </p:cNvPr>
+          <p:cNvPicPr>
+            <a:picLocks noChangeAspect="1"/>
+          </p:cNvPicPr>
+          <p:nvPr/>
+        </p:nvPicPr>
+        <p:blipFill>
+          <a:blip r:embed="rId4"/>
+          <a:srcRect l="3000" t="1486" r="2334" b="2722"/>
+          <a:stretch>
+            <a:fillRect/>
+          </a:stretch>
+        </p:blipFill>
+        <p:spPr>
+          <a:xfrm>
+            <a:off x="6505121" y="4285382"/>
+            <a:ext cx="2923343" cy="2285149"/>
+          </a:xfrm>
+          <a:prstGeom prst="rect">
+            <a:avLst/>
+          </a:prstGeom>
+        </p:spPr>
+      </p:pic>
     </p:spTree>
   </p:cSld>
   <p:clrMapOvr>
@@ -9454,7 +12107,13 @@
   <p:cSld>
     <p:spTree>
       <p:nvGrpSpPr>
-        <p:cNvPr id="1" name=""/>
+        <p:cNvPr id="1" name="">
+          <a:extLst>
+            <a:ext uri="{FF2B5EF4-FFF2-40B4-BE49-F238E27FC236}">
+              <a16:creationId xmlns:a16="http://schemas.microsoft.com/office/drawing/2014/main" id="{2F3A2137-DA47-56A0-8320-B8BFB237899C}"/>
+            </a:ext>
+          </a:extLst>
+        </p:cNvPr>
         <p:cNvGrpSpPr/>
         <p:nvPr/>
       </p:nvGrpSpPr>
@@ -9468,13 +12127,19 @@
       </p:grpSpPr>
       <p:sp>
         <p:nvSpPr>
-          <p:cNvPr id="73" name="Rectángulo 3"/>
+          <p:cNvPr id="69" name="Rectángulo 2">
+            <a:extLst>
+              <a:ext uri="{FF2B5EF4-FFF2-40B4-BE49-F238E27FC236}">
+                <a16:creationId xmlns:a16="http://schemas.microsoft.com/office/drawing/2014/main" id="{13A98D50-0E89-5ABA-D0C8-69C5D184F21E}"/>
+              </a:ext>
+            </a:extLst>
+          </p:cNvPr>
           <p:cNvSpPr/>
           <p:nvPr/>
         </p:nvSpPr>
         <p:spPr>
           <a:xfrm>
-            <a:off x="1080" y="0"/>
+            <a:off x="960" y="0"/>
             <a:ext cx="12191040" cy="6856920"/>
           </a:xfrm>
           <a:prstGeom prst="rect">
@@ -9523,1528 +12188,10 @@
       </p:sp>
       <p:sp>
         <p:nvSpPr>
-          <p:cNvPr id="74" name="CuadroTexto 15"/>
-          <p:cNvSpPr/>
-          <p:nvPr/>
-        </p:nvSpPr>
-        <p:spPr>
-          <a:xfrm>
-            <a:off x="527760" y="479520"/>
-            <a:ext cx="11135160" cy="623160"/>
-          </a:xfrm>
-          <a:prstGeom prst="rect">
-            <a:avLst/>
-          </a:prstGeom>
-          <a:noFill/>
-          <a:ln w="0">
-            <a:noFill/>
-          </a:ln>
-        </p:spPr>
-        <p:style>
-          <a:lnRef idx="0">
-            <a:scrgbClr r="0" g="0" b="0"/>
-          </a:lnRef>
-          <a:fillRef idx="0">
-            <a:scrgbClr r="0" g="0" b="0"/>
-          </a:fillRef>
-          <a:effectRef idx="0">
-            <a:scrgbClr r="0" g="0" b="0"/>
-          </a:effectRef>
-          <a:fontRef idx="minor"/>
-        </p:style>
-        <p:txBody>
-          <a:bodyPr lIns="90000" tIns="45000" rIns="90000" bIns="45000" anchor="t">
-            <a:spAutoFit/>
-          </a:bodyPr>
-          <a:lstStyle/>
-          <a:p>
-            <a:pPr defTabSz="914400">
-              <a:lnSpc>
-                <a:spcPct val="100000"/>
-              </a:lnSpc>
-            </a:pPr>
-            <a:r>
-              <a:rPr lang="es-ES" sz="3500" b="1" strike="noStrike" spc="-1">
-                <a:solidFill>
-                  <a:srgbClr val="582808"/>
-                </a:solidFill>
-                <a:latin typeface="Calibri Light"/>
-                <a:ea typeface="Microsoft YaHei"/>
-              </a:rPr>
-              <a:t>EDA – Feature engineering </a:t>
-            </a:r>
-            <a:r>
-              <a:rPr lang="es-ES" sz="3500" b="1" strike="noStrike" spc="-1">
-                <a:solidFill>
-                  <a:srgbClr val="582808"/>
-                </a:solidFill>
-                <a:latin typeface="Calibri Light"/>
-              </a:rPr>
-              <a:t> (JAVI)</a:t>
-            </a:r>
-            <a:endParaRPr lang="es-ES" sz="3500" b="0" strike="noStrike" spc="-1">
-              <a:solidFill>
-                <a:srgbClr val="000000"/>
-              </a:solidFill>
-              <a:latin typeface="Arial"/>
-            </a:endParaRPr>
-          </a:p>
-        </p:txBody>
-      </p:sp>
-      <p:sp>
-        <p:nvSpPr>
-          <p:cNvPr id="75" name="CuadroTexto 16"/>
-          <p:cNvSpPr/>
-          <p:nvPr/>
-        </p:nvSpPr>
-        <p:spPr>
-          <a:xfrm>
-            <a:off x="716400" y="1260000"/>
-            <a:ext cx="10946520" cy="5301720"/>
-          </a:xfrm>
-          <a:prstGeom prst="rect">
-            <a:avLst/>
-          </a:prstGeom>
-          <a:noFill/>
-          <a:ln w="0">
-            <a:noFill/>
-          </a:ln>
-        </p:spPr>
-        <p:style>
-          <a:lnRef idx="0">
-            <a:scrgbClr r="0" g="0" b="0"/>
-          </a:lnRef>
-          <a:fillRef idx="0">
-            <a:scrgbClr r="0" g="0" b="0"/>
-          </a:fillRef>
-          <a:effectRef idx="0">
-            <a:scrgbClr r="0" g="0" b="0"/>
-          </a:effectRef>
-          <a:fontRef idx="minor"/>
-        </p:style>
-        <p:txBody>
-          <a:bodyPr lIns="90000" tIns="45000" rIns="90000" bIns="45000" anchor="t">
-            <a:spAutoFit/>
-          </a:bodyPr>
-          <a:lstStyle/>
-          <a:p>
-            <a:pPr defTabSz="914400">
-              <a:lnSpc>
-                <a:spcPct val="100000"/>
-              </a:lnSpc>
-            </a:pPr>
-            <a:r>
-              <a:rPr lang="es-ES" sz="1800" b="0" strike="noStrike" spc="-1">
-                <a:solidFill>
-                  <a:srgbClr val="582808"/>
-                </a:solidFill>
-                <a:latin typeface="Calibri"/>
-              </a:rPr>
-              <a:t>Dado el objetivo de nuestro modelo de Machine Learning, teníamos que tratar las features categóricas en numéricas, de forma que pudiésemos dotarlas de sentido y significado para el entrenamiento del modelo.</a:t>
-            </a:r>
-            <a:endParaRPr lang="es-ES" sz="1800" b="0" strike="noStrike" spc="-1">
-              <a:solidFill>
-                <a:srgbClr val="000000"/>
-              </a:solidFill>
-              <a:latin typeface="Arial"/>
-            </a:endParaRPr>
-          </a:p>
-          <a:p>
-            <a:pPr defTabSz="914400">
-              <a:lnSpc>
-                <a:spcPct val="100000"/>
-              </a:lnSpc>
-            </a:pPr>
-            <a:endParaRPr lang="es-ES" sz="1800" b="0" strike="noStrike" spc="-1">
-              <a:solidFill>
-                <a:srgbClr val="000000"/>
-              </a:solidFill>
-              <a:latin typeface="Arial"/>
-            </a:endParaRPr>
-          </a:p>
-          <a:p>
-            <a:pPr defTabSz="914400">
-              <a:lnSpc>
-                <a:spcPct val="100000"/>
-              </a:lnSpc>
-            </a:pPr>
-            <a:r>
-              <a:rPr lang="es-ES" sz="1800" b="0" strike="noStrike" spc="-1">
-                <a:solidFill>
-                  <a:srgbClr val="582808"/>
-                </a:solidFill>
-                <a:latin typeface="Calibri"/>
-              </a:rPr>
-              <a:t>Por ello, tratamos individualmente cada columna categórica y fuimos aplicando el encoding más acorde en función de su cardinalidad.</a:t>
-            </a:r>
-            <a:endParaRPr lang="es-ES" sz="1800" b="0" strike="noStrike" spc="-1">
-              <a:solidFill>
-                <a:srgbClr val="000000"/>
-              </a:solidFill>
-              <a:latin typeface="Arial"/>
-            </a:endParaRPr>
-          </a:p>
-          <a:p>
-            <a:pPr defTabSz="914400">
-              <a:lnSpc>
-                <a:spcPct val="100000"/>
-              </a:lnSpc>
-            </a:pPr>
-            <a:endParaRPr lang="es-ES" sz="1800" b="0" strike="noStrike" spc="-1">
-              <a:solidFill>
-                <a:srgbClr val="000000"/>
-              </a:solidFill>
-              <a:latin typeface="Arial"/>
-            </a:endParaRPr>
-          </a:p>
-          <a:p>
-            <a:pPr defTabSz="914400">
-              <a:lnSpc>
-                <a:spcPct val="100000"/>
-              </a:lnSpc>
-            </a:pPr>
-            <a:r>
-              <a:rPr lang="es-ES" sz="1800" b="0" strike="noStrike" spc="-1">
-                <a:solidFill>
-                  <a:srgbClr val="582808"/>
-                </a:solidFill>
-                <a:latin typeface="Calibri"/>
-              </a:rPr>
-              <a:t>Algunas features con pocos valores únicos era fácilmente transformables en binarias o aplicándoles one-hot-encoding para la generación de estas columnas binarias-numéricas y alguna variable susceptible de mapeo de datos para su conversión en numérica.</a:t>
-            </a:r>
-            <a:endParaRPr lang="es-ES" sz="1800" b="0" strike="noStrike" spc="-1">
-              <a:solidFill>
-                <a:srgbClr val="000000"/>
-              </a:solidFill>
-              <a:latin typeface="Arial"/>
-            </a:endParaRPr>
-          </a:p>
-          <a:p>
-            <a:pPr defTabSz="914400">
-              <a:lnSpc>
-                <a:spcPct val="100000"/>
-              </a:lnSpc>
-            </a:pPr>
-            <a:endParaRPr lang="es-ES" sz="1800" b="0" strike="noStrike" spc="-1">
-              <a:solidFill>
-                <a:srgbClr val="000000"/>
-              </a:solidFill>
-              <a:latin typeface="Arial"/>
-            </a:endParaRPr>
-          </a:p>
-          <a:p>
-            <a:pPr defTabSz="914400">
-              <a:lnSpc>
-                <a:spcPct val="100000"/>
-              </a:lnSpc>
-            </a:pPr>
-            <a:r>
-              <a:rPr lang="es-ES" sz="1800" b="0" strike="noStrike" spc="-1">
-                <a:solidFill>
-                  <a:srgbClr val="582808"/>
-                </a:solidFill>
-                <a:latin typeface="Calibri"/>
-              </a:rPr>
-              <a:t>En el caso de otras features de tipo texto, extrajimos parte numérica que podía tener sentido para el modelo y también tratamos la parte de texto generando una columna binaria si por ejemplo la fila del dataset tenía una característica o no.</a:t>
-            </a:r>
-            <a:endParaRPr lang="es-ES" sz="1800" b="0" strike="noStrike" spc="-1">
-              <a:solidFill>
-                <a:srgbClr val="000000"/>
-              </a:solidFill>
-              <a:latin typeface="Arial"/>
-            </a:endParaRPr>
-          </a:p>
-          <a:p>
-            <a:pPr defTabSz="914400">
-              <a:lnSpc>
-                <a:spcPct val="100000"/>
-              </a:lnSpc>
-            </a:pPr>
-            <a:endParaRPr lang="es-ES" sz="1800" b="0" strike="noStrike" spc="-1">
-              <a:solidFill>
-                <a:srgbClr val="000000"/>
-              </a:solidFill>
-              <a:latin typeface="Arial"/>
-            </a:endParaRPr>
-          </a:p>
-          <a:p>
-            <a:pPr defTabSz="914400">
-              <a:lnSpc>
-                <a:spcPct val="100000"/>
-              </a:lnSpc>
-            </a:pPr>
-            <a:r>
-              <a:rPr lang="es-ES" sz="1800" b="0" strike="noStrike" spc="-1">
-                <a:solidFill>
-                  <a:srgbClr val="582808"/>
-                </a:solidFill>
-                <a:latin typeface="Calibri"/>
-              </a:rPr>
-              <a:t>Con todo ello, fuimos transformando las categóricas en numéricas, aportando valor a las features para mejorar el aprendizaje del modelo.</a:t>
-            </a:r>
-            <a:endParaRPr lang="es-ES" sz="1800" b="0" strike="noStrike" spc="-1">
-              <a:solidFill>
-                <a:srgbClr val="000000"/>
-              </a:solidFill>
-              <a:latin typeface="Arial"/>
-            </a:endParaRPr>
-          </a:p>
-          <a:p>
-            <a:pPr defTabSz="914400">
-              <a:lnSpc>
-                <a:spcPct val="100000"/>
-              </a:lnSpc>
-            </a:pPr>
-            <a:r>
-              <a:rPr lang="es-ES" sz="1800" b="0" strike="noStrike" spc="-1">
-                <a:solidFill>
-                  <a:srgbClr val="582808"/>
-                </a:solidFill>
-                <a:latin typeface="Calibri"/>
-              </a:rPr>
-              <a:t>Por último, alguna feature con alta cardinalidad, tuvimos que aplicarle feature encoding para dotarla de sentido para el modelo, por lo que este tratamiento lo aplicamos únicamente a train para no provocar un “</a:t>
-            </a:r>
-            <a:r>
-              <a:rPr lang="es-ES" sz="1800" b="0" i="1" strike="noStrike" spc="-1">
-                <a:solidFill>
-                  <a:srgbClr val="582808"/>
-                </a:solidFill>
-                <a:latin typeface="Calibri"/>
-              </a:rPr>
-              <a:t>data leakage</a:t>
-            </a:r>
-            <a:r>
-              <a:rPr lang="es-ES" sz="1800" b="0" strike="noStrike" spc="-1">
-                <a:solidFill>
-                  <a:srgbClr val="582808"/>
-                </a:solidFill>
-                <a:latin typeface="Calibri"/>
-              </a:rPr>
-              <a:t>” en los datos sobre los que predeciríamos.</a:t>
-            </a:r>
-            <a:endParaRPr lang="es-ES" sz="1800" b="0" strike="noStrike" spc="-1">
-              <a:solidFill>
-                <a:srgbClr val="000000"/>
-              </a:solidFill>
-              <a:latin typeface="Arial"/>
-            </a:endParaRPr>
-          </a:p>
-        </p:txBody>
-      </p:sp>
-      <p:pic>
-        <p:nvPicPr>
-          <p:cNvPr id="76" name="Imagen 9"/>
-          <p:cNvPicPr/>
-          <p:nvPr/>
-        </p:nvPicPr>
-        <p:blipFill>
-          <a:blip r:embed="rId2"/>
-          <a:stretch/>
-        </p:blipFill>
-        <p:spPr>
-          <a:xfrm>
-            <a:off x="10348920" y="479520"/>
-            <a:ext cx="1314000" cy="987840"/>
-          </a:xfrm>
-          <a:prstGeom prst="rect">
-            <a:avLst/>
-          </a:prstGeom>
-          <a:ln w="0">
-            <a:noFill/>
-          </a:ln>
-        </p:spPr>
-      </p:pic>
-    </p:spTree>
-  </p:cSld>
-  <p:clrMapOvr>
-    <a:masterClrMapping/>
-  </p:clrMapOvr>
-</p:sld>
-</file>
-
-<file path=ppt/slides/slide5.xml><?xml version="1.0" encoding="utf-8"?>
-<p:sld xmlns:a="http://schemas.openxmlformats.org/drawingml/2006/main" xmlns:r="http://schemas.openxmlformats.org/officeDocument/2006/relationships" xmlns:p="http://schemas.openxmlformats.org/presentationml/2006/main">
-  <p:cSld>
-    <p:spTree>
-      <p:nvGrpSpPr>
-        <p:cNvPr id="1" name=""/>
-        <p:cNvGrpSpPr/>
-        <p:nvPr/>
-      </p:nvGrpSpPr>
-      <p:grpSpPr>
-        <a:xfrm>
-          <a:off x="0" y="0"/>
-          <a:ext cx="0" cy="0"/>
-          <a:chOff x="0" y="0"/>
-          <a:chExt cx="0" cy="0"/>
-        </a:xfrm>
-      </p:grpSpPr>
-      <p:sp>
-        <p:nvSpPr>
-          <p:cNvPr id="65" name="Rectángulo 5"/>
-          <p:cNvSpPr/>
-          <p:nvPr/>
-        </p:nvSpPr>
-        <p:spPr>
-          <a:xfrm>
-            <a:off x="960" y="0"/>
-            <a:ext cx="12191040" cy="6856920"/>
-          </a:xfrm>
-          <a:prstGeom prst="rect">
-            <a:avLst/>
-          </a:prstGeom>
-          <a:solidFill>
-            <a:schemeClr val="accent2">
-              <a:lumMod val="20000"/>
-              <a:lumOff val="80000"/>
-            </a:schemeClr>
-          </a:solidFill>
-          <a:ln>
-            <a:solidFill>
-              <a:srgbClr val="325490"/>
-            </a:solidFill>
-          </a:ln>
-        </p:spPr>
-        <p:style>
-          <a:lnRef idx="2">
-            <a:schemeClr val="accent1">
-              <a:shade val="50000"/>
-            </a:schemeClr>
-          </a:lnRef>
-          <a:fillRef idx="1">
-            <a:schemeClr val="accent1"/>
-          </a:fillRef>
-          <a:effectRef idx="0">
-            <a:schemeClr val="accent1"/>
-          </a:effectRef>
-          <a:fontRef idx="minor"/>
-        </p:style>
-        <p:txBody>
-          <a:bodyPr lIns="90000" tIns="45000" rIns="90000" bIns="45000" anchor="ctr">
-            <a:noAutofit/>
-          </a:bodyPr>
-          <a:lstStyle/>
-          <a:p>
-            <a:pPr algn="ctr" defTabSz="914400">
-              <a:lnSpc>
-                <a:spcPct val="100000"/>
-              </a:lnSpc>
-            </a:pPr>
-            <a:endParaRPr lang="es-ES" sz="1800" b="0" strike="noStrike" spc="-1" dirty="0">
-              <a:solidFill>
-                <a:schemeClr val="lt1"/>
-              </a:solidFill>
-              <a:latin typeface="Calibri"/>
-            </a:endParaRPr>
-          </a:p>
-        </p:txBody>
-      </p:sp>
-      <p:sp>
-        <p:nvSpPr>
-          <p:cNvPr id="66" name="CuadroTexto 7"/>
-          <p:cNvSpPr/>
-          <p:nvPr/>
-        </p:nvSpPr>
-        <p:spPr>
-          <a:xfrm>
-            <a:off x="527760" y="479520"/>
-            <a:ext cx="11135160" cy="1014209"/>
-          </a:xfrm>
-          <a:prstGeom prst="rect">
-            <a:avLst/>
-          </a:prstGeom>
-          <a:noFill/>
-          <a:ln w="0">
-            <a:noFill/>
-          </a:ln>
-        </p:spPr>
-        <p:style>
-          <a:lnRef idx="0">
-            <a:scrgbClr r="0" g="0" b="0"/>
-          </a:lnRef>
-          <a:fillRef idx="0">
-            <a:scrgbClr r="0" g="0" b="0"/>
-          </a:fillRef>
-          <a:effectRef idx="0">
-            <a:scrgbClr r="0" g="0" b="0"/>
-          </a:effectRef>
-          <a:fontRef idx="minor"/>
-        </p:style>
-        <p:txBody>
-          <a:bodyPr lIns="90000" tIns="45000" rIns="90000" bIns="45000" anchor="t">
-            <a:spAutoFit/>
-          </a:bodyPr>
-          <a:lstStyle/>
-          <a:p>
-            <a:r>
-              <a:rPr lang="es-ES" sz="3500" b="1" spc="-1" dirty="0">
-                <a:solidFill>
-                  <a:schemeClr val="accent2">
-                    <a:lumMod val="50000"/>
-                  </a:schemeClr>
-                </a:solidFill>
-                <a:latin typeface="+mj-lt"/>
-              </a:rPr>
-              <a:t>Modelado y resultados </a:t>
-            </a:r>
-            <a:r>
-              <a:rPr lang="es-ES" sz="2500" b="1" spc="-1" dirty="0">
-                <a:solidFill>
-                  <a:schemeClr val="accent2">
-                    <a:lumMod val="50000"/>
-                  </a:schemeClr>
-                </a:solidFill>
-                <a:latin typeface="+mj-lt"/>
-              </a:rPr>
-              <a:t>(Selección de métricas y Cross Validation)</a:t>
-            </a:r>
-          </a:p>
-          <a:p>
-            <a:endParaRPr lang="es-ES" sz="2500" b="1" spc="-1" dirty="0">
-              <a:solidFill>
-                <a:schemeClr val="accent2">
-                  <a:lumMod val="50000"/>
-                </a:schemeClr>
-              </a:solidFill>
-              <a:latin typeface="+mj-lt"/>
-            </a:endParaRPr>
-          </a:p>
-        </p:txBody>
-      </p:sp>
-      <p:sp>
-        <p:nvSpPr>
-          <p:cNvPr id="67" name="CuadroTexto 2"/>
-          <p:cNvSpPr/>
-          <p:nvPr/>
-        </p:nvSpPr>
-        <p:spPr>
-          <a:xfrm>
-            <a:off x="716400" y="1947960"/>
-            <a:ext cx="10946520" cy="364680"/>
-          </a:xfrm>
-          <a:prstGeom prst="rect">
-            <a:avLst/>
-          </a:prstGeom>
-          <a:noFill/>
-          <a:ln w="0">
-            <a:noFill/>
-          </a:ln>
-        </p:spPr>
-        <p:style>
-          <a:lnRef idx="0">
-            <a:scrgbClr r="0" g="0" b="0"/>
-          </a:lnRef>
-          <a:fillRef idx="0">
-            <a:scrgbClr r="0" g="0" b="0"/>
-          </a:fillRef>
-          <a:effectRef idx="0">
-            <a:scrgbClr r="0" g="0" b="0"/>
-          </a:effectRef>
-          <a:fontRef idx="minor"/>
-        </p:style>
-        <p:txBody>
-          <a:bodyPr lIns="90000" tIns="45000" rIns="90000" bIns="45000" anchor="t">
-            <a:spAutoFit/>
-          </a:bodyPr>
-          <a:lstStyle/>
-          <a:p>
-            <a:pPr defTabSz="914400">
-              <a:lnSpc>
-                <a:spcPct val="100000"/>
-              </a:lnSpc>
-            </a:pPr>
-            <a:endParaRPr lang="es-ES" sz="1800" b="0" strike="noStrike" spc="-1" dirty="0">
-              <a:solidFill>
-                <a:srgbClr val="000000"/>
-              </a:solidFill>
-              <a:latin typeface="Arial"/>
-            </a:endParaRPr>
-          </a:p>
-        </p:txBody>
-      </p:sp>
-      <p:sp>
-        <p:nvSpPr>
-          <p:cNvPr id="6" name="Rectangle 3">
+          <p:cNvPr id="70" name="CuadroTexto 6">
             <a:extLst>
               <a:ext uri="{FF2B5EF4-FFF2-40B4-BE49-F238E27FC236}">
-                <a16:creationId xmlns:a16="http://schemas.microsoft.com/office/drawing/2014/main" id="{837AF994-6692-B983-CB34-D40E8FFF1DA6}"/>
-              </a:ext>
-            </a:extLst>
-          </p:cNvPr>
-          <p:cNvSpPr>
-            <a:spLocks noChangeArrowheads="1"/>
-          </p:cNvSpPr>
-          <p:nvPr/>
-        </p:nvSpPr>
-        <p:spPr bwMode="auto">
-          <a:xfrm>
-            <a:off x="458159" y="1558252"/>
-            <a:ext cx="11733841" cy="4093428"/>
-          </a:xfrm>
-          <a:prstGeom prst="rect">
-            <a:avLst/>
-          </a:prstGeom>
-          <a:noFill/>
-          <a:ln>
-            <a:noFill/>
-          </a:ln>
-          <a:effectLst/>
-          <a:extLst>
-            <a:ext uri="{909E8E84-426E-40DD-AFC4-6F175D3DCCD1}">
-              <a14:hiddenFill xmlns:a14="http://schemas.microsoft.com/office/drawing/2010/main">
-                <a:solidFill>
-                  <a:schemeClr val="accent1"/>
-                </a:solidFill>
-              </a14:hiddenFill>
-            </a:ext>
-            <a:ext uri="{91240B29-F687-4F45-9708-019B960494DF}">
-              <a14:hiddenLine xmlns:a14="http://schemas.microsoft.com/office/drawing/2010/main" w="9525">
-                <a:solidFill>
-                  <a:schemeClr val="tx1"/>
-                </a:solidFill>
-                <a:miter lim="800000"/>
-                <a:headEnd/>
-                <a:tailEnd/>
-              </a14:hiddenLine>
-            </a:ext>
-            <a:ext uri="{AF507438-7753-43E0-B8FC-AC1667EBCBE1}">
-              <a14:hiddenEffects xmlns:a14="http://schemas.microsoft.com/office/drawing/2010/main">
-                <a:effectLst>
-                  <a:outerShdw dist="35921" dir="2700000" algn="ctr" rotWithShape="0">
-                    <a:schemeClr val="bg2"/>
-                  </a:outerShdw>
-                </a:effectLst>
-              </a14:hiddenEffects>
-            </a:ext>
-          </a:extLst>
-        </p:spPr>
-        <p:txBody>
-          <a:bodyPr vert="horz" wrap="square" lIns="91440" tIns="45720" rIns="91440" bIns="45720" numCol="1" anchor="ctr" anchorCtr="0" compatLnSpc="1">
-            <a:prstTxWarp prst="textNoShape">
-              <a:avLst/>
-            </a:prstTxWarp>
-            <a:spAutoFit/>
-          </a:bodyPr>
-          <a:lstStyle/>
-          <a:p>
-            <a:pPr marL="0" marR="0" lvl="0" indent="0" algn="l" defTabSz="914400" rtl="0" eaLnBrk="0" fontAlgn="base" latinLnBrk="0" hangingPunct="0">
-              <a:lnSpc>
-                <a:spcPct val="100000"/>
-              </a:lnSpc>
-              <a:spcBef>
-                <a:spcPct val="0"/>
-              </a:spcBef>
-              <a:spcAft>
-                <a:spcPct val="0"/>
-              </a:spcAft>
-              <a:buClrTx/>
-              <a:buSzTx/>
-              <a:buFontTx/>
-              <a:buChar char="•"/>
-              <a:tabLst/>
-            </a:pPr>
-            <a:r>
-              <a:rPr kumimoji="0" lang="es-CL" altLang="es-CL" sz="2000" b="0" i="0" u="none" strike="noStrike" cap="none" normalizeH="0" baseline="0" dirty="0">
-                <a:ln>
-                  <a:noFill/>
-                </a:ln>
-                <a:solidFill>
-                  <a:schemeClr val="accent2">
-                    <a:lumMod val="50000"/>
-                  </a:schemeClr>
-                </a:solidFill>
-                <a:effectLst/>
-                <a:latin typeface="+mj-lt"/>
-              </a:rPr>
-              <a:t>Transformamos el target a </a:t>
-            </a:r>
-            <a:r>
-              <a:rPr kumimoji="0" lang="es-CL" altLang="es-CL" sz="2000" b="0" i="0" u="none" strike="noStrike" cap="none" normalizeH="0" baseline="0" dirty="0" err="1">
-                <a:ln>
-                  <a:noFill/>
-                </a:ln>
-                <a:solidFill>
-                  <a:schemeClr val="accent2">
-                    <a:lumMod val="50000"/>
-                  </a:schemeClr>
-                </a:solidFill>
-                <a:effectLst/>
-                <a:latin typeface="+mj-lt"/>
-              </a:rPr>
-              <a:t>revenue_log</a:t>
-            </a:r>
-            <a:r>
-              <a:rPr kumimoji="0" lang="es-CL" altLang="es-CL" sz="2000" b="0" i="0" u="none" strike="noStrike" cap="none" normalizeH="0" baseline="0" dirty="0">
-                <a:ln>
-                  <a:noFill/>
-                </a:ln>
-                <a:solidFill>
-                  <a:schemeClr val="accent2">
-                    <a:lumMod val="50000"/>
-                  </a:schemeClr>
-                </a:solidFill>
-                <a:effectLst/>
-                <a:latin typeface="+mj-lt"/>
-              </a:rPr>
-              <a:t> = log1p(revenue) para reducir asimetría y el impacto de outliers en una variable monetaria.</a:t>
-            </a:r>
-          </a:p>
-          <a:p>
-            <a:pPr marL="0" marR="0" lvl="0" indent="0" algn="l" defTabSz="914400" rtl="0" eaLnBrk="0" fontAlgn="base" latinLnBrk="0" hangingPunct="0">
-              <a:lnSpc>
-                <a:spcPct val="100000"/>
-              </a:lnSpc>
-              <a:spcBef>
-                <a:spcPct val="0"/>
-              </a:spcBef>
-              <a:spcAft>
-                <a:spcPct val="0"/>
-              </a:spcAft>
-              <a:buClrTx/>
-              <a:buSzTx/>
-              <a:tabLst/>
-            </a:pPr>
-            <a:endParaRPr kumimoji="0" lang="es-CL" altLang="es-CL" sz="2000" b="0" i="0" u="none" strike="noStrike" cap="none" normalizeH="0" baseline="0" dirty="0">
-              <a:ln>
-                <a:noFill/>
-              </a:ln>
-              <a:solidFill>
-                <a:schemeClr val="accent2">
-                  <a:lumMod val="50000"/>
-                </a:schemeClr>
-              </a:solidFill>
-              <a:effectLst/>
-              <a:latin typeface="+mj-lt"/>
-            </a:endParaRPr>
-          </a:p>
-          <a:p>
-            <a:pPr marL="0" marR="0" lvl="0" indent="0" algn="l" defTabSz="914400" rtl="0" eaLnBrk="0" fontAlgn="base" latinLnBrk="0" hangingPunct="0">
-              <a:lnSpc>
-                <a:spcPct val="100000"/>
-              </a:lnSpc>
-              <a:spcBef>
-                <a:spcPct val="0"/>
-              </a:spcBef>
-              <a:spcAft>
-                <a:spcPct val="0"/>
-              </a:spcAft>
-              <a:buClrTx/>
-              <a:buSzTx/>
-              <a:buFontTx/>
-              <a:buChar char="•"/>
-              <a:tabLst/>
-            </a:pPr>
-            <a:r>
-              <a:rPr kumimoji="0" lang="es-CL" altLang="es-CL" sz="2000" b="0" i="0" u="none" strike="noStrike" cap="none" normalizeH="0" baseline="0" dirty="0">
-                <a:ln>
-                  <a:noFill/>
-                </a:ln>
-                <a:solidFill>
-                  <a:schemeClr val="accent2">
-                    <a:lumMod val="50000"/>
-                  </a:schemeClr>
-                </a:solidFill>
-                <a:effectLst/>
-                <a:latin typeface="+mj-lt"/>
-              </a:rPr>
-              <a:t>Elegimos </a:t>
-            </a:r>
-            <a:r>
-              <a:rPr kumimoji="0" lang="es-CL" altLang="es-CL" sz="2000" b="1" i="0" u="none" strike="noStrike" cap="none" normalizeH="0" baseline="0" dirty="0">
-                <a:ln>
-                  <a:noFill/>
-                </a:ln>
-                <a:solidFill>
-                  <a:schemeClr val="accent2">
-                    <a:lumMod val="50000"/>
-                  </a:schemeClr>
-                </a:solidFill>
-                <a:effectLst/>
-                <a:latin typeface="+mj-lt"/>
-              </a:rPr>
-              <a:t>RMSE</a:t>
-            </a:r>
-            <a:r>
-              <a:rPr kumimoji="0" lang="es-CL" altLang="es-CL" sz="2000" b="0" i="0" u="none" strike="noStrike" cap="none" normalizeH="0" baseline="0" dirty="0">
-                <a:ln>
-                  <a:noFill/>
-                </a:ln>
-                <a:solidFill>
-                  <a:schemeClr val="accent2">
-                    <a:lumMod val="50000"/>
-                  </a:schemeClr>
-                </a:solidFill>
-                <a:effectLst/>
-                <a:latin typeface="+mj-lt"/>
-              </a:rPr>
-              <a:t> como métrica principal (sobre </a:t>
-            </a:r>
-            <a:r>
-              <a:rPr kumimoji="0" lang="es-CL" altLang="es-CL" sz="2000" b="0" i="0" u="none" strike="noStrike" cap="none" normalizeH="0" baseline="0" dirty="0" err="1">
-                <a:ln>
-                  <a:noFill/>
-                </a:ln>
-                <a:solidFill>
-                  <a:schemeClr val="accent2">
-                    <a:lumMod val="50000"/>
-                  </a:schemeClr>
-                </a:solidFill>
-                <a:effectLst/>
-                <a:latin typeface="+mj-lt"/>
-              </a:rPr>
-              <a:t>revenue_log</a:t>
-            </a:r>
-            <a:r>
-              <a:rPr kumimoji="0" lang="es-CL" altLang="es-CL" sz="2000" b="0" i="0" u="none" strike="noStrike" cap="none" normalizeH="0" baseline="0" dirty="0">
-                <a:ln>
-                  <a:noFill/>
-                </a:ln>
-                <a:solidFill>
-                  <a:schemeClr val="accent2">
-                    <a:lumMod val="50000"/>
-                  </a:schemeClr>
-                </a:solidFill>
-                <a:effectLst/>
-                <a:latin typeface="+mj-lt"/>
-              </a:rPr>
-              <a:t>) porque penaliza más los errores grandes y permite comparar modelos de forma consistente.</a:t>
-            </a:r>
-          </a:p>
-          <a:p>
-            <a:pPr marL="0" marR="0" lvl="0" indent="0" algn="l" defTabSz="914400" rtl="0" eaLnBrk="0" fontAlgn="base" latinLnBrk="0" hangingPunct="0">
-              <a:lnSpc>
-                <a:spcPct val="100000"/>
-              </a:lnSpc>
-              <a:spcBef>
-                <a:spcPct val="0"/>
-              </a:spcBef>
-              <a:spcAft>
-                <a:spcPct val="0"/>
-              </a:spcAft>
-              <a:buClrTx/>
-              <a:buSzTx/>
-              <a:tabLst/>
-            </a:pPr>
-            <a:endParaRPr kumimoji="0" lang="es-CL" altLang="es-CL" sz="2000" b="0" i="0" u="none" strike="noStrike" cap="none" normalizeH="0" baseline="0" dirty="0">
-              <a:ln>
-                <a:noFill/>
-              </a:ln>
-              <a:solidFill>
-                <a:schemeClr val="accent2">
-                  <a:lumMod val="50000"/>
-                </a:schemeClr>
-              </a:solidFill>
-              <a:effectLst/>
-              <a:latin typeface="+mj-lt"/>
-            </a:endParaRPr>
-          </a:p>
-          <a:p>
-            <a:pPr marL="0" marR="0" lvl="0" indent="0" algn="l" defTabSz="914400" rtl="0" eaLnBrk="0" fontAlgn="base" latinLnBrk="0" hangingPunct="0">
-              <a:lnSpc>
-                <a:spcPct val="100000"/>
-              </a:lnSpc>
-              <a:spcBef>
-                <a:spcPct val="0"/>
-              </a:spcBef>
-              <a:spcAft>
-                <a:spcPct val="0"/>
-              </a:spcAft>
-              <a:buClrTx/>
-              <a:buSzTx/>
-              <a:buFontTx/>
-              <a:buChar char="•"/>
-              <a:tabLst/>
-            </a:pPr>
-            <a:r>
-              <a:rPr kumimoji="0" lang="es-CL" altLang="es-CL" sz="2000" b="0" i="0" u="none" strike="noStrike" cap="none" normalizeH="0" baseline="0" dirty="0">
-                <a:ln>
-                  <a:noFill/>
-                </a:ln>
-                <a:solidFill>
-                  <a:schemeClr val="accent2">
-                    <a:lumMod val="50000"/>
-                  </a:schemeClr>
-                </a:solidFill>
-                <a:effectLst/>
-                <a:latin typeface="+mj-lt"/>
-              </a:rPr>
-              <a:t>Para interpretar resultados en euros, deshacemos la transformación al evaluar: revenue = expm1(</a:t>
-            </a:r>
-            <a:r>
-              <a:rPr kumimoji="0" lang="es-CL" altLang="es-CL" sz="2000" b="0" i="0" u="none" strike="noStrike" cap="none" normalizeH="0" baseline="0" dirty="0" err="1">
-                <a:ln>
-                  <a:noFill/>
-                </a:ln>
-                <a:solidFill>
-                  <a:schemeClr val="accent2">
-                    <a:lumMod val="50000"/>
-                  </a:schemeClr>
-                </a:solidFill>
-                <a:effectLst/>
-                <a:latin typeface="+mj-lt"/>
-              </a:rPr>
-              <a:t>revenue_log</a:t>
-            </a:r>
-            <a:r>
-              <a:rPr kumimoji="0" lang="es-CL" altLang="es-CL" sz="2000" b="0" i="0" u="none" strike="noStrike" cap="none" normalizeH="0" baseline="0" dirty="0">
-                <a:ln>
-                  <a:noFill/>
-                </a:ln>
-                <a:solidFill>
-                  <a:schemeClr val="accent2">
-                    <a:lumMod val="50000"/>
-                  </a:schemeClr>
-                </a:solidFill>
-                <a:effectLst/>
-                <a:latin typeface="+mj-lt"/>
-              </a:rPr>
-              <a:t>).</a:t>
-            </a:r>
-          </a:p>
-          <a:p>
-            <a:pPr marL="0" marR="0" lvl="0" indent="0" algn="l" defTabSz="914400" rtl="0" eaLnBrk="0" fontAlgn="base" latinLnBrk="0" hangingPunct="0">
-              <a:lnSpc>
-                <a:spcPct val="100000"/>
-              </a:lnSpc>
-              <a:spcBef>
-                <a:spcPct val="0"/>
-              </a:spcBef>
-              <a:spcAft>
-                <a:spcPct val="0"/>
-              </a:spcAft>
-              <a:buClrTx/>
-              <a:buSzTx/>
-              <a:tabLst/>
-            </a:pPr>
-            <a:endParaRPr kumimoji="0" lang="es-CL" altLang="es-CL" sz="2000" b="0" i="0" u="none" strike="noStrike" cap="none" normalizeH="0" baseline="0" dirty="0">
-              <a:ln>
-                <a:noFill/>
-              </a:ln>
-              <a:solidFill>
-                <a:schemeClr val="accent2">
-                  <a:lumMod val="50000"/>
-                </a:schemeClr>
-              </a:solidFill>
-              <a:effectLst/>
-              <a:latin typeface="+mj-lt"/>
-            </a:endParaRPr>
-          </a:p>
-          <a:p>
-            <a:pPr marL="0" marR="0" lvl="0" indent="0" algn="l" defTabSz="914400" rtl="0" eaLnBrk="0" fontAlgn="base" latinLnBrk="0" hangingPunct="0">
-              <a:lnSpc>
-                <a:spcPct val="100000"/>
-              </a:lnSpc>
-              <a:spcBef>
-                <a:spcPct val="0"/>
-              </a:spcBef>
-              <a:spcAft>
-                <a:spcPct val="0"/>
-              </a:spcAft>
-              <a:buClrTx/>
-              <a:buSzTx/>
-              <a:buFontTx/>
-              <a:buChar char="•"/>
-              <a:tabLst/>
-            </a:pPr>
-            <a:r>
-              <a:rPr kumimoji="0" lang="es-CL" altLang="es-CL" sz="2000" b="0" i="0" u="none" strike="noStrike" cap="none" normalizeH="0" baseline="0" dirty="0">
-                <a:ln>
-                  <a:noFill/>
-                </a:ln>
-                <a:solidFill>
-                  <a:schemeClr val="accent2">
-                    <a:lumMod val="50000"/>
-                  </a:schemeClr>
-                </a:solidFill>
-                <a:effectLst/>
-                <a:latin typeface="+mj-lt"/>
-              </a:rPr>
-              <a:t>Establecimos un único protocolo de evaluación con </a:t>
-            </a:r>
-            <a:r>
-              <a:rPr kumimoji="0" lang="es-CL" altLang="es-CL" sz="2000" b="1" i="0" u="none" strike="noStrike" cap="none" normalizeH="0" baseline="0" dirty="0">
-                <a:ln>
-                  <a:noFill/>
-                </a:ln>
-                <a:solidFill>
-                  <a:schemeClr val="accent2">
-                    <a:lumMod val="50000"/>
-                  </a:schemeClr>
-                </a:solidFill>
-                <a:effectLst/>
-                <a:latin typeface="+mj-lt"/>
-              </a:rPr>
-              <a:t>K-</a:t>
-            </a:r>
-            <a:r>
-              <a:rPr kumimoji="0" lang="es-CL" altLang="es-CL" sz="2000" b="1" i="0" u="none" strike="noStrike" cap="none" normalizeH="0" baseline="0" dirty="0" err="1">
-                <a:ln>
-                  <a:noFill/>
-                </a:ln>
-                <a:solidFill>
-                  <a:schemeClr val="accent2">
-                    <a:lumMod val="50000"/>
-                  </a:schemeClr>
-                </a:solidFill>
-                <a:effectLst/>
-                <a:latin typeface="+mj-lt"/>
-              </a:rPr>
-              <a:t>Fold</a:t>
-            </a:r>
-            <a:r>
-              <a:rPr kumimoji="0" lang="es-CL" altLang="es-CL" sz="2000" b="1" i="0" u="none" strike="noStrike" cap="none" normalizeH="0" baseline="0" dirty="0">
-                <a:ln>
-                  <a:noFill/>
-                </a:ln>
-                <a:solidFill>
-                  <a:schemeClr val="accent2">
-                    <a:lumMod val="50000"/>
-                  </a:schemeClr>
-                </a:solidFill>
-                <a:effectLst/>
-                <a:latin typeface="+mj-lt"/>
-              </a:rPr>
-              <a:t> Cross-Validation (k=5)</a:t>
-            </a:r>
-            <a:r>
-              <a:rPr kumimoji="0" lang="es-CL" altLang="es-CL" sz="2000" b="0" i="0" u="none" strike="noStrike" cap="none" normalizeH="0" baseline="0" dirty="0">
-                <a:ln>
-                  <a:noFill/>
-                </a:ln>
-                <a:solidFill>
-                  <a:schemeClr val="accent2">
-                    <a:lumMod val="50000"/>
-                  </a:schemeClr>
-                </a:solidFill>
-                <a:effectLst/>
-                <a:latin typeface="+mj-lt"/>
-              </a:rPr>
-              <a:t>, usando shuffle=True y random_state= 42 para reproducibilidad.</a:t>
-            </a:r>
-          </a:p>
-          <a:p>
-            <a:pPr marL="0" marR="0" lvl="0" indent="0" algn="l" defTabSz="914400" rtl="0" eaLnBrk="0" fontAlgn="base" latinLnBrk="0" hangingPunct="0">
-              <a:lnSpc>
-                <a:spcPct val="100000"/>
-              </a:lnSpc>
-              <a:spcBef>
-                <a:spcPct val="0"/>
-              </a:spcBef>
-              <a:spcAft>
-                <a:spcPct val="0"/>
-              </a:spcAft>
-              <a:buClrTx/>
-              <a:buSzTx/>
-              <a:tabLst/>
-            </a:pPr>
-            <a:endParaRPr kumimoji="0" lang="es-CL" altLang="es-CL" sz="2000" b="0" i="0" u="none" strike="noStrike" cap="none" normalizeH="0" baseline="0" dirty="0">
-              <a:ln>
-                <a:noFill/>
-              </a:ln>
-              <a:solidFill>
-                <a:schemeClr val="accent2">
-                  <a:lumMod val="50000"/>
-                </a:schemeClr>
-              </a:solidFill>
-              <a:effectLst/>
-              <a:latin typeface="+mj-lt"/>
-            </a:endParaRPr>
-          </a:p>
-          <a:p>
-            <a:pPr marL="0" marR="0" lvl="0" indent="0" algn="l" defTabSz="914400" rtl="0" eaLnBrk="0" fontAlgn="base" latinLnBrk="0" hangingPunct="0">
-              <a:lnSpc>
-                <a:spcPct val="100000"/>
-              </a:lnSpc>
-              <a:spcBef>
-                <a:spcPct val="0"/>
-              </a:spcBef>
-              <a:spcAft>
-                <a:spcPct val="0"/>
-              </a:spcAft>
-              <a:buClrTx/>
-              <a:buSzTx/>
-              <a:buFontTx/>
-              <a:buChar char="•"/>
-              <a:tabLst/>
-            </a:pPr>
-            <a:r>
-              <a:rPr kumimoji="0" lang="es-CL" altLang="es-CL" sz="2000" b="0" i="0" u="none" strike="noStrike" cap="none" normalizeH="0" baseline="0" dirty="0">
-                <a:ln>
-                  <a:noFill/>
-                </a:ln>
-                <a:solidFill>
-                  <a:schemeClr val="accent2">
-                    <a:lumMod val="50000"/>
-                  </a:schemeClr>
-                </a:solidFill>
-                <a:effectLst/>
-                <a:latin typeface="+mj-lt"/>
-              </a:rPr>
-              <a:t>Regla clave: todos los modelos se evalúan con </a:t>
-            </a:r>
-            <a:r>
-              <a:rPr kumimoji="0" lang="es-CL" altLang="es-CL" sz="2000" b="1" i="0" u="none" strike="noStrike" cap="none" normalizeH="0" baseline="0" dirty="0">
-                <a:ln>
-                  <a:noFill/>
-                </a:ln>
-                <a:solidFill>
-                  <a:schemeClr val="accent2">
-                    <a:lumMod val="50000"/>
-                  </a:schemeClr>
-                </a:solidFill>
-                <a:effectLst/>
-                <a:latin typeface="+mj-lt"/>
-              </a:rPr>
-              <a:t>la misma CV y la misma métrica</a:t>
-            </a:r>
-            <a:r>
-              <a:rPr kumimoji="0" lang="es-CL" altLang="es-CL" sz="2000" b="0" i="0" u="none" strike="noStrike" cap="none" normalizeH="0" baseline="0" dirty="0">
-                <a:ln>
-                  <a:noFill/>
-                </a:ln>
-                <a:solidFill>
-                  <a:schemeClr val="accent2">
-                    <a:lumMod val="50000"/>
-                  </a:schemeClr>
-                </a:solidFill>
-                <a:effectLst/>
-                <a:latin typeface="+mj-lt"/>
-              </a:rPr>
-              <a:t>, evitando comparaciones sesgadas.</a:t>
-            </a:r>
-          </a:p>
-        </p:txBody>
-      </p:sp>
-      <p:pic>
-        <p:nvPicPr>
-          <p:cNvPr id="7" name="Imagen 28">
-            <a:hlinkClick r:id="rId2" action="ppaction://hlinksldjump"/>
-            <a:extLst>
-              <a:ext uri="{FF2B5EF4-FFF2-40B4-BE49-F238E27FC236}">
-                <a16:creationId xmlns:a16="http://schemas.microsoft.com/office/drawing/2014/main" id="{79563867-AB1B-5C56-6DFA-397F157D8854}"/>
-              </a:ext>
-            </a:extLst>
-          </p:cNvPr>
-          <p:cNvPicPr/>
-          <p:nvPr/>
-        </p:nvPicPr>
-        <p:blipFill>
-          <a:blip r:embed="rId3"/>
-          <a:stretch/>
-        </p:blipFill>
-        <p:spPr>
-          <a:xfrm>
-            <a:off x="10294560" y="242092"/>
-            <a:ext cx="1368360" cy="1316160"/>
-          </a:xfrm>
-          <a:prstGeom prst="rect">
-            <a:avLst/>
-          </a:prstGeom>
-          <a:ln w="0">
-            <a:noFill/>
-          </a:ln>
-        </p:spPr>
-      </p:pic>
-    </p:spTree>
-  </p:cSld>
-  <p:clrMapOvr>
-    <a:masterClrMapping/>
-  </p:clrMapOvr>
-</p:sld>
-</file>
-
-<file path=ppt/slides/slide6.xml><?xml version="1.0" encoding="utf-8"?>
-<p:sld xmlns:a="http://schemas.openxmlformats.org/drawingml/2006/main" xmlns:r="http://schemas.openxmlformats.org/officeDocument/2006/relationships" xmlns:p="http://schemas.openxmlformats.org/presentationml/2006/main">
-  <p:cSld>
-    <p:spTree>
-      <p:nvGrpSpPr>
-        <p:cNvPr id="1" name="">
-          <a:extLst>
-            <a:ext uri="{FF2B5EF4-FFF2-40B4-BE49-F238E27FC236}">
-              <a16:creationId xmlns:a16="http://schemas.microsoft.com/office/drawing/2014/main" id="{D04D9308-8FED-78CC-795C-C73711E967AE}"/>
-            </a:ext>
-          </a:extLst>
-        </p:cNvPr>
-        <p:cNvGrpSpPr/>
-        <p:nvPr/>
-      </p:nvGrpSpPr>
-      <p:grpSpPr>
-        <a:xfrm>
-          <a:off x="0" y="0"/>
-          <a:ext cx="0" cy="0"/>
-          <a:chOff x="0" y="0"/>
-          <a:chExt cx="0" cy="0"/>
-        </a:xfrm>
-      </p:grpSpPr>
-      <p:sp>
-        <p:nvSpPr>
-          <p:cNvPr id="65" name="Rectángulo 5">
-            <a:extLst>
-              <a:ext uri="{FF2B5EF4-FFF2-40B4-BE49-F238E27FC236}">
-                <a16:creationId xmlns:a16="http://schemas.microsoft.com/office/drawing/2014/main" id="{E3F3403C-0898-DF37-8E0A-3CB66ED5BE76}"/>
-              </a:ext>
-            </a:extLst>
-          </p:cNvPr>
-          <p:cNvSpPr/>
-          <p:nvPr/>
-        </p:nvSpPr>
-        <p:spPr>
-          <a:xfrm>
-            <a:off x="-180" y="1080"/>
-            <a:ext cx="12191040" cy="6856920"/>
-          </a:xfrm>
-          <a:prstGeom prst="rect">
-            <a:avLst/>
-          </a:prstGeom>
-          <a:solidFill>
-            <a:schemeClr val="accent2">
-              <a:lumMod val="20000"/>
-              <a:lumOff val="80000"/>
-            </a:schemeClr>
-          </a:solidFill>
-          <a:ln>
-            <a:solidFill>
-              <a:srgbClr val="325490"/>
-            </a:solidFill>
-          </a:ln>
-        </p:spPr>
-        <p:style>
-          <a:lnRef idx="2">
-            <a:schemeClr val="accent1">
-              <a:shade val="50000"/>
-            </a:schemeClr>
-          </a:lnRef>
-          <a:fillRef idx="1">
-            <a:schemeClr val="accent1"/>
-          </a:fillRef>
-          <a:effectRef idx="0">
-            <a:schemeClr val="accent1"/>
-          </a:effectRef>
-          <a:fontRef idx="minor"/>
-        </p:style>
-        <p:txBody>
-          <a:bodyPr lIns="90000" tIns="45000" rIns="90000" bIns="45000" anchor="ctr">
-            <a:noAutofit/>
-          </a:bodyPr>
-          <a:lstStyle/>
-          <a:p>
-            <a:pPr algn="ctr" defTabSz="914400">
-              <a:lnSpc>
-                <a:spcPct val="100000"/>
-              </a:lnSpc>
-            </a:pPr>
-            <a:endParaRPr lang="es-ES" sz="1800" b="0" strike="noStrike" spc="-1" dirty="0">
-              <a:solidFill>
-                <a:schemeClr val="lt1"/>
-              </a:solidFill>
-              <a:latin typeface="Calibri"/>
-            </a:endParaRPr>
-          </a:p>
-        </p:txBody>
-      </p:sp>
-      <p:sp>
-        <p:nvSpPr>
-          <p:cNvPr id="66" name="CuadroTexto 7">
-            <a:extLst>
-              <a:ext uri="{FF2B5EF4-FFF2-40B4-BE49-F238E27FC236}">
-                <a16:creationId xmlns:a16="http://schemas.microsoft.com/office/drawing/2014/main" id="{4A8F80E1-C4AD-C455-ACA7-7A77C7151180}"/>
-              </a:ext>
-            </a:extLst>
-          </p:cNvPr>
-          <p:cNvSpPr/>
-          <p:nvPr/>
-        </p:nvSpPr>
-        <p:spPr>
-          <a:xfrm>
-            <a:off x="527760" y="479520"/>
-            <a:ext cx="11135160" cy="644877"/>
-          </a:xfrm>
-          <a:prstGeom prst="rect">
-            <a:avLst/>
-          </a:prstGeom>
-          <a:noFill/>
-          <a:ln w="0">
-            <a:noFill/>
-          </a:ln>
-        </p:spPr>
-        <p:style>
-          <a:lnRef idx="0">
-            <a:scrgbClr r="0" g="0" b="0"/>
-          </a:lnRef>
-          <a:fillRef idx="0">
-            <a:scrgbClr r="0" g="0" b="0"/>
-          </a:fillRef>
-          <a:effectRef idx="0">
-            <a:scrgbClr r="0" g="0" b="0"/>
-          </a:effectRef>
-          <a:fontRef idx="minor"/>
-        </p:style>
-        <p:txBody>
-          <a:bodyPr lIns="90000" tIns="45000" rIns="90000" bIns="45000" anchor="t">
-            <a:spAutoFit/>
-          </a:bodyPr>
-          <a:lstStyle/>
-          <a:p>
-            <a:r>
-              <a:rPr lang="es-ES" sz="3500" b="1" spc="-1" dirty="0">
-                <a:solidFill>
-                  <a:schemeClr val="accent2">
-                    <a:lumMod val="50000"/>
-                  </a:schemeClr>
-                </a:solidFill>
-                <a:latin typeface="+mj-lt"/>
-              </a:rPr>
-              <a:t>Modelado y resultados </a:t>
-            </a:r>
-            <a:r>
-              <a:rPr lang="es-ES" sz="2500" spc="-1" dirty="0">
-                <a:solidFill>
-                  <a:schemeClr val="accent2">
-                    <a:lumMod val="50000"/>
-                  </a:schemeClr>
-                </a:solidFill>
-              </a:rPr>
-              <a:t>(Código/Baselines)</a:t>
-            </a:r>
-            <a:endParaRPr lang="es-ES" sz="2500" spc="-1" dirty="0">
-              <a:solidFill>
-                <a:schemeClr val="accent2">
-                  <a:lumMod val="50000"/>
-                </a:schemeClr>
-              </a:solidFill>
-              <a:latin typeface="+mj-lt"/>
-            </a:endParaRPr>
-          </a:p>
-        </p:txBody>
-      </p:sp>
-      <p:pic>
-        <p:nvPicPr>
-          <p:cNvPr id="9" name="Imagen 8">
-            <a:extLst>
-              <a:ext uri="{FF2B5EF4-FFF2-40B4-BE49-F238E27FC236}">
-                <a16:creationId xmlns:a16="http://schemas.microsoft.com/office/drawing/2014/main" id="{B064AFE3-85B3-17B3-E0BB-40B45DDAAC28}"/>
-              </a:ext>
-            </a:extLst>
-          </p:cNvPr>
-          <p:cNvPicPr>
-            <a:picLocks noChangeAspect="1"/>
-          </p:cNvPicPr>
-          <p:nvPr/>
-        </p:nvPicPr>
-        <p:blipFill>
-          <a:blip r:embed="rId2"/>
-          <a:stretch>
-            <a:fillRect/>
-          </a:stretch>
-        </p:blipFill>
-        <p:spPr>
-          <a:xfrm>
-            <a:off x="322569" y="1178848"/>
-            <a:ext cx="6379789" cy="5199632"/>
-          </a:xfrm>
-          <a:prstGeom prst="rect">
-            <a:avLst/>
-          </a:prstGeom>
-        </p:spPr>
-      </p:pic>
-      <p:pic>
-        <p:nvPicPr>
-          <p:cNvPr id="11" name="Imagen 10">
-            <a:extLst>
-              <a:ext uri="{FF2B5EF4-FFF2-40B4-BE49-F238E27FC236}">
-                <a16:creationId xmlns:a16="http://schemas.microsoft.com/office/drawing/2014/main" id="{0C91C020-F91E-B7DB-E38E-692A91AED81E}"/>
-              </a:ext>
-            </a:extLst>
-          </p:cNvPr>
-          <p:cNvPicPr>
-            <a:picLocks noChangeAspect="1"/>
-          </p:cNvPicPr>
-          <p:nvPr/>
-        </p:nvPicPr>
-        <p:blipFill>
-          <a:blip r:embed="rId3"/>
-          <a:stretch>
-            <a:fillRect/>
-          </a:stretch>
-        </p:blipFill>
-        <p:spPr>
-          <a:xfrm>
-            <a:off x="6931996" y="1178848"/>
-            <a:ext cx="3556179" cy="3118713"/>
-          </a:xfrm>
-          <a:prstGeom prst="rect">
-            <a:avLst/>
-          </a:prstGeom>
-        </p:spPr>
-      </p:pic>
-      <p:pic>
-        <p:nvPicPr>
-          <p:cNvPr id="13" name="Imagen 12">
-            <a:extLst>
-              <a:ext uri="{FF2B5EF4-FFF2-40B4-BE49-F238E27FC236}">
-                <a16:creationId xmlns:a16="http://schemas.microsoft.com/office/drawing/2014/main" id="{DE6A9D79-7F64-0582-1BE4-9B1C18070686}"/>
-              </a:ext>
-            </a:extLst>
-          </p:cNvPr>
-          <p:cNvPicPr>
-            <a:picLocks noChangeAspect="1"/>
-          </p:cNvPicPr>
-          <p:nvPr/>
-        </p:nvPicPr>
-        <p:blipFill>
-          <a:blip r:embed="rId4"/>
-          <a:stretch>
-            <a:fillRect/>
-          </a:stretch>
-        </p:blipFill>
-        <p:spPr>
-          <a:xfrm>
-            <a:off x="6806860" y="4352012"/>
-            <a:ext cx="5279497" cy="2221300"/>
-          </a:xfrm>
-          <a:prstGeom prst="rect">
-            <a:avLst/>
-          </a:prstGeom>
-        </p:spPr>
-      </p:pic>
-      <p:pic>
-        <p:nvPicPr>
-          <p:cNvPr id="14" name="Imagen 28">
-            <a:hlinkClick r:id="rId5" action="ppaction://hlinksldjump"/>
-            <a:extLst>
-              <a:ext uri="{FF2B5EF4-FFF2-40B4-BE49-F238E27FC236}">
-                <a16:creationId xmlns:a16="http://schemas.microsoft.com/office/drawing/2014/main" id="{C696DD92-F277-9756-BA09-D6FA55EAF475}"/>
-              </a:ext>
-            </a:extLst>
-          </p:cNvPr>
-          <p:cNvPicPr/>
-          <p:nvPr/>
-        </p:nvPicPr>
-        <p:blipFill>
-          <a:blip r:embed="rId6"/>
-          <a:stretch/>
-        </p:blipFill>
-        <p:spPr>
-          <a:xfrm>
-            <a:off x="10558530" y="143878"/>
-            <a:ext cx="1368360" cy="1316160"/>
-          </a:xfrm>
-          <a:prstGeom prst="rect">
-            <a:avLst/>
-          </a:prstGeom>
-          <a:ln w="0">
-            <a:noFill/>
-          </a:ln>
-        </p:spPr>
-      </p:pic>
-    </p:spTree>
-    <p:extLst>
-      <p:ext uri="{BB962C8B-B14F-4D97-AF65-F5344CB8AC3E}">
-        <p14:creationId xmlns:p14="http://schemas.microsoft.com/office/powerpoint/2010/main" val="2978231915"/>
-      </p:ext>
-    </p:extLst>
-  </p:cSld>
-  <p:clrMapOvr>
-    <a:masterClrMapping/>
-  </p:clrMapOvr>
-</p:sld>
-</file>
-
-<file path=ppt/slides/slide7.xml><?xml version="1.0" encoding="utf-8"?>
-<p:sld xmlns:a="http://schemas.openxmlformats.org/drawingml/2006/main" xmlns:r="http://schemas.openxmlformats.org/officeDocument/2006/relationships" xmlns:p="http://schemas.openxmlformats.org/presentationml/2006/main">
-  <p:cSld>
-    <p:spTree>
-      <p:nvGrpSpPr>
-        <p:cNvPr id="1" name="">
-          <a:extLst>
-            <a:ext uri="{FF2B5EF4-FFF2-40B4-BE49-F238E27FC236}">
-              <a16:creationId xmlns:a16="http://schemas.microsoft.com/office/drawing/2014/main" id="{DA62F821-4221-8CE2-3E79-8711C2084C04}"/>
-            </a:ext>
-          </a:extLst>
-        </p:cNvPr>
-        <p:cNvGrpSpPr/>
-        <p:nvPr/>
-      </p:nvGrpSpPr>
-      <p:grpSpPr>
-        <a:xfrm>
-          <a:off x="0" y="0"/>
-          <a:ext cx="0" cy="0"/>
-          <a:chOff x="0" y="0"/>
-          <a:chExt cx="0" cy="0"/>
-        </a:xfrm>
-      </p:grpSpPr>
-      <p:sp>
-        <p:nvSpPr>
-          <p:cNvPr id="77" name="Rectángulo 5">
-            <a:extLst>
-              <a:ext uri="{FF2B5EF4-FFF2-40B4-BE49-F238E27FC236}">
-                <a16:creationId xmlns:a16="http://schemas.microsoft.com/office/drawing/2014/main" id="{E96F509D-89D5-7270-4088-76C259A3ADBB}"/>
-              </a:ext>
-            </a:extLst>
-          </p:cNvPr>
-          <p:cNvSpPr/>
-          <p:nvPr/>
-        </p:nvSpPr>
-        <p:spPr>
-          <a:xfrm>
-            <a:off x="960" y="0"/>
-            <a:ext cx="12191040" cy="6856920"/>
-          </a:xfrm>
-          <a:prstGeom prst="rect">
-            <a:avLst/>
-          </a:prstGeom>
-          <a:solidFill>
-            <a:schemeClr val="accent2">
-              <a:lumMod val="20000"/>
-              <a:lumOff val="80000"/>
-            </a:schemeClr>
-          </a:solidFill>
-          <a:ln>
-            <a:solidFill>
-              <a:srgbClr val="325490"/>
-            </a:solidFill>
-          </a:ln>
-        </p:spPr>
-        <p:style>
-          <a:lnRef idx="2">
-            <a:schemeClr val="accent1">
-              <a:shade val="50000"/>
-            </a:schemeClr>
-          </a:lnRef>
-          <a:fillRef idx="1">
-            <a:schemeClr val="accent1"/>
-          </a:fillRef>
-          <a:effectRef idx="0">
-            <a:schemeClr val="accent1"/>
-          </a:effectRef>
-          <a:fontRef idx="minor"/>
-        </p:style>
-        <p:txBody>
-          <a:bodyPr lIns="90000" tIns="45000" rIns="90000" bIns="45000" anchor="ctr">
-            <a:noAutofit/>
-          </a:bodyPr>
-          <a:lstStyle/>
-          <a:p>
-            <a:pPr algn="ctr" defTabSz="914400">
-              <a:lnSpc>
-                <a:spcPct val="100000"/>
-              </a:lnSpc>
-            </a:pPr>
-            <a:endParaRPr lang="es-ES" sz="1800" b="0" strike="noStrike" spc="-1">
-              <a:solidFill>
-                <a:schemeClr val="lt1"/>
-              </a:solidFill>
-              <a:latin typeface="Calibri"/>
-            </a:endParaRPr>
-          </a:p>
-        </p:txBody>
-      </p:sp>
-      <p:sp>
-        <p:nvSpPr>
-          <p:cNvPr id="78" name="CuadroTexto 7">
-            <a:extLst>
-              <a:ext uri="{FF2B5EF4-FFF2-40B4-BE49-F238E27FC236}">
-                <a16:creationId xmlns:a16="http://schemas.microsoft.com/office/drawing/2014/main" id="{DBF75072-AE1B-E16F-DAC5-BEC7F61FC2F7}"/>
+                <a16:creationId xmlns:a16="http://schemas.microsoft.com/office/drawing/2014/main" id="{0011FD49-7372-4358-527D-C74CEDFEC7DF}"/>
               </a:ext>
             </a:extLst>
           </p:cNvPr>
@@ -11082,32 +12229,234 @@
           </a:bodyPr>
           <a:lstStyle/>
           <a:p>
-            <a:r>
-              <a:rPr lang="es-ES" sz="3500" b="1" spc="-1" dirty="0">
-                <a:solidFill>
-                  <a:schemeClr val="accent2">
-                    <a:lumMod val="50000"/>
-                  </a:schemeClr>
-                </a:solidFill>
-                <a:latin typeface="+mj-lt"/>
-              </a:rPr>
-              <a:t>Modelado y resultados</a:t>
-            </a:r>
-            <a:endParaRPr lang="es-ES" sz="3500" b="1" strike="noStrike" spc="-1" dirty="0">
+            <a:pPr defTabSz="914400">
+              <a:lnSpc>
+                <a:spcPct val="100000"/>
+              </a:lnSpc>
+            </a:pPr>
+            <a:r>
+              <a:rPr lang="es-ES" sz="3500" b="1" strike="noStrike" spc="-1" dirty="0">
+                <a:solidFill>
+                  <a:srgbClr val="582808"/>
+                </a:solidFill>
+                <a:latin typeface="Calibri Light"/>
+              </a:rPr>
+              <a:t>EDA – Análisis de las variables numéricas</a:t>
+            </a:r>
+            <a:endParaRPr lang="es-ES" sz="3500" b="0" strike="noStrike" spc="-1" dirty="0">
               <a:solidFill>
                 <a:srgbClr val="000000"/>
               </a:solidFill>
-              <a:latin typeface="+mj-lt"/>
+              <a:latin typeface="Arial"/>
             </a:endParaRPr>
           </a:p>
         </p:txBody>
       </p:sp>
+      <p:pic>
+        <p:nvPicPr>
+          <p:cNvPr id="72" name="Imagen 7">
+            <a:extLst>
+              <a:ext uri="{FF2B5EF4-FFF2-40B4-BE49-F238E27FC236}">
+                <a16:creationId xmlns:a16="http://schemas.microsoft.com/office/drawing/2014/main" id="{5A103033-EDD0-51E7-F3C1-1C8A8BFC6BD7}"/>
+              </a:ext>
+            </a:extLst>
+          </p:cNvPr>
+          <p:cNvPicPr/>
+          <p:nvPr/>
+        </p:nvPicPr>
+        <p:blipFill>
+          <a:blip r:embed="rId2"/>
+          <a:stretch/>
+        </p:blipFill>
+        <p:spPr>
+          <a:xfrm>
+            <a:off x="10348920" y="479520"/>
+            <a:ext cx="1314000" cy="987840"/>
+          </a:xfrm>
+          <a:prstGeom prst="rect">
+            <a:avLst/>
+          </a:prstGeom>
+          <a:ln w="0">
+            <a:noFill/>
+          </a:ln>
+        </p:spPr>
+      </p:pic>
       <p:sp>
         <p:nvSpPr>
-          <p:cNvPr id="80" name="CuadroTexto 1">
+          <p:cNvPr id="2" name="CuadroTexto 1">
             <a:extLst>
               <a:ext uri="{FF2B5EF4-FFF2-40B4-BE49-F238E27FC236}">
-                <a16:creationId xmlns:a16="http://schemas.microsoft.com/office/drawing/2014/main" id="{6A1C6BDC-BC2D-1A12-3B61-E1A0C6BA88DE}"/>
+                <a16:creationId xmlns:a16="http://schemas.microsoft.com/office/drawing/2014/main" id="{F483EA42-63B1-D505-B0D9-15C7AD4183DB}"/>
+              </a:ext>
+            </a:extLst>
+          </p:cNvPr>
+          <p:cNvSpPr txBox="1"/>
+          <p:nvPr/>
+        </p:nvSpPr>
+        <p:spPr>
+          <a:xfrm>
+            <a:off x="527760" y="1371600"/>
+            <a:ext cx="11135160" cy="4278094"/>
+          </a:xfrm>
+          <a:prstGeom prst="rect">
+            <a:avLst/>
+          </a:prstGeom>
+          <a:noFill/>
+        </p:spPr>
+        <p:txBody>
+          <a:bodyPr wrap="square" rtlCol="0">
+            <a:spAutoFit/>
+          </a:bodyPr>
+          <a:lstStyle/>
+          <a:p>
+            <a:r>
+              <a:rPr lang="es-ES" sz="1600" dirty="0"/>
+              <a:t>Durante el análisis univariante se observa que muchas de las variables numéricas presentan una fuerte asimetría, con distribuciones sesgadas hacia la derecha y presencia de valores extremos. Esto sugiere la necesidad de un tratamiento posterior de </a:t>
+            </a:r>
+            <a:r>
+              <a:rPr lang="es-ES" sz="1600" dirty="0" err="1"/>
+              <a:t>outliers</a:t>
+            </a:r>
+            <a:r>
+              <a:rPr lang="es-ES" sz="1600" dirty="0"/>
+              <a:t> y posibles transformaciones.</a:t>
+            </a:r>
+          </a:p>
+          <a:p>
+            <a:endParaRPr lang="es-ES" sz="1600" dirty="0"/>
+          </a:p>
+          <a:p>
+            <a:r>
+              <a:rPr lang="es-ES" sz="1600" dirty="0"/>
+              <a:t>Se identifican variables potencialmente redundantes, especialmente dentro de los bloques de disponibilidad (</a:t>
+            </a:r>
+            <a:r>
+              <a:rPr lang="es-ES" sz="1600" b="1" dirty="0"/>
+              <a:t>availability_30, availability_60, availability_90, availability_365, </a:t>
+            </a:r>
+            <a:r>
+              <a:rPr lang="es-ES" sz="1600" b="1" dirty="0" err="1"/>
+              <a:t>availability_eoy</a:t>
+            </a:r>
+            <a:r>
+              <a:rPr lang="es-ES" sz="1600" dirty="0"/>
+              <a:t>) y de restricciones de estancia (</a:t>
+            </a:r>
+            <a:r>
+              <a:rPr lang="es-ES" sz="1600" b="1" dirty="0" err="1"/>
+              <a:t>minimum_nights</a:t>
+            </a:r>
+            <a:r>
+              <a:rPr lang="es-ES" sz="1600" b="1" dirty="0"/>
+              <a:t>, </a:t>
+            </a:r>
+            <a:r>
+              <a:rPr lang="es-ES" sz="1600" b="1" dirty="0" err="1"/>
+              <a:t>maximum_nights</a:t>
+            </a:r>
+            <a:r>
+              <a:rPr lang="es-ES" sz="1600" b="1" dirty="0"/>
+              <a:t> y sus derivados como </a:t>
+            </a:r>
+            <a:r>
+              <a:rPr lang="es-ES" sz="1600" b="1" dirty="0" err="1"/>
+              <a:t>minimum_minimum_nights</a:t>
+            </a:r>
+            <a:r>
+              <a:rPr lang="es-ES" sz="1600" b="1" dirty="0"/>
+              <a:t>, </a:t>
+            </a:r>
+            <a:r>
+              <a:rPr lang="es-ES" sz="1600" b="1" dirty="0" err="1"/>
+              <a:t>maximum_maximum_nights</a:t>
+            </a:r>
+            <a:r>
+              <a:rPr lang="es-ES" sz="1600" dirty="0"/>
+              <a:t>, etc.). Estas variables miden conceptos muy similares en distintos horizontes temporales o como agregaciones estadísticas, por lo que es esperable que presenten una alta correlación entre sí. Esto puede generar multicolinealidad en modelos lineales, por lo que posteriormente se evaluará la conveniencia de seleccionar únicamente las variables más representativas de cada bloque.</a:t>
+            </a:r>
+          </a:p>
+          <a:p>
+            <a:endParaRPr lang="es-ES" sz="1600" dirty="0"/>
+          </a:p>
+          <a:p>
+            <a:r>
+              <a:rPr lang="es-ES" sz="1600" dirty="0"/>
+              <a:t>Asimismo, se detectan variables que actúan como identificadores (por ejemplo, </a:t>
+            </a:r>
+            <a:r>
+              <a:rPr lang="es-ES" sz="1600" b="1" dirty="0" err="1"/>
+              <a:t>host_id</a:t>
+            </a:r>
+            <a:r>
+              <a:rPr lang="es-ES" sz="1600" dirty="0"/>
+              <a:t>), las cuales no aportan información predictiva real y deben ser eliminadas del modelado.</a:t>
+            </a:r>
+          </a:p>
+          <a:p>
+            <a:endParaRPr lang="es-ES" sz="1600" dirty="0"/>
+          </a:p>
+          <a:p>
+            <a:r>
+              <a:rPr lang="es-ES" sz="1600" dirty="0"/>
+              <a:t>Por último, algunas variables como los </a:t>
+            </a:r>
+            <a:r>
+              <a:rPr lang="es-ES" sz="1600" b="1" dirty="0" err="1"/>
+              <a:t>review_scores</a:t>
+            </a:r>
+            <a:r>
+              <a:rPr lang="es-ES" sz="1600" b="1" dirty="0"/>
+              <a:t> </a:t>
+            </a:r>
+            <a:r>
+              <a:rPr lang="es-ES" sz="1600" dirty="0"/>
+              <a:t>presentan una variabilidad reducida, concentrándose en valores altos (entre 4 y 5), lo que puede limitar su capacidad explicativa. También se detectan valores extremos en varias variables que deberán analizarse y tratarse en etapas posteriores del preprocesamiento.</a:t>
+            </a:r>
+          </a:p>
+        </p:txBody>
+      </p:sp>
+    </p:spTree>
+    <p:extLst>
+      <p:ext uri="{BB962C8B-B14F-4D97-AF65-F5344CB8AC3E}">
+        <p14:creationId xmlns:p14="http://schemas.microsoft.com/office/powerpoint/2010/main" val="2532235416"/>
+      </p:ext>
+    </p:extLst>
+  </p:cSld>
+  <p:clrMapOvr>
+    <a:masterClrMapping/>
+  </p:clrMapOvr>
+</p:sld>
+</file>
+
+<file path=ppt/slides/slide5.xml><?xml version="1.0" encoding="utf-8"?>
+<p:sld xmlns:a="http://schemas.openxmlformats.org/drawingml/2006/main" xmlns:r="http://schemas.openxmlformats.org/officeDocument/2006/relationships" xmlns:p="http://schemas.openxmlformats.org/presentationml/2006/main">
+  <p:cSld>
+    <p:spTree>
+      <p:nvGrpSpPr>
+        <p:cNvPr id="1" name="">
+          <a:extLst>
+            <a:ext uri="{FF2B5EF4-FFF2-40B4-BE49-F238E27FC236}">
+              <a16:creationId xmlns:a16="http://schemas.microsoft.com/office/drawing/2014/main" id="{CEB6C3EF-D420-5269-A2CB-8000055B50C5}"/>
+            </a:ext>
+          </a:extLst>
+        </p:cNvPr>
+        <p:cNvGrpSpPr/>
+        <p:nvPr/>
+      </p:nvGrpSpPr>
+      <p:grpSpPr>
+        <a:xfrm>
+          <a:off x="0" y="0"/>
+          <a:ext cx="0" cy="0"/>
+          <a:chOff x="0" y="0"/>
+          <a:chExt cx="0" cy="0"/>
+        </a:xfrm>
+      </p:grpSpPr>
+      <p:sp>
+        <p:nvSpPr>
+          <p:cNvPr id="69" name="Rectángulo 2">
+            <a:extLst>
+              <a:ext uri="{FF2B5EF4-FFF2-40B4-BE49-F238E27FC236}">
+                <a16:creationId xmlns:a16="http://schemas.microsoft.com/office/drawing/2014/main" id="{F5958DE6-685F-B9CF-4DF5-4340FB8583DB}"/>
               </a:ext>
             </a:extLst>
           </p:cNvPr>
@@ -11116,8 +12465,69 @@
         </p:nvSpPr>
         <p:spPr>
           <a:xfrm>
-            <a:off x="646200" y="1411200"/>
-            <a:ext cx="11135160" cy="4204440"/>
+            <a:off x="1080" y="0"/>
+            <a:ext cx="12191040" cy="6856920"/>
+          </a:xfrm>
+          <a:prstGeom prst="rect">
+            <a:avLst/>
+          </a:prstGeom>
+          <a:solidFill>
+            <a:schemeClr val="accent2">
+              <a:lumMod val="20000"/>
+              <a:lumOff val="80000"/>
+            </a:schemeClr>
+          </a:solidFill>
+          <a:ln>
+            <a:solidFill>
+              <a:srgbClr val="325490"/>
+            </a:solidFill>
+          </a:ln>
+        </p:spPr>
+        <p:style>
+          <a:lnRef idx="2">
+            <a:schemeClr val="accent1">
+              <a:shade val="50000"/>
+            </a:schemeClr>
+          </a:lnRef>
+          <a:fillRef idx="1">
+            <a:schemeClr val="accent1"/>
+          </a:fillRef>
+          <a:effectRef idx="0">
+            <a:schemeClr val="accent1"/>
+          </a:effectRef>
+          <a:fontRef idx="minor"/>
+        </p:style>
+        <p:txBody>
+          <a:bodyPr lIns="90000" tIns="45000" rIns="90000" bIns="45000" anchor="ctr">
+            <a:noAutofit/>
+          </a:bodyPr>
+          <a:lstStyle/>
+          <a:p>
+            <a:endParaRPr lang="es-ES" sz="1800" b="0" strike="noStrike" spc="-1">
+              <a:solidFill>
+                <a:schemeClr val="lt1"/>
+              </a:solidFill>
+              <a:latin typeface="Calibri"/>
+            </a:endParaRPr>
+          </a:p>
+        </p:txBody>
+      </p:sp>
+      <p:sp>
+        <p:nvSpPr>
+          <p:cNvPr id="70" name="CuadroTexto 6">
+            <a:extLst>
+              <a:ext uri="{FF2B5EF4-FFF2-40B4-BE49-F238E27FC236}">
+                <a16:creationId xmlns:a16="http://schemas.microsoft.com/office/drawing/2014/main" id="{54A245E1-A670-7E93-A9A7-0A72B28A9A31}"/>
+              </a:ext>
+            </a:extLst>
+          </p:cNvPr>
+          <p:cNvSpPr/>
+          <p:nvPr/>
+        </p:nvSpPr>
+        <p:spPr>
+          <a:xfrm>
+            <a:off x="527760" y="479520"/>
+            <a:ext cx="11135160" cy="629488"/>
           </a:xfrm>
           <a:prstGeom prst="rect">
             <a:avLst/>
@@ -11150,7 +12560,25 @@
                 <a:spcPct val="100000"/>
               </a:lnSpc>
             </a:pPr>
-            <a:endParaRPr lang="es-ES" sz="1800" b="0" strike="noStrike" spc="-1">
+            <a:r>
+              <a:rPr lang="es-ES" sz="3500" b="1" strike="noStrike" spc="-1" dirty="0">
+                <a:solidFill>
+                  <a:srgbClr val="582808"/>
+                </a:solidFill>
+                <a:latin typeface="Calibri Light"/>
+              </a:rPr>
+              <a:t>EDA – </a:t>
+            </a:r>
+            <a:r>
+              <a:rPr lang="es-ES" sz="3500" b="1" spc="-1" dirty="0">
+                <a:solidFill>
+                  <a:srgbClr val="582808"/>
+                </a:solidFill>
+                <a:latin typeface="Calibri Light"/>
+              </a:rPr>
+              <a:t>Correlación entre variables numéricas y target</a:t>
+            </a:r>
+            <a:endParaRPr lang="es-ES" sz="3500" b="0" strike="noStrike" spc="-1" dirty="0">
               <a:solidFill>
                 <a:srgbClr val="000000"/>
               </a:solidFill>
@@ -11159,671 +12587,12 @@
           </a:p>
         </p:txBody>
       </p:sp>
-      <p:sp>
-        <p:nvSpPr>
-          <p:cNvPr id="6" name="Rectangle 4">
+      <p:pic>
+        <p:nvPicPr>
+          <p:cNvPr id="72" name="Imagen 7">
             <a:extLst>
               <a:ext uri="{FF2B5EF4-FFF2-40B4-BE49-F238E27FC236}">
-                <a16:creationId xmlns:a16="http://schemas.microsoft.com/office/drawing/2014/main" id="{29D6A60C-93B8-2867-C0D4-31E81492AB3B}"/>
-              </a:ext>
-            </a:extLst>
-          </p:cNvPr>
-          <p:cNvSpPr>
-            <a:spLocks noChangeArrowheads="1"/>
-          </p:cNvSpPr>
-          <p:nvPr/>
-        </p:nvSpPr>
-        <p:spPr bwMode="auto">
-          <a:xfrm rot="10800000" flipV="1">
-            <a:off x="105296" y="1242360"/>
-            <a:ext cx="11557624" cy="4708981"/>
-          </a:xfrm>
-          <a:prstGeom prst="rect">
-            <a:avLst/>
-          </a:prstGeom>
-          <a:noFill/>
-          <a:ln>
-            <a:noFill/>
-          </a:ln>
-          <a:effectLst/>
-          <a:extLst>
-            <a:ext uri="{909E8E84-426E-40DD-AFC4-6F175D3DCCD1}">
-              <a14:hiddenFill xmlns:a14="http://schemas.microsoft.com/office/drawing/2010/main">
-                <a:solidFill>
-                  <a:schemeClr val="accent1"/>
-                </a:solidFill>
-              </a14:hiddenFill>
-            </a:ext>
-            <a:ext uri="{91240B29-F687-4F45-9708-019B960494DF}">
-              <a14:hiddenLine xmlns:a14="http://schemas.microsoft.com/office/drawing/2010/main" w="9525">
-                <a:solidFill>
-                  <a:schemeClr val="tx1"/>
-                </a:solidFill>
-                <a:miter lim="800000"/>
-                <a:headEnd/>
-                <a:tailEnd/>
-              </a14:hiddenLine>
-            </a:ext>
-            <a:ext uri="{AF507438-7753-43E0-B8FC-AC1667EBCBE1}">
-              <a14:hiddenEffects xmlns:a14="http://schemas.microsoft.com/office/drawing/2010/main">
-                <a:effectLst>
-                  <a:outerShdw dist="35921" dir="2700000" algn="ctr" rotWithShape="0">
-                    <a:schemeClr val="bg2"/>
-                  </a:outerShdw>
-                </a:effectLst>
-              </a14:hiddenEffects>
-            </a:ext>
-          </a:extLst>
-        </p:spPr>
-        <p:txBody>
-          <a:bodyPr vert="horz" wrap="square" lIns="91440" tIns="45720" rIns="91440" bIns="45720" numCol="1" anchor="ctr" anchorCtr="0" compatLnSpc="1">
-            <a:prstTxWarp prst="textNoShape">
-              <a:avLst/>
-            </a:prstTxWarp>
-            <a:spAutoFit/>
-          </a:bodyPr>
-          <a:lstStyle/>
-          <a:p>
-            <a:pPr marL="0" marR="0" lvl="0" indent="0" algn="l" defTabSz="914400" rtl="0" eaLnBrk="0" fontAlgn="base" latinLnBrk="0" hangingPunct="0">
-              <a:lnSpc>
-                <a:spcPct val="100000"/>
-              </a:lnSpc>
-              <a:spcBef>
-                <a:spcPct val="0"/>
-              </a:spcBef>
-              <a:spcAft>
-                <a:spcPct val="0"/>
-              </a:spcAft>
-              <a:buClrTx/>
-              <a:buSzTx/>
-              <a:buFontTx/>
-              <a:buChar char="•"/>
-              <a:tabLst/>
-            </a:pPr>
-            <a:r>
-              <a:rPr kumimoji="0" lang="es-CL" altLang="es-CL" sz="2000" b="1" i="0" u="none" strike="noStrike" cap="none" normalizeH="0" baseline="0" dirty="0">
-                <a:ln>
-                  <a:noFill/>
-                </a:ln>
-                <a:solidFill>
-                  <a:schemeClr val="tx1"/>
-                </a:solidFill>
-                <a:effectLst/>
-                <a:latin typeface="+mj-lt"/>
-              </a:rPr>
-              <a:t>Pipelines por modelo:</a:t>
-            </a:r>
-            <a:r>
-              <a:rPr kumimoji="0" lang="es-CL" altLang="es-CL" sz="2000" b="0" i="0" u="none" strike="noStrike" cap="none" normalizeH="0" baseline="0" dirty="0">
-                <a:ln>
-                  <a:noFill/>
-                </a:ln>
-                <a:solidFill>
-                  <a:schemeClr val="tx1"/>
-                </a:solidFill>
-                <a:effectLst/>
-                <a:latin typeface="+mj-lt"/>
-              </a:rPr>
-              <a:t> mismo preprocesado (imputación; escalado solo en lineales) para evitar leakage y comparar de forma justa.</a:t>
-            </a:r>
-          </a:p>
-          <a:p>
-            <a:pPr marL="0" marR="0" lvl="0" indent="0" algn="l" defTabSz="914400" rtl="0" eaLnBrk="0" fontAlgn="base" latinLnBrk="0" hangingPunct="0">
-              <a:lnSpc>
-                <a:spcPct val="100000"/>
-              </a:lnSpc>
-              <a:spcBef>
-                <a:spcPct val="0"/>
-              </a:spcBef>
-              <a:spcAft>
-                <a:spcPct val="0"/>
-              </a:spcAft>
-              <a:buClrTx/>
-              <a:buSzTx/>
-              <a:buFontTx/>
-              <a:buChar char="•"/>
-              <a:tabLst/>
-            </a:pPr>
-            <a:endParaRPr kumimoji="0" lang="es-CL" altLang="es-CL" sz="2000" b="0" i="0" u="none" strike="noStrike" cap="none" normalizeH="0" baseline="0" dirty="0">
-              <a:ln>
-                <a:noFill/>
-              </a:ln>
-              <a:solidFill>
-                <a:schemeClr val="tx1"/>
-              </a:solidFill>
-              <a:effectLst/>
-              <a:latin typeface="+mj-lt"/>
-            </a:endParaRPr>
-          </a:p>
-          <a:p>
-            <a:pPr marL="0" marR="0" lvl="0" indent="0" algn="l" defTabSz="914400" rtl="0" eaLnBrk="0" fontAlgn="base" latinLnBrk="0" hangingPunct="0">
-              <a:lnSpc>
-                <a:spcPct val="100000"/>
-              </a:lnSpc>
-              <a:spcBef>
-                <a:spcPct val="0"/>
-              </a:spcBef>
-              <a:spcAft>
-                <a:spcPct val="0"/>
-              </a:spcAft>
-              <a:buClrTx/>
-              <a:buSzTx/>
-              <a:buFontTx/>
-              <a:buChar char="•"/>
-              <a:tabLst/>
-            </a:pPr>
-            <a:r>
-              <a:rPr kumimoji="0" lang="es-CL" altLang="es-CL" sz="2000" b="1" i="0" u="none" strike="noStrike" cap="none" normalizeH="0" baseline="0" dirty="0">
-                <a:ln>
-                  <a:noFill/>
-                </a:ln>
-                <a:solidFill>
-                  <a:schemeClr val="tx1"/>
-                </a:solidFill>
-                <a:effectLst/>
-                <a:latin typeface="+mj-lt"/>
-              </a:rPr>
-              <a:t>Baseline y comparativa:</a:t>
-            </a:r>
-            <a:r>
-              <a:rPr kumimoji="0" lang="es-CL" altLang="es-CL" sz="2000" b="0" i="0" u="none" strike="noStrike" cap="none" normalizeH="0" baseline="0" dirty="0">
-                <a:ln>
-                  <a:noFill/>
-                </a:ln>
-                <a:solidFill>
-                  <a:schemeClr val="tx1"/>
-                </a:solidFill>
-                <a:effectLst/>
-                <a:latin typeface="+mj-lt"/>
-              </a:rPr>
-              <a:t> probamos </a:t>
-            </a:r>
-            <a:r>
-              <a:rPr kumimoji="0" lang="es-CL" altLang="es-CL" sz="2000" b="1" i="0" u="none" strike="noStrike" cap="none" normalizeH="0" baseline="0" dirty="0">
-                <a:ln>
-                  <a:noFill/>
-                </a:ln>
-                <a:solidFill>
-                  <a:schemeClr val="tx1"/>
-                </a:solidFill>
-                <a:effectLst/>
-                <a:latin typeface="+mj-lt"/>
-              </a:rPr>
-              <a:t>Ridge (baseline)</a:t>
-            </a:r>
-            <a:r>
-              <a:rPr kumimoji="0" lang="es-CL" altLang="es-CL" sz="2000" b="0" i="0" u="none" strike="noStrike" cap="none" normalizeH="0" baseline="0" dirty="0">
-                <a:ln>
-                  <a:noFill/>
-                </a:ln>
-                <a:solidFill>
-                  <a:schemeClr val="tx1"/>
-                </a:solidFill>
-                <a:effectLst/>
-                <a:latin typeface="+mj-lt"/>
-              </a:rPr>
-              <a:t>, </a:t>
-            </a:r>
-            <a:r>
-              <a:rPr kumimoji="0" lang="es-CL" altLang="es-CL" sz="2000" b="1" i="0" u="none" strike="noStrike" cap="none" normalizeH="0" baseline="0" dirty="0">
-                <a:ln>
-                  <a:noFill/>
-                </a:ln>
-                <a:solidFill>
-                  <a:schemeClr val="tx1"/>
-                </a:solidFill>
-                <a:effectLst/>
-                <a:latin typeface="+mj-lt"/>
-              </a:rPr>
-              <a:t>Random Forest</a:t>
-            </a:r>
-            <a:r>
-              <a:rPr kumimoji="0" lang="es-CL" altLang="es-CL" sz="2000" b="0" i="0" u="none" strike="noStrike" cap="none" normalizeH="0" baseline="0" dirty="0">
-                <a:ln>
-                  <a:noFill/>
-                </a:ln>
-                <a:solidFill>
-                  <a:schemeClr val="tx1"/>
-                </a:solidFill>
-                <a:effectLst/>
-                <a:latin typeface="+mj-lt"/>
-              </a:rPr>
-              <a:t> y </a:t>
-            </a:r>
-            <a:r>
-              <a:rPr kumimoji="0" lang="es-CL" altLang="es-CL" sz="2000" b="1" i="0" u="none" strike="noStrike" cap="none" normalizeH="0" baseline="0" dirty="0">
-                <a:ln>
-                  <a:noFill/>
-                </a:ln>
-                <a:solidFill>
-                  <a:schemeClr val="tx1"/>
-                </a:solidFill>
-                <a:effectLst/>
-                <a:latin typeface="+mj-lt"/>
-              </a:rPr>
-              <a:t>XGBoost</a:t>
-            </a:r>
-            <a:r>
-              <a:rPr kumimoji="0" lang="es-CL" altLang="es-CL" sz="2000" b="0" i="0" u="none" strike="noStrike" cap="none" normalizeH="0" baseline="0" dirty="0">
-                <a:ln>
-                  <a:noFill/>
-                </a:ln>
-                <a:solidFill>
-                  <a:schemeClr val="tx1"/>
-                </a:solidFill>
-                <a:effectLst/>
-                <a:latin typeface="+mj-lt"/>
-              </a:rPr>
-              <a:t> con </a:t>
-            </a:r>
-            <a:r>
-              <a:rPr kumimoji="0" lang="es-CL" altLang="es-CL" sz="2000" b="1" i="0" u="none" strike="noStrike" cap="none" normalizeH="0" baseline="0" dirty="0">
-                <a:ln>
-                  <a:noFill/>
-                </a:ln>
-                <a:solidFill>
-                  <a:schemeClr val="tx1"/>
-                </a:solidFill>
-                <a:effectLst/>
-                <a:latin typeface="+mj-lt"/>
-              </a:rPr>
-              <a:t>K-</a:t>
-            </a:r>
-            <a:r>
-              <a:rPr kumimoji="0" lang="es-CL" altLang="es-CL" sz="2000" b="1" i="0" u="none" strike="noStrike" cap="none" normalizeH="0" baseline="0" dirty="0" err="1">
-                <a:ln>
-                  <a:noFill/>
-                </a:ln>
-                <a:solidFill>
-                  <a:schemeClr val="tx1"/>
-                </a:solidFill>
-                <a:effectLst/>
-                <a:latin typeface="+mj-lt"/>
-              </a:rPr>
-              <a:t>Fold</a:t>
-            </a:r>
-            <a:r>
-              <a:rPr kumimoji="0" lang="es-CL" altLang="es-CL" sz="2000" b="1" i="0" u="none" strike="noStrike" cap="none" normalizeH="0" baseline="0" dirty="0">
-                <a:ln>
-                  <a:noFill/>
-                </a:ln>
-                <a:solidFill>
-                  <a:schemeClr val="tx1"/>
-                </a:solidFill>
-                <a:effectLst/>
-                <a:latin typeface="+mj-lt"/>
-              </a:rPr>
-              <a:t> CV (k=5)</a:t>
-            </a:r>
-            <a:r>
-              <a:rPr kumimoji="0" lang="es-CL" altLang="es-CL" sz="2000" b="0" i="0" u="none" strike="noStrike" cap="none" normalizeH="0" baseline="0" dirty="0">
-                <a:ln>
-                  <a:noFill/>
-                </a:ln>
-                <a:solidFill>
-                  <a:schemeClr val="tx1"/>
-                </a:solidFill>
-                <a:effectLst/>
-                <a:latin typeface="+mj-lt"/>
-              </a:rPr>
-              <a:t> y </a:t>
-            </a:r>
-            <a:r>
-              <a:rPr kumimoji="0" lang="es-CL" altLang="es-CL" sz="2000" b="1" i="0" u="none" strike="noStrike" cap="none" normalizeH="0" baseline="0" dirty="0">
-                <a:ln>
-                  <a:noFill/>
-                </a:ln>
-                <a:solidFill>
-                  <a:schemeClr val="tx1"/>
-                </a:solidFill>
-                <a:effectLst/>
-                <a:latin typeface="+mj-lt"/>
-              </a:rPr>
-              <a:t>RMSE sobre revenue_log</a:t>
-            </a:r>
-            <a:r>
-              <a:rPr kumimoji="0" lang="es-CL" altLang="es-CL" sz="2000" b="0" i="0" u="none" strike="noStrike" cap="none" normalizeH="0" baseline="0" dirty="0">
-                <a:ln>
-                  <a:noFill/>
-                </a:ln>
-                <a:solidFill>
-                  <a:schemeClr val="tx1"/>
-                </a:solidFill>
-                <a:effectLst/>
-                <a:latin typeface="+mj-lt"/>
-              </a:rPr>
-              <a:t>.</a:t>
-            </a:r>
-          </a:p>
-          <a:p>
-            <a:pPr marL="0" marR="0" lvl="0" indent="0" algn="l" defTabSz="914400" rtl="0" eaLnBrk="0" fontAlgn="base" latinLnBrk="0" hangingPunct="0">
-              <a:lnSpc>
-                <a:spcPct val="100000"/>
-              </a:lnSpc>
-              <a:spcBef>
-                <a:spcPct val="0"/>
-              </a:spcBef>
-              <a:spcAft>
-                <a:spcPct val="0"/>
-              </a:spcAft>
-              <a:buClrTx/>
-              <a:buSzTx/>
-              <a:buFontTx/>
-              <a:buChar char="•"/>
-              <a:tabLst/>
-            </a:pPr>
-            <a:endParaRPr kumimoji="0" lang="es-CL" altLang="es-CL" sz="2000" b="0" i="0" u="none" strike="noStrike" cap="none" normalizeH="0" baseline="0" dirty="0">
-              <a:ln>
-                <a:noFill/>
-              </a:ln>
-              <a:solidFill>
-                <a:schemeClr val="tx1"/>
-              </a:solidFill>
-              <a:effectLst/>
-              <a:latin typeface="+mj-lt"/>
-            </a:endParaRPr>
-          </a:p>
-          <a:p>
-            <a:pPr marL="0" marR="0" lvl="0" indent="0" algn="l" defTabSz="914400" rtl="0" eaLnBrk="0" fontAlgn="base" latinLnBrk="0" hangingPunct="0">
-              <a:lnSpc>
-                <a:spcPct val="100000"/>
-              </a:lnSpc>
-              <a:spcBef>
-                <a:spcPct val="0"/>
-              </a:spcBef>
-              <a:spcAft>
-                <a:spcPct val="0"/>
-              </a:spcAft>
-              <a:buClrTx/>
-              <a:buSzTx/>
-              <a:buFontTx/>
-              <a:buChar char="•"/>
-              <a:tabLst/>
-            </a:pPr>
-            <a:r>
-              <a:rPr kumimoji="0" lang="es-CL" altLang="es-CL" sz="2000" b="1" i="0" u="none" strike="noStrike" cap="none" normalizeH="0" baseline="0" dirty="0">
-                <a:ln>
-                  <a:noFill/>
-                </a:ln>
-                <a:solidFill>
-                  <a:schemeClr val="tx1"/>
-                </a:solidFill>
-                <a:effectLst/>
-                <a:latin typeface="+mj-lt"/>
-              </a:rPr>
-              <a:t>Selección del modelo:</a:t>
-            </a:r>
-            <a:r>
-              <a:rPr kumimoji="0" lang="es-CL" altLang="es-CL" sz="2000" b="0" i="0" u="none" strike="noStrike" cap="none" normalizeH="0" baseline="0" dirty="0">
-                <a:ln>
-                  <a:noFill/>
-                </a:ln>
-                <a:solidFill>
-                  <a:schemeClr val="tx1"/>
-                </a:solidFill>
-                <a:effectLst/>
-                <a:latin typeface="+mj-lt"/>
-              </a:rPr>
-              <a:t> el menor RMSE en CV fue </a:t>
-            </a:r>
-            <a:r>
-              <a:rPr kumimoji="0" lang="es-CL" altLang="es-CL" sz="2000" b="1" i="0" u="none" strike="noStrike" cap="none" normalizeH="0" baseline="0" dirty="0">
-                <a:ln>
-                  <a:noFill/>
-                </a:ln>
-                <a:solidFill>
-                  <a:schemeClr val="tx1"/>
-                </a:solidFill>
-                <a:effectLst/>
-                <a:latin typeface="+mj-lt"/>
-              </a:rPr>
-              <a:t>XGBoost</a:t>
-            </a:r>
-            <a:r>
-              <a:rPr kumimoji="0" lang="es-CL" altLang="es-CL" sz="2000" b="0" i="0" u="none" strike="noStrike" cap="none" normalizeH="0" baseline="0" dirty="0">
-                <a:ln>
-                  <a:noFill/>
-                </a:ln>
-                <a:solidFill>
-                  <a:schemeClr val="tx1"/>
-                </a:solidFill>
-                <a:effectLst/>
-                <a:latin typeface="+mj-lt"/>
-              </a:rPr>
-              <a:t>, por lo que se eligió para entrenamiento final y posterior optimización.</a:t>
-            </a:r>
-          </a:p>
-          <a:p>
-            <a:pPr marL="0" marR="0" lvl="0" indent="0" algn="l" defTabSz="914400" rtl="0" eaLnBrk="0" fontAlgn="base" latinLnBrk="0" hangingPunct="0">
-              <a:lnSpc>
-                <a:spcPct val="100000"/>
-              </a:lnSpc>
-              <a:spcBef>
-                <a:spcPct val="0"/>
-              </a:spcBef>
-              <a:spcAft>
-                <a:spcPct val="0"/>
-              </a:spcAft>
-              <a:buClrTx/>
-              <a:buSzTx/>
-              <a:buFontTx/>
-              <a:buChar char="•"/>
-              <a:tabLst/>
-            </a:pPr>
-            <a:endParaRPr kumimoji="0" lang="es-CL" altLang="es-CL" sz="2000" b="0" i="0" u="none" strike="noStrike" cap="none" normalizeH="0" baseline="0" dirty="0">
-              <a:ln>
-                <a:noFill/>
-              </a:ln>
-              <a:solidFill>
-                <a:schemeClr val="tx1"/>
-              </a:solidFill>
-              <a:effectLst/>
-              <a:latin typeface="+mj-lt"/>
-            </a:endParaRPr>
-          </a:p>
-          <a:p>
-            <a:pPr marL="0" marR="0" lvl="0" indent="0" algn="l" defTabSz="914400" rtl="0" eaLnBrk="0" fontAlgn="base" latinLnBrk="0" hangingPunct="0">
-              <a:lnSpc>
-                <a:spcPct val="100000"/>
-              </a:lnSpc>
-              <a:spcBef>
-                <a:spcPct val="0"/>
-              </a:spcBef>
-              <a:spcAft>
-                <a:spcPct val="0"/>
-              </a:spcAft>
-              <a:buClrTx/>
-              <a:buSzTx/>
-              <a:buFontTx/>
-              <a:buChar char="•"/>
-              <a:tabLst/>
-            </a:pPr>
-            <a:r>
-              <a:rPr kumimoji="0" lang="es-CL" altLang="es-CL" sz="2000" b="1" i="0" u="none" strike="noStrike" cap="none" normalizeH="0" baseline="0" dirty="0">
-                <a:ln>
-                  <a:noFill/>
-                </a:ln>
-                <a:solidFill>
-                  <a:schemeClr val="tx1"/>
-                </a:solidFill>
-                <a:effectLst/>
-                <a:latin typeface="+mj-lt"/>
-              </a:rPr>
-              <a:t>Chequeo del target en euros:</a:t>
-            </a:r>
-            <a:r>
-              <a:rPr kumimoji="0" lang="es-CL" altLang="es-CL" sz="2000" b="0" i="0" u="none" strike="noStrike" cap="none" normalizeH="0" baseline="0" dirty="0">
-                <a:ln>
-                  <a:noFill/>
-                </a:ln>
-                <a:solidFill>
-                  <a:schemeClr val="tx1"/>
-                </a:solidFill>
-                <a:effectLst/>
-                <a:latin typeface="+mj-lt"/>
-              </a:rPr>
-              <a:t> calculamos </a:t>
-            </a:r>
-            <a:r>
-              <a:rPr kumimoji="0" lang="es-CL" altLang="es-CL" sz="2000" b="1" i="0" u="none" strike="noStrike" cap="none" normalizeH="0" baseline="0" dirty="0">
-                <a:ln>
-                  <a:noFill/>
-                </a:ln>
-                <a:solidFill>
-                  <a:schemeClr val="tx1"/>
-                </a:solidFill>
-                <a:effectLst/>
-                <a:latin typeface="+mj-lt"/>
-              </a:rPr>
-              <a:t>media, mediana y percentiles</a:t>
-            </a:r>
-            <a:r>
-              <a:rPr kumimoji="0" lang="es-CL" altLang="es-CL" sz="2000" b="0" i="0" u="none" strike="noStrike" cap="none" normalizeH="0" baseline="0" dirty="0">
-                <a:ln>
-                  <a:noFill/>
-                </a:ln>
-                <a:solidFill>
-                  <a:schemeClr val="tx1"/>
-                </a:solidFill>
-                <a:effectLst/>
-                <a:latin typeface="+mj-lt"/>
-              </a:rPr>
-              <a:t> (tras expm1) para entender la magnitud real del revenue y poder interpretar el error.</a:t>
-            </a:r>
-          </a:p>
-          <a:p>
-            <a:pPr marL="0" marR="0" lvl="0" indent="0" algn="l" defTabSz="914400" rtl="0" eaLnBrk="0" fontAlgn="base" latinLnBrk="0" hangingPunct="0">
-              <a:lnSpc>
-                <a:spcPct val="100000"/>
-              </a:lnSpc>
-              <a:spcBef>
-                <a:spcPct val="0"/>
-              </a:spcBef>
-              <a:spcAft>
-                <a:spcPct val="0"/>
-              </a:spcAft>
-              <a:buClrTx/>
-              <a:buSzTx/>
-              <a:buFontTx/>
-              <a:buChar char="•"/>
-              <a:tabLst/>
-            </a:pPr>
-            <a:endParaRPr kumimoji="0" lang="es-CL" altLang="es-CL" sz="2000" b="0" i="0" u="none" strike="noStrike" cap="none" normalizeH="0" baseline="0" dirty="0">
-              <a:ln>
-                <a:noFill/>
-              </a:ln>
-              <a:solidFill>
-                <a:schemeClr val="tx1"/>
-              </a:solidFill>
-              <a:effectLst/>
-              <a:latin typeface="+mj-lt"/>
-            </a:endParaRPr>
-          </a:p>
-          <a:p>
-            <a:pPr marL="0" marR="0" lvl="0" indent="0" algn="l" defTabSz="914400" rtl="0" eaLnBrk="0" fontAlgn="base" latinLnBrk="0" hangingPunct="0">
-              <a:lnSpc>
-                <a:spcPct val="100000"/>
-              </a:lnSpc>
-              <a:spcBef>
-                <a:spcPct val="0"/>
-              </a:spcBef>
-              <a:spcAft>
-                <a:spcPct val="0"/>
-              </a:spcAft>
-              <a:buClrTx/>
-              <a:buSzTx/>
-              <a:buFontTx/>
-              <a:buChar char="•"/>
-              <a:tabLst/>
-            </a:pPr>
-            <a:r>
-              <a:rPr kumimoji="0" lang="es-CL" altLang="es-CL" sz="2000" b="1" i="0" u="none" strike="noStrike" cap="none" normalizeH="0" baseline="0" dirty="0">
-                <a:ln>
-                  <a:noFill/>
-                </a:ln>
-                <a:solidFill>
-                  <a:schemeClr val="tx1"/>
-                </a:solidFill>
-                <a:effectLst/>
-                <a:latin typeface="+mj-lt"/>
-              </a:rPr>
-              <a:t>Interpretación del RMSE (€):</a:t>
-            </a:r>
-            <a:r>
-              <a:rPr kumimoji="0" lang="es-CL" altLang="es-CL" sz="2000" b="0" i="0" u="none" strike="noStrike" cap="none" normalizeH="0" baseline="0" dirty="0">
-                <a:ln>
-                  <a:noFill/>
-                </a:ln>
-                <a:solidFill>
-                  <a:schemeClr val="tx1"/>
-                </a:solidFill>
-                <a:effectLst/>
-                <a:latin typeface="+mj-lt"/>
-              </a:rPr>
-              <a:t> el revenue tiene </a:t>
-            </a:r>
-            <a:r>
-              <a:rPr kumimoji="0" lang="es-CL" altLang="es-CL" sz="2000" b="1" i="0" u="none" strike="noStrike" cap="none" normalizeH="0" baseline="0" dirty="0">
-                <a:ln>
-                  <a:noFill/>
-                </a:ln>
-                <a:solidFill>
-                  <a:schemeClr val="tx1"/>
-                </a:solidFill>
-                <a:effectLst/>
-                <a:latin typeface="+mj-lt"/>
-              </a:rPr>
-              <a:t>cola muy pesada</a:t>
-            </a:r>
-            <a:r>
-              <a:rPr kumimoji="0" lang="es-CL" altLang="es-CL" sz="2000" b="0" i="0" u="none" strike="noStrike" cap="none" normalizeH="0" baseline="0" dirty="0">
-                <a:ln>
-                  <a:noFill/>
-                </a:ln>
-                <a:solidFill>
-                  <a:schemeClr val="tx1"/>
-                </a:solidFill>
-                <a:effectLst/>
-                <a:latin typeface="+mj-lt"/>
-              </a:rPr>
-              <a:t> (p99 ≈ 84k€ y </a:t>
-            </a:r>
-            <a:r>
-              <a:rPr kumimoji="0" lang="es-CL" altLang="es-CL" sz="2000" b="1" i="0" u="none" strike="noStrike" cap="none" normalizeH="0" baseline="0" dirty="0">
-                <a:ln>
-                  <a:noFill/>
-                </a:ln>
-                <a:solidFill>
-                  <a:schemeClr val="tx1"/>
-                </a:solidFill>
-                <a:effectLst/>
-                <a:latin typeface="+mj-lt"/>
-              </a:rPr>
-              <a:t>máximo ≈ 2M€</a:t>
-            </a:r>
-            <a:r>
-              <a:rPr kumimoji="0" lang="es-CL" altLang="es-CL" sz="2000" b="0" i="0" u="none" strike="noStrike" cap="none" normalizeH="0" baseline="0" dirty="0">
-                <a:ln>
-                  <a:noFill/>
-                </a:ln>
-                <a:solidFill>
-                  <a:schemeClr val="tx1"/>
-                </a:solidFill>
-                <a:effectLst/>
-                <a:latin typeface="+mj-lt"/>
-              </a:rPr>
-              <a:t>). Como RMSE penaliza errores al cuadrado, estos casos extremos pueden inflar el RMSE en euros aunque el modelo funcione bien para la mayoría.</a:t>
-            </a:r>
-          </a:p>
-        </p:txBody>
-      </p:sp>
-      <p:pic>
-        <p:nvPicPr>
-          <p:cNvPr id="7" name="Imagen 28">
-            <a:hlinkClick r:id="rId2" action="ppaction://hlinksldjump"/>
-            <a:extLst>
-              <a:ext uri="{FF2B5EF4-FFF2-40B4-BE49-F238E27FC236}">
-                <a16:creationId xmlns:a16="http://schemas.microsoft.com/office/drawing/2014/main" id="{42F73702-51E5-2631-57CC-D0BB26462C81}"/>
+                <a16:creationId xmlns:a16="http://schemas.microsoft.com/office/drawing/2014/main" id="{EA88FEB5-EB50-2480-BD28-FF58120819E8}"/>
               </a:ext>
             </a:extLst>
           </p:cNvPr>
@@ -11831,13 +12600,13 @@
           <p:nvPr/>
         </p:nvPicPr>
         <p:blipFill>
-          <a:blip r:embed="rId3"/>
+          <a:blip r:embed="rId2"/>
           <a:stretch/>
         </p:blipFill>
         <p:spPr>
           <a:xfrm>
-            <a:off x="10644306" y="131941"/>
-            <a:ext cx="1208156" cy="1147319"/>
+            <a:off x="10348920" y="479520"/>
+            <a:ext cx="1314000" cy="987840"/>
           </a:xfrm>
           <a:prstGeom prst="rect">
             <a:avLst/>
@@ -11847,10 +12616,136 @@
           </a:ln>
         </p:spPr>
       </p:pic>
+      <p:sp>
+        <p:nvSpPr>
+          <p:cNvPr id="2" name="CuadroTexto 1">
+            <a:extLst>
+              <a:ext uri="{FF2B5EF4-FFF2-40B4-BE49-F238E27FC236}">
+                <a16:creationId xmlns:a16="http://schemas.microsoft.com/office/drawing/2014/main" id="{A7D4B502-4242-156E-8AF9-EDEC9C34F0E8}"/>
+              </a:ext>
+            </a:extLst>
+          </p:cNvPr>
+          <p:cNvSpPr txBox="1"/>
+          <p:nvPr/>
+        </p:nvSpPr>
+        <p:spPr>
+          <a:xfrm>
+            <a:off x="615290" y="1588528"/>
+            <a:ext cx="10960100" cy="3416320"/>
+          </a:xfrm>
+          <a:prstGeom prst="rect">
+            <a:avLst/>
+          </a:prstGeom>
+          <a:noFill/>
+        </p:spPr>
+        <p:txBody>
+          <a:bodyPr wrap="square" rtlCol="0">
+            <a:spAutoFit/>
+          </a:bodyPr>
+          <a:lstStyle/>
+          <a:p>
+            <a:r>
+              <a:rPr lang="es-ES" sz="1600" dirty="0"/>
+              <a:t>Del análisis bivariante se observa que el bloque de variables con mayor relación con la variable objetivo es el compuesto por la ocupación estimada anual (</a:t>
+            </a:r>
+            <a:r>
+              <a:rPr lang="es-ES" sz="1600" b="1" dirty="0"/>
+              <a:t>estimated_occupancy_l365d</a:t>
+            </a:r>
+            <a:r>
+              <a:rPr lang="es-ES" sz="1600" dirty="0"/>
+              <a:t>) y las métricas asociadas al volumen de reseñas (</a:t>
+            </a:r>
+            <a:r>
+              <a:rPr lang="es-ES" sz="1600" b="1" dirty="0" err="1"/>
+              <a:t>number_of_reviews_ltm</a:t>
+            </a:r>
+            <a:r>
+              <a:rPr lang="es-ES" sz="1600" b="1" dirty="0"/>
+              <a:t>, </a:t>
+            </a:r>
+            <a:r>
+              <a:rPr lang="es-ES" sz="1600" b="1" dirty="0" err="1"/>
+              <a:t>number_of_reviews_ly</a:t>
+            </a:r>
+            <a:r>
+              <a:rPr lang="es-ES" sz="1600" b="1" dirty="0"/>
+              <a:t>, number_of_reviews_l30d, </a:t>
+            </a:r>
+            <a:r>
+              <a:rPr lang="es-ES" sz="1600" b="1" dirty="0" err="1"/>
+              <a:t>reviews_per_month</a:t>
+            </a:r>
+            <a:r>
+              <a:rPr lang="es-ES" sz="1600" b="1" dirty="0"/>
+              <a:t>, </a:t>
+            </a:r>
+            <a:r>
+              <a:rPr lang="es-ES" sz="1600" b="1" dirty="0" err="1"/>
+              <a:t>number_of_reviews</a:t>
+            </a:r>
+            <a:r>
+              <a:rPr lang="es-ES" sz="1600" dirty="0"/>
+              <a:t>).</a:t>
+            </a:r>
+          </a:p>
+          <a:p>
+            <a:endParaRPr lang="es-ES" sz="1600" dirty="0"/>
+          </a:p>
+          <a:p>
+            <a:r>
+              <a:rPr lang="es-ES" sz="1600" dirty="0"/>
+              <a:t>Estas variables presentan las correlaciones más elevadas con el </a:t>
+            </a:r>
+            <a:r>
+              <a:rPr lang="es-ES" sz="1600" dirty="0" err="1"/>
+              <a:t>revenue</a:t>
+            </a:r>
+            <a:r>
+              <a:rPr lang="es-ES" sz="1600" dirty="0"/>
+              <a:t> log-transformado, lo que sugiere que la intensidad de uso del alojamiento y su nivel de actividad están fuertemente vinculados con los ingresos generados.</a:t>
+            </a:r>
+          </a:p>
+          <a:p>
+            <a:endParaRPr lang="es-ES" sz="1600" dirty="0"/>
+          </a:p>
+          <a:p>
+            <a:r>
+              <a:rPr lang="es-ES" sz="1600" dirty="0"/>
+              <a:t>Por otro lado, las variables estructurales del alojamiento (como capacidad o características físicas) muestran una correlación moderada, indicando que influyen en el </a:t>
+            </a:r>
+            <a:r>
+              <a:rPr lang="es-ES" sz="1600" dirty="0" err="1"/>
+              <a:t>revenue</a:t>
+            </a:r>
+            <a:r>
+              <a:rPr lang="es-ES" sz="1600" dirty="0"/>
+              <a:t>, aunque en menor medida que las variables de actividad.</a:t>
+            </a:r>
+          </a:p>
+          <a:p>
+            <a:endParaRPr lang="es-ES" sz="1600" dirty="0"/>
+          </a:p>
+          <a:p>
+            <a:r>
+              <a:rPr lang="es-ES" sz="1600" dirty="0"/>
+              <a:t>Finalmente, las variables relacionadas con restricciones de estancia (bloque de “</a:t>
+            </a:r>
+            <a:r>
+              <a:rPr lang="es-ES" sz="1600" b="1" dirty="0" err="1"/>
+              <a:t>nights</a:t>
+            </a:r>
+            <a:r>
+              <a:rPr lang="es-ES" sz="1600" dirty="0"/>
+              <a:t>”) presentan una relación más débil y potencialmente redundante entre sí, por lo que será necesario evaluar su posible reducción para evitar problemas de multicolinealidad en modelos posteriores.</a:t>
+            </a:r>
+          </a:p>
+        </p:txBody>
+      </p:sp>
     </p:spTree>
     <p:extLst>
       <p:ext uri="{BB962C8B-B14F-4D97-AF65-F5344CB8AC3E}">
-        <p14:creationId xmlns:p14="http://schemas.microsoft.com/office/powerpoint/2010/main" val="3762195791"/>
+        <p14:creationId xmlns:p14="http://schemas.microsoft.com/office/powerpoint/2010/main" val="4038327818"/>
       </p:ext>
     </p:extLst>
   </p:cSld>
@@ -11860,12 +12755,18 @@
 </p:sld>
 </file>
 
-<file path=ppt/slides/slide8.xml><?xml version="1.0" encoding="utf-8"?>
+<file path=ppt/slides/slide6.xml><?xml version="1.0" encoding="utf-8"?>
 <p:sld xmlns:a="http://schemas.openxmlformats.org/drawingml/2006/main" xmlns:r="http://schemas.openxmlformats.org/officeDocument/2006/relationships" xmlns:p="http://schemas.openxmlformats.org/presentationml/2006/main">
   <p:cSld>
     <p:spTree>
       <p:nvGrpSpPr>
-        <p:cNvPr id="1" name=""/>
+        <p:cNvPr id="1" name="">
+          <a:extLst>
+            <a:ext uri="{FF2B5EF4-FFF2-40B4-BE49-F238E27FC236}">
+              <a16:creationId xmlns:a16="http://schemas.microsoft.com/office/drawing/2014/main" id="{B45F946A-EE44-EFC9-C459-D1BDC5C6A8EC}"/>
+            </a:ext>
+          </a:extLst>
+        </p:cNvPr>
         <p:cNvGrpSpPr/>
         <p:nvPr/>
       </p:nvGrpSpPr>
@@ -11879,13 +12780,19 @@
       </p:grpSpPr>
       <p:sp>
         <p:nvSpPr>
-          <p:cNvPr id="77" name="Rectángulo 5"/>
+          <p:cNvPr id="69" name="Rectángulo 2">
+            <a:extLst>
+              <a:ext uri="{FF2B5EF4-FFF2-40B4-BE49-F238E27FC236}">
+                <a16:creationId xmlns:a16="http://schemas.microsoft.com/office/drawing/2014/main" id="{B1134DD3-ACD1-5C2B-E094-439C3491740C}"/>
+              </a:ext>
+            </a:extLst>
+          </p:cNvPr>
           <p:cNvSpPr/>
           <p:nvPr/>
         </p:nvSpPr>
         <p:spPr>
           <a:xfrm>
-            <a:off x="0" y="0"/>
+            <a:off x="1080" y="0"/>
             <a:ext cx="12191040" cy="6856920"/>
           </a:xfrm>
           <a:prstGeom prst="rect">
@@ -11923,11 +12830,6 @@
           </a:bodyPr>
           <a:lstStyle/>
           <a:p>
-            <a:pPr algn="ctr" defTabSz="914400">
-              <a:lnSpc>
-                <a:spcPct val="100000"/>
-              </a:lnSpc>
-            </a:pPr>
             <a:endParaRPr lang="es-ES" sz="1800" b="0" strike="noStrike" spc="-1">
               <a:solidFill>
                 <a:schemeClr val="lt1"/>
@@ -11939,7 +12841,970 @@
       </p:sp>
       <p:sp>
         <p:nvSpPr>
-          <p:cNvPr id="78" name="CuadroTexto 7"/>
+          <p:cNvPr id="70" name="CuadroTexto 6">
+            <a:extLst>
+              <a:ext uri="{FF2B5EF4-FFF2-40B4-BE49-F238E27FC236}">
+                <a16:creationId xmlns:a16="http://schemas.microsoft.com/office/drawing/2014/main" id="{3DEA0B96-4192-4895-6B7C-C25239E9F536}"/>
+              </a:ext>
+            </a:extLst>
+          </p:cNvPr>
+          <p:cNvSpPr/>
+          <p:nvPr/>
+        </p:nvSpPr>
+        <p:spPr>
+          <a:xfrm>
+            <a:off x="527760" y="479520"/>
+            <a:ext cx="11135160" cy="629488"/>
+          </a:xfrm>
+          <a:prstGeom prst="rect">
+            <a:avLst/>
+          </a:prstGeom>
+          <a:noFill/>
+          <a:ln w="0">
+            <a:noFill/>
+          </a:ln>
+        </p:spPr>
+        <p:style>
+          <a:lnRef idx="0">
+            <a:scrgbClr r="0" g="0" b="0"/>
+          </a:lnRef>
+          <a:fillRef idx="0">
+            <a:scrgbClr r="0" g="0" b="0"/>
+          </a:fillRef>
+          <a:effectRef idx="0">
+            <a:scrgbClr r="0" g="0" b="0"/>
+          </a:effectRef>
+          <a:fontRef idx="minor"/>
+        </p:style>
+        <p:txBody>
+          <a:bodyPr lIns="90000" tIns="45000" rIns="90000" bIns="45000" anchor="t">
+            <a:spAutoFit/>
+          </a:bodyPr>
+          <a:lstStyle/>
+          <a:p>
+            <a:pPr defTabSz="914400">
+              <a:lnSpc>
+                <a:spcPct val="100000"/>
+              </a:lnSpc>
+            </a:pPr>
+            <a:r>
+              <a:rPr lang="es-ES" sz="3500" b="1" strike="noStrike" spc="-1" dirty="0">
+                <a:solidFill>
+                  <a:srgbClr val="582808"/>
+                </a:solidFill>
+                <a:latin typeface="Calibri Light"/>
+              </a:rPr>
+              <a:t>EDA – </a:t>
+            </a:r>
+            <a:r>
+              <a:rPr lang="es-ES" sz="3500" b="1" spc="-1" dirty="0">
+                <a:solidFill>
+                  <a:srgbClr val="582808"/>
+                </a:solidFill>
+                <a:latin typeface="Calibri Light"/>
+              </a:rPr>
+              <a:t>Análisis de las variables categóricas</a:t>
+            </a:r>
+            <a:endParaRPr lang="es-ES" sz="3500" b="0" strike="noStrike" spc="-1" dirty="0">
+              <a:solidFill>
+                <a:srgbClr val="000000"/>
+              </a:solidFill>
+              <a:latin typeface="Arial"/>
+            </a:endParaRPr>
+          </a:p>
+        </p:txBody>
+      </p:sp>
+      <p:pic>
+        <p:nvPicPr>
+          <p:cNvPr id="72" name="Imagen 7">
+            <a:extLst>
+              <a:ext uri="{FF2B5EF4-FFF2-40B4-BE49-F238E27FC236}">
+                <a16:creationId xmlns:a16="http://schemas.microsoft.com/office/drawing/2014/main" id="{5D01CF4C-F84E-49F7-49D0-9B8E11B09695}"/>
+              </a:ext>
+            </a:extLst>
+          </p:cNvPr>
+          <p:cNvPicPr/>
+          <p:nvPr/>
+        </p:nvPicPr>
+        <p:blipFill>
+          <a:blip r:embed="rId2"/>
+          <a:stretch/>
+        </p:blipFill>
+        <p:spPr>
+          <a:xfrm>
+            <a:off x="10348920" y="479520"/>
+            <a:ext cx="1314000" cy="987840"/>
+          </a:xfrm>
+          <a:prstGeom prst="rect">
+            <a:avLst/>
+          </a:prstGeom>
+          <a:ln w="0">
+            <a:noFill/>
+          </a:ln>
+        </p:spPr>
+      </p:pic>
+      <p:sp>
+        <p:nvSpPr>
+          <p:cNvPr id="2" name="CuadroTexto 1">
+            <a:extLst>
+              <a:ext uri="{FF2B5EF4-FFF2-40B4-BE49-F238E27FC236}">
+                <a16:creationId xmlns:a16="http://schemas.microsoft.com/office/drawing/2014/main" id="{FA8959A3-34EE-F1A3-CED5-4A2990BCF52E}"/>
+              </a:ext>
+            </a:extLst>
+          </p:cNvPr>
+          <p:cNvSpPr txBox="1"/>
+          <p:nvPr/>
+        </p:nvSpPr>
+        <p:spPr>
+          <a:xfrm>
+            <a:off x="692150" y="1530350"/>
+            <a:ext cx="4832350" cy="4524315"/>
+          </a:xfrm>
+          <a:prstGeom prst="rect">
+            <a:avLst/>
+          </a:prstGeom>
+          <a:noFill/>
+        </p:spPr>
+        <p:txBody>
+          <a:bodyPr wrap="square" rtlCol="0">
+            <a:spAutoFit/>
+          </a:bodyPr>
+          <a:lstStyle/>
+          <a:p>
+            <a:r>
+              <a:rPr lang="es-ES" sz="1600" dirty="0"/>
+              <a:t>Tras el análisis univariante de las variables categóricas, se ha optado por seleccionar únicamente aquellas con baja o moderada cardinalidad y potencial capacidad explicativa respecto a la variable objetivo.</a:t>
+            </a:r>
+          </a:p>
+          <a:p>
+            <a:endParaRPr lang="es-ES" sz="1600" dirty="0"/>
+          </a:p>
+          <a:p>
+            <a:r>
+              <a:rPr lang="es-ES" sz="1600" dirty="0"/>
+              <a:t>Se descartan variables de texto libre, fechas técnicas o identificadores, así como aquellas con excesivo número de categorías que podrían generar un alto número de variables </a:t>
+            </a:r>
+            <a:r>
+              <a:rPr lang="es-ES" sz="1600" dirty="0" err="1"/>
+              <a:t>dummy</a:t>
+            </a:r>
+            <a:r>
+              <a:rPr lang="es-ES" sz="1600" dirty="0"/>
+              <a:t> y aumentar innecesariamente la complejidad del modelo.</a:t>
+            </a:r>
+          </a:p>
+          <a:p>
+            <a:endParaRPr lang="es-ES" sz="1600" dirty="0"/>
+          </a:p>
+          <a:p>
+            <a:r>
+              <a:rPr lang="es-ES" sz="1600" dirty="0"/>
+              <a:t>Las variables seleccionadas presentan una estructura interpretable, categorías bien definidas y relevancia conceptual en el contexto del negocio (tipo de alojamiento, características del anfitrión y disponibilidad), lo que las convierte en candidatas adecuadas para el análisis bivariante y su posible inclusión en modelos predictivos posteriores.</a:t>
+            </a:r>
+          </a:p>
+        </p:txBody>
+      </p:sp>
+      <p:pic>
+        <p:nvPicPr>
+          <p:cNvPr id="4" name="Imagen 3" descr="The diagram displays a bar chart comparing various factors influencing revenue, such as room type, instant bookability, host response time, and neighborhood group, with different categories and their respective values.&#10;&#10;El contenido generado por IA puede ser incorrecto.">
+            <a:extLst>
+              <a:ext uri="{FF2B5EF4-FFF2-40B4-BE49-F238E27FC236}">
+                <a16:creationId xmlns:a16="http://schemas.microsoft.com/office/drawing/2014/main" id="{2D928E33-2B71-96D9-EEF5-C8913783E0D6}"/>
+              </a:ext>
+            </a:extLst>
+          </p:cNvPr>
+          <p:cNvPicPr>
+            <a:picLocks noChangeAspect="1"/>
+          </p:cNvPicPr>
+          <p:nvPr/>
+        </p:nvPicPr>
+        <p:blipFill>
+          <a:blip r:embed="rId3"/>
+          <a:stretch>
+            <a:fillRect/>
+          </a:stretch>
+        </p:blipFill>
+        <p:spPr>
+          <a:xfrm>
+            <a:off x="6215570" y="1648945"/>
+            <a:ext cx="5284280" cy="4405720"/>
+          </a:xfrm>
+          <a:prstGeom prst="rect">
+            <a:avLst/>
+          </a:prstGeom>
+        </p:spPr>
+      </p:pic>
+    </p:spTree>
+    <p:extLst>
+      <p:ext uri="{BB962C8B-B14F-4D97-AF65-F5344CB8AC3E}">
+        <p14:creationId xmlns:p14="http://schemas.microsoft.com/office/powerpoint/2010/main" val="1996184875"/>
+      </p:ext>
+    </p:extLst>
+  </p:cSld>
+  <p:clrMapOvr>
+    <a:masterClrMapping/>
+  </p:clrMapOvr>
+</p:sld>
+</file>
+
+<file path=ppt/slides/slide7.xml><?xml version="1.0" encoding="utf-8"?>
+<p:sld xmlns:a="http://schemas.openxmlformats.org/drawingml/2006/main" xmlns:r="http://schemas.openxmlformats.org/officeDocument/2006/relationships" xmlns:p="http://schemas.openxmlformats.org/presentationml/2006/main">
+  <p:cSld>
+    <p:spTree>
+      <p:nvGrpSpPr>
+        <p:cNvPr id="1" name="">
+          <a:extLst>
+            <a:ext uri="{FF2B5EF4-FFF2-40B4-BE49-F238E27FC236}">
+              <a16:creationId xmlns:a16="http://schemas.microsoft.com/office/drawing/2014/main" id="{FD121FDC-E1A3-C20C-FE05-4E09458D6C84}"/>
+            </a:ext>
+          </a:extLst>
+        </p:cNvPr>
+        <p:cNvGrpSpPr/>
+        <p:nvPr/>
+      </p:nvGrpSpPr>
+      <p:grpSpPr>
+        <a:xfrm>
+          <a:off x="0" y="0"/>
+          <a:ext cx="0" cy="0"/>
+          <a:chOff x="0" y="0"/>
+          <a:chExt cx="0" cy="0"/>
+        </a:xfrm>
+      </p:grpSpPr>
+      <p:sp>
+        <p:nvSpPr>
+          <p:cNvPr id="69" name="Rectángulo 2">
+            <a:extLst>
+              <a:ext uri="{FF2B5EF4-FFF2-40B4-BE49-F238E27FC236}">
+                <a16:creationId xmlns:a16="http://schemas.microsoft.com/office/drawing/2014/main" id="{882FE741-6D53-7A1B-6629-94CE2E3711E0}"/>
+              </a:ext>
+            </a:extLst>
+          </p:cNvPr>
+          <p:cNvSpPr/>
+          <p:nvPr/>
+        </p:nvSpPr>
+        <p:spPr>
+          <a:xfrm>
+            <a:off x="1080" y="0"/>
+            <a:ext cx="12191040" cy="6856920"/>
+          </a:xfrm>
+          <a:prstGeom prst="rect">
+            <a:avLst/>
+          </a:prstGeom>
+          <a:solidFill>
+            <a:schemeClr val="accent2">
+              <a:lumMod val="20000"/>
+              <a:lumOff val="80000"/>
+            </a:schemeClr>
+          </a:solidFill>
+          <a:ln>
+            <a:solidFill>
+              <a:srgbClr val="325490"/>
+            </a:solidFill>
+          </a:ln>
+        </p:spPr>
+        <p:style>
+          <a:lnRef idx="2">
+            <a:schemeClr val="accent1">
+              <a:shade val="50000"/>
+            </a:schemeClr>
+          </a:lnRef>
+          <a:fillRef idx="1">
+            <a:schemeClr val="accent1"/>
+          </a:fillRef>
+          <a:effectRef idx="0">
+            <a:schemeClr val="accent1"/>
+          </a:effectRef>
+          <a:fontRef idx="minor"/>
+        </p:style>
+        <p:txBody>
+          <a:bodyPr lIns="90000" tIns="45000" rIns="90000" bIns="45000" anchor="ctr">
+            <a:noAutofit/>
+          </a:bodyPr>
+          <a:lstStyle/>
+          <a:p>
+            <a:endParaRPr lang="es-ES" sz="1800" b="0" strike="noStrike" spc="-1">
+              <a:solidFill>
+                <a:schemeClr val="lt1"/>
+              </a:solidFill>
+              <a:latin typeface="Calibri"/>
+            </a:endParaRPr>
+          </a:p>
+        </p:txBody>
+      </p:sp>
+      <p:sp>
+        <p:nvSpPr>
+          <p:cNvPr id="70" name="CuadroTexto 6">
+            <a:extLst>
+              <a:ext uri="{FF2B5EF4-FFF2-40B4-BE49-F238E27FC236}">
+                <a16:creationId xmlns:a16="http://schemas.microsoft.com/office/drawing/2014/main" id="{6D4CB89F-B3BD-0818-2E5A-575B8160EB79}"/>
+              </a:ext>
+            </a:extLst>
+          </p:cNvPr>
+          <p:cNvSpPr/>
+          <p:nvPr/>
+        </p:nvSpPr>
+        <p:spPr>
+          <a:xfrm>
+            <a:off x="527760" y="479520"/>
+            <a:ext cx="11135160" cy="629488"/>
+          </a:xfrm>
+          <a:prstGeom prst="rect">
+            <a:avLst/>
+          </a:prstGeom>
+          <a:noFill/>
+          <a:ln w="0">
+            <a:noFill/>
+          </a:ln>
+        </p:spPr>
+        <p:style>
+          <a:lnRef idx="0">
+            <a:scrgbClr r="0" g="0" b="0"/>
+          </a:lnRef>
+          <a:fillRef idx="0">
+            <a:scrgbClr r="0" g="0" b="0"/>
+          </a:fillRef>
+          <a:effectRef idx="0">
+            <a:scrgbClr r="0" g="0" b="0"/>
+          </a:effectRef>
+          <a:fontRef idx="minor"/>
+        </p:style>
+        <p:txBody>
+          <a:bodyPr lIns="90000" tIns="45000" rIns="90000" bIns="45000" anchor="t">
+            <a:spAutoFit/>
+          </a:bodyPr>
+          <a:lstStyle/>
+          <a:p>
+            <a:pPr defTabSz="914400">
+              <a:lnSpc>
+                <a:spcPct val="100000"/>
+              </a:lnSpc>
+            </a:pPr>
+            <a:r>
+              <a:rPr lang="es-ES" sz="3500" b="1" strike="noStrike" spc="-1" dirty="0">
+                <a:solidFill>
+                  <a:srgbClr val="582808"/>
+                </a:solidFill>
+                <a:latin typeface="Calibri Light"/>
+              </a:rPr>
+              <a:t>EDA – </a:t>
+            </a:r>
+            <a:r>
+              <a:rPr lang="es-ES" sz="3500" b="1" spc="-1" dirty="0">
+                <a:solidFill>
+                  <a:srgbClr val="582808"/>
+                </a:solidFill>
+                <a:latin typeface="Calibri Light"/>
+              </a:rPr>
+              <a:t>Análisis de las variables categóricas</a:t>
+            </a:r>
+            <a:endParaRPr lang="es-ES" sz="3500" b="0" strike="noStrike" spc="-1" dirty="0">
+              <a:solidFill>
+                <a:srgbClr val="000000"/>
+              </a:solidFill>
+              <a:latin typeface="Arial"/>
+            </a:endParaRPr>
+          </a:p>
+        </p:txBody>
+      </p:sp>
+      <p:pic>
+        <p:nvPicPr>
+          <p:cNvPr id="72" name="Imagen 7">
+            <a:extLst>
+              <a:ext uri="{FF2B5EF4-FFF2-40B4-BE49-F238E27FC236}">
+                <a16:creationId xmlns:a16="http://schemas.microsoft.com/office/drawing/2014/main" id="{78C1F89B-9138-11C5-29F5-5083C02EFFF5}"/>
+              </a:ext>
+            </a:extLst>
+          </p:cNvPr>
+          <p:cNvPicPr/>
+          <p:nvPr/>
+        </p:nvPicPr>
+        <p:blipFill>
+          <a:blip r:embed="rId2"/>
+          <a:stretch/>
+        </p:blipFill>
+        <p:spPr>
+          <a:xfrm>
+            <a:off x="10348920" y="479520"/>
+            <a:ext cx="1314000" cy="987840"/>
+          </a:xfrm>
+          <a:prstGeom prst="rect">
+            <a:avLst/>
+          </a:prstGeom>
+          <a:ln w="0">
+            <a:noFill/>
+          </a:ln>
+        </p:spPr>
+      </p:pic>
+      <p:sp>
+        <p:nvSpPr>
+          <p:cNvPr id="2" name="CuadroTexto 1">
+            <a:extLst>
+              <a:ext uri="{FF2B5EF4-FFF2-40B4-BE49-F238E27FC236}">
+                <a16:creationId xmlns:a16="http://schemas.microsoft.com/office/drawing/2014/main" id="{17558ED0-DF97-F95A-DF44-92C553EC2539}"/>
+              </a:ext>
+            </a:extLst>
+          </p:cNvPr>
+          <p:cNvSpPr txBox="1"/>
+          <p:nvPr/>
+        </p:nvSpPr>
+        <p:spPr>
+          <a:xfrm>
+            <a:off x="692150" y="1530350"/>
+            <a:ext cx="10970770" cy="4278094"/>
+          </a:xfrm>
+          <a:prstGeom prst="rect">
+            <a:avLst/>
+          </a:prstGeom>
+          <a:noFill/>
+        </p:spPr>
+        <p:txBody>
+          <a:bodyPr wrap="square" rtlCol="0">
+            <a:spAutoFit/>
+          </a:bodyPr>
+          <a:lstStyle/>
+          <a:p>
+            <a:r>
+              <a:rPr lang="es-ES" sz="1600" dirty="0"/>
+              <a:t>En el análisis bivariante de variables categóricas se observan diferencias claras en la distribución del </a:t>
+            </a:r>
+            <a:r>
+              <a:rPr lang="es-ES" sz="1600" dirty="0" err="1"/>
+              <a:t>revenue</a:t>
+            </a:r>
+            <a:r>
+              <a:rPr lang="es-ES" sz="1600" dirty="0"/>
+              <a:t> según ciertas categorías.</a:t>
+            </a:r>
+          </a:p>
+          <a:p>
+            <a:endParaRPr lang="es-ES" sz="1600" dirty="0"/>
+          </a:p>
+          <a:p>
+            <a:r>
+              <a:rPr lang="es-ES" sz="1600" dirty="0"/>
+              <a:t>En esta fase se ha realizado un preprocesamiento específico de algunas variables categóricas con el objetivo de prepararlas para el modelado.</a:t>
+            </a:r>
+          </a:p>
+          <a:p>
+            <a:endParaRPr lang="es-ES" sz="1600" dirty="0"/>
+          </a:p>
+          <a:p>
+            <a:r>
+              <a:rPr lang="es-ES" sz="1600" dirty="0"/>
+              <a:t>En primer lugar, la variable </a:t>
+            </a:r>
+            <a:r>
+              <a:rPr lang="es-ES" sz="1600" b="1" dirty="0" err="1"/>
+              <a:t>host_response_time</a:t>
+            </a:r>
+            <a:r>
+              <a:rPr lang="es-ES" sz="1600" dirty="0"/>
+              <a:t>, que posee un orden natural en sus categorías, ha sido transformada en una variable ordinal numérica. Esta codificación permite preservar la jerarquía implícita en el tiempo de respuesta del anfitrión (desde respuestas más rápidas hasta más lentas), facilitando que los modelos puedan capturar mejor su posible relación con el </a:t>
+            </a:r>
+            <a:r>
+              <a:rPr lang="es-ES" sz="1600" dirty="0" err="1"/>
+              <a:t>revenue</a:t>
+            </a:r>
+            <a:r>
+              <a:rPr lang="es-ES" sz="1600" dirty="0"/>
+              <a:t>.</a:t>
+            </a:r>
+          </a:p>
+          <a:p>
+            <a:endParaRPr lang="es-ES" sz="1600" dirty="0"/>
+          </a:p>
+          <a:p>
+            <a:r>
+              <a:rPr lang="es-ES" sz="1600" dirty="0"/>
+              <a:t>Por otro lado, se ha simplificado la variable </a:t>
+            </a:r>
+            <a:r>
+              <a:rPr lang="es-ES" sz="1600" b="1" dirty="0" err="1"/>
+              <a:t>room_type</a:t>
+            </a:r>
+            <a:r>
+              <a:rPr lang="es-ES" sz="1600" dirty="0"/>
+              <a:t>, agrupando las categorías con muy baja representación ("</a:t>
+            </a:r>
+            <a:r>
+              <a:rPr lang="es-ES" sz="1600" dirty="0" err="1"/>
+              <a:t>Shared</a:t>
+            </a:r>
+            <a:r>
+              <a:rPr lang="es-ES" sz="1600" dirty="0"/>
+              <a:t> </a:t>
+            </a:r>
+            <a:r>
+              <a:rPr lang="es-ES" sz="1600" dirty="0" err="1"/>
+              <a:t>room</a:t>
+            </a:r>
+            <a:r>
+              <a:rPr lang="es-ES" sz="1600" dirty="0"/>
+              <a:t>" y "Hotel </a:t>
+            </a:r>
+            <a:r>
+              <a:rPr lang="es-ES" sz="1600" dirty="0" err="1"/>
+              <a:t>room</a:t>
+            </a:r>
+            <a:r>
+              <a:rPr lang="es-ES" sz="1600" dirty="0"/>
+              <a:t>") bajo una nueva categoría común ("</a:t>
+            </a:r>
+            <a:r>
+              <a:rPr lang="es-ES" sz="1600" dirty="0" err="1"/>
+              <a:t>Other</a:t>
+            </a:r>
+            <a:r>
+              <a:rPr lang="es-ES" sz="1600" dirty="0"/>
+              <a:t>"). Esta decisión reduce la dispersión de información y evita que categorías con pocos registros introduzcan ruido en el modelo.</a:t>
+            </a:r>
+          </a:p>
+          <a:p>
+            <a:endParaRPr lang="es-ES" sz="1600" dirty="0"/>
+          </a:p>
+          <a:p>
+            <a:r>
+              <a:rPr lang="es-ES" sz="1600" dirty="0"/>
+              <a:t>Finalmente, en las variables binarias relacionadas con características del anfitrión (</a:t>
+            </a:r>
+            <a:r>
+              <a:rPr lang="es-ES" sz="1600" b="1" dirty="0" err="1"/>
+              <a:t>host_is_superhost</a:t>
+            </a:r>
+            <a:r>
+              <a:rPr lang="es-ES" sz="1600" dirty="0"/>
+              <a:t>, </a:t>
+            </a:r>
+            <a:r>
+              <a:rPr lang="es-ES" sz="1600" b="1" dirty="0" err="1"/>
+              <a:t>host_identity_verified</a:t>
+            </a:r>
+            <a:r>
+              <a:rPr lang="es-ES" sz="1600" dirty="0"/>
+              <a:t>, </a:t>
+            </a:r>
+            <a:r>
+              <a:rPr lang="es-ES" sz="1600" b="1" dirty="0" err="1"/>
+              <a:t>host_has_profile_pic</a:t>
+            </a:r>
+            <a:r>
+              <a:rPr lang="es-ES" sz="1600" b="1" dirty="0"/>
+              <a:t> </a:t>
+            </a:r>
+            <a:r>
+              <a:rPr lang="es-ES" sz="1600" dirty="0"/>
+              <a:t>e </a:t>
+            </a:r>
+            <a:r>
+              <a:rPr lang="es-ES" sz="1600" b="1" dirty="0" err="1"/>
+              <a:t>instant_bookable</a:t>
+            </a:r>
+            <a:r>
+              <a:rPr lang="es-ES" sz="1600" dirty="0"/>
+              <a:t>), se han imputado los valores faltantes con la categoría "</a:t>
+            </a:r>
+            <a:r>
+              <a:rPr lang="es-ES" sz="1600" dirty="0" err="1"/>
+              <a:t>Unknown</a:t>
+            </a:r>
+            <a:r>
+              <a:rPr lang="es-ES" sz="1600" dirty="0"/>
+              <a:t>", evitando la pérdida de observaciones y manteniendo la coherencia categórica para su posterior codificación.</a:t>
+            </a:r>
+          </a:p>
+        </p:txBody>
+      </p:sp>
+    </p:spTree>
+    <p:extLst>
+      <p:ext uri="{BB962C8B-B14F-4D97-AF65-F5344CB8AC3E}">
+        <p14:creationId xmlns:p14="http://schemas.microsoft.com/office/powerpoint/2010/main" val="719195083"/>
+      </p:ext>
+    </p:extLst>
+  </p:cSld>
+  <p:clrMapOvr>
+    <a:masterClrMapping/>
+  </p:clrMapOvr>
+</p:sld>
+</file>
+
+<file path=ppt/slides/slide8.xml><?xml version="1.0" encoding="utf-8"?>
+<p:sld xmlns:a="http://schemas.openxmlformats.org/drawingml/2006/main" xmlns:r="http://schemas.openxmlformats.org/officeDocument/2006/relationships" xmlns:p="http://schemas.openxmlformats.org/presentationml/2006/main">
+  <p:cSld>
+    <p:spTree>
+      <p:nvGrpSpPr>
+        <p:cNvPr id="1" name="">
+          <a:extLst>
+            <a:ext uri="{FF2B5EF4-FFF2-40B4-BE49-F238E27FC236}">
+              <a16:creationId xmlns:a16="http://schemas.microsoft.com/office/drawing/2014/main" id="{4A6B3029-122E-3C57-4D53-00CB3C92287B}"/>
+            </a:ext>
+          </a:extLst>
+        </p:cNvPr>
+        <p:cNvGrpSpPr/>
+        <p:nvPr/>
+      </p:nvGrpSpPr>
+      <p:grpSpPr>
+        <a:xfrm>
+          <a:off x="0" y="0"/>
+          <a:ext cx="0" cy="0"/>
+          <a:chOff x="0" y="0"/>
+          <a:chExt cx="0" cy="0"/>
+        </a:xfrm>
+      </p:grpSpPr>
+      <p:sp>
+        <p:nvSpPr>
+          <p:cNvPr id="69" name="Rectángulo 2">
+            <a:extLst>
+              <a:ext uri="{FF2B5EF4-FFF2-40B4-BE49-F238E27FC236}">
+                <a16:creationId xmlns:a16="http://schemas.microsoft.com/office/drawing/2014/main" id="{68FB0694-55AB-8361-D412-5A7370234F36}"/>
+              </a:ext>
+            </a:extLst>
+          </p:cNvPr>
+          <p:cNvSpPr/>
+          <p:nvPr/>
+        </p:nvSpPr>
+        <p:spPr>
+          <a:xfrm>
+            <a:off x="1080" y="0"/>
+            <a:ext cx="12191040" cy="6856920"/>
+          </a:xfrm>
+          <a:prstGeom prst="rect">
+            <a:avLst/>
+          </a:prstGeom>
+          <a:solidFill>
+            <a:schemeClr val="accent2">
+              <a:lumMod val="20000"/>
+              <a:lumOff val="80000"/>
+            </a:schemeClr>
+          </a:solidFill>
+          <a:ln>
+            <a:solidFill>
+              <a:srgbClr val="325490"/>
+            </a:solidFill>
+          </a:ln>
+        </p:spPr>
+        <p:style>
+          <a:lnRef idx="2">
+            <a:schemeClr val="accent1">
+              <a:shade val="50000"/>
+            </a:schemeClr>
+          </a:lnRef>
+          <a:fillRef idx="1">
+            <a:schemeClr val="accent1"/>
+          </a:fillRef>
+          <a:effectRef idx="0">
+            <a:schemeClr val="accent1"/>
+          </a:effectRef>
+          <a:fontRef idx="minor"/>
+        </p:style>
+        <p:txBody>
+          <a:bodyPr lIns="90000" tIns="45000" rIns="90000" bIns="45000" anchor="ctr">
+            <a:noAutofit/>
+          </a:bodyPr>
+          <a:lstStyle/>
+          <a:p>
+            <a:endParaRPr lang="es-ES" sz="1800" b="0" strike="noStrike" spc="-1" dirty="0">
+              <a:solidFill>
+                <a:schemeClr val="lt1"/>
+              </a:solidFill>
+              <a:latin typeface="Calibri"/>
+            </a:endParaRPr>
+          </a:p>
+        </p:txBody>
+      </p:sp>
+      <p:sp>
+        <p:nvSpPr>
+          <p:cNvPr id="70" name="CuadroTexto 6">
+            <a:extLst>
+              <a:ext uri="{FF2B5EF4-FFF2-40B4-BE49-F238E27FC236}">
+                <a16:creationId xmlns:a16="http://schemas.microsoft.com/office/drawing/2014/main" id="{5BBF151E-CAE0-EDBD-CB2B-EAA0C3C772BE}"/>
+              </a:ext>
+            </a:extLst>
+          </p:cNvPr>
+          <p:cNvSpPr/>
+          <p:nvPr/>
+        </p:nvSpPr>
+        <p:spPr>
+          <a:xfrm>
+            <a:off x="527760" y="479520"/>
+            <a:ext cx="11135160" cy="629488"/>
+          </a:xfrm>
+          <a:prstGeom prst="rect">
+            <a:avLst/>
+          </a:prstGeom>
+          <a:noFill/>
+          <a:ln w="0">
+            <a:noFill/>
+          </a:ln>
+        </p:spPr>
+        <p:style>
+          <a:lnRef idx="0">
+            <a:scrgbClr r="0" g="0" b="0"/>
+          </a:lnRef>
+          <a:fillRef idx="0">
+            <a:scrgbClr r="0" g="0" b="0"/>
+          </a:fillRef>
+          <a:effectRef idx="0">
+            <a:scrgbClr r="0" g="0" b="0"/>
+          </a:effectRef>
+          <a:fontRef idx="minor"/>
+        </p:style>
+        <p:txBody>
+          <a:bodyPr lIns="90000" tIns="45000" rIns="90000" bIns="45000" anchor="t">
+            <a:spAutoFit/>
+          </a:bodyPr>
+          <a:lstStyle/>
+          <a:p>
+            <a:pPr defTabSz="914400">
+              <a:lnSpc>
+                <a:spcPct val="100000"/>
+              </a:lnSpc>
+            </a:pPr>
+            <a:r>
+              <a:rPr lang="es-ES" sz="3500" b="1" strike="noStrike" spc="-1" dirty="0">
+                <a:solidFill>
+                  <a:srgbClr val="582808"/>
+                </a:solidFill>
+                <a:latin typeface="Calibri Light"/>
+              </a:rPr>
+              <a:t>EDA – Eliminación de </a:t>
+            </a:r>
+            <a:r>
+              <a:rPr lang="es-ES" sz="3500" b="1" strike="noStrike" spc="-1" dirty="0" err="1">
+                <a:solidFill>
+                  <a:srgbClr val="582808"/>
+                </a:solidFill>
+                <a:latin typeface="Calibri Light"/>
+              </a:rPr>
+              <a:t>features</a:t>
+            </a:r>
+            <a:r>
+              <a:rPr lang="es-ES" sz="3500" b="1" strike="noStrike" spc="-1" dirty="0">
+                <a:solidFill>
+                  <a:srgbClr val="582808"/>
+                </a:solidFill>
+                <a:latin typeface="Calibri Light"/>
+              </a:rPr>
+              <a:t> preliminar</a:t>
+            </a:r>
+            <a:endParaRPr lang="es-ES" sz="3500" b="0" strike="noStrike" spc="-1" dirty="0">
+              <a:solidFill>
+                <a:srgbClr val="000000"/>
+              </a:solidFill>
+              <a:latin typeface="Arial"/>
+            </a:endParaRPr>
+          </a:p>
+        </p:txBody>
+      </p:sp>
+      <p:pic>
+        <p:nvPicPr>
+          <p:cNvPr id="72" name="Imagen 7">
+            <a:extLst>
+              <a:ext uri="{FF2B5EF4-FFF2-40B4-BE49-F238E27FC236}">
+                <a16:creationId xmlns:a16="http://schemas.microsoft.com/office/drawing/2014/main" id="{32115E20-24D2-A54E-B56F-78A09657232E}"/>
+              </a:ext>
+            </a:extLst>
+          </p:cNvPr>
+          <p:cNvPicPr/>
+          <p:nvPr/>
+        </p:nvPicPr>
+        <p:blipFill>
+          <a:blip r:embed="rId2"/>
+          <a:stretch/>
+        </p:blipFill>
+        <p:spPr>
+          <a:xfrm>
+            <a:off x="10348920" y="479520"/>
+            <a:ext cx="1314000" cy="987840"/>
+          </a:xfrm>
+          <a:prstGeom prst="rect">
+            <a:avLst/>
+          </a:prstGeom>
+          <a:ln w="0">
+            <a:noFill/>
+          </a:ln>
+        </p:spPr>
+      </p:pic>
+      <p:sp>
+        <p:nvSpPr>
+          <p:cNvPr id="2" name="CuadroTexto 1">
+            <a:extLst>
+              <a:ext uri="{FF2B5EF4-FFF2-40B4-BE49-F238E27FC236}">
+                <a16:creationId xmlns:a16="http://schemas.microsoft.com/office/drawing/2014/main" id="{CE00C4C5-D61D-178D-85B7-812ACE256B4D}"/>
+              </a:ext>
+            </a:extLst>
+          </p:cNvPr>
+          <p:cNvSpPr txBox="1"/>
+          <p:nvPr/>
+        </p:nvSpPr>
+        <p:spPr>
+          <a:xfrm>
+            <a:off x="711200" y="1377950"/>
+            <a:ext cx="4330700" cy="4031873"/>
+          </a:xfrm>
+          <a:prstGeom prst="rect">
+            <a:avLst/>
+          </a:prstGeom>
+          <a:noFill/>
+        </p:spPr>
+        <p:txBody>
+          <a:bodyPr wrap="square" rtlCol="0">
+            <a:spAutoFit/>
+          </a:bodyPr>
+          <a:lstStyle/>
+          <a:p>
+            <a:r>
+              <a:rPr lang="es-ES" sz="1600" dirty="0"/>
+              <a:t>En esta fase se realiza una depuración moderada del conjunto de variables con el objetivo de eliminar información no estructurada y posibles identificadores sin capacidad predictiva, manteniendo, no obstante, aquellas variables potencialmente redundantes que podrían aportar valor en modelos no lineales.</a:t>
+            </a:r>
+          </a:p>
+          <a:p>
+            <a:endParaRPr lang="es-ES" sz="1600" dirty="0"/>
+          </a:p>
+          <a:p>
+            <a:r>
+              <a:rPr lang="es-ES" sz="1600" dirty="0"/>
+              <a:t>Dado que el análisis contempla tanto modelos lineales como modelos basados en árboles, se opta por una estrategia intermedia: reducir variables claramente irrelevantes sin aplicar una eliminación excesivamente restrictiva, permitiendo posteriormente comparar el comportamiento de distintos algoritmos frente a posibles problemas de multicolinealidad.</a:t>
+            </a:r>
+          </a:p>
+        </p:txBody>
+      </p:sp>
+      <p:pic>
+        <p:nvPicPr>
+          <p:cNvPr id="4" name="Imagen 3" descr="The text describes a Python code snippet that performs data cleaning on a DataFrame by dropping certain columns related to availability, reviews, and nights based on specified criteria.&#10;&#10;El contenido generado por IA puede ser incorrecto.">
+            <a:extLst>
+              <a:ext uri="{FF2B5EF4-FFF2-40B4-BE49-F238E27FC236}">
+                <a16:creationId xmlns:a16="http://schemas.microsoft.com/office/drawing/2014/main" id="{122DCC7A-0971-D258-A5A2-8BF4E05DA913}"/>
+              </a:ext>
+            </a:extLst>
+          </p:cNvPr>
+          <p:cNvPicPr>
+            <a:picLocks noChangeAspect="1"/>
+          </p:cNvPicPr>
+          <p:nvPr/>
+        </p:nvPicPr>
+        <p:blipFill>
+          <a:blip r:embed="rId3"/>
+          <a:srcRect l="2384" t="760" r="38563" b="5444"/>
+          <a:stretch>
+            <a:fillRect/>
+          </a:stretch>
+        </p:blipFill>
+        <p:spPr>
+          <a:xfrm>
+            <a:off x="5472119" y="1377950"/>
+            <a:ext cx="4876801" cy="5137150"/>
+          </a:xfrm>
+          <a:prstGeom prst="rect">
+            <a:avLst/>
+          </a:prstGeom>
+        </p:spPr>
+      </p:pic>
+    </p:spTree>
+    <p:extLst>
+      <p:ext uri="{BB962C8B-B14F-4D97-AF65-F5344CB8AC3E}">
+        <p14:creationId xmlns:p14="http://schemas.microsoft.com/office/powerpoint/2010/main" val="2637221106"/>
+      </p:ext>
+    </p:extLst>
+  </p:cSld>
+  <p:clrMapOvr>
+    <a:masterClrMapping/>
+  </p:clrMapOvr>
+</p:sld>
+</file>
+
+<file path=ppt/slides/slide9.xml><?xml version="1.0" encoding="utf-8"?>
+<p:sld xmlns:a="http://schemas.openxmlformats.org/drawingml/2006/main" xmlns:r="http://schemas.openxmlformats.org/officeDocument/2006/relationships" xmlns:p="http://schemas.openxmlformats.org/presentationml/2006/main">
+  <p:cSld>
+    <p:spTree>
+      <p:nvGrpSpPr>
+        <p:cNvPr id="1" name="">
+          <a:extLst>
+            <a:ext uri="{FF2B5EF4-FFF2-40B4-BE49-F238E27FC236}">
+              <a16:creationId xmlns:a16="http://schemas.microsoft.com/office/drawing/2014/main" id="{E91C0232-5F3D-7D65-FBCB-28AF706807AC}"/>
+            </a:ext>
+          </a:extLst>
+        </p:cNvPr>
+        <p:cNvGrpSpPr/>
+        <p:nvPr/>
+      </p:nvGrpSpPr>
+      <p:grpSpPr>
+        <a:xfrm>
+          <a:off x="0" y="0"/>
+          <a:ext cx="0" cy="0"/>
+          <a:chOff x="0" y="0"/>
+          <a:chExt cx="0" cy="0"/>
+        </a:xfrm>
+      </p:grpSpPr>
+      <p:sp>
+        <p:nvSpPr>
+          <p:cNvPr id="69" name="Rectángulo 2">
+            <a:extLst>
+              <a:ext uri="{FF2B5EF4-FFF2-40B4-BE49-F238E27FC236}">
+                <a16:creationId xmlns:a16="http://schemas.microsoft.com/office/drawing/2014/main" id="{8BEF87F7-FE0F-4530-7847-A553D4F255B9}"/>
+              </a:ext>
+            </a:extLst>
+          </p:cNvPr>
+          <p:cNvSpPr/>
+          <p:nvPr/>
+        </p:nvSpPr>
+        <p:spPr>
+          <a:xfrm>
+            <a:off x="1080" y="0"/>
+            <a:ext cx="12191040" cy="6856920"/>
+          </a:xfrm>
+          <a:prstGeom prst="rect">
+            <a:avLst/>
+          </a:prstGeom>
+          <a:solidFill>
+            <a:schemeClr val="accent2">
+              <a:lumMod val="20000"/>
+              <a:lumOff val="80000"/>
+            </a:schemeClr>
+          </a:solidFill>
+          <a:ln>
+            <a:solidFill>
+              <a:srgbClr val="325490"/>
+            </a:solidFill>
+          </a:ln>
+        </p:spPr>
+        <p:style>
+          <a:lnRef idx="2">
+            <a:schemeClr val="accent1">
+              <a:shade val="50000"/>
+            </a:schemeClr>
+          </a:lnRef>
+          <a:fillRef idx="1">
+            <a:schemeClr val="accent1"/>
+          </a:fillRef>
+          <a:effectRef idx="0">
+            <a:schemeClr val="accent1"/>
+          </a:effectRef>
+          <a:fontRef idx="minor"/>
+        </p:style>
+        <p:txBody>
+          <a:bodyPr lIns="90000" tIns="45000" rIns="90000" bIns="45000" anchor="ctr">
+            <a:noAutofit/>
+          </a:bodyPr>
+          <a:lstStyle/>
+          <a:p>
+            <a:endParaRPr lang="es-ES" sz="1800" b="0" strike="noStrike" spc="-1">
+              <a:solidFill>
+                <a:schemeClr val="lt1"/>
+              </a:solidFill>
+              <a:latin typeface="Calibri"/>
+            </a:endParaRPr>
+          </a:p>
+        </p:txBody>
+      </p:sp>
+      <p:sp>
+        <p:nvSpPr>
+          <p:cNvPr id="70" name="CuadroTexto 6">
+            <a:extLst>
+              <a:ext uri="{FF2B5EF4-FFF2-40B4-BE49-F238E27FC236}">
+                <a16:creationId xmlns:a16="http://schemas.microsoft.com/office/drawing/2014/main" id="{AEBB16D7-5240-D6FE-BFD2-7A7A553F6F63}"/>
+              </a:ext>
+            </a:extLst>
+          </p:cNvPr>
           <p:cNvSpPr/>
           <p:nvPr/>
         </p:nvSpPr>
@@ -11986,7 +13851,7 @@
                 </a:solidFill>
                 <a:latin typeface="Calibri Light"/>
               </a:rPr>
-              <a:t>5. Conclusiones</a:t>
+              <a:t>EDA – Duplicados, missings y outliers (JAVI)</a:t>
             </a:r>
             <a:endParaRPr lang="es-ES" sz="3500" b="0" strike="noStrike" spc="-1">
               <a:solidFill>
@@ -11997,39 +13862,22 @@
           </a:p>
         </p:txBody>
       </p:sp>
-      <p:pic>
-        <p:nvPicPr>
-          <p:cNvPr id="79" name="Imagen 6"/>
-          <p:cNvPicPr/>
-          <p:nvPr/>
-        </p:nvPicPr>
-        <p:blipFill>
-          <a:blip r:embed="rId2"/>
-          <a:stretch/>
-        </p:blipFill>
-        <p:spPr>
-          <a:xfrm>
-            <a:off x="10598040" y="479520"/>
-            <a:ext cx="1064880" cy="797760"/>
-          </a:xfrm>
-          <a:prstGeom prst="rect">
-            <a:avLst/>
-          </a:prstGeom>
-          <a:ln w="0">
-            <a:noFill/>
-          </a:ln>
-        </p:spPr>
-      </p:pic>
       <p:sp>
         <p:nvSpPr>
-          <p:cNvPr id="80" name="CuadroTexto 1"/>
+          <p:cNvPr id="71" name="CuadroTexto 13">
+            <a:extLst>
+              <a:ext uri="{FF2B5EF4-FFF2-40B4-BE49-F238E27FC236}">
+                <a16:creationId xmlns:a16="http://schemas.microsoft.com/office/drawing/2014/main" id="{6F1FCC3A-323B-56EB-6F96-FA9263734877}"/>
+              </a:ext>
+            </a:extLst>
+          </p:cNvPr>
           <p:cNvSpPr/>
           <p:nvPr/>
         </p:nvSpPr>
         <p:spPr>
           <a:xfrm>
-            <a:off x="646200" y="1411200"/>
-            <a:ext cx="11135160" cy="4204440"/>
+            <a:off x="716400" y="1839960"/>
+            <a:ext cx="10946520" cy="3537976"/>
           </a:xfrm>
           <a:prstGeom prst="rect">
             <a:avLst/>
@@ -12057,21 +13905,369 @@
           </a:bodyPr>
           <a:lstStyle/>
           <a:p>
-            <a:pPr defTabSz="914400">
+            <a:pPr marL="216000" indent="-216000" defTabSz="914400">
               <a:lnSpc>
                 <a:spcPct val="100000"/>
               </a:lnSpc>
+              <a:buClr>
+                <a:srgbClr val="582808"/>
+              </a:buClr>
+              <a:buFont typeface="Wingdings" charset="2"/>
+              <a:buChar char=""/>
             </a:pPr>
-            <a:endParaRPr lang="es-ES" sz="1800" b="0" strike="noStrike" spc="-1">
+            <a:r>
+              <a:rPr lang="es-ES" sz="1600" b="0" strike="noStrike" spc="-1" dirty="0">
+                <a:solidFill>
+                  <a:srgbClr val="582808"/>
+                </a:solidFill>
+                <a:latin typeface="Calibri"/>
+              </a:rPr>
+              <a:t>Al partir de tres </a:t>
+            </a:r>
+            <a:r>
+              <a:rPr lang="es-ES" sz="1600" b="0" strike="noStrike" spc="-1" dirty="0" err="1">
+                <a:solidFill>
+                  <a:srgbClr val="582808"/>
+                </a:solidFill>
+                <a:latin typeface="Calibri"/>
+              </a:rPr>
+              <a:t>subdatasets</a:t>
+            </a:r>
+            <a:r>
+              <a:rPr lang="es-ES" sz="1600" b="0" strike="noStrike" spc="-1" dirty="0">
+                <a:solidFill>
+                  <a:srgbClr val="582808"/>
+                </a:solidFill>
+                <a:latin typeface="Calibri"/>
+              </a:rPr>
+              <a:t> que unificamos en el </a:t>
+            </a:r>
+            <a:r>
+              <a:rPr lang="es-ES" sz="1600" b="0" strike="noStrike" spc="-1" dirty="0" err="1">
+                <a:solidFill>
+                  <a:srgbClr val="582808"/>
+                </a:solidFill>
+                <a:latin typeface="Calibri"/>
+              </a:rPr>
+              <a:t>dataset</a:t>
+            </a:r>
+            <a:r>
+              <a:rPr lang="es-ES" sz="1600" b="0" strike="noStrike" spc="-1" dirty="0">
+                <a:solidFill>
+                  <a:srgbClr val="582808"/>
+                </a:solidFill>
+                <a:latin typeface="Calibri"/>
+              </a:rPr>
+              <a:t> definitivo de partida, la mayoría de duplicados ya los eliminamos previamente localizando coincidencias por id. Por lo que en este punto, teníamos un número reducido de duplicados en nuestro </a:t>
+            </a:r>
+            <a:r>
+              <a:rPr lang="es-ES" sz="1600" b="0" strike="noStrike" spc="-1" dirty="0" err="1">
+                <a:solidFill>
+                  <a:srgbClr val="582808"/>
+                </a:solidFill>
+                <a:latin typeface="Calibri"/>
+              </a:rPr>
+              <a:t>dataframe</a:t>
+            </a:r>
+            <a:r>
+              <a:rPr lang="es-ES" sz="1600" b="0" strike="noStrike" spc="-1" dirty="0">
+                <a:solidFill>
+                  <a:srgbClr val="582808"/>
+                </a:solidFill>
+                <a:latin typeface="Calibri"/>
+              </a:rPr>
+              <a:t> que eliminamos.</a:t>
+            </a:r>
+            <a:endParaRPr lang="es-ES" sz="1600" b="0" strike="noStrike" spc="-1" dirty="0">
               <a:solidFill>
                 <a:srgbClr val="000000"/>
               </a:solidFill>
               <a:latin typeface="Arial"/>
             </a:endParaRPr>
           </a:p>
+          <a:p>
+            <a:pPr marL="216000" indent="-216000" defTabSz="914400">
+              <a:lnSpc>
+                <a:spcPct val="100000"/>
+              </a:lnSpc>
+              <a:buClr>
+                <a:srgbClr val="582808"/>
+              </a:buClr>
+              <a:buFont typeface="Wingdings" charset="2"/>
+              <a:buChar char=""/>
+            </a:pPr>
+            <a:endParaRPr lang="es-ES" sz="1600" b="0" strike="noStrike" spc="-1" dirty="0">
+              <a:solidFill>
+                <a:srgbClr val="000000"/>
+              </a:solidFill>
+              <a:latin typeface="Arial"/>
+            </a:endParaRPr>
+          </a:p>
+          <a:p>
+            <a:pPr marL="216000" indent="-216000" defTabSz="914400">
+              <a:lnSpc>
+                <a:spcPct val="100000"/>
+              </a:lnSpc>
+              <a:buClr>
+                <a:srgbClr val="582808"/>
+              </a:buClr>
+              <a:buFont typeface="Wingdings" charset="2"/>
+              <a:buChar char=""/>
+            </a:pPr>
+            <a:r>
+              <a:rPr lang="es-ES" sz="1600" b="0" strike="noStrike" spc="-1" dirty="0">
+                <a:solidFill>
+                  <a:srgbClr val="582808"/>
+                </a:solidFill>
+                <a:latin typeface="Calibri"/>
+              </a:rPr>
+              <a:t>Continuamos con el tratamiento de nulos o </a:t>
+            </a:r>
+            <a:r>
+              <a:rPr lang="es-ES" sz="1600" b="0" strike="noStrike" spc="-1" dirty="0" err="1">
+                <a:solidFill>
+                  <a:srgbClr val="582808"/>
+                </a:solidFill>
+                <a:latin typeface="Calibri"/>
+              </a:rPr>
+              <a:t>missings</a:t>
+            </a:r>
+            <a:r>
+              <a:rPr lang="es-ES" sz="1600" b="0" strike="noStrike" spc="-1" dirty="0">
+                <a:solidFill>
+                  <a:srgbClr val="582808"/>
+                </a:solidFill>
+                <a:latin typeface="Calibri"/>
+              </a:rPr>
+              <a:t>, valorando para cada </a:t>
+            </a:r>
+            <a:r>
+              <a:rPr lang="es-ES" sz="1600" b="0" strike="noStrike" spc="-1" dirty="0" err="1">
+                <a:solidFill>
+                  <a:srgbClr val="582808"/>
+                </a:solidFill>
+                <a:latin typeface="Calibri"/>
+              </a:rPr>
+              <a:t>feature</a:t>
+            </a:r>
+            <a:r>
+              <a:rPr lang="es-ES" sz="1600" b="0" strike="noStrike" spc="-1" dirty="0">
+                <a:solidFill>
+                  <a:srgbClr val="582808"/>
+                </a:solidFill>
+                <a:latin typeface="Calibri"/>
+              </a:rPr>
+              <a:t> la solución más acorde en función del porcentaje de nulos y el tipo de la columna.</a:t>
+            </a:r>
+            <a:br>
+              <a:rPr sz="1600" dirty="0"/>
+            </a:br>
+            <a:r>
+              <a:rPr lang="es-ES" sz="1600" b="0" strike="noStrike" spc="-1" dirty="0">
+                <a:solidFill>
+                  <a:srgbClr val="582808"/>
+                </a:solidFill>
+                <a:latin typeface="Calibri"/>
+              </a:rPr>
+              <a:t>Aplicamos tratamientos que van desde la eliminación de una </a:t>
+            </a:r>
+            <a:r>
+              <a:rPr lang="es-ES" sz="1600" b="0" strike="noStrike" spc="-1" dirty="0" err="1">
+                <a:solidFill>
+                  <a:srgbClr val="582808"/>
+                </a:solidFill>
+                <a:latin typeface="Calibri"/>
+              </a:rPr>
+              <a:t>feature</a:t>
+            </a:r>
+            <a:r>
+              <a:rPr lang="es-ES" sz="1600" b="0" strike="noStrike" spc="-1" dirty="0">
+                <a:solidFill>
+                  <a:srgbClr val="582808"/>
+                </a:solidFill>
+                <a:latin typeface="Calibri"/>
+              </a:rPr>
+              <a:t> completa al presentar un porcentaje muy elevado de </a:t>
+            </a:r>
+            <a:r>
+              <a:rPr lang="es-ES" sz="1600" b="0" strike="noStrike" spc="-1" dirty="0" err="1">
+                <a:solidFill>
+                  <a:srgbClr val="582808"/>
+                </a:solidFill>
+                <a:latin typeface="Calibri"/>
+              </a:rPr>
+              <a:t>missings</a:t>
+            </a:r>
+            <a:r>
+              <a:rPr lang="es-ES" sz="1600" b="0" strike="noStrike" spc="-1" dirty="0">
+                <a:solidFill>
+                  <a:srgbClr val="582808"/>
+                </a:solidFill>
+                <a:latin typeface="Calibri"/>
+              </a:rPr>
+              <a:t> y ser de poca relevancia para el objetivo, hasta imputación de medianas, modas, mapeo de datos en función de clasificación de los valores e imputación de 0 u otros valores según la distribución de cada </a:t>
+            </a:r>
+            <a:r>
+              <a:rPr lang="es-ES" sz="1600" b="0" strike="noStrike" spc="-1" dirty="0" err="1">
+                <a:solidFill>
+                  <a:srgbClr val="582808"/>
+                </a:solidFill>
+                <a:latin typeface="Calibri"/>
+              </a:rPr>
+              <a:t>feature</a:t>
+            </a:r>
+            <a:r>
+              <a:rPr lang="es-ES" sz="1600" b="0" strike="noStrike" spc="-1" dirty="0">
+                <a:solidFill>
+                  <a:srgbClr val="582808"/>
+                </a:solidFill>
+                <a:latin typeface="Calibri"/>
+              </a:rPr>
+              <a:t>.</a:t>
+            </a:r>
+            <a:br>
+              <a:rPr sz="1600" dirty="0"/>
+            </a:br>
+            <a:r>
+              <a:rPr lang="es-ES" sz="1600" b="0" strike="noStrike" spc="-1" dirty="0">
+                <a:solidFill>
+                  <a:srgbClr val="582808"/>
+                </a:solidFill>
+                <a:latin typeface="Calibri"/>
+              </a:rPr>
+              <a:t> </a:t>
+            </a:r>
+            <a:endParaRPr lang="es-ES" sz="1600" b="0" strike="noStrike" spc="-1" dirty="0">
+              <a:solidFill>
+                <a:srgbClr val="000000"/>
+              </a:solidFill>
+              <a:latin typeface="Arial"/>
+            </a:endParaRPr>
+          </a:p>
+          <a:p>
+            <a:pPr marL="216000" indent="-216000" defTabSz="914400">
+              <a:lnSpc>
+                <a:spcPct val="100000"/>
+              </a:lnSpc>
+              <a:buClr>
+                <a:srgbClr val="582808"/>
+              </a:buClr>
+              <a:buFont typeface="Wingdings" charset="2"/>
+              <a:buChar char=""/>
+            </a:pPr>
+            <a:r>
+              <a:rPr lang="es-ES" sz="1600" b="0" strike="noStrike" spc="-1" dirty="0">
+                <a:solidFill>
+                  <a:srgbClr val="582808"/>
+                </a:solidFill>
+                <a:latin typeface="Calibri"/>
+              </a:rPr>
+              <a:t>Por último, para concluir con esta evaluación preliminar de features, detectamos los posibles </a:t>
+            </a:r>
+            <a:r>
+              <a:rPr lang="es-ES" sz="1600" b="0" strike="noStrike" spc="-1" dirty="0" err="1">
+                <a:solidFill>
+                  <a:srgbClr val="582808"/>
+                </a:solidFill>
+                <a:latin typeface="Calibri"/>
+              </a:rPr>
+              <a:t>outliers</a:t>
+            </a:r>
+            <a:r>
+              <a:rPr lang="es-ES" sz="1600" b="0" strike="noStrike" spc="-1" dirty="0">
+                <a:solidFill>
+                  <a:srgbClr val="582808"/>
+                </a:solidFill>
+                <a:latin typeface="Calibri"/>
+              </a:rPr>
+              <a:t>.</a:t>
+            </a:r>
+            <a:br>
+              <a:rPr sz="1600" dirty="0"/>
+            </a:br>
+            <a:r>
+              <a:rPr lang="es-ES" sz="1600" b="0" strike="noStrike" spc="-1" dirty="0">
+                <a:solidFill>
+                  <a:srgbClr val="582808"/>
+                </a:solidFill>
+                <a:latin typeface="Calibri"/>
+              </a:rPr>
+              <a:t>En nuestro caso visualizamos los percentiles extremos 1% y 99% para comparar con los valores mínimos y máximos.</a:t>
+            </a:r>
+            <a:br>
+              <a:rPr sz="1600" dirty="0"/>
+            </a:br>
+            <a:r>
+              <a:rPr lang="es-ES" sz="1600" b="0" strike="noStrike" spc="-1" dirty="0">
+                <a:solidFill>
+                  <a:srgbClr val="582808"/>
+                </a:solidFill>
+                <a:latin typeface="Calibri"/>
+              </a:rPr>
+              <a:t>Con esta visualización, igualamos los máximos al valor del percentil 99% de alguna </a:t>
+            </a:r>
+            <a:r>
+              <a:rPr lang="es-ES" sz="1600" b="0" strike="noStrike" spc="-1" dirty="0" err="1">
+                <a:solidFill>
+                  <a:srgbClr val="582808"/>
+                </a:solidFill>
+                <a:latin typeface="Calibri"/>
+              </a:rPr>
+              <a:t>feature</a:t>
+            </a:r>
+            <a:r>
+              <a:rPr lang="es-ES" sz="1600" b="0" strike="noStrike" spc="-1" dirty="0">
+                <a:solidFill>
+                  <a:srgbClr val="582808"/>
+                </a:solidFill>
+                <a:latin typeface="Calibri"/>
+              </a:rPr>
+              <a:t> que carecía de sentido ese valor máximo.</a:t>
+            </a:r>
+            <a:endParaRPr lang="es-ES" sz="1600" b="0" strike="noStrike" spc="-1" dirty="0">
+              <a:solidFill>
+                <a:srgbClr val="000000"/>
+              </a:solidFill>
+              <a:latin typeface="Arial"/>
+            </a:endParaRPr>
+          </a:p>
         </p:txBody>
       </p:sp>
+      <p:pic>
+        <p:nvPicPr>
+          <p:cNvPr id="72" name="Imagen 7">
+            <a:extLst>
+              <a:ext uri="{FF2B5EF4-FFF2-40B4-BE49-F238E27FC236}">
+                <a16:creationId xmlns:a16="http://schemas.microsoft.com/office/drawing/2014/main" id="{EBC7D6D4-07E0-CC47-5617-19C0074BD8A4}"/>
+              </a:ext>
+            </a:extLst>
+          </p:cNvPr>
+          <p:cNvPicPr/>
+          <p:nvPr/>
+        </p:nvPicPr>
+        <p:blipFill>
+          <a:blip r:embed="rId2"/>
+          <a:stretch/>
+        </p:blipFill>
+        <p:spPr>
+          <a:xfrm>
+            <a:off x="10348920" y="479520"/>
+            <a:ext cx="1314000" cy="987840"/>
+          </a:xfrm>
+          <a:prstGeom prst="rect">
+            <a:avLst/>
+          </a:prstGeom>
+          <a:ln w="0">
+            <a:noFill/>
+          </a:ln>
+        </p:spPr>
+      </p:pic>
     </p:spTree>
+    <p:extLst>
+      <p:ext uri="{BB962C8B-B14F-4D97-AF65-F5344CB8AC3E}">
+        <p14:creationId xmlns:p14="http://schemas.microsoft.com/office/powerpoint/2010/main" val="4220750260"/>
+      </p:ext>
+    </p:extLst>
   </p:cSld>
   <p:clrMapOvr>
     <a:masterClrMapping/>

--- a/ML_ppt.pptx
+++ b/ML_ppt.pptx
@@ -27,8 +27,12 @@
     <p:sldId id="260" r:id="rId21"/>
     <p:sldId id="258" r:id="rId22"/>
     <p:sldId id="263" r:id="rId23"/>
-    <p:sldId id="265" r:id="rId24"/>
-    <p:sldId id="261" r:id="rId25"/>
+    <p:sldId id="272" r:id="rId24"/>
+    <p:sldId id="273" r:id="rId25"/>
+    <p:sldId id="274" r:id="rId26"/>
+    <p:sldId id="275" r:id="rId27"/>
+    <p:sldId id="261" r:id="rId28"/>
+    <p:sldId id="276" r:id="rId29"/>
   </p:sldIdLst>
   <p:sldSz cx="12192000" cy="6858000"/>
   <p:notesSz cx="7559675" cy="10691813"/>
@@ -8115,8 +8119,8 @@
         </p:nvSpPr>
         <p:spPr>
           <a:xfrm>
-            <a:off x="7229880" y="727920"/>
-            <a:ext cx="4956480" cy="363960"/>
+            <a:off x="5258463" y="509259"/>
+            <a:ext cx="6933537" cy="383267"/>
           </a:xfrm>
           <a:prstGeom prst="rect">
             <a:avLst/>
@@ -8146,7 +8150,7 @@
           <a:fontRef idx="minor"/>
         </p:style>
         <p:txBody>
-          <a:bodyPr lIns="90000" tIns="45000" rIns="90000" bIns="45000" anchor="t">
+          <a:bodyPr wrap="square" lIns="90000" tIns="45000" rIns="90000" bIns="45000" anchor="t">
             <a:spAutoFit/>
           </a:bodyPr>
           <a:lstStyle/>
@@ -8157,15 +8161,15 @@
               </a:lnSpc>
             </a:pPr>
             <a:r>
-              <a:rPr lang="es-ES" sz="1800" b="1" strike="noStrike" spc="-1">
+              <a:rPr lang="es-ES" sz="1900" b="1" strike="noStrike" spc="-1" dirty="0">
                 <a:solidFill>
                   <a:schemeClr val="lt1"/>
                 </a:solidFill>
                 <a:latin typeface="Calibri"/>
               </a:rPr>
-              <a:t>Oferta turística vs precios de vivienda en Madrid</a:t>
-            </a:r>
-            <a:endParaRPr lang="es-ES" sz="1800" b="0" strike="noStrike" spc="-1">
+              <a:t>Estimación de rentabilidad anual para vivienda turística en Madrid</a:t>
+            </a:r>
+            <a:endParaRPr lang="es-ES" sz="1900" b="0" strike="noStrike" spc="-1" dirty="0">
               <a:solidFill>
                 <a:srgbClr val="000000"/>
               </a:solidFill>
@@ -8182,8 +8186,8 @@
         </p:nvSpPr>
         <p:spPr>
           <a:xfrm>
-            <a:off x="7229880" y="1097280"/>
-            <a:ext cx="4741200" cy="1431360"/>
+            <a:off x="7120550" y="892526"/>
+            <a:ext cx="4741200" cy="1568206"/>
           </a:xfrm>
           <a:prstGeom prst="rect">
             <a:avLst/>
@@ -8224,7 +8228,7 @@
               </a:lnSpc>
             </a:pPr>
             <a:r>
-              <a:rPr lang="es-ES" sz="1400" b="0" strike="noStrike" spc="-1">
+              <a:rPr lang="es-ES" sz="1600" b="0" strike="noStrike" spc="-1" dirty="0">
                 <a:solidFill>
                   <a:schemeClr val="lt1"/>
                 </a:solidFill>
@@ -8232,7 +8236,7 @@
               </a:rPr>
               <a:t>Participantes:</a:t>
             </a:r>
-            <a:endParaRPr lang="es-ES" sz="1400" b="0" strike="noStrike" spc="-1">
+            <a:endParaRPr lang="es-ES" sz="1600" b="0" strike="noStrike" spc="-1" dirty="0">
               <a:solidFill>
                 <a:srgbClr val="000000"/>
               </a:solidFill>
@@ -8246,7 +8250,7 @@
               </a:lnSpc>
             </a:pPr>
             <a:r>
-              <a:rPr lang="es-ES" sz="1400" b="0" strike="noStrike" spc="-1">
+              <a:rPr lang="es-ES" sz="1600" b="0" strike="noStrike" spc="-1" dirty="0">
                 <a:solidFill>
                   <a:schemeClr val="lt1"/>
                 </a:solidFill>
@@ -8254,7 +8258,7 @@
               </a:rPr>
               <a:t>Nazareth Montero</a:t>
             </a:r>
-            <a:endParaRPr lang="es-ES" sz="1400" b="0" strike="noStrike" spc="-1">
+            <a:endParaRPr lang="es-ES" sz="1600" b="0" strike="noStrike" spc="-1" dirty="0">
               <a:solidFill>
                 <a:srgbClr val="000000"/>
               </a:solidFill>
@@ -8268,7 +8272,7 @@
               </a:lnSpc>
             </a:pPr>
             <a:r>
-              <a:rPr lang="es-ES" sz="1400" b="0" strike="noStrike" spc="-1">
+              <a:rPr lang="es-ES" sz="1600" b="0" strike="noStrike" spc="-1" dirty="0">
                 <a:solidFill>
                   <a:schemeClr val="lt1"/>
                 </a:solidFill>
@@ -8276,7 +8280,7 @@
               </a:rPr>
               <a:t>Javier Pascual</a:t>
             </a:r>
-            <a:endParaRPr lang="es-ES" sz="1400" b="0" strike="noStrike" spc="-1">
+            <a:endParaRPr lang="es-ES" sz="1600" b="0" strike="noStrike" spc="-1" dirty="0">
               <a:solidFill>
                 <a:srgbClr val="000000"/>
               </a:solidFill>
@@ -8290,7 +8294,7 @@
               </a:lnSpc>
             </a:pPr>
             <a:r>
-              <a:rPr lang="es-ES" sz="1400" b="0" strike="noStrike" spc="-1">
+              <a:rPr lang="es-ES" sz="1600" b="0" strike="noStrike" spc="-1" dirty="0">
                 <a:solidFill>
                   <a:schemeClr val="lt1"/>
                 </a:solidFill>
@@ -8298,7 +8302,7 @@
               </a:rPr>
               <a:t>Román Diaz</a:t>
             </a:r>
-            <a:endParaRPr lang="es-ES" sz="1400" b="0" strike="noStrike" spc="-1">
+            <a:endParaRPr lang="es-ES" sz="1600" b="0" strike="noStrike" spc="-1" dirty="0">
               <a:solidFill>
                 <a:srgbClr val="000000"/>
               </a:solidFill>
@@ -8312,7 +8316,7 @@
               </a:lnSpc>
             </a:pPr>
             <a:r>
-              <a:rPr lang="es-ES" sz="1400" b="0" strike="noStrike" spc="-1">
+              <a:rPr lang="es-ES" sz="1600" b="0" strike="noStrike" spc="-1" dirty="0">
                 <a:solidFill>
                   <a:schemeClr val="lt1"/>
                 </a:solidFill>
@@ -8320,7 +8324,7 @@
               </a:rPr>
               <a:t>Sara Ruiz</a:t>
             </a:r>
-            <a:endParaRPr lang="es-ES" sz="1400" b="0" strike="noStrike" spc="-1">
+            <a:endParaRPr lang="es-ES" sz="1600" b="0" strike="noStrike" spc="-1" dirty="0">
               <a:solidFill>
                 <a:srgbClr val="000000"/>
               </a:solidFill>
@@ -8333,7 +8337,7 @@
                 <a:spcPct val="100000"/>
               </a:lnSpc>
             </a:pPr>
-            <a:endParaRPr lang="es-ES" sz="1800" b="0" strike="noStrike" spc="-1">
+            <a:endParaRPr lang="es-ES" sz="1600" b="0" strike="noStrike" spc="-1" dirty="0">
               <a:solidFill>
                 <a:srgbClr val="000000"/>
               </a:solidFill>
@@ -8413,7 +8417,8 @@
           </a:bodyPr>
           <a:lstStyle/>
           <a:p>
-            <a:endParaRPr lang="es-ES" sz="1800" b="0" strike="noStrike" spc="-1">
+            <a:pPr algn="just"/>
+            <a:endParaRPr lang="es-ES" sz="1800" b="0" strike="noStrike" spc="-1" dirty="0">
               <a:solidFill>
                 <a:schemeClr val="lt1"/>
               </a:solidFill>
@@ -8431,7 +8436,7 @@
         <p:spPr>
           <a:xfrm>
             <a:off x="527760" y="479520"/>
-            <a:ext cx="11135160" cy="623160"/>
+            <a:ext cx="11135160" cy="629488"/>
           </a:xfrm>
           <a:prstGeom prst="rect">
             <a:avLst/>
@@ -8465,25 +8470,46 @@
               </a:lnSpc>
             </a:pPr>
             <a:r>
-              <a:rPr lang="es-ES" sz="3500" b="1" strike="noStrike" spc="-1">
+              <a:rPr lang="es-ES" sz="3500" b="1" strike="noStrike" spc="-1" dirty="0">
                 <a:solidFill>
                   <a:srgbClr val="582808"/>
                 </a:solidFill>
                 <a:latin typeface="Calibri Light"/>
                 <a:ea typeface="Microsoft YaHei"/>
               </a:rPr>
-              <a:t>EDA – Feature engineering </a:t>
-            </a:r>
-            <a:r>
-              <a:rPr lang="es-ES" sz="3500" b="1" strike="noStrike" spc="-1">
+              <a:t>EDA – </a:t>
+            </a:r>
+            <a:r>
+              <a:rPr lang="es-ES" sz="3000" b="1" strike="noStrike" spc="-1" dirty="0" err="1">
                 <a:solidFill>
                   <a:srgbClr val="582808"/>
                 </a:solidFill>
                 <a:latin typeface="Calibri Light"/>
-              </a:rPr>
-              <a:t> (JAVI)</a:t>
-            </a:r>
-            <a:endParaRPr lang="es-ES" sz="3500" b="0" strike="noStrike" spc="-1">
+                <a:ea typeface="Microsoft YaHei"/>
+              </a:rPr>
+              <a:t>Feature</a:t>
+            </a:r>
+            <a:r>
+              <a:rPr lang="es-ES" sz="3000" b="1" strike="noStrike" spc="-1" dirty="0">
+                <a:solidFill>
+                  <a:srgbClr val="582808"/>
+                </a:solidFill>
+                <a:latin typeface="Calibri Light"/>
+                <a:ea typeface="Microsoft YaHei"/>
+              </a:rPr>
+              <a:t> </a:t>
+            </a:r>
+            <a:r>
+              <a:rPr lang="es-ES" sz="3000" b="1" strike="noStrike" spc="-1" dirty="0" err="1">
+                <a:solidFill>
+                  <a:srgbClr val="582808"/>
+                </a:solidFill>
+                <a:latin typeface="Calibri Light"/>
+                <a:ea typeface="Microsoft YaHei"/>
+              </a:rPr>
+              <a:t>engineering</a:t>
+            </a:r>
+            <a:endParaRPr lang="es-ES" sz="3000" b="0" strike="noStrike" spc="-1" dirty="0">
               <a:solidFill>
                 <a:srgbClr val="000000"/>
               </a:solidFill>
@@ -8959,18 +8985,25 @@
       </p:sp>
       <p:pic>
         <p:nvPicPr>
-          <p:cNvPr id="76" name="Imagen 9"/>
+          <p:cNvPr id="6" name="Imagen 20">
+            <a:hlinkClick r:id="rId2" action="ppaction://hlinksldjump"/>
+            <a:extLst>
+              <a:ext uri="{FF2B5EF4-FFF2-40B4-BE49-F238E27FC236}">
+                <a16:creationId xmlns:a16="http://schemas.microsoft.com/office/drawing/2014/main" id="{2E7451B6-7E64-4DEB-B414-503A9ADFACF0}"/>
+              </a:ext>
+            </a:extLst>
+          </p:cNvPr>
           <p:cNvPicPr/>
           <p:nvPr/>
         </p:nvPicPr>
         <p:blipFill>
-          <a:blip r:embed="rId2"/>
+          <a:blip r:embed="rId3"/>
           <a:stretch/>
         </p:blipFill>
         <p:spPr>
           <a:xfrm>
-            <a:off x="10348920" y="479520"/>
-            <a:ext cx="1314000" cy="987840"/>
+            <a:off x="10706465" y="347264"/>
+            <a:ext cx="1220995" cy="664372"/>
           </a:xfrm>
           <a:prstGeom prst="rect">
             <a:avLst/>
@@ -9111,10 +9144,10 @@
                 </a:solidFill>
                 <a:latin typeface="+mj-lt"/>
               </a:rPr>
-              <a:t>Modelado y resultados </a:t>
-            </a:r>
-            <a:r>
-              <a:rPr lang="es-ES" sz="2500" b="1" spc="-1" dirty="0">
+              <a:t>Modelado y resultados: </a:t>
+            </a:r>
+            <a:r>
+              <a:rPr lang="es-ES" sz="3000" b="1" spc="-1" dirty="0">
                 <a:solidFill>
                   <a:schemeClr val="accent2">
                     <a:lumMod val="50000"/>
@@ -9122,7 +9155,7 @@
                 </a:solidFill>
                 <a:latin typeface="+mj-lt"/>
               </a:rPr>
-              <a:t>(Selección de métricas y Cross Validation)</a:t>
+              <a:t>Selección de métricas y CV</a:t>
             </a:r>
           </a:p>
           <a:p>
@@ -9190,551 +9223,453 @@
       </p:sp>
       <p:sp>
         <p:nvSpPr>
-          <p:cNvPr id="6" name="Rectangle 3">
+          <p:cNvPr id="8" name="CuadroTexto 13">
             <a:extLst>
               <a:ext uri="{FF2B5EF4-FFF2-40B4-BE49-F238E27FC236}">
-                <a16:creationId xmlns:a16="http://schemas.microsoft.com/office/drawing/2014/main" id="{837AF994-6692-B983-CB34-D40E8FFF1DA6}"/>
+                <a16:creationId xmlns:a16="http://schemas.microsoft.com/office/drawing/2014/main" id="{0CAEE926-6477-42E9-A71A-E440C5622199}"/>
               </a:ext>
             </a:extLst>
           </p:cNvPr>
-          <p:cNvSpPr>
-            <a:spLocks noChangeArrowheads="1"/>
-          </p:cNvSpPr>
+          <p:cNvSpPr/>
           <p:nvPr/>
         </p:nvSpPr>
-        <p:spPr bwMode="auto">
+        <p:spPr>
           <a:xfrm>
-            <a:off x="458159" y="1558252"/>
-            <a:ext cx="11733841" cy="4093428"/>
+            <a:off x="622080" y="1906233"/>
+            <a:ext cx="10946520" cy="3045534"/>
           </a:xfrm>
           <a:prstGeom prst="rect">
             <a:avLst/>
           </a:prstGeom>
           <a:noFill/>
-          <a:ln>
+          <a:ln w="0">
             <a:noFill/>
           </a:ln>
-          <a:effectLst/>
-          <a:extLst>
-            <a:ext uri="{909E8E84-426E-40DD-AFC4-6F175D3DCCD1}">
-              <a14:hiddenFill xmlns:a14="http://schemas.microsoft.com/office/drawing/2010/main">
-                <a:solidFill>
-                  <a:schemeClr val="accent1"/>
-                </a:solidFill>
-              </a14:hiddenFill>
-            </a:ext>
-            <a:ext uri="{91240B29-F687-4F45-9708-019B960494DF}">
-              <a14:hiddenLine xmlns:a14="http://schemas.microsoft.com/office/drawing/2010/main" w="9525">
-                <a:solidFill>
-                  <a:schemeClr val="tx1"/>
-                </a:solidFill>
-                <a:miter lim="800000"/>
-                <a:headEnd/>
-                <a:tailEnd/>
-              </a14:hiddenLine>
-            </a:ext>
-            <a:ext uri="{AF507438-7753-43E0-B8FC-AC1667EBCBE1}">
-              <a14:hiddenEffects xmlns:a14="http://schemas.microsoft.com/office/drawing/2010/main">
-                <a:effectLst>
-                  <a:outerShdw dist="35921" dir="2700000" algn="ctr" rotWithShape="0">
-                    <a:schemeClr val="bg2"/>
-                  </a:outerShdw>
-                </a:effectLst>
-              </a14:hiddenEffects>
-            </a:ext>
-          </a:extLst>
         </p:spPr>
+        <p:style>
+          <a:lnRef idx="0">
+            <a:scrgbClr r="0" g="0" b="0"/>
+          </a:lnRef>
+          <a:fillRef idx="0">
+            <a:scrgbClr r="0" g="0" b="0"/>
+          </a:fillRef>
+          <a:effectRef idx="0">
+            <a:scrgbClr r="0" g="0" b="0"/>
+          </a:effectRef>
+          <a:fontRef idx="minor"/>
+        </p:style>
         <p:txBody>
-          <a:bodyPr vert="horz" wrap="square" lIns="91440" tIns="45720" rIns="91440" bIns="45720" numCol="1" anchor="ctr" anchorCtr="0" compatLnSpc="1">
-            <a:prstTxWarp prst="textNoShape">
-              <a:avLst/>
-            </a:prstTxWarp>
+          <a:bodyPr lIns="90000" tIns="45000" rIns="90000" bIns="45000" anchor="t">
             <a:spAutoFit/>
           </a:bodyPr>
           <a:lstStyle/>
           <a:p>
-            <a:pPr marL="0" marR="0" lvl="0" indent="0" algn="l" defTabSz="914400" rtl="0" eaLnBrk="0" fontAlgn="base" latinLnBrk="0" hangingPunct="0">
+            <a:pPr marL="216000" indent="-216000" algn="just" defTabSz="914400">
               <a:lnSpc>
                 <a:spcPct val="100000"/>
               </a:lnSpc>
-              <a:spcBef>
-                <a:spcPct val="0"/>
-              </a:spcBef>
-              <a:spcAft>
-                <a:spcPct val="0"/>
-              </a:spcAft>
-              <a:buClrTx/>
-              <a:buSzTx/>
-              <a:buFontTx/>
-              <a:buChar char="•"/>
-              <a:tabLst/>
+              <a:buClr>
+                <a:srgbClr val="582808"/>
+              </a:buClr>
+              <a:buFont typeface="Wingdings" charset="2"/>
+              <a:buChar char=""/>
             </a:pPr>
             <a:r>
-              <a:rPr kumimoji="0" lang="es-CL" altLang="es-CL" sz="2000" b="0" i="0" u="none" strike="noStrike" cap="none" normalizeH="0" baseline="0" dirty="0">
-                <a:ln>
-                  <a:noFill/>
-                </a:ln>
-                <a:solidFill>
-                  <a:schemeClr val="accent2">
-                    <a:lumMod val="50000"/>
-                  </a:schemeClr>
-                </a:solidFill>
-                <a:effectLst/>
-                <a:latin typeface="+mj-lt"/>
+              <a:rPr lang="es-ES" sz="1600" b="0" strike="noStrike" spc="-1" dirty="0">
+                <a:solidFill>
+                  <a:srgbClr val="582808"/>
+                </a:solidFill>
+                <a:latin typeface="Calibri"/>
               </a:rPr>
               <a:t>Transformamos el target a </a:t>
             </a:r>
             <a:r>
-              <a:rPr kumimoji="0" lang="es-CL" altLang="es-CL" sz="2000" b="0" i="0" u="none" strike="noStrike" cap="none" normalizeH="0" baseline="0" dirty="0" err="1">
-                <a:ln>
-                  <a:noFill/>
-                </a:ln>
-                <a:solidFill>
-                  <a:schemeClr val="accent2">
-                    <a:lumMod val="50000"/>
-                  </a:schemeClr>
-                </a:solidFill>
-                <a:effectLst/>
-                <a:latin typeface="+mj-lt"/>
+              <a:rPr lang="es-ES" sz="1600" b="0" strike="noStrike" spc="-1" dirty="0" err="1">
+                <a:solidFill>
+                  <a:srgbClr val="582808"/>
+                </a:solidFill>
+                <a:latin typeface="Calibri"/>
               </a:rPr>
               <a:t>revenue_log</a:t>
             </a:r>
             <a:r>
-              <a:rPr kumimoji="0" lang="es-CL" altLang="es-CL" sz="2000" b="0" i="0" u="none" strike="noStrike" cap="none" normalizeH="0" baseline="0" dirty="0">
-                <a:ln>
-                  <a:noFill/>
-                </a:ln>
-                <a:solidFill>
-                  <a:schemeClr val="accent2">
-                    <a:lumMod val="50000"/>
-                  </a:schemeClr>
-                </a:solidFill>
-                <a:effectLst/>
-                <a:latin typeface="+mj-lt"/>
-              </a:rPr>
-              <a:t> = log1p(revenue) para reducir asimetría y el impacto de outliers en una variable monetaria.</a:t>
-            </a:r>
-          </a:p>
-          <a:p>
-            <a:pPr marL="0" marR="0" lvl="0" indent="0" algn="l" defTabSz="914400" rtl="0" eaLnBrk="0" fontAlgn="base" latinLnBrk="0" hangingPunct="0">
+              <a:rPr lang="es-ES" sz="1600" b="0" strike="noStrike" spc="-1" dirty="0">
+                <a:solidFill>
+                  <a:srgbClr val="582808"/>
+                </a:solidFill>
+                <a:latin typeface="Calibri"/>
+              </a:rPr>
+              <a:t> = log1p(</a:t>
+            </a:r>
+            <a:r>
+              <a:rPr lang="es-ES" sz="1600" b="0" strike="noStrike" spc="-1" dirty="0" err="1">
+                <a:solidFill>
+                  <a:srgbClr val="582808"/>
+                </a:solidFill>
+                <a:latin typeface="Calibri"/>
+              </a:rPr>
+              <a:t>revenue</a:t>
+            </a:r>
+            <a:r>
+              <a:rPr lang="es-ES" sz="1600" b="0" strike="noStrike" spc="-1" dirty="0">
+                <a:solidFill>
+                  <a:srgbClr val="582808"/>
+                </a:solidFill>
+                <a:latin typeface="Calibri"/>
+              </a:rPr>
+              <a:t>) para reducir asimetría y el impacto de </a:t>
+            </a:r>
+            <a:r>
+              <a:rPr lang="es-ES" sz="1600" b="0" strike="noStrike" spc="-1" dirty="0" err="1">
+                <a:solidFill>
+                  <a:srgbClr val="582808"/>
+                </a:solidFill>
+                <a:latin typeface="Calibri"/>
+              </a:rPr>
+              <a:t>outliers</a:t>
+            </a:r>
+            <a:r>
+              <a:rPr lang="es-ES" sz="1600" b="0" strike="noStrike" spc="-1" dirty="0">
+                <a:solidFill>
+                  <a:srgbClr val="582808"/>
+                </a:solidFill>
+                <a:latin typeface="Calibri"/>
+              </a:rPr>
+              <a:t> en una variable monetaria.</a:t>
+            </a:r>
+          </a:p>
+          <a:p>
+            <a:pPr marL="216000" indent="-216000" algn="just" defTabSz="914400">
               <a:lnSpc>
                 <a:spcPct val="100000"/>
               </a:lnSpc>
-              <a:spcBef>
-                <a:spcPct val="0"/>
-              </a:spcBef>
-              <a:spcAft>
-                <a:spcPct val="0"/>
-              </a:spcAft>
-              <a:buClrTx/>
-              <a:buSzTx/>
-              <a:tabLst/>
+              <a:buClr>
+                <a:srgbClr val="582808"/>
+              </a:buClr>
+              <a:buFont typeface="Wingdings" charset="2"/>
+              <a:buChar char=""/>
             </a:pPr>
-            <a:endParaRPr kumimoji="0" lang="es-CL" altLang="es-CL" sz="2000" b="0" i="0" u="none" strike="noStrike" cap="none" normalizeH="0" baseline="0" dirty="0">
-              <a:ln>
-                <a:noFill/>
-              </a:ln>
+            <a:endParaRPr lang="es-ES" sz="1600" b="0" strike="noStrike" spc="-1" dirty="0">
               <a:solidFill>
-                <a:schemeClr val="accent2">
-                  <a:lumMod val="50000"/>
-                </a:schemeClr>
+                <a:srgbClr val="582808"/>
               </a:solidFill>
-              <a:effectLst/>
-              <a:latin typeface="+mj-lt"/>
+              <a:latin typeface="Calibri"/>
             </a:endParaRPr>
           </a:p>
           <a:p>
-            <a:pPr marL="0" marR="0" lvl="0" indent="0" algn="l" defTabSz="914400" rtl="0" eaLnBrk="0" fontAlgn="base" latinLnBrk="0" hangingPunct="0">
+            <a:pPr marL="216000" indent="-216000" algn="just" defTabSz="914400">
               <a:lnSpc>
                 <a:spcPct val="100000"/>
               </a:lnSpc>
-              <a:spcBef>
-                <a:spcPct val="0"/>
-              </a:spcBef>
-              <a:spcAft>
-                <a:spcPct val="0"/>
-              </a:spcAft>
-              <a:buClrTx/>
-              <a:buSzTx/>
-              <a:buFontTx/>
-              <a:buChar char="•"/>
-              <a:tabLst/>
+              <a:buClr>
+                <a:srgbClr val="582808"/>
+              </a:buClr>
+              <a:buFont typeface="Wingdings" charset="2"/>
+              <a:buChar char=""/>
             </a:pPr>
             <a:r>
-              <a:rPr kumimoji="0" lang="es-CL" altLang="es-CL" sz="2000" b="0" i="0" u="none" strike="noStrike" cap="none" normalizeH="0" baseline="0" dirty="0">
-                <a:ln>
-                  <a:noFill/>
-                </a:ln>
-                <a:solidFill>
-                  <a:schemeClr val="accent2">
-                    <a:lumMod val="50000"/>
-                  </a:schemeClr>
-                </a:solidFill>
-                <a:effectLst/>
-                <a:latin typeface="+mj-lt"/>
+              <a:rPr lang="es-ES" sz="1600" b="0" strike="noStrike" spc="-1" dirty="0">
+                <a:solidFill>
+                  <a:srgbClr val="582808"/>
+                </a:solidFill>
+                <a:latin typeface="Calibri"/>
               </a:rPr>
               <a:t>Elegimos </a:t>
             </a:r>
             <a:r>
-              <a:rPr kumimoji="0" lang="es-CL" altLang="es-CL" sz="2000" b="1" i="0" u="none" strike="noStrike" cap="none" normalizeH="0" baseline="0" dirty="0">
-                <a:ln>
-                  <a:noFill/>
-                </a:ln>
-                <a:solidFill>
-                  <a:schemeClr val="accent2">
-                    <a:lumMod val="50000"/>
-                  </a:schemeClr>
-                </a:solidFill>
-                <a:effectLst/>
-                <a:latin typeface="+mj-lt"/>
+              <a:rPr lang="es-ES" sz="1600" b="1" strike="noStrike" spc="-1" dirty="0">
+                <a:solidFill>
+                  <a:srgbClr val="582808"/>
+                </a:solidFill>
+                <a:latin typeface="Calibri"/>
               </a:rPr>
               <a:t>RMSE</a:t>
             </a:r>
             <a:r>
-              <a:rPr kumimoji="0" lang="es-CL" altLang="es-CL" sz="2000" b="0" i="0" u="none" strike="noStrike" cap="none" normalizeH="0" baseline="0" dirty="0">
-                <a:ln>
-                  <a:noFill/>
-                </a:ln>
-                <a:solidFill>
-                  <a:schemeClr val="accent2">
-                    <a:lumMod val="50000"/>
-                  </a:schemeClr>
-                </a:solidFill>
-                <a:effectLst/>
-                <a:latin typeface="+mj-lt"/>
+              <a:rPr lang="es-ES" sz="1600" b="0" strike="noStrike" spc="-1" dirty="0">
+                <a:solidFill>
+                  <a:srgbClr val="582808"/>
+                </a:solidFill>
+                <a:latin typeface="Calibri"/>
               </a:rPr>
               <a:t> como métrica principal (sobre </a:t>
             </a:r>
             <a:r>
-              <a:rPr kumimoji="0" lang="es-CL" altLang="es-CL" sz="2000" b="0" i="0" u="none" strike="noStrike" cap="none" normalizeH="0" baseline="0" dirty="0" err="1">
-                <a:ln>
-                  <a:noFill/>
-                </a:ln>
-                <a:solidFill>
-                  <a:schemeClr val="accent2">
-                    <a:lumMod val="50000"/>
-                  </a:schemeClr>
-                </a:solidFill>
-                <a:effectLst/>
-                <a:latin typeface="+mj-lt"/>
+              <a:rPr lang="es-ES" sz="1600" b="0" strike="noStrike" spc="-1" dirty="0" err="1">
+                <a:solidFill>
+                  <a:srgbClr val="582808"/>
+                </a:solidFill>
+                <a:latin typeface="Calibri"/>
               </a:rPr>
               <a:t>revenue_log</a:t>
             </a:r>
             <a:r>
-              <a:rPr kumimoji="0" lang="es-CL" altLang="es-CL" sz="2000" b="0" i="0" u="none" strike="noStrike" cap="none" normalizeH="0" baseline="0" dirty="0">
-                <a:ln>
-                  <a:noFill/>
-                </a:ln>
-                <a:solidFill>
-                  <a:schemeClr val="accent2">
-                    <a:lumMod val="50000"/>
-                  </a:schemeClr>
-                </a:solidFill>
-                <a:effectLst/>
-                <a:latin typeface="+mj-lt"/>
+              <a:rPr lang="es-ES" sz="1600" b="0" strike="noStrike" spc="-1" dirty="0">
+                <a:solidFill>
+                  <a:srgbClr val="582808"/>
+                </a:solidFill>
+                <a:latin typeface="Calibri"/>
               </a:rPr>
               <a:t>) porque penaliza más los errores grandes y permite comparar modelos de forma consistente.</a:t>
             </a:r>
           </a:p>
           <a:p>
-            <a:pPr marL="0" marR="0" lvl="0" indent="0" algn="l" defTabSz="914400" rtl="0" eaLnBrk="0" fontAlgn="base" latinLnBrk="0" hangingPunct="0">
+            <a:pPr marL="216000" indent="-216000" algn="just" defTabSz="914400">
               <a:lnSpc>
                 <a:spcPct val="100000"/>
               </a:lnSpc>
-              <a:spcBef>
-                <a:spcPct val="0"/>
-              </a:spcBef>
-              <a:spcAft>
-                <a:spcPct val="0"/>
-              </a:spcAft>
-              <a:buClrTx/>
-              <a:buSzTx/>
-              <a:tabLst/>
+              <a:buClr>
+                <a:srgbClr val="582808"/>
+              </a:buClr>
+              <a:buFont typeface="Wingdings" charset="2"/>
+              <a:buChar char=""/>
             </a:pPr>
-            <a:endParaRPr kumimoji="0" lang="es-CL" altLang="es-CL" sz="2000" b="0" i="0" u="none" strike="noStrike" cap="none" normalizeH="0" baseline="0" dirty="0">
-              <a:ln>
-                <a:noFill/>
-              </a:ln>
+            <a:endParaRPr lang="es-ES" sz="1600" b="0" strike="noStrike" spc="-1" dirty="0">
               <a:solidFill>
-                <a:schemeClr val="accent2">
-                  <a:lumMod val="50000"/>
-                </a:schemeClr>
+                <a:srgbClr val="582808"/>
               </a:solidFill>
-              <a:effectLst/>
-              <a:latin typeface="+mj-lt"/>
+              <a:latin typeface="Calibri"/>
             </a:endParaRPr>
           </a:p>
           <a:p>
-            <a:pPr marL="0" marR="0" lvl="0" indent="0" algn="l" defTabSz="914400" rtl="0" eaLnBrk="0" fontAlgn="base" latinLnBrk="0" hangingPunct="0">
+            <a:pPr marL="216000" indent="-216000" algn="just" defTabSz="914400">
               <a:lnSpc>
                 <a:spcPct val="100000"/>
               </a:lnSpc>
-              <a:spcBef>
-                <a:spcPct val="0"/>
-              </a:spcBef>
-              <a:spcAft>
-                <a:spcPct val="0"/>
-              </a:spcAft>
-              <a:buClrTx/>
-              <a:buSzTx/>
-              <a:buFontTx/>
-              <a:buChar char="•"/>
-              <a:tabLst/>
+              <a:buClr>
+                <a:srgbClr val="582808"/>
+              </a:buClr>
+              <a:buFont typeface="Wingdings" charset="2"/>
+              <a:buChar char=""/>
             </a:pPr>
             <a:r>
-              <a:rPr kumimoji="0" lang="es-CL" altLang="es-CL" sz="2000" b="0" i="0" u="none" strike="noStrike" cap="none" normalizeH="0" baseline="0" dirty="0">
-                <a:ln>
-                  <a:noFill/>
-                </a:ln>
-                <a:solidFill>
-                  <a:schemeClr val="accent2">
-                    <a:lumMod val="50000"/>
-                  </a:schemeClr>
-                </a:solidFill>
-                <a:effectLst/>
-                <a:latin typeface="+mj-lt"/>
-              </a:rPr>
-              <a:t>Para interpretar resultados en euros, deshacemos la transformación al evaluar: revenue = expm1(</a:t>
-            </a:r>
-            <a:r>
-              <a:rPr kumimoji="0" lang="es-CL" altLang="es-CL" sz="2000" b="0" i="0" u="none" strike="noStrike" cap="none" normalizeH="0" baseline="0" dirty="0" err="1">
-                <a:ln>
-                  <a:noFill/>
-                </a:ln>
-                <a:solidFill>
-                  <a:schemeClr val="accent2">
-                    <a:lumMod val="50000"/>
-                  </a:schemeClr>
-                </a:solidFill>
-                <a:effectLst/>
-                <a:latin typeface="+mj-lt"/>
+              <a:rPr lang="es-ES" sz="1600" b="0" strike="noStrike" spc="-1" dirty="0">
+                <a:solidFill>
+                  <a:srgbClr val="582808"/>
+                </a:solidFill>
+                <a:latin typeface="Calibri"/>
+              </a:rPr>
+              <a:t>Para interpretar resultados en euros, deshacemos la transformación al evaluar: </a:t>
+            </a:r>
+            <a:r>
+              <a:rPr lang="es-ES" sz="1600" b="0" strike="noStrike" spc="-1" dirty="0" err="1">
+                <a:solidFill>
+                  <a:srgbClr val="582808"/>
+                </a:solidFill>
+                <a:latin typeface="Calibri"/>
+              </a:rPr>
+              <a:t>revenue</a:t>
+            </a:r>
+            <a:r>
+              <a:rPr lang="es-ES" sz="1600" b="0" strike="noStrike" spc="-1" dirty="0">
+                <a:solidFill>
+                  <a:srgbClr val="582808"/>
+                </a:solidFill>
+                <a:latin typeface="Calibri"/>
+              </a:rPr>
+              <a:t> = expm1(</a:t>
+            </a:r>
+            <a:r>
+              <a:rPr lang="es-ES" sz="1600" b="0" strike="noStrike" spc="-1" dirty="0" err="1">
+                <a:solidFill>
+                  <a:srgbClr val="582808"/>
+                </a:solidFill>
+                <a:latin typeface="Calibri"/>
               </a:rPr>
               <a:t>revenue_log</a:t>
             </a:r>
             <a:r>
-              <a:rPr kumimoji="0" lang="es-CL" altLang="es-CL" sz="2000" b="0" i="0" u="none" strike="noStrike" cap="none" normalizeH="0" baseline="0" dirty="0">
-                <a:ln>
-                  <a:noFill/>
-                </a:ln>
-                <a:solidFill>
-                  <a:schemeClr val="accent2">
-                    <a:lumMod val="50000"/>
-                  </a:schemeClr>
-                </a:solidFill>
-                <a:effectLst/>
-                <a:latin typeface="+mj-lt"/>
+              <a:rPr lang="es-ES" sz="1600" b="0" strike="noStrike" spc="-1" dirty="0">
+                <a:solidFill>
+                  <a:srgbClr val="582808"/>
+                </a:solidFill>
+                <a:latin typeface="Calibri"/>
               </a:rPr>
               <a:t>).</a:t>
             </a:r>
           </a:p>
           <a:p>
-            <a:pPr marL="0" marR="0" lvl="0" indent="0" algn="l" defTabSz="914400" rtl="0" eaLnBrk="0" fontAlgn="base" latinLnBrk="0" hangingPunct="0">
+            <a:pPr marL="216000" indent="-216000" algn="just" defTabSz="914400">
               <a:lnSpc>
                 <a:spcPct val="100000"/>
               </a:lnSpc>
-              <a:spcBef>
-                <a:spcPct val="0"/>
-              </a:spcBef>
-              <a:spcAft>
-                <a:spcPct val="0"/>
-              </a:spcAft>
-              <a:buClrTx/>
-              <a:buSzTx/>
-              <a:tabLst/>
+              <a:buClr>
+                <a:srgbClr val="582808"/>
+              </a:buClr>
+              <a:buFont typeface="Wingdings" charset="2"/>
+              <a:buChar char=""/>
             </a:pPr>
-            <a:endParaRPr kumimoji="0" lang="es-CL" altLang="es-CL" sz="2000" b="0" i="0" u="none" strike="noStrike" cap="none" normalizeH="0" baseline="0" dirty="0">
-              <a:ln>
-                <a:noFill/>
-              </a:ln>
+            <a:endParaRPr lang="es-ES" sz="1600" b="0" strike="noStrike" spc="-1" dirty="0">
               <a:solidFill>
-                <a:schemeClr val="accent2">
-                  <a:lumMod val="50000"/>
-                </a:schemeClr>
+                <a:srgbClr val="582808"/>
               </a:solidFill>
-              <a:effectLst/>
-              <a:latin typeface="+mj-lt"/>
+              <a:latin typeface="Calibri"/>
             </a:endParaRPr>
           </a:p>
           <a:p>
-            <a:pPr marL="0" marR="0" lvl="0" indent="0" algn="l" defTabSz="914400" rtl="0" eaLnBrk="0" fontAlgn="base" latinLnBrk="0" hangingPunct="0">
+            <a:pPr marL="216000" indent="-216000" algn="just" defTabSz="914400">
               <a:lnSpc>
                 <a:spcPct val="100000"/>
               </a:lnSpc>
-              <a:spcBef>
-                <a:spcPct val="0"/>
-              </a:spcBef>
-              <a:spcAft>
-                <a:spcPct val="0"/>
-              </a:spcAft>
-              <a:buClrTx/>
-              <a:buSzTx/>
-              <a:buFontTx/>
-              <a:buChar char="•"/>
-              <a:tabLst/>
+              <a:buClr>
+                <a:srgbClr val="582808"/>
+              </a:buClr>
+              <a:buFont typeface="Wingdings" charset="2"/>
+              <a:buChar char=""/>
             </a:pPr>
             <a:r>
-              <a:rPr kumimoji="0" lang="es-CL" altLang="es-CL" sz="2000" b="0" i="0" u="none" strike="noStrike" cap="none" normalizeH="0" baseline="0" dirty="0">
-                <a:ln>
-                  <a:noFill/>
-                </a:ln>
-                <a:solidFill>
-                  <a:schemeClr val="accent2">
-                    <a:lumMod val="50000"/>
-                  </a:schemeClr>
-                </a:solidFill>
-                <a:effectLst/>
-                <a:latin typeface="+mj-lt"/>
+              <a:rPr lang="es-ES" sz="1600" b="0" strike="noStrike" spc="-1" dirty="0">
+                <a:solidFill>
+                  <a:srgbClr val="582808"/>
+                </a:solidFill>
+                <a:latin typeface="Calibri"/>
               </a:rPr>
               <a:t>Establecimos un único protocolo de evaluación con </a:t>
             </a:r>
             <a:r>
-              <a:rPr kumimoji="0" lang="es-CL" altLang="es-CL" sz="2000" b="1" i="0" u="none" strike="noStrike" cap="none" normalizeH="0" baseline="0" dirty="0">
-                <a:ln>
-                  <a:noFill/>
-                </a:ln>
-                <a:solidFill>
-                  <a:schemeClr val="accent2">
-                    <a:lumMod val="50000"/>
-                  </a:schemeClr>
-                </a:solidFill>
-                <a:effectLst/>
-                <a:latin typeface="+mj-lt"/>
+              <a:rPr lang="es-ES" sz="1600" b="1" strike="noStrike" spc="-1" dirty="0">
+                <a:solidFill>
+                  <a:srgbClr val="582808"/>
+                </a:solidFill>
+                <a:latin typeface="Calibri"/>
               </a:rPr>
               <a:t>K-</a:t>
             </a:r>
             <a:r>
-              <a:rPr kumimoji="0" lang="es-CL" altLang="es-CL" sz="2000" b="1" i="0" u="none" strike="noStrike" cap="none" normalizeH="0" baseline="0" dirty="0" err="1">
-                <a:ln>
-                  <a:noFill/>
-                </a:ln>
-                <a:solidFill>
-                  <a:schemeClr val="accent2">
-                    <a:lumMod val="50000"/>
-                  </a:schemeClr>
-                </a:solidFill>
-                <a:effectLst/>
-                <a:latin typeface="+mj-lt"/>
+              <a:rPr lang="es-ES" sz="1600" b="1" strike="noStrike" spc="-1" dirty="0" err="1">
+                <a:solidFill>
+                  <a:srgbClr val="582808"/>
+                </a:solidFill>
+                <a:latin typeface="Calibri"/>
               </a:rPr>
               <a:t>Fold</a:t>
             </a:r>
             <a:r>
-              <a:rPr kumimoji="0" lang="es-CL" altLang="es-CL" sz="2000" b="1" i="0" u="none" strike="noStrike" cap="none" normalizeH="0" baseline="0" dirty="0">
-                <a:ln>
-                  <a:noFill/>
-                </a:ln>
-                <a:solidFill>
-                  <a:schemeClr val="accent2">
-                    <a:lumMod val="50000"/>
-                  </a:schemeClr>
-                </a:solidFill>
-                <a:effectLst/>
-                <a:latin typeface="+mj-lt"/>
-              </a:rPr>
-              <a:t> Cross-Validation (k=5)</a:t>
-            </a:r>
-            <a:r>
-              <a:rPr kumimoji="0" lang="es-CL" altLang="es-CL" sz="2000" b="0" i="0" u="none" strike="noStrike" cap="none" normalizeH="0" baseline="0" dirty="0">
-                <a:ln>
-                  <a:noFill/>
-                </a:ln>
-                <a:solidFill>
-                  <a:schemeClr val="accent2">
-                    <a:lumMod val="50000"/>
-                  </a:schemeClr>
-                </a:solidFill>
-                <a:effectLst/>
-                <a:latin typeface="+mj-lt"/>
-              </a:rPr>
-              <a:t>, usando shuffle=True y random_state= 42 para reproducibilidad.</a:t>
-            </a:r>
-          </a:p>
-          <a:p>
-            <a:pPr marL="0" marR="0" lvl="0" indent="0" algn="l" defTabSz="914400" rtl="0" eaLnBrk="0" fontAlgn="base" latinLnBrk="0" hangingPunct="0">
+              <a:rPr lang="es-ES" sz="1600" b="1" strike="noStrike" spc="-1" dirty="0">
+                <a:solidFill>
+                  <a:srgbClr val="582808"/>
+                </a:solidFill>
+                <a:latin typeface="Calibri"/>
+              </a:rPr>
+              <a:t> Cross-</a:t>
+            </a:r>
+            <a:r>
+              <a:rPr lang="es-ES" sz="1600" b="1" strike="noStrike" spc="-1" dirty="0" err="1">
+                <a:solidFill>
+                  <a:srgbClr val="582808"/>
+                </a:solidFill>
+                <a:latin typeface="Calibri"/>
+              </a:rPr>
+              <a:t>Validation</a:t>
+            </a:r>
+            <a:r>
+              <a:rPr lang="es-ES" sz="1600" b="1" strike="noStrike" spc="-1" dirty="0">
+                <a:solidFill>
+                  <a:srgbClr val="582808"/>
+                </a:solidFill>
+                <a:latin typeface="Calibri"/>
+              </a:rPr>
+              <a:t> </a:t>
+            </a:r>
+            <a:r>
+              <a:rPr lang="es-ES" sz="1600" b="0" strike="noStrike" spc="-1" dirty="0">
+                <a:solidFill>
+                  <a:srgbClr val="582808"/>
+                </a:solidFill>
+                <a:latin typeface="Calibri"/>
+              </a:rPr>
+              <a:t>(k=5), usando </a:t>
+            </a:r>
+            <a:r>
+              <a:rPr lang="es-ES" sz="1600" b="0" strike="noStrike" spc="-1" dirty="0" err="1">
+                <a:solidFill>
+                  <a:srgbClr val="582808"/>
+                </a:solidFill>
+                <a:latin typeface="Calibri"/>
+              </a:rPr>
+              <a:t>shuffle</a:t>
+            </a:r>
+            <a:r>
+              <a:rPr lang="es-ES" sz="1600" b="0" strike="noStrike" spc="-1" dirty="0">
+                <a:solidFill>
+                  <a:srgbClr val="582808"/>
+                </a:solidFill>
+                <a:latin typeface="Calibri"/>
+              </a:rPr>
+              <a:t>=True y </a:t>
+            </a:r>
+            <a:r>
+              <a:rPr lang="es-ES" sz="1600" b="0" strike="noStrike" spc="-1" dirty="0" err="1">
+                <a:solidFill>
+                  <a:srgbClr val="582808"/>
+                </a:solidFill>
+                <a:latin typeface="Calibri"/>
+              </a:rPr>
+              <a:t>random_state</a:t>
+            </a:r>
+            <a:r>
+              <a:rPr lang="es-ES" sz="1600" b="0" strike="noStrike" spc="-1" dirty="0">
+                <a:solidFill>
+                  <a:srgbClr val="582808"/>
+                </a:solidFill>
+                <a:latin typeface="Calibri"/>
+              </a:rPr>
+              <a:t>= 42 para reproducibilidad.</a:t>
+            </a:r>
+          </a:p>
+          <a:p>
+            <a:pPr marL="216000" indent="-216000" algn="just" defTabSz="914400">
               <a:lnSpc>
                 <a:spcPct val="100000"/>
               </a:lnSpc>
-              <a:spcBef>
-                <a:spcPct val="0"/>
-              </a:spcBef>
-              <a:spcAft>
-                <a:spcPct val="0"/>
-              </a:spcAft>
-              <a:buClrTx/>
-              <a:buSzTx/>
-              <a:tabLst/>
+              <a:buClr>
+                <a:srgbClr val="582808"/>
+              </a:buClr>
+              <a:buFont typeface="Wingdings" charset="2"/>
+              <a:buChar char=""/>
             </a:pPr>
-            <a:endParaRPr kumimoji="0" lang="es-CL" altLang="es-CL" sz="2000" b="0" i="0" u="none" strike="noStrike" cap="none" normalizeH="0" baseline="0" dirty="0">
-              <a:ln>
-                <a:noFill/>
-              </a:ln>
+            <a:endParaRPr lang="es-ES" sz="1600" b="0" strike="noStrike" spc="-1" dirty="0">
               <a:solidFill>
-                <a:schemeClr val="accent2">
-                  <a:lumMod val="50000"/>
-                </a:schemeClr>
+                <a:srgbClr val="582808"/>
               </a:solidFill>
-              <a:effectLst/>
-              <a:latin typeface="+mj-lt"/>
+              <a:latin typeface="Calibri"/>
             </a:endParaRPr>
           </a:p>
           <a:p>
-            <a:pPr marL="0" marR="0" lvl="0" indent="0" algn="l" defTabSz="914400" rtl="0" eaLnBrk="0" fontAlgn="base" latinLnBrk="0" hangingPunct="0">
+            <a:pPr marL="216000" indent="-216000" algn="just" defTabSz="914400">
               <a:lnSpc>
                 <a:spcPct val="100000"/>
               </a:lnSpc>
-              <a:spcBef>
-                <a:spcPct val="0"/>
-              </a:spcBef>
-              <a:spcAft>
-                <a:spcPct val="0"/>
-              </a:spcAft>
-              <a:buClrTx/>
-              <a:buSzTx/>
-              <a:buFontTx/>
-              <a:buChar char="•"/>
-              <a:tabLst/>
+              <a:buClr>
+                <a:srgbClr val="582808"/>
+              </a:buClr>
+              <a:buFont typeface="Wingdings" charset="2"/>
+              <a:buChar char=""/>
             </a:pPr>
             <a:r>
-              <a:rPr kumimoji="0" lang="es-CL" altLang="es-CL" sz="2000" b="0" i="0" u="none" strike="noStrike" cap="none" normalizeH="0" baseline="0" dirty="0">
-                <a:ln>
-                  <a:noFill/>
-                </a:ln>
-                <a:solidFill>
-                  <a:schemeClr val="accent2">
-                    <a:lumMod val="50000"/>
-                  </a:schemeClr>
-                </a:solidFill>
-                <a:effectLst/>
-                <a:latin typeface="+mj-lt"/>
-              </a:rPr>
-              <a:t>Regla clave: todos los modelos se evalúan con </a:t>
-            </a:r>
-            <a:r>
-              <a:rPr kumimoji="0" lang="es-CL" altLang="es-CL" sz="2000" b="1" i="0" u="none" strike="noStrike" cap="none" normalizeH="0" baseline="0" dirty="0">
-                <a:ln>
-                  <a:noFill/>
-                </a:ln>
-                <a:solidFill>
-                  <a:schemeClr val="accent2">
-                    <a:lumMod val="50000"/>
-                  </a:schemeClr>
-                </a:solidFill>
-                <a:effectLst/>
-                <a:latin typeface="+mj-lt"/>
-              </a:rPr>
-              <a:t>la misma CV y la misma métrica</a:t>
-            </a:r>
-            <a:r>
-              <a:rPr kumimoji="0" lang="es-CL" altLang="es-CL" sz="2000" b="0" i="0" u="none" strike="noStrike" cap="none" normalizeH="0" baseline="0" dirty="0">
-                <a:ln>
-                  <a:noFill/>
-                </a:ln>
-                <a:solidFill>
-                  <a:schemeClr val="accent2">
-                    <a:lumMod val="50000"/>
-                  </a:schemeClr>
-                </a:solidFill>
-                <a:effectLst/>
-                <a:latin typeface="+mj-lt"/>
+              <a:rPr lang="es-ES" sz="1600" b="0" strike="noStrike" spc="-1" dirty="0">
+                <a:solidFill>
+                  <a:srgbClr val="582808"/>
+                </a:solidFill>
+                <a:latin typeface="Calibri"/>
+              </a:rPr>
+              <a:t>Regla clave: todos los modelos se evalúan con la </a:t>
+            </a:r>
+            <a:r>
+              <a:rPr lang="es-ES" sz="1600" b="1" strike="noStrike" spc="-1" dirty="0">
+                <a:solidFill>
+                  <a:srgbClr val="582808"/>
+                </a:solidFill>
+                <a:latin typeface="Calibri"/>
+              </a:rPr>
+              <a:t>misma CV y la misma métrica</a:t>
+            </a:r>
+            <a:r>
+              <a:rPr lang="es-ES" sz="1600" b="0" strike="noStrike" spc="-1" dirty="0">
+                <a:solidFill>
+                  <a:srgbClr val="582808"/>
+                </a:solidFill>
+                <a:latin typeface="Calibri"/>
               </a:rPr>
               <a:t>, evitando comparaciones sesgadas.</a:t>
             </a:r>
@@ -9743,11 +9678,11 @@
       </p:sp>
       <p:pic>
         <p:nvPicPr>
-          <p:cNvPr id="7" name="Imagen 28">
+          <p:cNvPr id="10" name="Imagen 28">
             <a:hlinkClick r:id="rId2" action="ppaction://hlinksldjump"/>
             <a:extLst>
               <a:ext uri="{FF2B5EF4-FFF2-40B4-BE49-F238E27FC236}">
-                <a16:creationId xmlns:a16="http://schemas.microsoft.com/office/drawing/2014/main" id="{79563867-AB1B-5C56-6DFA-397F157D8854}"/>
+                <a16:creationId xmlns:a16="http://schemas.microsoft.com/office/drawing/2014/main" id="{42D78302-A6EC-4729-9E70-A5A02898C129}"/>
               </a:ext>
             </a:extLst>
           </p:cNvPr>
@@ -9760,8 +9695,8 @@
         </p:blipFill>
         <p:spPr>
           <a:xfrm>
-            <a:off x="10294560" y="242092"/>
-            <a:ext cx="1368360" cy="1316160"/>
+            <a:off x="10477440" y="272022"/>
+            <a:ext cx="1368360" cy="1014209"/>
           </a:xfrm>
           <a:prstGeom prst="rect">
             <a:avLst/>
@@ -9923,7 +9858,7 @@
               <a:t>Modelado y resultados </a:t>
             </a:r>
             <a:r>
-              <a:rPr lang="es-ES" sz="2500" spc="-1" dirty="0">
+              <a:rPr lang="es-ES" sz="3000" spc="-1" dirty="0">
                 <a:solidFill>
                   <a:schemeClr val="accent2">
                     <a:lumMod val="50000"/>
@@ -9932,7 +9867,7 @@
               </a:rPr>
               <a:t>(Código/Baselines)</a:t>
             </a:r>
-            <a:endParaRPr lang="es-ES" sz="2500" spc="-1" dirty="0">
+            <a:endParaRPr lang="es-ES" sz="3000" spc="-1" dirty="0">
               <a:solidFill>
                 <a:schemeClr val="accent2">
                   <a:lumMod val="50000"/>
@@ -9965,8 +9900,8 @@
         </p:blipFill>
         <p:spPr>
           <a:xfrm>
-            <a:off x="322569" y="1178848"/>
-            <a:ext cx="6379789" cy="5199632"/>
+            <a:off x="703557" y="1837422"/>
+            <a:ext cx="5115247" cy="4307552"/>
           </a:xfrm>
           <a:prstGeom prst="rect">
             <a:avLst/>
@@ -9995,8 +9930,8 @@
         </p:blipFill>
         <p:spPr>
           <a:xfrm>
-            <a:off x="6931996" y="1178848"/>
-            <a:ext cx="3556179" cy="3118713"/>
+            <a:off x="6373197" y="1837422"/>
+            <a:ext cx="2801284" cy="2456682"/>
           </a:xfrm>
           <a:prstGeom prst="rect">
             <a:avLst/>
@@ -10025,8 +9960,8 @@
         </p:blipFill>
         <p:spPr>
           <a:xfrm>
-            <a:off x="6806860" y="4352012"/>
-            <a:ext cx="5279497" cy="2221300"/>
+            <a:off x="6373197" y="4352012"/>
+            <a:ext cx="4261440" cy="1792962"/>
           </a:xfrm>
           <a:prstGeom prst="rect">
             <a:avLst/>
@@ -10035,11 +9970,11 @@
       </p:pic>
       <p:pic>
         <p:nvPicPr>
-          <p:cNvPr id="14" name="Imagen 28">
+          <p:cNvPr id="8" name="Imagen 28">
             <a:hlinkClick r:id="rId5" action="ppaction://hlinksldjump"/>
             <a:extLst>
               <a:ext uri="{FF2B5EF4-FFF2-40B4-BE49-F238E27FC236}">
-                <a16:creationId xmlns:a16="http://schemas.microsoft.com/office/drawing/2014/main" id="{C696DD92-F277-9756-BA09-D6FA55EAF475}"/>
+                <a16:creationId xmlns:a16="http://schemas.microsoft.com/office/drawing/2014/main" id="{2B10C040-0CD9-4DC5-84E5-3DE82AC595E6}"/>
               </a:ext>
             </a:extLst>
           </p:cNvPr>
@@ -10052,8 +9987,8 @@
         </p:blipFill>
         <p:spPr>
           <a:xfrm>
-            <a:off x="10558530" y="143878"/>
-            <a:ext cx="1368360" cy="1316160"/>
+            <a:off x="10477440" y="272022"/>
+            <a:ext cx="1368360" cy="1014209"/>
           </a:xfrm>
           <a:prstGeom prst="rect">
             <a:avLst/>
@@ -10081,13 +10016,7 @@
   <p:cSld>
     <p:spTree>
       <p:nvGrpSpPr>
-        <p:cNvPr id="1" name="">
-          <a:extLst>
-            <a:ext uri="{FF2B5EF4-FFF2-40B4-BE49-F238E27FC236}">
-              <a16:creationId xmlns:a16="http://schemas.microsoft.com/office/drawing/2014/main" id="{DA62F821-4221-8CE2-3E79-8711C2084C04}"/>
-            </a:ext>
-          </a:extLst>
-        </p:cNvPr>
+        <p:cNvPr id="1" name=""/>
         <p:cNvGrpSpPr/>
         <p:nvPr/>
       </p:nvGrpSpPr>
@@ -10101,13 +10030,7 @@
       </p:grpSpPr>
       <p:sp>
         <p:nvSpPr>
-          <p:cNvPr id="77" name="Rectángulo 5">
-            <a:extLst>
-              <a:ext uri="{FF2B5EF4-FFF2-40B4-BE49-F238E27FC236}">
-                <a16:creationId xmlns:a16="http://schemas.microsoft.com/office/drawing/2014/main" id="{E96F509D-89D5-7270-4088-76C259A3ADBB}"/>
-              </a:ext>
-            </a:extLst>
-          </p:cNvPr>
+          <p:cNvPr id="65" name="Rectángulo 5"/>
           <p:cNvSpPr/>
           <p:nvPr/>
         </p:nvSpPr>
@@ -10156,7 +10079,7 @@
                 <a:spcPct val="100000"/>
               </a:lnSpc>
             </a:pPr>
-            <a:endParaRPr lang="es-ES" sz="1800" b="0" strike="noStrike" spc="-1">
+            <a:endParaRPr lang="es-ES" sz="1800" b="0" strike="noStrike" spc="-1" dirty="0">
               <a:solidFill>
                 <a:schemeClr val="lt1"/>
               </a:solidFill>
@@ -10167,13 +10090,7 @@
       </p:sp>
       <p:sp>
         <p:nvSpPr>
-          <p:cNvPr id="78" name="CuadroTexto 7">
-            <a:extLst>
-              <a:ext uri="{FF2B5EF4-FFF2-40B4-BE49-F238E27FC236}">
-                <a16:creationId xmlns:a16="http://schemas.microsoft.com/office/drawing/2014/main" id="{DBF75072-AE1B-E16F-DAC5-BEC7F61FC2F7}"/>
-              </a:ext>
-            </a:extLst>
-          </p:cNvPr>
+          <p:cNvPr id="66" name="CuadroTexto 7"/>
           <p:cNvSpPr/>
           <p:nvPr/>
         </p:nvSpPr>
@@ -10219,9 +10136,11 @@
               </a:rPr>
               <a:t>Modelado y resultados</a:t>
             </a:r>
-            <a:endParaRPr lang="es-ES" sz="3500" b="1" strike="noStrike" spc="-1" dirty="0">
+            <a:endParaRPr lang="es-ES" sz="2500" b="1" spc="-1" dirty="0">
               <a:solidFill>
-                <a:srgbClr val="000000"/>
+                <a:schemeClr val="accent2">
+                  <a:lumMod val="50000"/>
+                </a:schemeClr>
               </a:solidFill>
               <a:latin typeface="+mj-lt"/>
             </a:endParaRPr>
@@ -10230,20 +10149,14 @@
       </p:sp>
       <p:sp>
         <p:nvSpPr>
-          <p:cNvPr id="80" name="CuadroTexto 1">
-            <a:extLst>
-              <a:ext uri="{FF2B5EF4-FFF2-40B4-BE49-F238E27FC236}">
-                <a16:creationId xmlns:a16="http://schemas.microsoft.com/office/drawing/2014/main" id="{6A1C6BDC-BC2D-1A12-3B61-E1A0C6BA88DE}"/>
-              </a:ext>
-            </a:extLst>
-          </p:cNvPr>
+          <p:cNvPr id="67" name="CuadroTexto 2"/>
           <p:cNvSpPr/>
           <p:nvPr/>
         </p:nvSpPr>
         <p:spPr>
           <a:xfrm>
-            <a:off x="646200" y="1411200"/>
-            <a:ext cx="11135160" cy="4204440"/>
+            <a:off x="716400" y="1947960"/>
+            <a:ext cx="10946520" cy="364680"/>
           </a:xfrm>
           <a:prstGeom prst="rect">
             <a:avLst/>
@@ -10276,7 +10189,7 @@
                 <a:spcPct val="100000"/>
               </a:lnSpc>
             </a:pPr>
-            <a:endParaRPr lang="es-ES" sz="1800" b="0" strike="noStrike" spc="-1">
+            <a:endParaRPr lang="es-ES" sz="1800" b="0" strike="noStrike" spc="-1" dirty="0">
               <a:solidFill>
                 <a:srgbClr val="000000"/>
               </a:solidFill>
@@ -10287,669 +10200,403 @@
       </p:sp>
       <p:sp>
         <p:nvSpPr>
-          <p:cNvPr id="6" name="Rectangle 4">
+          <p:cNvPr id="8" name="CuadroTexto 13">
             <a:extLst>
               <a:ext uri="{FF2B5EF4-FFF2-40B4-BE49-F238E27FC236}">
-                <a16:creationId xmlns:a16="http://schemas.microsoft.com/office/drawing/2014/main" id="{29D6A60C-93B8-2867-C0D4-31E81492AB3B}"/>
+                <a16:creationId xmlns:a16="http://schemas.microsoft.com/office/drawing/2014/main" id="{0CAEE926-6477-42E9-A71A-E440C5622199}"/>
               </a:ext>
             </a:extLst>
           </p:cNvPr>
-          <p:cNvSpPr>
-            <a:spLocks noChangeArrowheads="1"/>
-          </p:cNvSpPr>
+          <p:cNvSpPr/>
           <p:nvPr/>
         </p:nvSpPr>
-        <p:spPr bwMode="auto">
-          <a:xfrm rot="10800000" flipV="1">
-            <a:off x="105296" y="1242360"/>
-            <a:ext cx="11557624" cy="4708981"/>
+        <p:spPr>
+          <a:xfrm>
+            <a:off x="622080" y="1906233"/>
+            <a:ext cx="10946520" cy="3045534"/>
           </a:xfrm>
           <a:prstGeom prst="rect">
             <a:avLst/>
           </a:prstGeom>
           <a:noFill/>
-          <a:ln>
+          <a:ln w="0">
             <a:noFill/>
           </a:ln>
-          <a:effectLst/>
-          <a:extLst>
-            <a:ext uri="{909E8E84-426E-40DD-AFC4-6F175D3DCCD1}">
-              <a14:hiddenFill xmlns:a14="http://schemas.microsoft.com/office/drawing/2010/main">
-                <a:solidFill>
-                  <a:schemeClr val="accent1"/>
-                </a:solidFill>
-              </a14:hiddenFill>
-            </a:ext>
-            <a:ext uri="{91240B29-F687-4F45-9708-019B960494DF}">
-              <a14:hiddenLine xmlns:a14="http://schemas.microsoft.com/office/drawing/2010/main" w="9525">
-                <a:solidFill>
-                  <a:schemeClr val="tx1"/>
-                </a:solidFill>
-                <a:miter lim="800000"/>
-                <a:headEnd/>
-                <a:tailEnd/>
-              </a14:hiddenLine>
-            </a:ext>
-            <a:ext uri="{AF507438-7753-43E0-B8FC-AC1667EBCBE1}">
-              <a14:hiddenEffects xmlns:a14="http://schemas.microsoft.com/office/drawing/2010/main">
-                <a:effectLst>
-                  <a:outerShdw dist="35921" dir="2700000" algn="ctr" rotWithShape="0">
-                    <a:schemeClr val="bg2"/>
-                  </a:outerShdw>
-                </a:effectLst>
-              </a14:hiddenEffects>
-            </a:ext>
-          </a:extLst>
         </p:spPr>
+        <p:style>
+          <a:lnRef idx="0">
+            <a:scrgbClr r="0" g="0" b="0"/>
+          </a:lnRef>
+          <a:fillRef idx="0">
+            <a:scrgbClr r="0" g="0" b="0"/>
+          </a:fillRef>
+          <a:effectRef idx="0">
+            <a:scrgbClr r="0" g="0" b="0"/>
+          </a:effectRef>
+          <a:fontRef idx="minor"/>
+        </p:style>
         <p:txBody>
-          <a:bodyPr vert="horz" wrap="square" lIns="91440" tIns="45720" rIns="91440" bIns="45720" numCol="1" anchor="ctr" anchorCtr="0" compatLnSpc="1">
-            <a:prstTxWarp prst="textNoShape">
-              <a:avLst/>
-            </a:prstTxWarp>
+          <a:bodyPr lIns="90000" tIns="45000" rIns="90000" bIns="45000" anchor="t">
             <a:spAutoFit/>
           </a:bodyPr>
           <a:lstStyle/>
           <a:p>
-            <a:pPr marL="0" marR="0" lvl="0" indent="0" algn="l" defTabSz="914400" rtl="0" eaLnBrk="0" fontAlgn="base" latinLnBrk="0" hangingPunct="0">
+            <a:pPr marL="216000" indent="-216000" algn="just" defTabSz="914400">
               <a:lnSpc>
                 <a:spcPct val="100000"/>
               </a:lnSpc>
-              <a:spcBef>
-                <a:spcPct val="0"/>
-              </a:spcBef>
-              <a:spcAft>
-                <a:spcPct val="0"/>
-              </a:spcAft>
-              <a:buClrTx/>
-              <a:buSzTx/>
-              <a:buFontTx/>
-              <a:buChar char="•"/>
-              <a:tabLst/>
+              <a:buClr>
+                <a:srgbClr val="582808"/>
+              </a:buClr>
+              <a:buFont typeface="Wingdings" charset="2"/>
+              <a:buChar char=""/>
             </a:pPr>
             <a:r>
-              <a:rPr kumimoji="0" lang="es-CL" altLang="es-CL" sz="2000" b="1" i="0" u="none" strike="noStrike" cap="none" normalizeH="0" baseline="0" dirty="0">
-                <a:ln>
-                  <a:noFill/>
-                </a:ln>
-                <a:solidFill>
-                  <a:schemeClr val="tx1"/>
-                </a:solidFill>
-                <a:effectLst/>
-                <a:latin typeface="+mj-lt"/>
-              </a:rPr>
-              <a:t>Pipelines por modelo:</a:t>
-            </a:r>
-            <a:r>
-              <a:rPr kumimoji="0" lang="es-CL" altLang="es-CL" sz="2000" b="0" i="0" u="none" strike="noStrike" cap="none" normalizeH="0" baseline="0" dirty="0">
-                <a:ln>
-                  <a:noFill/>
-                </a:ln>
-                <a:solidFill>
-                  <a:schemeClr val="tx1"/>
-                </a:solidFill>
-                <a:effectLst/>
-                <a:latin typeface="+mj-lt"/>
-              </a:rPr>
-              <a:t> mismo preprocesado (imputación; escalado solo en lineales) para evitar leakage y comparar de forma justa.</a:t>
-            </a:r>
-          </a:p>
-          <a:p>
-            <a:pPr marL="0" marR="0" lvl="0" indent="0" algn="l" defTabSz="914400" rtl="0" eaLnBrk="0" fontAlgn="base" latinLnBrk="0" hangingPunct="0">
+              <a:rPr lang="es-ES" sz="1600" b="0" strike="noStrike" spc="-1" dirty="0">
+                <a:solidFill>
+                  <a:srgbClr val="582808"/>
+                </a:solidFill>
+                <a:latin typeface="Calibri"/>
+              </a:rPr>
+              <a:t>Pipelines por modelo: mismo preprocesado (imputación; escalado solo en lineales) para evitar </a:t>
+            </a:r>
+            <a:r>
+              <a:rPr lang="es-ES" sz="1600" b="0" strike="noStrike" spc="-1" dirty="0" err="1">
+                <a:solidFill>
+                  <a:srgbClr val="582808"/>
+                </a:solidFill>
+                <a:latin typeface="Calibri"/>
+              </a:rPr>
+              <a:t>leakage</a:t>
+            </a:r>
+            <a:r>
+              <a:rPr lang="es-ES" sz="1600" b="0" strike="noStrike" spc="-1" dirty="0">
+                <a:solidFill>
+                  <a:srgbClr val="582808"/>
+                </a:solidFill>
+                <a:latin typeface="Calibri"/>
+              </a:rPr>
+              <a:t> y comparar de forma justa.</a:t>
+            </a:r>
+          </a:p>
+          <a:p>
+            <a:pPr marL="216000" indent="-216000" algn="just" defTabSz="914400">
               <a:lnSpc>
                 <a:spcPct val="100000"/>
               </a:lnSpc>
-              <a:spcBef>
-                <a:spcPct val="0"/>
-              </a:spcBef>
-              <a:spcAft>
-                <a:spcPct val="0"/>
-              </a:spcAft>
-              <a:buClrTx/>
-              <a:buSzTx/>
-              <a:buFontTx/>
-              <a:buChar char="•"/>
-              <a:tabLst/>
+              <a:buClr>
+                <a:srgbClr val="582808"/>
+              </a:buClr>
+              <a:buFont typeface="Wingdings" charset="2"/>
+              <a:buChar char=""/>
             </a:pPr>
-            <a:endParaRPr kumimoji="0" lang="es-CL" altLang="es-CL" sz="2000" b="0" i="0" u="none" strike="noStrike" cap="none" normalizeH="0" baseline="0" dirty="0">
-              <a:ln>
-                <a:noFill/>
-              </a:ln>
+            <a:endParaRPr lang="es-ES" sz="1600" b="0" strike="noStrike" spc="-1" dirty="0">
               <a:solidFill>
-                <a:schemeClr val="tx1"/>
+                <a:srgbClr val="582808"/>
               </a:solidFill>
-              <a:effectLst/>
-              <a:latin typeface="+mj-lt"/>
+              <a:latin typeface="Calibri"/>
             </a:endParaRPr>
           </a:p>
           <a:p>
-            <a:pPr marL="0" marR="0" lvl="0" indent="0" algn="l" defTabSz="914400" rtl="0" eaLnBrk="0" fontAlgn="base" latinLnBrk="0" hangingPunct="0">
+            <a:pPr marL="216000" indent="-216000" algn="just" defTabSz="914400">
               <a:lnSpc>
                 <a:spcPct val="100000"/>
               </a:lnSpc>
-              <a:spcBef>
-                <a:spcPct val="0"/>
-              </a:spcBef>
-              <a:spcAft>
-                <a:spcPct val="0"/>
-              </a:spcAft>
-              <a:buClrTx/>
-              <a:buSzTx/>
-              <a:buFontTx/>
-              <a:buChar char="•"/>
-              <a:tabLst/>
+              <a:buClr>
+                <a:srgbClr val="582808"/>
+              </a:buClr>
+              <a:buFont typeface="Wingdings" charset="2"/>
+              <a:buChar char=""/>
             </a:pPr>
             <a:r>
-              <a:rPr kumimoji="0" lang="es-CL" altLang="es-CL" sz="2000" b="1" i="0" u="none" strike="noStrike" cap="none" normalizeH="0" baseline="0" dirty="0">
-                <a:ln>
-                  <a:noFill/>
-                </a:ln>
-                <a:solidFill>
-                  <a:schemeClr val="tx1"/>
-                </a:solidFill>
-                <a:effectLst/>
-                <a:latin typeface="+mj-lt"/>
-              </a:rPr>
-              <a:t>Baseline y comparativa:</a:t>
-            </a:r>
-            <a:r>
-              <a:rPr kumimoji="0" lang="es-CL" altLang="es-CL" sz="2000" b="0" i="0" u="none" strike="noStrike" cap="none" normalizeH="0" baseline="0" dirty="0">
-                <a:ln>
-                  <a:noFill/>
-                </a:ln>
-                <a:solidFill>
-                  <a:schemeClr val="tx1"/>
-                </a:solidFill>
-                <a:effectLst/>
-                <a:latin typeface="+mj-lt"/>
-              </a:rPr>
-              <a:t> probamos </a:t>
-            </a:r>
-            <a:r>
-              <a:rPr kumimoji="0" lang="es-CL" altLang="es-CL" sz="2000" b="1" i="0" u="none" strike="noStrike" cap="none" normalizeH="0" baseline="0" dirty="0">
-                <a:ln>
-                  <a:noFill/>
-                </a:ln>
-                <a:solidFill>
-                  <a:schemeClr val="tx1"/>
-                </a:solidFill>
-                <a:effectLst/>
-                <a:latin typeface="+mj-lt"/>
-              </a:rPr>
-              <a:t>Ridge (baseline)</a:t>
-            </a:r>
-            <a:r>
-              <a:rPr kumimoji="0" lang="es-CL" altLang="es-CL" sz="2000" b="0" i="0" u="none" strike="noStrike" cap="none" normalizeH="0" baseline="0" dirty="0">
-                <a:ln>
-                  <a:noFill/>
-                </a:ln>
-                <a:solidFill>
-                  <a:schemeClr val="tx1"/>
-                </a:solidFill>
-                <a:effectLst/>
-                <a:latin typeface="+mj-lt"/>
-              </a:rPr>
-              <a:t>, </a:t>
-            </a:r>
-            <a:r>
-              <a:rPr kumimoji="0" lang="es-CL" altLang="es-CL" sz="2000" b="1" i="0" u="none" strike="noStrike" cap="none" normalizeH="0" baseline="0" dirty="0">
-                <a:ln>
-                  <a:noFill/>
-                </a:ln>
-                <a:solidFill>
-                  <a:schemeClr val="tx1"/>
-                </a:solidFill>
-                <a:effectLst/>
-                <a:latin typeface="+mj-lt"/>
-              </a:rPr>
-              <a:t>Random Forest</a:t>
-            </a:r>
-            <a:r>
-              <a:rPr kumimoji="0" lang="es-CL" altLang="es-CL" sz="2000" b="0" i="0" u="none" strike="noStrike" cap="none" normalizeH="0" baseline="0" dirty="0">
-                <a:ln>
-                  <a:noFill/>
-                </a:ln>
-                <a:solidFill>
-                  <a:schemeClr val="tx1"/>
-                </a:solidFill>
-                <a:effectLst/>
-                <a:latin typeface="+mj-lt"/>
-              </a:rPr>
-              <a:t> y </a:t>
-            </a:r>
-            <a:r>
-              <a:rPr kumimoji="0" lang="es-CL" altLang="es-CL" sz="2000" b="1" i="0" u="none" strike="noStrike" cap="none" normalizeH="0" baseline="0" dirty="0">
-                <a:ln>
-                  <a:noFill/>
-                </a:ln>
-                <a:solidFill>
-                  <a:schemeClr val="tx1"/>
-                </a:solidFill>
-                <a:effectLst/>
-                <a:latin typeface="+mj-lt"/>
+              <a:rPr lang="es-ES" sz="1600" b="0" strike="noStrike" spc="-1" dirty="0" err="1">
+                <a:solidFill>
+                  <a:srgbClr val="582808"/>
+                </a:solidFill>
+                <a:latin typeface="Calibri"/>
+              </a:rPr>
+              <a:t>Baseline</a:t>
+            </a:r>
+            <a:r>
+              <a:rPr lang="es-ES" sz="1600" b="0" strike="noStrike" spc="-1" dirty="0">
+                <a:solidFill>
+                  <a:srgbClr val="582808"/>
+                </a:solidFill>
+                <a:latin typeface="Calibri"/>
+              </a:rPr>
+              <a:t> y comparativa: probamos Ridge (</a:t>
+            </a:r>
+            <a:r>
+              <a:rPr lang="es-ES" sz="1600" b="0" strike="noStrike" spc="-1" dirty="0" err="1">
+                <a:solidFill>
+                  <a:srgbClr val="582808"/>
+                </a:solidFill>
+                <a:latin typeface="Calibri"/>
+              </a:rPr>
+              <a:t>baseline</a:t>
+            </a:r>
+            <a:r>
+              <a:rPr lang="es-ES" sz="1600" b="0" strike="noStrike" spc="-1" dirty="0">
+                <a:solidFill>
+                  <a:srgbClr val="582808"/>
+                </a:solidFill>
+                <a:latin typeface="Calibri"/>
+              </a:rPr>
+              <a:t>), </a:t>
+            </a:r>
+            <a:r>
+              <a:rPr lang="es-ES" sz="1600" b="0" strike="noStrike" spc="-1" dirty="0" err="1">
+                <a:solidFill>
+                  <a:srgbClr val="582808"/>
+                </a:solidFill>
+                <a:latin typeface="Calibri"/>
+              </a:rPr>
+              <a:t>Random</a:t>
+            </a:r>
+            <a:r>
+              <a:rPr lang="es-ES" sz="1600" b="0" strike="noStrike" spc="-1" dirty="0">
+                <a:solidFill>
+                  <a:srgbClr val="582808"/>
+                </a:solidFill>
+                <a:latin typeface="Calibri"/>
+              </a:rPr>
+              <a:t> Forest y </a:t>
+            </a:r>
+            <a:r>
+              <a:rPr lang="es-ES" sz="1600" b="0" strike="noStrike" spc="-1" dirty="0" err="1">
+                <a:solidFill>
+                  <a:srgbClr val="582808"/>
+                </a:solidFill>
+                <a:latin typeface="Calibri"/>
               </a:rPr>
               <a:t>XGBoost</a:t>
             </a:r>
             <a:r>
-              <a:rPr kumimoji="0" lang="es-CL" altLang="es-CL" sz="2000" b="0" i="0" u="none" strike="noStrike" cap="none" normalizeH="0" baseline="0" dirty="0">
-                <a:ln>
-                  <a:noFill/>
-                </a:ln>
-                <a:solidFill>
-                  <a:schemeClr val="tx1"/>
-                </a:solidFill>
-                <a:effectLst/>
-                <a:latin typeface="+mj-lt"/>
-              </a:rPr>
-              <a:t> con </a:t>
-            </a:r>
-            <a:r>
-              <a:rPr kumimoji="0" lang="es-CL" altLang="es-CL" sz="2000" b="1" i="0" u="none" strike="noStrike" cap="none" normalizeH="0" baseline="0" dirty="0">
-                <a:ln>
-                  <a:noFill/>
-                </a:ln>
-                <a:solidFill>
-                  <a:schemeClr val="tx1"/>
-                </a:solidFill>
-                <a:effectLst/>
-                <a:latin typeface="+mj-lt"/>
-              </a:rPr>
-              <a:t>K-</a:t>
-            </a:r>
-            <a:r>
-              <a:rPr kumimoji="0" lang="es-CL" altLang="es-CL" sz="2000" b="1" i="0" u="none" strike="noStrike" cap="none" normalizeH="0" baseline="0" dirty="0" err="1">
-                <a:ln>
-                  <a:noFill/>
-                </a:ln>
-                <a:solidFill>
-                  <a:schemeClr val="tx1"/>
-                </a:solidFill>
-                <a:effectLst/>
-                <a:latin typeface="+mj-lt"/>
+              <a:rPr lang="es-ES" sz="1600" b="0" strike="noStrike" spc="-1" dirty="0">
+                <a:solidFill>
+                  <a:srgbClr val="582808"/>
+                </a:solidFill>
+                <a:latin typeface="Calibri"/>
+              </a:rPr>
+              <a:t> con K-</a:t>
+            </a:r>
+            <a:r>
+              <a:rPr lang="es-ES" sz="1600" b="0" strike="noStrike" spc="-1" dirty="0" err="1">
+                <a:solidFill>
+                  <a:srgbClr val="582808"/>
+                </a:solidFill>
+                <a:latin typeface="Calibri"/>
               </a:rPr>
               <a:t>Fold</a:t>
             </a:r>
             <a:r>
-              <a:rPr kumimoji="0" lang="es-CL" altLang="es-CL" sz="2000" b="1" i="0" u="none" strike="noStrike" cap="none" normalizeH="0" baseline="0" dirty="0">
-                <a:ln>
-                  <a:noFill/>
-                </a:ln>
-                <a:solidFill>
-                  <a:schemeClr val="tx1"/>
-                </a:solidFill>
-                <a:effectLst/>
-                <a:latin typeface="+mj-lt"/>
-              </a:rPr>
-              <a:t> CV (k=5)</a:t>
-            </a:r>
-            <a:r>
-              <a:rPr kumimoji="0" lang="es-CL" altLang="es-CL" sz="2000" b="0" i="0" u="none" strike="noStrike" cap="none" normalizeH="0" baseline="0" dirty="0">
-                <a:ln>
-                  <a:noFill/>
-                </a:ln>
-                <a:solidFill>
-                  <a:schemeClr val="tx1"/>
-                </a:solidFill>
-                <a:effectLst/>
-                <a:latin typeface="+mj-lt"/>
-              </a:rPr>
-              <a:t> y </a:t>
-            </a:r>
-            <a:r>
-              <a:rPr kumimoji="0" lang="es-CL" altLang="es-CL" sz="2000" b="1" i="0" u="none" strike="noStrike" cap="none" normalizeH="0" baseline="0" dirty="0">
-                <a:ln>
-                  <a:noFill/>
-                </a:ln>
-                <a:solidFill>
-                  <a:schemeClr val="tx1"/>
-                </a:solidFill>
-                <a:effectLst/>
-                <a:latin typeface="+mj-lt"/>
-              </a:rPr>
-              <a:t>RMSE sobre revenue_log</a:t>
-            </a:r>
-            <a:r>
-              <a:rPr kumimoji="0" lang="es-CL" altLang="es-CL" sz="2000" b="0" i="0" u="none" strike="noStrike" cap="none" normalizeH="0" baseline="0" dirty="0">
-                <a:ln>
-                  <a:noFill/>
-                </a:ln>
-                <a:solidFill>
-                  <a:schemeClr val="tx1"/>
-                </a:solidFill>
-                <a:effectLst/>
-                <a:latin typeface="+mj-lt"/>
+              <a:rPr lang="es-ES" sz="1600" b="0" strike="noStrike" spc="-1" dirty="0">
+                <a:solidFill>
+                  <a:srgbClr val="582808"/>
+                </a:solidFill>
+                <a:latin typeface="Calibri"/>
+              </a:rPr>
+              <a:t> CV (k=5) y RMSE sobre </a:t>
+            </a:r>
+            <a:r>
+              <a:rPr lang="es-ES" sz="1600" b="0" strike="noStrike" spc="-1" dirty="0" err="1">
+                <a:solidFill>
+                  <a:srgbClr val="582808"/>
+                </a:solidFill>
+                <a:latin typeface="Calibri"/>
+              </a:rPr>
+              <a:t>revenue_log</a:t>
+            </a:r>
+            <a:r>
+              <a:rPr lang="es-ES" sz="1600" b="0" strike="noStrike" spc="-1" dirty="0">
+                <a:solidFill>
+                  <a:srgbClr val="582808"/>
+                </a:solidFill>
+                <a:latin typeface="Calibri"/>
               </a:rPr>
               <a:t>.</a:t>
             </a:r>
           </a:p>
           <a:p>
-            <a:pPr marL="0" marR="0" lvl="0" indent="0" algn="l" defTabSz="914400" rtl="0" eaLnBrk="0" fontAlgn="base" latinLnBrk="0" hangingPunct="0">
+            <a:pPr marL="216000" indent="-216000" algn="just" defTabSz="914400">
               <a:lnSpc>
                 <a:spcPct val="100000"/>
               </a:lnSpc>
-              <a:spcBef>
-                <a:spcPct val="0"/>
-              </a:spcBef>
-              <a:spcAft>
-                <a:spcPct val="0"/>
-              </a:spcAft>
-              <a:buClrTx/>
-              <a:buSzTx/>
-              <a:buFontTx/>
-              <a:buChar char="•"/>
-              <a:tabLst/>
+              <a:buClr>
+                <a:srgbClr val="582808"/>
+              </a:buClr>
+              <a:buFont typeface="Wingdings" charset="2"/>
+              <a:buChar char=""/>
             </a:pPr>
-            <a:endParaRPr kumimoji="0" lang="es-CL" altLang="es-CL" sz="2000" b="0" i="0" u="none" strike="noStrike" cap="none" normalizeH="0" baseline="0" dirty="0">
-              <a:ln>
-                <a:noFill/>
-              </a:ln>
+            <a:endParaRPr lang="es-ES" sz="1600" b="0" strike="noStrike" spc="-1" dirty="0">
               <a:solidFill>
-                <a:schemeClr val="tx1"/>
+                <a:srgbClr val="582808"/>
               </a:solidFill>
-              <a:effectLst/>
-              <a:latin typeface="+mj-lt"/>
+              <a:latin typeface="Calibri"/>
             </a:endParaRPr>
           </a:p>
           <a:p>
-            <a:pPr marL="0" marR="0" lvl="0" indent="0" algn="l" defTabSz="914400" rtl="0" eaLnBrk="0" fontAlgn="base" latinLnBrk="0" hangingPunct="0">
+            <a:pPr marL="216000" indent="-216000" algn="just" defTabSz="914400">
               <a:lnSpc>
                 <a:spcPct val="100000"/>
               </a:lnSpc>
-              <a:spcBef>
-                <a:spcPct val="0"/>
-              </a:spcBef>
-              <a:spcAft>
-                <a:spcPct val="0"/>
-              </a:spcAft>
-              <a:buClrTx/>
-              <a:buSzTx/>
-              <a:buFontTx/>
-              <a:buChar char="•"/>
-              <a:tabLst/>
+              <a:buClr>
+                <a:srgbClr val="582808"/>
+              </a:buClr>
+              <a:buFont typeface="Wingdings" charset="2"/>
+              <a:buChar char=""/>
             </a:pPr>
             <a:r>
-              <a:rPr kumimoji="0" lang="es-CL" altLang="es-CL" sz="2000" b="1" i="0" u="none" strike="noStrike" cap="none" normalizeH="0" baseline="0" dirty="0">
-                <a:ln>
-                  <a:noFill/>
-                </a:ln>
-                <a:solidFill>
-                  <a:schemeClr val="tx1"/>
-                </a:solidFill>
-                <a:effectLst/>
-                <a:latin typeface="+mj-lt"/>
-              </a:rPr>
-              <a:t>Selección del modelo:</a:t>
-            </a:r>
-            <a:r>
-              <a:rPr kumimoji="0" lang="es-CL" altLang="es-CL" sz="2000" b="0" i="0" u="none" strike="noStrike" cap="none" normalizeH="0" baseline="0" dirty="0">
-                <a:ln>
-                  <a:noFill/>
-                </a:ln>
-                <a:solidFill>
-                  <a:schemeClr val="tx1"/>
-                </a:solidFill>
-                <a:effectLst/>
-                <a:latin typeface="+mj-lt"/>
-              </a:rPr>
-              <a:t> el menor RMSE en CV fue </a:t>
-            </a:r>
-            <a:r>
-              <a:rPr kumimoji="0" lang="es-CL" altLang="es-CL" sz="2000" b="1" i="0" u="none" strike="noStrike" cap="none" normalizeH="0" baseline="0" dirty="0">
-                <a:ln>
-                  <a:noFill/>
-                </a:ln>
-                <a:solidFill>
-                  <a:schemeClr val="tx1"/>
-                </a:solidFill>
-                <a:effectLst/>
-                <a:latin typeface="+mj-lt"/>
+              <a:rPr lang="es-ES" sz="1600" b="0" strike="noStrike" spc="-1" dirty="0">
+                <a:solidFill>
+                  <a:srgbClr val="582808"/>
+                </a:solidFill>
+                <a:latin typeface="Calibri"/>
+              </a:rPr>
+              <a:t>Selección del modelo: el menor RMSE en CV fue </a:t>
+            </a:r>
+            <a:r>
+              <a:rPr lang="es-ES" sz="1600" b="0" strike="noStrike" spc="-1" dirty="0" err="1">
+                <a:solidFill>
+                  <a:srgbClr val="582808"/>
+                </a:solidFill>
+                <a:latin typeface="Calibri"/>
               </a:rPr>
               <a:t>XGBoost</a:t>
             </a:r>
             <a:r>
-              <a:rPr kumimoji="0" lang="es-CL" altLang="es-CL" sz="2000" b="0" i="0" u="none" strike="noStrike" cap="none" normalizeH="0" baseline="0" dirty="0">
-                <a:ln>
-                  <a:noFill/>
-                </a:ln>
-                <a:solidFill>
-                  <a:schemeClr val="tx1"/>
-                </a:solidFill>
-                <a:effectLst/>
-                <a:latin typeface="+mj-lt"/>
+              <a:rPr lang="es-ES" sz="1600" b="0" strike="noStrike" spc="-1" dirty="0">
+                <a:solidFill>
+                  <a:srgbClr val="582808"/>
+                </a:solidFill>
+                <a:latin typeface="Calibri"/>
               </a:rPr>
               <a:t>, por lo que se eligió para entrenamiento final y posterior optimización.</a:t>
             </a:r>
           </a:p>
           <a:p>
-            <a:pPr marL="0" marR="0" lvl="0" indent="0" algn="l" defTabSz="914400" rtl="0" eaLnBrk="0" fontAlgn="base" latinLnBrk="0" hangingPunct="0">
+            <a:pPr marL="216000" indent="-216000" algn="just" defTabSz="914400">
               <a:lnSpc>
                 <a:spcPct val="100000"/>
               </a:lnSpc>
-              <a:spcBef>
-                <a:spcPct val="0"/>
-              </a:spcBef>
-              <a:spcAft>
-                <a:spcPct val="0"/>
-              </a:spcAft>
-              <a:buClrTx/>
-              <a:buSzTx/>
-              <a:buFontTx/>
-              <a:buChar char="•"/>
-              <a:tabLst/>
+              <a:buClr>
+                <a:srgbClr val="582808"/>
+              </a:buClr>
+              <a:buFont typeface="Wingdings" charset="2"/>
+              <a:buChar char=""/>
             </a:pPr>
-            <a:endParaRPr kumimoji="0" lang="es-CL" altLang="es-CL" sz="2000" b="0" i="0" u="none" strike="noStrike" cap="none" normalizeH="0" baseline="0" dirty="0">
-              <a:ln>
-                <a:noFill/>
-              </a:ln>
+            <a:endParaRPr lang="es-ES" sz="1600" b="0" strike="noStrike" spc="-1" dirty="0">
               <a:solidFill>
-                <a:schemeClr val="tx1"/>
+                <a:srgbClr val="582808"/>
               </a:solidFill>
-              <a:effectLst/>
-              <a:latin typeface="+mj-lt"/>
+              <a:latin typeface="Calibri"/>
             </a:endParaRPr>
           </a:p>
           <a:p>
-            <a:pPr marL="0" marR="0" lvl="0" indent="0" algn="l" defTabSz="914400" rtl="0" eaLnBrk="0" fontAlgn="base" latinLnBrk="0" hangingPunct="0">
+            <a:pPr marL="216000" indent="-216000" algn="just" defTabSz="914400">
               <a:lnSpc>
                 <a:spcPct val="100000"/>
               </a:lnSpc>
-              <a:spcBef>
-                <a:spcPct val="0"/>
-              </a:spcBef>
-              <a:spcAft>
-                <a:spcPct val="0"/>
-              </a:spcAft>
-              <a:buClrTx/>
-              <a:buSzTx/>
-              <a:buFontTx/>
-              <a:buChar char="•"/>
-              <a:tabLst/>
+              <a:buClr>
+                <a:srgbClr val="582808"/>
+              </a:buClr>
+              <a:buFont typeface="Wingdings" charset="2"/>
+              <a:buChar char=""/>
             </a:pPr>
             <a:r>
-              <a:rPr kumimoji="0" lang="es-CL" altLang="es-CL" sz="2000" b="1" i="0" u="none" strike="noStrike" cap="none" normalizeH="0" baseline="0" dirty="0">
-                <a:ln>
-                  <a:noFill/>
-                </a:ln>
-                <a:solidFill>
-                  <a:schemeClr val="tx1"/>
-                </a:solidFill>
-                <a:effectLst/>
-                <a:latin typeface="+mj-lt"/>
-              </a:rPr>
-              <a:t>Chequeo del target en euros:</a:t>
-            </a:r>
-            <a:r>
-              <a:rPr kumimoji="0" lang="es-CL" altLang="es-CL" sz="2000" b="0" i="0" u="none" strike="noStrike" cap="none" normalizeH="0" baseline="0" dirty="0">
-                <a:ln>
-                  <a:noFill/>
-                </a:ln>
-                <a:solidFill>
-                  <a:schemeClr val="tx1"/>
-                </a:solidFill>
-                <a:effectLst/>
-                <a:latin typeface="+mj-lt"/>
-              </a:rPr>
-              <a:t> calculamos </a:t>
-            </a:r>
-            <a:r>
-              <a:rPr kumimoji="0" lang="es-CL" altLang="es-CL" sz="2000" b="1" i="0" u="none" strike="noStrike" cap="none" normalizeH="0" baseline="0" dirty="0">
-                <a:ln>
-                  <a:noFill/>
-                </a:ln>
-                <a:solidFill>
-                  <a:schemeClr val="tx1"/>
-                </a:solidFill>
-                <a:effectLst/>
-                <a:latin typeface="+mj-lt"/>
-              </a:rPr>
-              <a:t>media, mediana y percentiles</a:t>
-            </a:r>
-            <a:r>
-              <a:rPr kumimoji="0" lang="es-CL" altLang="es-CL" sz="2000" b="0" i="0" u="none" strike="noStrike" cap="none" normalizeH="0" baseline="0" dirty="0">
-                <a:ln>
-                  <a:noFill/>
-                </a:ln>
-                <a:solidFill>
-                  <a:schemeClr val="tx1"/>
-                </a:solidFill>
-                <a:effectLst/>
-                <a:latin typeface="+mj-lt"/>
-              </a:rPr>
-              <a:t> (tras expm1) para entender la magnitud real del revenue y poder interpretar el error.</a:t>
-            </a:r>
-          </a:p>
-          <a:p>
-            <a:pPr marL="0" marR="0" lvl="0" indent="0" algn="l" defTabSz="914400" rtl="0" eaLnBrk="0" fontAlgn="base" latinLnBrk="0" hangingPunct="0">
+              <a:rPr lang="es-ES" sz="1600" b="0" strike="noStrike" spc="-1" dirty="0">
+                <a:solidFill>
+                  <a:srgbClr val="582808"/>
+                </a:solidFill>
+                <a:latin typeface="Calibri"/>
+              </a:rPr>
+              <a:t>Chequeo del target en euros: calculamos media, mediana y percentiles (tras expm1) para entender la magnitud real del </a:t>
+            </a:r>
+            <a:r>
+              <a:rPr lang="es-ES" sz="1600" b="0" strike="noStrike" spc="-1" dirty="0" err="1">
+                <a:solidFill>
+                  <a:srgbClr val="582808"/>
+                </a:solidFill>
+                <a:latin typeface="Calibri"/>
+              </a:rPr>
+              <a:t>revenue</a:t>
+            </a:r>
+            <a:r>
+              <a:rPr lang="es-ES" sz="1600" b="0" strike="noStrike" spc="-1" dirty="0">
+                <a:solidFill>
+                  <a:srgbClr val="582808"/>
+                </a:solidFill>
+                <a:latin typeface="Calibri"/>
+              </a:rPr>
+              <a:t> y poder interpretar el error.</a:t>
+            </a:r>
+          </a:p>
+          <a:p>
+            <a:pPr marL="216000" indent="-216000" algn="just" defTabSz="914400">
               <a:lnSpc>
                 <a:spcPct val="100000"/>
               </a:lnSpc>
-              <a:spcBef>
-                <a:spcPct val="0"/>
-              </a:spcBef>
-              <a:spcAft>
-                <a:spcPct val="0"/>
-              </a:spcAft>
-              <a:buClrTx/>
-              <a:buSzTx/>
-              <a:buFontTx/>
-              <a:buChar char="•"/>
-              <a:tabLst/>
+              <a:buClr>
+                <a:srgbClr val="582808"/>
+              </a:buClr>
+              <a:buFont typeface="Wingdings" charset="2"/>
+              <a:buChar char=""/>
             </a:pPr>
-            <a:endParaRPr kumimoji="0" lang="es-CL" altLang="es-CL" sz="2000" b="0" i="0" u="none" strike="noStrike" cap="none" normalizeH="0" baseline="0" dirty="0">
-              <a:ln>
-                <a:noFill/>
-              </a:ln>
+            <a:endParaRPr lang="es-ES" sz="1600" b="0" strike="noStrike" spc="-1" dirty="0">
               <a:solidFill>
-                <a:schemeClr val="tx1"/>
+                <a:srgbClr val="582808"/>
               </a:solidFill>
-              <a:effectLst/>
-              <a:latin typeface="+mj-lt"/>
+              <a:latin typeface="Calibri"/>
             </a:endParaRPr>
           </a:p>
           <a:p>
-            <a:pPr marL="0" marR="0" lvl="0" indent="0" algn="l" defTabSz="914400" rtl="0" eaLnBrk="0" fontAlgn="base" latinLnBrk="0" hangingPunct="0">
+            <a:pPr marL="216000" indent="-216000" algn="just" defTabSz="914400">
               <a:lnSpc>
                 <a:spcPct val="100000"/>
               </a:lnSpc>
-              <a:spcBef>
-                <a:spcPct val="0"/>
-              </a:spcBef>
-              <a:spcAft>
-                <a:spcPct val="0"/>
-              </a:spcAft>
-              <a:buClrTx/>
-              <a:buSzTx/>
-              <a:buFontTx/>
-              <a:buChar char="•"/>
-              <a:tabLst/>
+              <a:buClr>
+                <a:srgbClr val="582808"/>
+              </a:buClr>
+              <a:buFont typeface="Wingdings" charset="2"/>
+              <a:buChar char=""/>
             </a:pPr>
             <a:r>
-              <a:rPr kumimoji="0" lang="es-CL" altLang="es-CL" sz="2000" b="1" i="0" u="none" strike="noStrike" cap="none" normalizeH="0" baseline="0" dirty="0">
-                <a:ln>
-                  <a:noFill/>
-                </a:ln>
-                <a:solidFill>
-                  <a:schemeClr val="tx1"/>
-                </a:solidFill>
-                <a:effectLst/>
-                <a:latin typeface="+mj-lt"/>
-              </a:rPr>
-              <a:t>Interpretación del RMSE (€):</a:t>
-            </a:r>
-            <a:r>
-              <a:rPr kumimoji="0" lang="es-CL" altLang="es-CL" sz="2000" b="0" i="0" u="none" strike="noStrike" cap="none" normalizeH="0" baseline="0" dirty="0">
-                <a:ln>
-                  <a:noFill/>
-                </a:ln>
-                <a:solidFill>
-                  <a:schemeClr val="tx1"/>
-                </a:solidFill>
-                <a:effectLst/>
-                <a:latin typeface="+mj-lt"/>
-              </a:rPr>
-              <a:t> el revenue tiene </a:t>
-            </a:r>
-            <a:r>
-              <a:rPr kumimoji="0" lang="es-CL" altLang="es-CL" sz="2000" b="1" i="0" u="none" strike="noStrike" cap="none" normalizeH="0" baseline="0" dirty="0">
-                <a:ln>
-                  <a:noFill/>
-                </a:ln>
-                <a:solidFill>
-                  <a:schemeClr val="tx1"/>
-                </a:solidFill>
-                <a:effectLst/>
-                <a:latin typeface="+mj-lt"/>
-              </a:rPr>
-              <a:t>cola muy pesada</a:t>
-            </a:r>
-            <a:r>
-              <a:rPr kumimoji="0" lang="es-CL" altLang="es-CL" sz="2000" b="0" i="0" u="none" strike="noStrike" cap="none" normalizeH="0" baseline="0" dirty="0">
-                <a:ln>
-                  <a:noFill/>
-                </a:ln>
-                <a:solidFill>
-                  <a:schemeClr val="tx1"/>
-                </a:solidFill>
-                <a:effectLst/>
-                <a:latin typeface="+mj-lt"/>
-              </a:rPr>
-              <a:t> (p99 ≈ 84k€ y </a:t>
-            </a:r>
-            <a:r>
-              <a:rPr kumimoji="0" lang="es-CL" altLang="es-CL" sz="2000" b="1" i="0" u="none" strike="noStrike" cap="none" normalizeH="0" baseline="0" dirty="0">
-                <a:ln>
-                  <a:noFill/>
-                </a:ln>
-                <a:solidFill>
-                  <a:schemeClr val="tx1"/>
-                </a:solidFill>
-                <a:effectLst/>
-                <a:latin typeface="+mj-lt"/>
-              </a:rPr>
-              <a:t>máximo ≈ 2M€</a:t>
-            </a:r>
-            <a:r>
-              <a:rPr kumimoji="0" lang="es-CL" altLang="es-CL" sz="2000" b="0" i="0" u="none" strike="noStrike" cap="none" normalizeH="0" baseline="0" dirty="0">
-                <a:ln>
-                  <a:noFill/>
-                </a:ln>
-                <a:solidFill>
-                  <a:schemeClr val="tx1"/>
-                </a:solidFill>
-                <a:effectLst/>
-                <a:latin typeface="+mj-lt"/>
-              </a:rPr>
-              <a:t>). Como RMSE penaliza errores al cuadrado, estos casos extremos pueden inflar el RMSE en euros aunque el modelo funcione bien para la mayoría.</a:t>
+              <a:rPr lang="es-ES" sz="1600" b="0" strike="noStrike" spc="-1" dirty="0">
+                <a:solidFill>
+                  <a:srgbClr val="582808"/>
+                </a:solidFill>
+                <a:latin typeface="Calibri"/>
+              </a:rPr>
+              <a:t>Interpretación del RMSE (€): el </a:t>
+            </a:r>
+            <a:r>
+              <a:rPr lang="es-ES" sz="1600" b="0" strike="noStrike" spc="-1" dirty="0" err="1">
+                <a:solidFill>
+                  <a:srgbClr val="582808"/>
+                </a:solidFill>
+                <a:latin typeface="Calibri"/>
+              </a:rPr>
+              <a:t>revenue</a:t>
+            </a:r>
+            <a:r>
+              <a:rPr lang="es-ES" sz="1600" b="0" strike="noStrike" spc="-1" dirty="0">
+                <a:solidFill>
+                  <a:srgbClr val="582808"/>
+                </a:solidFill>
+                <a:latin typeface="Calibri"/>
+              </a:rPr>
+              <a:t> tiene cola muy pesada (p99 ≈ 84k€ y máximo ≈ 2M€). Como RMSE penaliza errores al cuadrado, estos casos extremos pueden inflar el RMSE en euros aunque el modelo funcione bien para la mayoría.</a:t>
             </a:r>
           </a:p>
         </p:txBody>
       </p:sp>
       <p:pic>
         <p:nvPicPr>
-          <p:cNvPr id="7" name="Imagen 28">
+          <p:cNvPr id="10" name="Imagen 28">
             <a:hlinkClick r:id="rId2" action="ppaction://hlinksldjump"/>
             <a:extLst>
               <a:ext uri="{FF2B5EF4-FFF2-40B4-BE49-F238E27FC236}">
-                <a16:creationId xmlns:a16="http://schemas.microsoft.com/office/drawing/2014/main" id="{42F73702-51E5-2631-57CC-D0BB26462C81}"/>
+                <a16:creationId xmlns:a16="http://schemas.microsoft.com/office/drawing/2014/main" id="{42D78302-A6EC-4729-9E70-A5A02898C129}"/>
               </a:ext>
             </a:extLst>
           </p:cNvPr>
@@ -10962,8 +10609,8 @@
         </p:blipFill>
         <p:spPr>
           <a:xfrm>
-            <a:off x="10644306" y="131941"/>
-            <a:ext cx="1208156" cy="1147319"/>
+            <a:off x="10477440" y="272022"/>
+            <a:ext cx="1368360" cy="1014209"/>
           </a:xfrm>
           <a:prstGeom prst="rect">
             <a:avLst/>
@@ -10976,7 +10623,7 @@
     </p:spTree>
     <p:extLst>
       <p:ext uri="{BB962C8B-B14F-4D97-AF65-F5344CB8AC3E}">
-        <p14:creationId xmlns:p14="http://schemas.microsoft.com/office/powerpoint/2010/main" val="3762195791"/>
+        <p14:creationId xmlns:p14="http://schemas.microsoft.com/office/powerpoint/2010/main" val="3099402250"/>
       </p:ext>
     </p:extLst>
   </p:cSld>
@@ -10987,6 +10634,1363 @@
 </file>
 
 <file path=ppt/slides/slide14.xml><?xml version="1.0" encoding="utf-8"?>
+<p:sld xmlns:a="http://schemas.openxmlformats.org/drawingml/2006/main" xmlns:r="http://schemas.openxmlformats.org/officeDocument/2006/relationships" xmlns:p="http://schemas.openxmlformats.org/presentationml/2006/main">
+  <p:cSld>
+    <p:spTree>
+      <p:nvGrpSpPr>
+        <p:cNvPr id="1" name=""/>
+        <p:cNvGrpSpPr/>
+        <p:nvPr/>
+      </p:nvGrpSpPr>
+      <p:grpSpPr>
+        <a:xfrm>
+          <a:off x="0" y="0"/>
+          <a:ext cx="0" cy="0"/>
+          <a:chOff x="0" y="0"/>
+          <a:chExt cx="0" cy="0"/>
+        </a:xfrm>
+      </p:grpSpPr>
+      <p:sp>
+        <p:nvSpPr>
+          <p:cNvPr id="65" name="Rectángulo 5"/>
+          <p:cNvSpPr/>
+          <p:nvPr/>
+        </p:nvSpPr>
+        <p:spPr>
+          <a:xfrm>
+            <a:off x="960" y="0"/>
+            <a:ext cx="12191040" cy="6856920"/>
+          </a:xfrm>
+          <a:prstGeom prst="rect">
+            <a:avLst/>
+          </a:prstGeom>
+          <a:solidFill>
+            <a:schemeClr val="accent2">
+              <a:lumMod val="20000"/>
+              <a:lumOff val="80000"/>
+            </a:schemeClr>
+          </a:solidFill>
+          <a:ln>
+            <a:solidFill>
+              <a:srgbClr val="325490"/>
+            </a:solidFill>
+          </a:ln>
+        </p:spPr>
+        <p:style>
+          <a:lnRef idx="2">
+            <a:schemeClr val="accent1">
+              <a:shade val="50000"/>
+            </a:schemeClr>
+          </a:lnRef>
+          <a:fillRef idx="1">
+            <a:schemeClr val="accent1"/>
+          </a:fillRef>
+          <a:effectRef idx="0">
+            <a:schemeClr val="accent1"/>
+          </a:effectRef>
+          <a:fontRef idx="minor"/>
+        </p:style>
+        <p:txBody>
+          <a:bodyPr lIns="90000" tIns="45000" rIns="90000" bIns="45000" anchor="ctr">
+            <a:noAutofit/>
+          </a:bodyPr>
+          <a:lstStyle/>
+          <a:p>
+            <a:pPr algn="ctr" defTabSz="914400">
+              <a:lnSpc>
+                <a:spcPct val="100000"/>
+              </a:lnSpc>
+            </a:pPr>
+            <a:endParaRPr lang="es-ES" sz="1800" b="0" strike="noStrike" spc="-1" dirty="0">
+              <a:solidFill>
+                <a:schemeClr val="accent2">
+                  <a:lumMod val="50000"/>
+                </a:schemeClr>
+              </a:solidFill>
+              <a:latin typeface="Calibri"/>
+            </a:endParaRPr>
+          </a:p>
+        </p:txBody>
+      </p:sp>
+      <p:sp>
+        <p:nvSpPr>
+          <p:cNvPr id="66" name="CuadroTexto 7"/>
+          <p:cNvSpPr/>
+          <p:nvPr/>
+        </p:nvSpPr>
+        <p:spPr>
+          <a:xfrm>
+            <a:off x="527760" y="479520"/>
+            <a:ext cx="11135160" cy="629488"/>
+          </a:xfrm>
+          <a:prstGeom prst="rect">
+            <a:avLst/>
+          </a:prstGeom>
+          <a:noFill/>
+          <a:ln w="0">
+            <a:noFill/>
+          </a:ln>
+        </p:spPr>
+        <p:style>
+          <a:lnRef idx="0">
+            <a:scrgbClr r="0" g="0" b="0"/>
+          </a:lnRef>
+          <a:fillRef idx="0">
+            <a:scrgbClr r="0" g="0" b="0"/>
+          </a:fillRef>
+          <a:effectRef idx="0">
+            <a:scrgbClr r="0" g="0" b="0"/>
+          </a:effectRef>
+          <a:fontRef idx="minor"/>
+        </p:style>
+        <p:txBody>
+          <a:bodyPr lIns="90000" tIns="45000" rIns="90000" bIns="45000" anchor="t">
+            <a:spAutoFit/>
+          </a:bodyPr>
+          <a:lstStyle/>
+          <a:p>
+            <a:r>
+              <a:rPr lang="es-ES" sz="3500" b="1" spc="-1" dirty="0">
+                <a:solidFill>
+                  <a:schemeClr val="accent2">
+                    <a:lumMod val="50000"/>
+                  </a:schemeClr>
+                </a:solidFill>
+                <a:latin typeface="+mj-lt"/>
+              </a:rPr>
+              <a:t>Modelado y resultados: </a:t>
+            </a:r>
+            <a:r>
+              <a:rPr lang="es-ES" sz="3000" b="1" spc="-1" dirty="0">
+                <a:solidFill>
+                  <a:schemeClr val="accent2">
+                    <a:lumMod val="50000"/>
+                  </a:schemeClr>
+                </a:solidFill>
+                <a:latin typeface="+mj-lt"/>
+              </a:rPr>
+              <a:t>Optimización de </a:t>
+            </a:r>
+            <a:r>
+              <a:rPr lang="es-ES" sz="3000" b="1" spc="-1" dirty="0" err="1">
+                <a:solidFill>
+                  <a:schemeClr val="accent2">
+                    <a:lumMod val="50000"/>
+                  </a:schemeClr>
+                </a:solidFill>
+                <a:latin typeface="+mj-lt"/>
+              </a:rPr>
+              <a:t>hiperparámetros</a:t>
+            </a:r>
+            <a:endParaRPr lang="es-ES" sz="2500" b="1" spc="-1" dirty="0">
+              <a:solidFill>
+                <a:schemeClr val="accent2">
+                  <a:lumMod val="50000"/>
+                </a:schemeClr>
+              </a:solidFill>
+              <a:latin typeface="+mj-lt"/>
+            </a:endParaRPr>
+          </a:p>
+        </p:txBody>
+      </p:sp>
+      <p:sp>
+        <p:nvSpPr>
+          <p:cNvPr id="67" name="CuadroTexto 2"/>
+          <p:cNvSpPr/>
+          <p:nvPr/>
+        </p:nvSpPr>
+        <p:spPr>
+          <a:xfrm>
+            <a:off x="716400" y="1947960"/>
+            <a:ext cx="10946520" cy="364680"/>
+          </a:xfrm>
+          <a:prstGeom prst="rect">
+            <a:avLst/>
+          </a:prstGeom>
+          <a:noFill/>
+          <a:ln w="0">
+            <a:noFill/>
+          </a:ln>
+        </p:spPr>
+        <p:style>
+          <a:lnRef idx="0">
+            <a:scrgbClr r="0" g="0" b="0"/>
+          </a:lnRef>
+          <a:fillRef idx="0">
+            <a:scrgbClr r="0" g="0" b="0"/>
+          </a:fillRef>
+          <a:effectRef idx="0">
+            <a:scrgbClr r="0" g="0" b="0"/>
+          </a:effectRef>
+          <a:fontRef idx="minor"/>
+        </p:style>
+        <p:txBody>
+          <a:bodyPr lIns="90000" tIns="45000" rIns="90000" bIns="45000" anchor="t">
+            <a:spAutoFit/>
+          </a:bodyPr>
+          <a:lstStyle/>
+          <a:p>
+            <a:pPr defTabSz="914400">
+              <a:lnSpc>
+                <a:spcPct val="100000"/>
+              </a:lnSpc>
+            </a:pPr>
+            <a:endParaRPr lang="es-ES" sz="1800" b="0" strike="noStrike" spc="-1" dirty="0">
+              <a:solidFill>
+                <a:srgbClr val="000000"/>
+              </a:solidFill>
+              <a:latin typeface="Arial"/>
+            </a:endParaRPr>
+          </a:p>
+        </p:txBody>
+      </p:sp>
+      <p:pic>
+        <p:nvPicPr>
+          <p:cNvPr id="10" name="Imagen 28">
+            <a:hlinkClick r:id="rId2" action="ppaction://hlinksldjump"/>
+            <a:extLst>
+              <a:ext uri="{FF2B5EF4-FFF2-40B4-BE49-F238E27FC236}">
+                <a16:creationId xmlns:a16="http://schemas.microsoft.com/office/drawing/2014/main" id="{42D78302-A6EC-4729-9E70-A5A02898C129}"/>
+              </a:ext>
+            </a:extLst>
+          </p:cNvPr>
+          <p:cNvPicPr/>
+          <p:nvPr/>
+        </p:nvPicPr>
+        <p:blipFill>
+          <a:blip r:embed="rId3"/>
+          <a:stretch/>
+        </p:blipFill>
+        <p:spPr>
+          <a:xfrm>
+            <a:off x="10477440" y="272022"/>
+            <a:ext cx="1368360" cy="1014209"/>
+          </a:xfrm>
+          <a:prstGeom prst="rect">
+            <a:avLst/>
+          </a:prstGeom>
+          <a:ln w="0">
+            <a:noFill/>
+          </a:ln>
+        </p:spPr>
+      </p:pic>
+      <p:sp>
+        <p:nvSpPr>
+          <p:cNvPr id="7" name="CuadroTexto 16">
+            <a:extLst>
+              <a:ext uri="{FF2B5EF4-FFF2-40B4-BE49-F238E27FC236}">
+                <a16:creationId xmlns:a16="http://schemas.microsoft.com/office/drawing/2014/main" id="{90F91F3A-1179-4A16-A5DE-BDAACFACC3F6}"/>
+              </a:ext>
+            </a:extLst>
+          </p:cNvPr>
+          <p:cNvSpPr/>
+          <p:nvPr/>
+        </p:nvSpPr>
+        <p:spPr>
+          <a:xfrm>
+            <a:off x="716400" y="1582200"/>
+            <a:ext cx="10946520" cy="4276640"/>
+          </a:xfrm>
+          <a:prstGeom prst="rect">
+            <a:avLst/>
+          </a:prstGeom>
+          <a:noFill/>
+          <a:ln w="0">
+            <a:noFill/>
+          </a:ln>
+        </p:spPr>
+        <p:style>
+          <a:lnRef idx="0">
+            <a:scrgbClr r="0" g="0" b="0"/>
+          </a:lnRef>
+          <a:fillRef idx="0">
+            <a:scrgbClr r="0" g="0" b="0"/>
+          </a:fillRef>
+          <a:effectRef idx="0">
+            <a:scrgbClr r="0" g="0" b="0"/>
+          </a:effectRef>
+          <a:fontRef idx="minor"/>
+        </p:style>
+        <p:txBody>
+          <a:bodyPr lIns="90000" tIns="45000" rIns="90000" bIns="45000" anchor="t">
+            <a:spAutoFit/>
+          </a:bodyPr>
+          <a:lstStyle/>
+          <a:p>
+            <a:pPr algn="just" defTabSz="914400">
+              <a:lnSpc>
+                <a:spcPct val="100000"/>
+              </a:lnSpc>
+            </a:pPr>
+            <a:r>
+              <a:rPr lang="es-ES" sz="1600" b="0" strike="noStrike" spc="-1" dirty="0">
+                <a:solidFill>
+                  <a:srgbClr val="582808"/>
+                </a:solidFill>
+                <a:latin typeface="Calibri"/>
+              </a:rPr>
+              <a:t>Tras construir varios modelos base (</a:t>
+            </a:r>
+            <a:r>
+              <a:rPr lang="es-ES" sz="1600" b="0" strike="noStrike" spc="-1" dirty="0" err="1">
+                <a:solidFill>
+                  <a:srgbClr val="582808"/>
+                </a:solidFill>
+                <a:latin typeface="Calibri"/>
+              </a:rPr>
+              <a:t>baseline</a:t>
+            </a:r>
+            <a:r>
+              <a:rPr lang="es-ES" sz="1600" b="0" strike="noStrike" spc="-1" dirty="0">
+                <a:solidFill>
+                  <a:srgbClr val="582808"/>
+                </a:solidFill>
+                <a:latin typeface="Calibri"/>
+              </a:rPr>
+              <a:t>), el siguiente paso consiste en mejorar su rendimiento ajustando sus </a:t>
+            </a:r>
+            <a:r>
+              <a:rPr lang="es-ES" sz="1600" b="0" strike="noStrike" spc="-1" dirty="0" err="1">
+                <a:solidFill>
+                  <a:srgbClr val="582808"/>
+                </a:solidFill>
+                <a:latin typeface="Calibri"/>
+              </a:rPr>
+              <a:t>hiperparámetros</a:t>
+            </a:r>
+            <a:r>
+              <a:rPr lang="es-ES" sz="1600" b="0" strike="noStrike" spc="-1" dirty="0">
+                <a:solidFill>
+                  <a:srgbClr val="582808"/>
+                </a:solidFill>
+                <a:latin typeface="Calibri"/>
+              </a:rPr>
+              <a:t>. La optimización busca encontrar la combinación que minimiza el error y mejora la capacidad de generalización.</a:t>
+            </a:r>
+          </a:p>
+          <a:p>
+            <a:pPr algn="just" defTabSz="914400">
+              <a:lnSpc>
+                <a:spcPct val="100000"/>
+              </a:lnSpc>
+            </a:pPr>
+            <a:endParaRPr lang="es-ES" sz="1600" spc="-1" dirty="0">
+              <a:solidFill>
+                <a:srgbClr val="582808"/>
+              </a:solidFill>
+              <a:latin typeface="Calibri"/>
+            </a:endParaRPr>
+          </a:p>
+          <a:p>
+            <a:pPr algn="just" defTabSz="914400">
+              <a:lnSpc>
+                <a:spcPct val="100000"/>
+              </a:lnSpc>
+            </a:pPr>
+            <a:r>
+              <a:rPr lang="es-ES" sz="1600" b="0" strike="noStrike" spc="-1" dirty="0">
+                <a:solidFill>
+                  <a:srgbClr val="582808"/>
+                </a:solidFill>
+                <a:latin typeface="Calibri"/>
+              </a:rPr>
+              <a:t>En este paso, se han optimizado el modelo lineal, </a:t>
+            </a:r>
+            <a:r>
+              <a:rPr lang="es-ES" sz="1600" b="0" strike="noStrike" spc="-1" dirty="0" err="1">
+                <a:solidFill>
+                  <a:srgbClr val="582808"/>
+                </a:solidFill>
+                <a:latin typeface="Calibri"/>
+              </a:rPr>
+              <a:t>Random</a:t>
+            </a:r>
+            <a:r>
+              <a:rPr lang="es-ES" sz="1600" b="0" strike="noStrike" spc="-1" dirty="0">
+                <a:solidFill>
+                  <a:srgbClr val="582808"/>
+                </a:solidFill>
+                <a:latin typeface="Calibri"/>
+              </a:rPr>
+              <a:t> Forest y </a:t>
+            </a:r>
+            <a:r>
+              <a:rPr lang="es-ES" sz="1600" b="0" strike="noStrike" spc="-1" dirty="0" err="1">
+                <a:solidFill>
+                  <a:srgbClr val="582808"/>
+                </a:solidFill>
+                <a:latin typeface="Calibri"/>
+              </a:rPr>
+              <a:t>XGBoost</a:t>
+            </a:r>
+            <a:r>
+              <a:rPr lang="es-ES" sz="1600" b="0" strike="noStrike" spc="-1" dirty="0">
+                <a:solidFill>
+                  <a:srgbClr val="582808"/>
+                </a:solidFill>
+                <a:latin typeface="Calibri"/>
+              </a:rPr>
+              <a:t> con el objetivo de maximizar el rendimiento de los modelos desarrollados durante la fase de modelado, garantizando al mismo tiempo su capacidad de generalización.</a:t>
+            </a:r>
+          </a:p>
+          <a:p>
+            <a:pPr algn="just" defTabSz="914400">
+              <a:lnSpc>
+                <a:spcPct val="100000"/>
+              </a:lnSpc>
+            </a:pPr>
+            <a:endParaRPr lang="es-ES" sz="1600" spc="-1" dirty="0">
+              <a:solidFill>
+                <a:srgbClr val="582808"/>
+              </a:solidFill>
+              <a:latin typeface="Calibri"/>
+            </a:endParaRPr>
+          </a:p>
+          <a:p>
+            <a:pPr algn="just" defTabSz="914400">
+              <a:lnSpc>
+                <a:spcPct val="100000"/>
+              </a:lnSpc>
+            </a:pPr>
+            <a:r>
+              <a:rPr lang="es-ES" sz="1600" b="0" strike="noStrike" spc="-1" dirty="0">
+                <a:solidFill>
+                  <a:srgbClr val="582808"/>
+                </a:solidFill>
+                <a:latin typeface="Calibri"/>
+              </a:rPr>
+              <a:t>Para ello, se ha optado por el uso de </a:t>
+            </a:r>
+            <a:r>
+              <a:rPr lang="es-ES" sz="1600" b="0" strike="noStrike" spc="-1" dirty="0" err="1">
+                <a:solidFill>
+                  <a:srgbClr val="582808"/>
+                </a:solidFill>
+                <a:latin typeface="Calibri"/>
+              </a:rPr>
+              <a:t>RandomizedSearchCV</a:t>
+            </a:r>
+            <a:r>
+              <a:rPr lang="es-ES" sz="1600" b="0" strike="noStrike" spc="-1" dirty="0">
+                <a:solidFill>
+                  <a:srgbClr val="582808"/>
+                </a:solidFill>
+                <a:latin typeface="Calibri"/>
+              </a:rPr>
+              <a:t> frente a otras alternativas como </a:t>
+            </a:r>
+            <a:r>
+              <a:rPr lang="es-ES" sz="1600" b="0" strike="noStrike" spc="-1" dirty="0" err="1">
+                <a:solidFill>
+                  <a:srgbClr val="582808"/>
+                </a:solidFill>
+                <a:latin typeface="Calibri"/>
+              </a:rPr>
+              <a:t>Grid</a:t>
+            </a:r>
+            <a:r>
+              <a:rPr lang="es-ES" sz="1600" b="0" strike="noStrike" spc="-1" dirty="0">
+                <a:solidFill>
+                  <a:srgbClr val="582808"/>
+                </a:solidFill>
+                <a:latin typeface="Calibri"/>
+              </a:rPr>
+              <a:t> </a:t>
+            </a:r>
+            <a:r>
+              <a:rPr lang="es-ES" sz="1600" b="0" strike="noStrike" spc="-1" dirty="0" err="1">
+                <a:solidFill>
+                  <a:srgbClr val="582808"/>
+                </a:solidFill>
+                <a:latin typeface="Calibri"/>
+              </a:rPr>
+              <a:t>Search</a:t>
+            </a:r>
+            <a:r>
+              <a:rPr lang="es-ES" sz="1600" b="0" strike="noStrike" spc="-1" dirty="0">
+                <a:solidFill>
+                  <a:srgbClr val="582808"/>
+                </a:solidFill>
+                <a:latin typeface="Calibri"/>
+              </a:rPr>
+              <a:t>, debido a su mayor eficiencia computacional. Este método permite explorar el espacio de </a:t>
+            </a:r>
+            <a:r>
+              <a:rPr lang="es-ES" sz="1600" b="0" strike="noStrike" spc="-1" dirty="0" err="1">
+                <a:solidFill>
+                  <a:srgbClr val="582808"/>
+                </a:solidFill>
+                <a:latin typeface="Calibri"/>
+              </a:rPr>
+              <a:t>hiperparámetros</a:t>
+            </a:r>
+            <a:r>
+              <a:rPr lang="es-ES" sz="1600" b="0" strike="noStrike" spc="-1" dirty="0">
+                <a:solidFill>
+                  <a:srgbClr val="582808"/>
+                </a:solidFill>
+                <a:latin typeface="Calibri"/>
+              </a:rPr>
+              <a:t> de forma aleatoria, evaluando un número limitado de combinaciones pero cubriendo un rango amplio de valores.</a:t>
+            </a:r>
+          </a:p>
+          <a:p>
+            <a:pPr algn="just" defTabSz="914400">
+              <a:lnSpc>
+                <a:spcPct val="100000"/>
+              </a:lnSpc>
+            </a:pPr>
+            <a:endParaRPr lang="es-ES" sz="1600" spc="-1" dirty="0">
+              <a:solidFill>
+                <a:srgbClr val="582808"/>
+              </a:solidFill>
+              <a:latin typeface="Calibri"/>
+            </a:endParaRPr>
+          </a:p>
+          <a:p>
+            <a:pPr algn="just" defTabSz="914400">
+              <a:lnSpc>
+                <a:spcPct val="100000"/>
+              </a:lnSpc>
+            </a:pPr>
+            <a:r>
+              <a:rPr lang="es-ES" sz="1600" b="0" strike="noStrike" spc="-1" dirty="0">
+                <a:solidFill>
+                  <a:srgbClr val="582808"/>
+                </a:solidFill>
+                <a:latin typeface="Calibri"/>
+              </a:rPr>
+              <a:t>La métrica seleccionada para la optimización ha sido el error cuadrático medio (RMSE), dado que el problema abordado es de regresión sobre variables continuas relacionadas con precios.</a:t>
+            </a:r>
+          </a:p>
+          <a:p>
+            <a:pPr algn="just" defTabSz="914400">
+              <a:lnSpc>
+                <a:spcPct val="100000"/>
+              </a:lnSpc>
+            </a:pPr>
+            <a:endParaRPr lang="es-ES" sz="1600" spc="-1" dirty="0">
+              <a:solidFill>
+                <a:srgbClr val="582808"/>
+              </a:solidFill>
+              <a:latin typeface="Calibri"/>
+            </a:endParaRPr>
+          </a:p>
+          <a:p>
+            <a:pPr algn="just" defTabSz="914400">
+              <a:lnSpc>
+                <a:spcPct val="100000"/>
+              </a:lnSpc>
+            </a:pPr>
+            <a:r>
+              <a:rPr lang="es-ES" sz="1600" b="0" strike="noStrike" spc="-1" dirty="0">
+                <a:solidFill>
+                  <a:srgbClr val="582808"/>
+                </a:solidFill>
+                <a:latin typeface="Calibri"/>
+              </a:rPr>
+              <a:t>Finalmente, la validación cruzada con 5 particiones ha permitido obtener una estimación robusta del rendimiento del modelo, reduciendo la dependencia de una única partición de los datos y mejorando la fiabilidad de los resultados obtenidos.</a:t>
+            </a:r>
+          </a:p>
+          <a:p>
+            <a:pPr algn="just" defTabSz="914400">
+              <a:lnSpc>
+                <a:spcPct val="100000"/>
+              </a:lnSpc>
+            </a:pPr>
+            <a:endParaRPr lang="es-ES" sz="1600" spc="-1" dirty="0">
+              <a:solidFill>
+                <a:srgbClr val="582808"/>
+              </a:solidFill>
+              <a:latin typeface="Calibri"/>
+            </a:endParaRPr>
+          </a:p>
+          <a:p>
+            <a:pPr algn="just" defTabSz="914400">
+              <a:lnSpc>
+                <a:spcPct val="100000"/>
+              </a:lnSpc>
+            </a:pPr>
+            <a:endParaRPr lang="es-ES" sz="1600" b="0" strike="noStrike" spc="-1" dirty="0">
+              <a:solidFill>
+                <a:srgbClr val="000000"/>
+              </a:solidFill>
+              <a:latin typeface="Arial"/>
+            </a:endParaRPr>
+          </a:p>
+        </p:txBody>
+      </p:sp>
+    </p:spTree>
+    <p:extLst>
+      <p:ext uri="{BB962C8B-B14F-4D97-AF65-F5344CB8AC3E}">
+        <p14:creationId xmlns:p14="http://schemas.microsoft.com/office/powerpoint/2010/main" val="2489339621"/>
+      </p:ext>
+    </p:extLst>
+  </p:cSld>
+  <p:clrMapOvr>
+    <a:masterClrMapping/>
+  </p:clrMapOvr>
+</p:sld>
+</file>
+
+<file path=ppt/slides/slide15.xml><?xml version="1.0" encoding="utf-8"?>
+<p:sld xmlns:a="http://schemas.openxmlformats.org/drawingml/2006/main" xmlns:r="http://schemas.openxmlformats.org/officeDocument/2006/relationships" xmlns:p="http://schemas.openxmlformats.org/presentationml/2006/main">
+  <p:cSld>
+    <p:spTree>
+      <p:nvGrpSpPr>
+        <p:cNvPr id="1" name=""/>
+        <p:cNvGrpSpPr/>
+        <p:nvPr/>
+      </p:nvGrpSpPr>
+      <p:grpSpPr>
+        <a:xfrm>
+          <a:off x="0" y="0"/>
+          <a:ext cx="0" cy="0"/>
+          <a:chOff x="0" y="0"/>
+          <a:chExt cx="0" cy="0"/>
+        </a:xfrm>
+      </p:grpSpPr>
+      <p:sp>
+        <p:nvSpPr>
+          <p:cNvPr id="65" name="Rectángulo 5"/>
+          <p:cNvSpPr/>
+          <p:nvPr/>
+        </p:nvSpPr>
+        <p:spPr>
+          <a:xfrm>
+            <a:off x="960" y="-30480"/>
+            <a:ext cx="12191040" cy="6856920"/>
+          </a:xfrm>
+          <a:prstGeom prst="rect">
+            <a:avLst/>
+          </a:prstGeom>
+          <a:solidFill>
+            <a:schemeClr val="accent2">
+              <a:lumMod val="20000"/>
+              <a:lumOff val="80000"/>
+            </a:schemeClr>
+          </a:solidFill>
+          <a:ln>
+            <a:solidFill>
+              <a:srgbClr val="325490"/>
+            </a:solidFill>
+          </a:ln>
+        </p:spPr>
+        <p:style>
+          <a:lnRef idx="2">
+            <a:schemeClr val="accent1">
+              <a:shade val="50000"/>
+            </a:schemeClr>
+          </a:lnRef>
+          <a:fillRef idx="1">
+            <a:schemeClr val="accent1"/>
+          </a:fillRef>
+          <a:effectRef idx="0">
+            <a:schemeClr val="accent1"/>
+          </a:effectRef>
+          <a:fontRef idx="minor"/>
+        </p:style>
+        <p:txBody>
+          <a:bodyPr lIns="90000" tIns="45000" rIns="90000" bIns="45000" anchor="ctr">
+            <a:noAutofit/>
+          </a:bodyPr>
+          <a:lstStyle/>
+          <a:p>
+            <a:pPr algn="ctr" defTabSz="914400">
+              <a:lnSpc>
+                <a:spcPct val="100000"/>
+              </a:lnSpc>
+            </a:pPr>
+            <a:endParaRPr lang="es-ES" sz="1800" b="0" strike="noStrike" spc="-1" dirty="0">
+              <a:solidFill>
+                <a:schemeClr val="accent2">
+                  <a:lumMod val="50000"/>
+                </a:schemeClr>
+              </a:solidFill>
+              <a:latin typeface="Calibri"/>
+            </a:endParaRPr>
+          </a:p>
+        </p:txBody>
+      </p:sp>
+      <p:sp>
+        <p:nvSpPr>
+          <p:cNvPr id="66" name="CuadroTexto 7"/>
+          <p:cNvSpPr/>
+          <p:nvPr/>
+        </p:nvSpPr>
+        <p:spPr>
+          <a:xfrm>
+            <a:off x="527760" y="479520"/>
+            <a:ext cx="11135160" cy="629488"/>
+          </a:xfrm>
+          <a:prstGeom prst="rect">
+            <a:avLst/>
+          </a:prstGeom>
+          <a:noFill/>
+          <a:ln w="0">
+            <a:noFill/>
+          </a:ln>
+        </p:spPr>
+        <p:style>
+          <a:lnRef idx="0">
+            <a:scrgbClr r="0" g="0" b="0"/>
+          </a:lnRef>
+          <a:fillRef idx="0">
+            <a:scrgbClr r="0" g="0" b="0"/>
+          </a:fillRef>
+          <a:effectRef idx="0">
+            <a:scrgbClr r="0" g="0" b="0"/>
+          </a:effectRef>
+          <a:fontRef idx="minor"/>
+        </p:style>
+        <p:txBody>
+          <a:bodyPr lIns="90000" tIns="45000" rIns="90000" bIns="45000" anchor="t">
+            <a:spAutoFit/>
+          </a:bodyPr>
+          <a:lstStyle/>
+          <a:p>
+            <a:r>
+              <a:rPr lang="es-ES" sz="3500" b="1" spc="-1" dirty="0">
+                <a:solidFill>
+                  <a:schemeClr val="accent2">
+                    <a:lumMod val="50000"/>
+                  </a:schemeClr>
+                </a:solidFill>
+                <a:latin typeface="+mj-lt"/>
+              </a:rPr>
+              <a:t>Modelado y resultados: </a:t>
+            </a:r>
+            <a:r>
+              <a:rPr lang="es-ES" sz="3000" b="1" spc="-1" dirty="0">
+                <a:solidFill>
+                  <a:schemeClr val="accent2">
+                    <a:lumMod val="50000"/>
+                  </a:schemeClr>
+                </a:solidFill>
+                <a:latin typeface="+mj-lt"/>
+              </a:rPr>
+              <a:t>Evaluación final en test</a:t>
+            </a:r>
+            <a:endParaRPr lang="es-ES" sz="2500" b="1" spc="-1" dirty="0">
+              <a:solidFill>
+                <a:schemeClr val="accent2">
+                  <a:lumMod val="50000"/>
+                </a:schemeClr>
+              </a:solidFill>
+              <a:latin typeface="+mj-lt"/>
+            </a:endParaRPr>
+          </a:p>
+        </p:txBody>
+      </p:sp>
+      <p:sp>
+        <p:nvSpPr>
+          <p:cNvPr id="67" name="CuadroTexto 2"/>
+          <p:cNvSpPr/>
+          <p:nvPr/>
+        </p:nvSpPr>
+        <p:spPr>
+          <a:xfrm>
+            <a:off x="716400" y="1947960"/>
+            <a:ext cx="10946520" cy="364680"/>
+          </a:xfrm>
+          <a:prstGeom prst="rect">
+            <a:avLst/>
+          </a:prstGeom>
+          <a:noFill/>
+          <a:ln w="0">
+            <a:noFill/>
+          </a:ln>
+        </p:spPr>
+        <p:style>
+          <a:lnRef idx="0">
+            <a:scrgbClr r="0" g="0" b="0"/>
+          </a:lnRef>
+          <a:fillRef idx="0">
+            <a:scrgbClr r="0" g="0" b="0"/>
+          </a:fillRef>
+          <a:effectRef idx="0">
+            <a:scrgbClr r="0" g="0" b="0"/>
+          </a:effectRef>
+          <a:fontRef idx="minor"/>
+        </p:style>
+        <p:txBody>
+          <a:bodyPr lIns="90000" tIns="45000" rIns="90000" bIns="45000" anchor="t">
+            <a:spAutoFit/>
+          </a:bodyPr>
+          <a:lstStyle/>
+          <a:p>
+            <a:pPr defTabSz="914400">
+              <a:lnSpc>
+                <a:spcPct val="100000"/>
+              </a:lnSpc>
+            </a:pPr>
+            <a:endParaRPr lang="es-ES" sz="1800" b="0" strike="noStrike" spc="-1" dirty="0">
+              <a:solidFill>
+                <a:srgbClr val="000000"/>
+              </a:solidFill>
+              <a:latin typeface="Arial"/>
+            </a:endParaRPr>
+          </a:p>
+        </p:txBody>
+      </p:sp>
+      <p:pic>
+        <p:nvPicPr>
+          <p:cNvPr id="10" name="Imagen 28">
+            <a:hlinkClick r:id="rId2" action="ppaction://hlinksldjump"/>
+            <a:extLst>
+              <a:ext uri="{FF2B5EF4-FFF2-40B4-BE49-F238E27FC236}">
+                <a16:creationId xmlns:a16="http://schemas.microsoft.com/office/drawing/2014/main" id="{42D78302-A6EC-4729-9E70-A5A02898C129}"/>
+              </a:ext>
+            </a:extLst>
+          </p:cNvPr>
+          <p:cNvPicPr/>
+          <p:nvPr/>
+        </p:nvPicPr>
+        <p:blipFill>
+          <a:blip r:embed="rId3"/>
+          <a:stretch/>
+        </p:blipFill>
+        <p:spPr>
+          <a:xfrm>
+            <a:off x="10477440" y="272022"/>
+            <a:ext cx="1368360" cy="1014209"/>
+          </a:xfrm>
+          <a:prstGeom prst="rect">
+            <a:avLst/>
+          </a:prstGeom>
+          <a:ln w="0">
+            <a:noFill/>
+          </a:ln>
+        </p:spPr>
+      </p:pic>
+      <p:sp>
+        <p:nvSpPr>
+          <p:cNvPr id="7" name="CuadroTexto 16">
+            <a:extLst>
+              <a:ext uri="{FF2B5EF4-FFF2-40B4-BE49-F238E27FC236}">
+                <a16:creationId xmlns:a16="http://schemas.microsoft.com/office/drawing/2014/main" id="{90F91F3A-1179-4A16-A5DE-BDAACFACC3F6}"/>
+              </a:ext>
+            </a:extLst>
+          </p:cNvPr>
+          <p:cNvSpPr/>
+          <p:nvPr/>
+        </p:nvSpPr>
+        <p:spPr>
+          <a:xfrm>
+            <a:off x="715740" y="1756663"/>
+            <a:ext cx="10946520" cy="829543"/>
+          </a:xfrm>
+          <a:prstGeom prst="rect">
+            <a:avLst/>
+          </a:prstGeom>
+          <a:noFill/>
+          <a:ln w="0">
+            <a:noFill/>
+          </a:ln>
+        </p:spPr>
+        <p:style>
+          <a:lnRef idx="0">
+            <a:scrgbClr r="0" g="0" b="0"/>
+          </a:lnRef>
+          <a:fillRef idx="0">
+            <a:scrgbClr r="0" g="0" b="0"/>
+          </a:fillRef>
+          <a:effectRef idx="0">
+            <a:scrgbClr r="0" g="0" b="0"/>
+          </a:effectRef>
+          <a:fontRef idx="minor"/>
+        </p:style>
+        <p:txBody>
+          <a:bodyPr lIns="90000" tIns="45000" rIns="90000" bIns="45000" anchor="t">
+            <a:spAutoFit/>
+          </a:bodyPr>
+          <a:lstStyle/>
+          <a:p>
+            <a:pPr algn="just" defTabSz="914400">
+              <a:lnSpc>
+                <a:spcPct val="100000"/>
+              </a:lnSpc>
+            </a:pPr>
+            <a:r>
+              <a:rPr lang="es-ES" sz="1600" b="0" strike="noStrike" spc="-1" dirty="0">
+                <a:solidFill>
+                  <a:srgbClr val="582808"/>
+                </a:solidFill>
+                <a:latin typeface="Calibri"/>
+              </a:rPr>
+              <a:t>La evaluación final se ha realizado sobre el conjunto de test, no utilizado durante el entrenamiento ni en la optimización de </a:t>
+            </a:r>
+            <a:r>
+              <a:rPr lang="es-ES" sz="1600" b="0" strike="noStrike" spc="-1" dirty="0" err="1">
+                <a:solidFill>
+                  <a:srgbClr val="582808"/>
+                </a:solidFill>
+                <a:latin typeface="Calibri"/>
+              </a:rPr>
+              <a:t>hiperparámetros</a:t>
+            </a:r>
+            <a:r>
+              <a:rPr lang="es-ES" sz="1600" b="0" strike="noStrike" spc="-1" dirty="0">
+                <a:solidFill>
+                  <a:srgbClr val="582808"/>
+                </a:solidFill>
+                <a:latin typeface="Calibri"/>
+              </a:rPr>
+              <a:t>. Esto garantiza una estimación realista del rendimiento del modelo en datos no vistos.</a:t>
+            </a:r>
+            <a:endParaRPr lang="es-ES" sz="1600" spc="-1" dirty="0">
+              <a:solidFill>
+                <a:srgbClr val="582808"/>
+              </a:solidFill>
+              <a:latin typeface="Calibri"/>
+            </a:endParaRPr>
+          </a:p>
+          <a:p>
+            <a:pPr algn="just" defTabSz="914400">
+              <a:lnSpc>
+                <a:spcPct val="100000"/>
+              </a:lnSpc>
+            </a:pPr>
+            <a:endParaRPr lang="es-ES" sz="1600" b="0" strike="noStrike" spc="-1" dirty="0">
+              <a:solidFill>
+                <a:srgbClr val="000000"/>
+              </a:solidFill>
+              <a:latin typeface="Arial"/>
+            </a:endParaRPr>
+          </a:p>
+        </p:txBody>
+      </p:sp>
+      <p:pic>
+        <p:nvPicPr>
+          <p:cNvPr id="3" name="Imagen 2">
+            <a:extLst>
+              <a:ext uri="{FF2B5EF4-FFF2-40B4-BE49-F238E27FC236}">
+                <a16:creationId xmlns:a16="http://schemas.microsoft.com/office/drawing/2014/main" id="{9B266B83-578A-4691-BD30-DA07E8AFAEAA}"/>
+              </a:ext>
+            </a:extLst>
+          </p:cNvPr>
+          <p:cNvPicPr>
+            <a:picLocks noChangeAspect="1"/>
+          </p:cNvPicPr>
+          <p:nvPr/>
+        </p:nvPicPr>
+        <p:blipFill>
+          <a:blip r:embed="rId4"/>
+          <a:stretch>
+            <a:fillRect/>
+          </a:stretch>
+        </p:blipFill>
+        <p:spPr>
+          <a:xfrm>
+            <a:off x="715740" y="2884935"/>
+            <a:ext cx="5379600" cy="2461473"/>
+          </a:xfrm>
+          <a:prstGeom prst="rect">
+            <a:avLst/>
+          </a:prstGeom>
+        </p:spPr>
+      </p:pic>
+      <p:pic>
+        <p:nvPicPr>
+          <p:cNvPr id="8" name="Imagen 7">
+            <a:extLst>
+              <a:ext uri="{FF2B5EF4-FFF2-40B4-BE49-F238E27FC236}">
+                <a16:creationId xmlns:a16="http://schemas.microsoft.com/office/drawing/2014/main" id="{6A688265-B09A-410A-807C-506E7268784F}"/>
+              </a:ext>
+            </a:extLst>
+          </p:cNvPr>
+          <p:cNvPicPr>
+            <a:picLocks noChangeAspect="1"/>
+          </p:cNvPicPr>
+          <p:nvPr/>
+        </p:nvPicPr>
+        <p:blipFill>
+          <a:blip r:embed="rId5"/>
+          <a:stretch>
+            <a:fillRect/>
+          </a:stretch>
+        </p:blipFill>
+        <p:spPr>
+          <a:xfrm>
+            <a:off x="6283320" y="2884935"/>
+            <a:ext cx="5379600" cy="975445"/>
+          </a:xfrm>
+          <a:prstGeom prst="rect">
+            <a:avLst/>
+          </a:prstGeom>
+        </p:spPr>
+      </p:pic>
+    </p:spTree>
+    <p:extLst>
+      <p:ext uri="{BB962C8B-B14F-4D97-AF65-F5344CB8AC3E}">
+        <p14:creationId xmlns:p14="http://schemas.microsoft.com/office/powerpoint/2010/main" val="77901953"/>
+      </p:ext>
+    </p:extLst>
+  </p:cSld>
+  <p:clrMapOvr>
+    <a:masterClrMapping/>
+  </p:clrMapOvr>
+</p:sld>
+</file>
+
+<file path=ppt/slides/slide16.xml><?xml version="1.0" encoding="utf-8"?>
+<p:sld xmlns:a="http://schemas.openxmlformats.org/drawingml/2006/main" xmlns:r="http://schemas.openxmlformats.org/officeDocument/2006/relationships" xmlns:p="http://schemas.openxmlformats.org/presentationml/2006/main">
+  <p:cSld>
+    <p:spTree>
+      <p:nvGrpSpPr>
+        <p:cNvPr id="1" name=""/>
+        <p:cNvGrpSpPr/>
+        <p:nvPr/>
+      </p:nvGrpSpPr>
+      <p:grpSpPr>
+        <a:xfrm>
+          <a:off x="0" y="0"/>
+          <a:ext cx="0" cy="0"/>
+          <a:chOff x="0" y="0"/>
+          <a:chExt cx="0" cy="0"/>
+        </a:xfrm>
+      </p:grpSpPr>
+      <p:sp>
+        <p:nvSpPr>
+          <p:cNvPr id="65" name="Rectángulo 5"/>
+          <p:cNvSpPr/>
+          <p:nvPr/>
+        </p:nvSpPr>
+        <p:spPr>
+          <a:xfrm>
+            <a:off x="960" y="1080"/>
+            <a:ext cx="12191040" cy="6856920"/>
+          </a:xfrm>
+          <a:prstGeom prst="rect">
+            <a:avLst/>
+          </a:prstGeom>
+          <a:solidFill>
+            <a:schemeClr val="accent2">
+              <a:lumMod val="20000"/>
+              <a:lumOff val="80000"/>
+            </a:schemeClr>
+          </a:solidFill>
+          <a:ln>
+            <a:solidFill>
+              <a:srgbClr val="325490"/>
+            </a:solidFill>
+          </a:ln>
+        </p:spPr>
+        <p:style>
+          <a:lnRef idx="2">
+            <a:schemeClr val="accent1">
+              <a:shade val="50000"/>
+            </a:schemeClr>
+          </a:lnRef>
+          <a:fillRef idx="1">
+            <a:schemeClr val="accent1"/>
+          </a:fillRef>
+          <a:effectRef idx="0">
+            <a:schemeClr val="accent1"/>
+          </a:effectRef>
+          <a:fontRef idx="minor"/>
+        </p:style>
+        <p:txBody>
+          <a:bodyPr lIns="90000" tIns="45000" rIns="90000" bIns="45000" anchor="ctr">
+            <a:noAutofit/>
+          </a:bodyPr>
+          <a:lstStyle/>
+          <a:p>
+            <a:pPr algn="ctr" defTabSz="914400">
+              <a:lnSpc>
+                <a:spcPct val="100000"/>
+              </a:lnSpc>
+            </a:pPr>
+            <a:endParaRPr lang="es-ES" sz="1800" b="0" strike="noStrike" spc="-1" dirty="0">
+              <a:solidFill>
+                <a:schemeClr val="accent2">
+                  <a:lumMod val="50000"/>
+                </a:schemeClr>
+              </a:solidFill>
+              <a:latin typeface="Calibri"/>
+            </a:endParaRPr>
+          </a:p>
+        </p:txBody>
+      </p:sp>
+      <p:sp>
+        <p:nvSpPr>
+          <p:cNvPr id="66" name="CuadroTexto 7"/>
+          <p:cNvSpPr/>
+          <p:nvPr/>
+        </p:nvSpPr>
+        <p:spPr>
+          <a:xfrm>
+            <a:off x="527760" y="479520"/>
+            <a:ext cx="11135160" cy="629488"/>
+          </a:xfrm>
+          <a:prstGeom prst="rect">
+            <a:avLst/>
+          </a:prstGeom>
+          <a:noFill/>
+          <a:ln w="0">
+            <a:noFill/>
+          </a:ln>
+        </p:spPr>
+        <p:style>
+          <a:lnRef idx="0">
+            <a:scrgbClr r="0" g="0" b="0"/>
+          </a:lnRef>
+          <a:fillRef idx="0">
+            <a:scrgbClr r="0" g="0" b="0"/>
+          </a:fillRef>
+          <a:effectRef idx="0">
+            <a:scrgbClr r="0" g="0" b="0"/>
+          </a:effectRef>
+          <a:fontRef idx="minor"/>
+        </p:style>
+        <p:txBody>
+          <a:bodyPr lIns="90000" tIns="45000" rIns="90000" bIns="45000" anchor="t">
+            <a:spAutoFit/>
+          </a:bodyPr>
+          <a:lstStyle/>
+          <a:p>
+            <a:r>
+              <a:rPr lang="es-ES" sz="3500" b="1" spc="-1" dirty="0">
+                <a:solidFill>
+                  <a:schemeClr val="accent2">
+                    <a:lumMod val="50000"/>
+                  </a:schemeClr>
+                </a:solidFill>
+                <a:latin typeface="+mj-lt"/>
+              </a:rPr>
+              <a:t>Modelado y resultados: </a:t>
+            </a:r>
+            <a:r>
+              <a:rPr lang="es-ES" sz="3000" b="1" spc="-1" dirty="0">
+                <a:solidFill>
+                  <a:schemeClr val="accent2">
+                    <a:lumMod val="50000"/>
+                  </a:schemeClr>
+                </a:solidFill>
+                <a:latin typeface="+mj-lt"/>
+              </a:rPr>
+              <a:t>Persistencia del modelo</a:t>
+            </a:r>
+            <a:endParaRPr lang="es-ES" sz="2500" b="1" spc="-1" dirty="0">
+              <a:solidFill>
+                <a:schemeClr val="accent2">
+                  <a:lumMod val="50000"/>
+                </a:schemeClr>
+              </a:solidFill>
+              <a:latin typeface="+mj-lt"/>
+            </a:endParaRPr>
+          </a:p>
+        </p:txBody>
+      </p:sp>
+      <p:sp>
+        <p:nvSpPr>
+          <p:cNvPr id="67" name="CuadroTexto 2"/>
+          <p:cNvSpPr/>
+          <p:nvPr/>
+        </p:nvSpPr>
+        <p:spPr>
+          <a:xfrm>
+            <a:off x="716400" y="1947960"/>
+            <a:ext cx="10946520" cy="364680"/>
+          </a:xfrm>
+          <a:prstGeom prst="rect">
+            <a:avLst/>
+          </a:prstGeom>
+          <a:noFill/>
+          <a:ln w="0">
+            <a:noFill/>
+          </a:ln>
+        </p:spPr>
+        <p:style>
+          <a:lnRef idx="0">
+            <a:scrgbClr r="0" g="0" b="0"/>
+          </a:lnRef>
+          <a:fillRef idx="0">
+            <a:scrgbClr r="0" g="0" b="0"/>
+          </a:fillRef>
+          <a:effectRef idx="0">
+            <a:scrgbClr r="0" g="0" b="0"/>
+          </a:effectRef>
+          <a:fontRef idx="minor"/>
+        </p:style>
+        <p:txBody>
+          <a:bodyPr lIns="90000" tIns="45000" rIns="90000" bIns="45000" anchor="t">
+            <a:spAutoFit/>
+          </a:bodyPr>
+          <a:lstStyle/>
+          <a:p>
+            <a:pPr defTabSz="914400">
+              <a:lnSpc>
+                <a:spcPct val="100000"/>
+              </a:lnSpc>
+            </a:pPr>
+            <a:endParaRPr lang="es-ES" sz="1800" b="0" strike="noStrike" spc="-1" dirty="0">
+              <a:solidFill>
+                <a:srgbClr val="000000"/>
+              </a:solidFill>
+              <a:latin typeface="Arial"/>
+            </a:endParaRPr>
+          </a:p>
+        </p:txBody>
+      </p:sp>
+      <p:pic>
+        <p:nvPicPr>
+          <p:cNvPr id="10" name="Imagen 28">
+            <a:hlinkClick r:id="rId2" action="ppaction://hlinksldjump"/>
+            <a:extLst>
+              <a:ext uri="{FF2B5EF4-FFF2-40B4-BE49-F238E27FC236}">
+                <a16:creationId xmlns:a16="http://schemas.microsoft.com/office/drawing/2014/main" id="{42D78302-A6EC-4729-9E70-A5A02898C129}"/>
+              </a:ext>
+            </a:extLst>
+          </p:cNvPr>
+          <p:cNvPicPr/>
+          <p:nvPr/>
+        </p:nvPicPr>
+        <p:blipFill>
+          <a:blip r:embed="rId3"/>
+          <a:stretch/>
+        </p:blipFill>
+        <p:spPr>
+          <a:xfrm>
+            <a:off x="10477440" y="272022"/>
+            <a:ext cx="1368360" cy="1014209"/>
+          </a:xfrm>
+          <a:prstGeom prst="rect">
+            <a:avLst/>
+          </a:prstGeom>
+          <a:ln w="0">
+            <a:noFill/>
+          </a:ln>
+        </p:spPr>
+      </p:pic>
+      <p:sp>
+        <p:nvSpPr>
+          <p:cNvPr id="7" name="CuadroTexto 16">
+            <a:extLst>
+              <a:ext uri="{FF2B5EF4-FFF2-40B4-BE49-F238E27FC236}">
+                <a16:creationId xmlns:a16="http://schemas.microsoft.com/office/drawing/2014/main" id="{90F91F3A-1179-4A16-A5DE-BDAACFACC3F6}"/>
+              </a:ext>
+            </a:extLst>
+          </p:cNvPr>
+          <p:cNvSpPr/>
+          <p:nvPr/>
+        </p:nvSpPr>
+        <p:spPr>
+          <a:xfrm>
+            <a:off x="715740" y="1756663"/>
+            <a:ext cx="10946520" cy="829543"/>
+          </a:xfrm>
+          <a:prstGeom prst="rect">
+            <a:avLst/>
+          </a:prstGeom>
+          <a:noFill/>
+          <a:ln w="0">
+            <a:noFill/>
+          </a:ln>
+        </p:spPr>
+        <p:style>
+          <a:lnRef idx="0">
+            <a:scrgbClr r="0" g="0" b="0"/>
+          </a:lnRef>
+          <a:fillRef idx="0">
+            <a:scrgbClr r="0" g="0" b="0"/>
+          </a:fillRef>
+          <a:effectRef idx="0">
+            <a:scrgbClr r="0" g="0" b="0"/>
+          </a:effectRef>
+          <a:fontRef idx="minor"/>
+        </p:style>
+        <p:txBody>
+          <a:bodyPr lIns="90000" tIns="45000" rIns="90000" bIns="45000" anchor="t">
+            <a:spAutoFit/>
+          </a:bodyPr>
+          <a:lstStyle/>
+          <a:p>
+            <a:pPr algn="just" defTabSz="914400">
+              <a:lnSpc>
+                <a:spcPct val="100000"/>
+              </a:lnSpc>
+            </a:pPr>
+            <a:r>
+              <a:rPr lang="es-ES" sz="1600" b="0" strike="noStrike" spc="-1" dirty="0">
+                <a:solidFill>
+                  <a:srgbClr val="582808"/>
+                </a:solidFill>
+                <a:latin typeface="Calibri"/>
+              </a:rPr>
+              <a:t>El modelo final optimizado ha sido persistido mediante la utilización de </a:t>
+            </a:r>
+            <a:r>
+              <a:rPr lang="es-ES" sz="1600" b="0" strike="noStrike" spc="-1" dirty="0" err="1">
+                <a:solidFill>
+                  <a:srgbClr val="582808"/>
+                </a:solidFill>
+                <a:latin typeface="Calibri"/>
+              </a:rPr>
+              <a:t>joblib</a:t>
+            </a:r>
+            <a:r>
+              <a:rPr lang="es-ES" sz="1600" b="0" strike="noStrike" spc="-1" dirty="0">
+                <a:solidFill>
+                  <a:srgbClr val="582808"/>
+                </a:solidFill>
+                <a:latin typeface="Calibri"/>
+              </a:rPr>
+              <a:t> lo que permite su reutilización en entornos productivos y análisis posteriores sin necesidad de reentrenamiento. Esto es fundamental para garantizar la reproducibilidad del proyecto.</a:t>
+            </a:r>
+            <a:endParaRPr lang="es-ES" sz="1600" b="0" strike="noStrike" spc="-1" dirty="0">
+              <a:solidFill>
+                <a:srgbClr val="000000"/>
+              </a:solidFill>
+              <a:latin typeface="Arial"/>
+            </a:endParaRPr>
+          </a:p>
+        </p:txBody>
+      </p:sp>
+      <p:pic>
+        <p:nvPicPr>
+          <p:cNvPr id="4" name="Imagen 3">
+            <a:extLst>
+              <a:ext uri="{FF2B5EF4-FFF2-40B4-BE49-F238E27FC236}">
+                <a16:creationId xmlns:a16="http://schemas.microsoft.com/office/drawing/2014/main" id="{4C93416A-FFE0-46F8-B26B-69ECEFCBD4D4}"/>
+              </a:ext>
+            </a:extLst>
+          </p:cNvPr>
+          <p:cNvPicPr>
+            <a:picLocks noChangeAspect="1"/>
+          </p:cNvPicPr>
+          <p:nvPr/>
+        </p:nvPicPr>
+        <p:blipFill>
+          <a:blip r:embed="rId4"/>
+          <a:stretch>
+            <a:fillRect/>
+          </a:stretch>
+        </p:blipFill>
+        <p:spPr>
+          <a:xfrm>
+            <a:off x="3275695" y="2777503"/>
+            <a:ext cx="5639289" cy="2552921"/>
+          </a:xfrm>
+          <a:prstGeom prst="rect">
+            <a:avLst/>
+          </a:prstGeom>
+        </p:spPr>
+      </p:pic>
+    </p:spTree>
+    <p:extLst>
+      <p:ext uri="{BB962C8B-B14F-4D97-AF65-F5344CB8AC3E}">
+        <p14:creationId xmlns:p14="http://schemas.microsoft.com/office/powerpoint/2010/main" val="806153808"/>
+      </p:ext>
+    </p:extLst>
+  </p:cSld>
+  <p:clrMapOvr>
+    <a:masterClrMapping/>
+  </p:clrMapOvr>
+</p:sld>
+</file>
+
+<file path=ppt/slides/slide17.xml><?xml version="1.0" encoding="utf-8"?>
 <p:sld xmlns:a="http://schemas.openxmlformats.org/drawingml/2006/main" xmlns:r="http://schemas.openxmlformats.org/officeDocument/2006/relationships" xmlns:p="http://schemas.openxmlformats.org/presentationml/2006/main">
   <p:cSld>
     <p:spTree>
@@ -11106,7 +12110,7 @@
               </a:lnSpc>
             </a:pPr>
             <a:r>
-              <a:rPr lang="es-ES" sz="3500" b="1" strike="noStrike" spc="-1">
+              <a:rPr lang="es-ES" sz="3500" b="1" strike="noStrike" spc="-1" dirty="0">
                 <a:solidFill>
                   <a:srgbClr val="582808"/>
                 </a:solidFill>
@@ -11114,7 +12118,7 @@
               </a:rPr>
               <a:t>5. Conclusiones</a:t>
             </a:r>
-            <a:endParaRPr lang="es-ES" sz="3500" b="0" strike="noStrike" spc="-1">
+            <a:endParaRPr lang="es-ES" sz="3500" b="0" strike="noStrike" spc="-1" dirty="0">
               <a:solidFill>
                 <a:srgbClr val="000000"/>
               </a:solidFill>
@@ -11197,7 +12201,643 @@
           </a:p>
         </p:txBody>
       </p:sp>
+      <p:sp>
+        <p:nvSpPr>
+          <p:cNvPr id="2" name="CuadroTexto 1">
+            <a:extLst>
+              <a:ext uri="{FF2B5EF4-FFF2-40B4-BE49-F238E27FC236}">
+                <a16:creationId xmlns:a16="http://schemas.microsoft.com/office/drawing/2014/main" id="{F8996089-18CB-4C34-9582-8AC0FDB920C9}"/>
+              </a:ext>
+            </a:extLst>
+          </p:cNvPr>
+          <p:cNvSpPr txBox="1"/>
+          <p:nvPr/>
+        </p:nvSpPr>
+        <p:spPr>
+          <a:xfrm>
+            <a:off x="646200" y="1524000"/>
+            <a:ext cx="11016720" cy="4278094"/>
+          </a:xfrm>
+          <a:prstGeom prst="rect">
+            <a:avLst/>
+          </a:prstGeom>
+          <a:noFill/>
+        </p:spPr>
+        <p:txBody>
+          <a:bodyPr wrap="square" rtlCol="0">
+            <a:spAutoFit/>
+          </a:bodyPr>
+          <a:lstStyle/>
+          <a:p>
+            <a:r>
+              <a:rPr lang="es-ES" sz="1600" spc="-1" dirty="0">
+                <a:solidFill>
+                  <a:srgbClr val="582808"/>
+                </a:solidFill>
+                <a:latin typeface="Calibri"/>
+              </a:rPr>
+              <a:t>El proyecto ha seguido un flujo completo de análisis de datos y modelado predictivo, comenzando con la exploración inicial de los datos (EDA), continuando con el preprocesado y la ingeniería de variables, y finalizando con el entrenamiento, optimización y evaluación de modelos de Machine </a:t>
+            </a:r>
+            <a:r>
+              <a:rPr lang="es-ES" sz="1600" spc="-1" dirty="0" err="1">
+                <a:solidFill>
+                  <a:srgbClr val="582808"/>
+                </a:solidFill>
+                <a:latin typeface="Calibri"/>
+              </a:rPr>
+              <a:t>Learning</a:t>
+            </a:r>
+            <a:r>
+              <a:rPr lang="es-ES" sz="1600" spc="-1" dirty="0">
+                <a:solidFill>
+                  <a:srgbClr val="582808"/>
+                </a:solidFill>
+                <a:latin typeface="Calibri"/>
+              </a:rPr>
+              <a:t>.</a:t>
+            </a:r>
+            <a:br>
+              <a:rPr lang="es-ES" sz="1600" spc="-1" dirty="0">
+                <a:solidFill>
+                  <a:srgbClr val="582808"/>
+                </a:solidFill>
+                <a:latin typeface="Calibri"/>
+              </a:rPr>
+            </a:br>
+            <a:endParaRPr lang="es-ES" sz="1600" spc="-1" dirty="0">
+              <a:solidFill>
+                <a:srgbClr val="582808"/>
+              </a:solidFill>
+              <a:latin typeface="Calibri"/>
+            </a:endParaRPr>
+          </a:p>
+          <a:p>
+            <a:r>
+              <a:rPr lang="es-ES" sz="1600" spc="-1" dirty="0">
+                <a:solidFill>
+                  <a:srgbClr val="582808"/>
+                </a:solidFill>
+                <a:latin typeface="Calibri"/>
+              </a:rPr>
+              <a:t>Este enfoque permitió:</a:t>
+            </a:r>
+          </a:p>
+          <a:p>
+            <a:pPr marL="216000" indent="-216000" algn="just" defTabSz="914400">
+              <a:lnSpc>
+                <a:spcPct val="100000"/>
+              </a:lnSpc>
+              <a:buClr>
+                <a:srgbClr val="582808"/>
+              </a:buClr>
+              <a:buFont typeface="Wingdings" charset="2"/>
+              <a:buChar char=""/>
+            </a:pPr>
+            <a:endParaRPr lang="es-ES" sz="1600" b="0" strike="noStrike" spc="-1" dirty="0">
+              <a:solidFill>
+                <a:srgbClr val="582808"/>
+              </a:solidFill>
+              <a:latin typeface="Calibri"/>
+            </a:endParaRPr>
+          </a:p>
+          <a:p>
+            <a:pPr marL="216000" indent="-216000" algn="just">
+              <a:buClr>
+                <a:srgbClr val="582808"/>
+              </a:buClr>
+              <a:buFont typeface="Wingdings" charset="2"/>
+              <a:buChar char=""/>
+            </a:pPr>
+            <a:r>
+              <a:rPr lang="es-ES" sz="1600" b="0" strike="noStrike" spc="-1" dirty="0">
+                <a:solidFill>
+                  <a:srgbClr val="582808"/>
+                </a:solidFill>
+                <a:latin typeface="Calibri"/>
+              </a:rPr>
+              <a:t>C</a:t>
+            </a:r>
+            <a:r>
+              <a:rPr lang="es-ES" sz="1600" spc="-1" dirty="0">
+                <a:solidFill>
+                  <a:srgbClr val="582808"/>
+                </a:solidFill>
+                <a:latin typeface="Calibri"/>
+              </a:rPr>
+              <a:t>omprender la estructura de los datos</a:t>
+            </a:r>
+          </a:p>
+          <a:p>
+            <a:pPr marL="216000" indent="-216000" algn="just">
+              <a:buClr>
+                <a:srgbClr val="582808"/>
+              </a:buClr>
+              <a:buFont typeface="Wingdings" charset="2"/>
+              <a:buChar char=""/>
+            </a:pPr>
+            <a:r>
+              <a:rPr lang="es-ES" sz="1600" b="0" strike="noStrike" spc="-1" dirty="0">
+                <a:solidFill>
+                  <a:srgbClr val="582808"/>
+                </a:solidFill>
+                <a:latin typeface="Calibri"/>
+              </a:rPr>
+              <a:t>I</a:t>
+            </a:r>
+            <a:r>
+              <a:rPr lang="es-ES" sz="1600" spc="-1" dirty="0">
+                <a:solidFill>
+                  <a:srgbClr val="582808"/>
+                </a:solidFill>
+                <a:latin typeface="Calibri"/>
+              </a:rPr>
+              <a:t>dentificar patrones relevantes</a:t>
+            </a:r>
+          </a:p>
+          <a:p>
+            <a:pPr marL="216000" indent="-216000" algn="just">
+              <a:buClr>
+                <a:srgbClr val="582808"/>
+              </a:buClr>
+              <a:buFont typeface="Wingdings" charset="2"/>
+              <a:buChar char=""/>
+            </a:pPr>
+            <a:r>
+              <a:rPr lang="es-ES" sz="1600" spc="-1" dirty="0">
+                <a:solidFill>
+                  <a:srgbClr val="582808"/>
+                </a:solidFill>
+                <a:latin typeface="Calibri"/>
+              </a:rPr>
+              <a:t>Preparar adecuadamente las variables para el modelado</a:t>
+            </a:r>
+          </a:p>
+          <a:p>
+            <a:pPr marL="216000" indent="-216000" algn="just">
+              <a:buClr>
+                <a:srgbClr val="582808"/>
+              </a:buClr>
+              <a:buFont typeface="Wingdings" charset="2"/>
+              <a:buChar char=""/>
+            </a:pPr>
+            <a:r>
+              <a:rPr lang="es-ES" sz="1600" spc="-1" dirty="0">
+                <a:solidFill>
+                  <a:srgbClr val="582808"/>
+                </a:solidFill>
+                <a:latin typeface="Calibri"/>
+              </a:rPr>
+              <a:t>Construir modelos capaces de generar predicciones fiables.</a:t>
+            </a:r>
+          </a:p>
+          <a:p>
+            <a:pPr marL="216000" indent="-216000" algn="just">
+              <a:buClr>
+                <a:srgbClr val="582808"/>
+              </a:buClr>
+              <a:buFont typeface="Wingdings" charset="2"/>
+              <a:buChar char=""/>
+            </a:pPr>
+            <a:endParaRPr lang="es-ES" sz="1600" spc="-1" dirty="0">
+              <a:solidFill>
+                <a:srgbClr val="582808"/>
+              </a:solidFill>
+              <a:latin typeface="Calibri"/>
+            </a:endParaRPr>
+          </a:p>
+          <a:p>
+            <a:pPr algn="just">
+              <a:buClr>
+                <a:srgbClr val="582808"/>
+              </a:buClr>
+            </a:pPr>
+            <a:r>
+              <a:rPr lang="es-ES" sz="1600" spc="-1" dirty="0">
+                <a:solidFill>
+                  <a:srgbClr val="582808"/>
+                </a:solidFill>
+                <a:latin typeface="Calibri"/>
+              </a:rPr>
+              <a:t>El preprocesado de los datos fue una fase clave para mejorar la calidad del modelo. Durante esta etapa se realizaron diversas tareas como: tratamiento de valores nulos, transformación de variables categóricas, conversión de variables numéricas, selección de variables relevantes…</a:t>
+            </a:r>
+          </a:p>
+          <a:p>
+            <a:pPr algn="just">
+              <a:buClr>
+                <a:srgbClr val="582808"/>
+              </a:buClr>
+            </a:pPr>
+            <a:endParaRPr lang="es-ES" sz="1600" spc="-1" dirty="0">
+              <a:solidFill>
+                <a:srgbClr val="582808"/>
+              </a:solidFill>
+              <a:latin typeface="Calibri"/>
+            </a:endParaRPr>
+          </a:p>
+          <a:p>
+            <a:pPr algn="just">
+              <a:buClr>
+                <a:srgbClr val="582808"/>
+              </a:buClr>
+            </a:pPr>
+            <a:r>
+              <a:rPr lang="es-ES" sz="1600" spc="-1" dirty="0">
+                <a:solidFill>
+                  <a:srgbClr val="582808"/>
+                </a:solidFill>
+                <a:latin typeface="Calibri"/>
+              </a:rPr>
+              <a:t>Estas transformaciones permitieron construir un conjunto de datos más consistente y adecuado para el entrenamiento de modelos de aprendizaje automático.</a:t>
+            </a:r>
+          </a:p>
+        </p:txBody>
+      </p:sp>
     </p:spTree>
+  </p:cSld>
+  <p:clrMapOvr>
+    <a:masterClrMapping/>
+  </p:clrMapOvr>
+</p:sld>
+</file>
+
+<file path=ppt/slides/slide18.xml><?xml version="1.0" encoding="utf-8"?>
+<p:sld xmlns:a="http://schemas.openxmlformats.org/drawingml/2006/main" xmlns:r="http://schemas.openxmlformats.org/officeDocument/2006/relationships" xmlns:p="http://schemas.openxmlformats.org/presentationml/2006/main">
+  <p:cSld>
+    <p:spTree>
+      <p:nvGrpSpPr>
+        <p:cNvPr id="1" name=""/>
+        <p:cNvGrpSpPr/>
+        <p:nvPr/>
+      </p:nvGrpSpPr>
+      <p:grpSpPr>
+        <a:xfrm>
+          <a:off x="0" y="0"/>
+          <a:ext cx="0" cy="0"/>
+          <a:chOff x="0" y="0"/>
+          <a:chExt cx="0" cy="0"/>
+        </a:xfrm>
+      </p:grpSpPr>
+      <p:sp>
+        <p:nvSpPr>
+          <p:cNvPr id="77" name="Rectángulo 5"/>
+          <p:cNvSpPr/>
+          <p:nvPr/>
+        </p:nvSpPr>
+        <p:spPr>
+          <a:xfrm>
+            <a:off x="0" y="0"/>
+            <a:ext cx="12191040" cy="6856920"/>
+          </a:xfrm>
+          <a:prstGeom prst="rect">
+            <a:avLst/>
+          </a:prstGeom>
+          <a:solidFill>
+            <a:schemeClr val="accent2">
+              <a:lumMod val="20000"/>
+              <a:lumOff val="80000"/>
+            </a:schemeClr>
+          </a:solidFill>
+          <a:ln>
+            <a:solidFill>
+              <a:srgbClr val="325490"/>
+            </a:solidFill>
+          </a:ln>
+        </p:spPr>
+        <p:style>
+          <a:lnRef idx="2">
+            <a:schemeClr val="accent1">
+              <a:shade val="50000"/>
+            </a:schemeClr>
+          </a:lnRef>
+          <a:fillRef idx="1">
+            <a:schemeClr val="accent1"/>
+          </a:fillRef>
+          <a:effectRef idx="0">
+            <a:schemeClr val="accent1"/>
+          </a:effectRef>
+          <a:fontRef idx="minor"/>
+        </p:style>
+        <p:txBody>
+          <a:bodyPr lIns="90000" tIns="45000" rIns="90000" bIns="45000" anchor="ctr">
+            <a:noAutofit/>
+          </a:bodyPr>
+          <a:lstStyle/>
+          <a:p>
+            <a:pPr algn="ctr" defTabSz="914400">
+              <a:lnSpc>
+                <a:spcPct val="100000"/>
+              </a:lnSpc>
+            </a:pPr>
+            <a:endParaRPr lang="es-ES" sz="1800" b="0" strike="noStrike" spc="-1">
+              <a:solidFill>
+                <a:schemeClr val="lt1"/>
+              </a:solidFill>
+              <a:latin typeface="Calibri"/>
+            </a:endParaRPr>
+          </a:p>
+        </p:txBody>
+      </p:sp>
+      <p:sp>
+        <p:nvSpPr>
+          <p:cNvPr id="78" name="CuadroTexto 7"/>
+          <p:cNvSpPr/>
+          <p:nvPr/>
+        </p:nvSpPr>
+        <p:spPr>
+          <a:xfrm>
+            <a:off x="527760" y="479520"/>
+            <a:ext cx="11135160" cy="623160"/>
+          </a:xfrm>
+          <a:prstGeom prst="rect">
+            <a:avLst/>
+          </a:prstGeom>
+          <a:noFill/>
+          <a:ln w="0">
+            <a:noFill/>
+          </a:ln>
+        </p:spPr>
+        <p:style>
+          <a:lnRef idx="0">
+            <a:scrgbClr r="0" g="0" b="0"/>
+          </a:lnRef>
+          <a:fillRef idx="0">
+            <a:scrgbClr r="0" g="0" b="0"/>
+          </a:fillRef>
+          <a:effectRef idx="0">
+            <a:scrgbClr r="0" g="0" b="0"/>
+          </a:effectRef>
+          <a:fontRef idx="minor"/>
+        </p:style>
+        <p:txBody>
+          <a:bodyPr lIns="90000" tIns="45000" rIns="90000" bIns="45000" anchor="t">
+            <a:spAutoFit/>
+          </a:bodyPr>
+          <a:lstStyle/>
+          <a:p>
+            <a:pPr defTabSz="914400">
+              <a:lnSpc>
+                <a:spcPct val="100000"/>
+              </a:lnSpc>
+            </a:pPr>
+            <a:r>
+              <a:rPr lang="es-ES" sz="3500" b="1" strike="noStrike" spc="-1" dirty="0">
+                <a:solidFill>
+                  <a:srgbClr val="582808"/>
+                </a:solidFill>
+                <a:latin typeface="Calibri Light"/>
+              </a:rPr>
+              <a:t>5. Conclusiones</a:t>
+            </a:r>
+            <a:endParaRPr lang="es-ES" sz="3500" b="0" strike="noStrike" spc="-1" dirty="0">
+              <a:solidFill>
+                <a:srgbClr val="000000"/>
+              </a:solidFill>
+              <a:latin typeface="Arial"/>
+            </a:endParaRPr>
+          </a:p>
+        </p:txBody>
+      </p:sp>
+      <p:pic>
+        <p:nvPicPr>
+          <p:cNvPr id="79" name="Imagen 6"/>
+          <p:cNvPicPr/>
+          <p:nvPr/>
+        </p:nvPicPr>
+        <p:blipFill>
+          <a:blip r:embed="rId2"/>
+          <a:stretch/>
+        </p:blipFill>
+        <p:spPr>
+          <a:xfrm>
+            <a:off x="10598040" y="479520"/>
+            <a:ext cx="1064880" cy="797760"/>
+          </a:xfrm>
+          <a:prstGeom prst="rect">
+            <a:avLst/>
+          </a:prstGeom>
+          <a:ln w="0">
+            <a:noFill/>
+          </a:ln>
+        </p:spPr>
+      </p:pic>
+      <p:sp>
+        <p:nvSpPr>
+          <p:cNvPr id="80" name="CuadroTexto 1"/>
+          <p:cNvSpPr/>
+          <p:nvPr/>
+        </p:nvSpPr>
+        <p:spPr>
+          <a:xfrm>
+            <a:off x="646200" y="1411200"/>
+            <a:ext cx="11135160" cy="4204440"/>
+          </a:xfrm>
+          <a:prstGeom prst="rect">
+            <a:avLst/>
+          </a:prstGeom>
+          <a:noFill/>
+          <a:ln w="0">
+            <a:noFill/>
+          </a:ln>
+        </p:spPr>
+        <p:style>
+          <a:lnRef idx="0">
+            <a:scrgbClr r="0" g="0" b="0"/>
+          </a:lnRef>
+          <a:fillRef idx="0">
+            <a:scrgbClr r="0" g="0" b="0"/>
+          </a:fillRef>
+          <a:effectRef idx="0">
+            <a:scrgbClr r="0" g="0" b="0"/>
+          </a:effectRef>
+          <a:fontRef idx="minor"/>
+        </p:style>
+        <p:txBody>
+          <a:bodyPr lIns="90000" tIns="45000" rIns="90000" bIns="45000" anchor="t">
+            <a:spAutoFit/>
+          </a:bodyPr>
+          <a:lstStyle/>
+          <a:p>
+            <a:pPr defTabSz="914400">
+              <a:lnSpc>
+                <a:spcPct val="100000"/>
+              </a:lnSpc>
+            </a:pPr>
+            <a:endParaRPr lang="es-ES" sz="1800" b="0" strike="noStrike" spc="-1">
+              <a:solidFill>
+                <a:srgbClr val="000000"/>
+              </a:solidFill>
+              <a:latin typeface="Arial"/>
+            </a:endParaRPr>
+          </a:p>
+        </p:txBody>
+      </p:sp>
+      <p:sp>
+        <p:nvSpPr>
+          <p:cNvPr id="2" name="CuadroTexto 1">
+            <a:extLst>
+              <a:ext uri="{FF2B5EF4-FFF2-40B4-BE49-F238E27FC236}">
+                <a16:creationId xmlns:a16="http://schemas.microsoft.com/office/drawing/2014/main" id="{F8996089-18CB-4C34-9582-8AC0FDB920C9}"/>
+              </a:ext>
+            </a:extLst>
+          </p:cNvPr>
+          <p:cNvSpPr txBox="1"/>
+          <p:nvPr/>
+        </p:nvSpPr>
+        <p:spPr>
+          <a:xfrm>
+            <a:off x="646200" y="1524000"/>
+            <a:ext cx="11016720" cy="3785652"/>
+          </a:xfrm>
+          <a:prstGeom prst="rect">
+            <a:avLst/>
+          </a:prstGeom>
+          <a:noFill/>
+        </p:spPr>
+        <p:txBody>
+          <a:bodyPr wrap="square" rtlCol="0">
+            <a:spAutoFit/>
+          </a:bodyPr>
+          <a:lstStyle/>
+          <a:p>
+            <a:r>
+              <a:rPr lang="es-ES" sz="1600" spc="-1" dirty="0">
+                <a:solidFill>
+                  <a:srgbClr val="582808"/>
+                </a:solidFill>
+                <a:latin typeface="Calibri"/>
+              </a:rPr>
+              <a:t>Durante el proceso de modelado se evaluaron diferentes algoritmos de regresión con el objetivo de identificar cuál ofrecía el mejor rendimiento predictivo. Para ello se utilizó una </a:t>
+            </a:r>
+            <a:r>
+              <a:rPr lang="es-ES" sz="1600" b="1" spc="-1" dirty="0">
+                <a:solidFill>
+                  <a:srgbClr val="582808"/>
+                </a:solidFill>
+                <a:latin typeface="Calibri"/>
+              </a:rPr>
+              <a:t>pipeline de procesamiento.</a:t>
+            </a:r>
+          </a:p>
+          <a:p>
+            <a:endParaRPr lang="es-ES" sz="1600" b="1" spc="-1" dirty="0">
+              <a:solidFill>
+                <a:srgbClr val="582808"/>
+              </a:solidFill>
+              <a:latin typeface="Calibri"/>
+            </a:endParaRPr>
+          </a:p>
+          <a:p>
+            <a:r>
+              <a:rPr lang="es-ES" sz="1600" spc="-1" dirty="0">
+                <a:solidFill>
+                  <a:srgbClr val="582808"/>
+                </a:solidFill>
+                <a:latin typeface="Calibri"/>
+              </a:rPr>
+              <a:t>Posteriormente con la </a:t>
+            </a:r>
+            <a:r>
+              <a:rPr lang="es-ES" sz="1600" b="1" spc="-1" dirty="0">
+                <a:solidFill>
+                  <a:srgbClr val="582808"/>
+                </a:solidFill>
+                <a:latin typeface="Calibri"/>
+              </a:rPr>
+              <a:t>optimización de </a:t>
+            </a:r>
+            <a:r>
+              <a:rPr lang="es-ES" sz="1600" b="1" spc="-1" dirty="0" err="1">
+                <a:solidFill>
+                  <a:srgbClr val="582808"/>
+                </a:solidFill>
+                <a:latin typeface="Calibri"/>
+              </a:rPr>
+              <a:t>hiperparámetros</a:t>
+            </a:r>
+            <a:r>
+              <a:rPr lang="es-ES" sz="1600" b="1" spc="-1" dirty="0">
+                <a:solidFill>
+                  <a:srgbClr val="582808"/>
+                </a:solidFill>
+                <a:latin typeface="Calibri"/>
+              </a:rPr>
+              <a:t> </a:t>
+            </a:r>
+            <a:r>
+              <a:rPr lang="es-ES" sz="1600" spc="-1" dirty="0">
+                <a:solidFill>
+                  <a:srgbClr val="582808"/>
+                </a:solidFill>
+                <a:latin typeface="Calibri"/>
+              </a:rPr>
+              <a:t>encontramos la configuración del modelo que ofrecía el mejor equilibrio entre capacidad de ajuste y generalización.</a:t>
+            </a:r>
+          </a:p>
+          <a:p>
+            <a:endParaRPr lang="es-ES" sz="1600" spc="-1" dirty="0">
+              <a:solidFill>
+                <a:srgbClr val="582808"/>
+              </a:solidFill>
+              <a:latin typeface="Calibri"/>
+            </a:endParaRPr>
+          </a:p>
+          <a:p>
+            <a:r>
+              <a:rPr lang="es-ES" sz="1600" spc="-1" dirty="0">
+                <a:solidFill>
+                  <a:srgbClr val="582808"/>
+                </a:solidFill>
+                <a:latin typeface="Calibri"/>
+              </a:rPr>
+              <a:t>El modelo optimizado se evaluó utilizando un conjunto de datos de test independiente para medir su capacidad de generalización.</a:t>
+            </a:r>
+          </a:p>
+          <a:p>
+            <a:endParaRPr lang="es-ES" sz="1600" spc="-1" dirty="0">
+              <a:solidFill>
+                <a:srgbClr val="582808"/>
+              </a:solidFill>
+              <a:latin typeface="Calibri"/>
+            </a:endParaRPr>
+          </a:p>
+          <a:p>
+            <a:r>
+              <a:rPr lang="es-ES" sz="1600" spc="-1" dirty="0">
+                <a:solidFill>
+                  <a:srgbClr val="582808"/>
+                </a:solidFill>
+                <a:latin typeface="Calibri"/>
+              </a:rPr>
+              <a:t>Los resultados obtenidos muestran que el modelo es capaz de capturar una parte significativa de la variabilidad de los precios, ofreciendo predicciones razonablemente precisas dentro del contexto del problema analizado.</a:t>
+            </a:r>
+          </a:p>
+          <a:p>
+            <a:endParaRPr lang="es-ES" sz="1600" spc="-1" dirty="0">
+              <a:solidFill>
+                <a:srgbClr val="582808"/>
+              </a:solidFill>
+              <a:latin typeface="Calibri"/>
+            </a:endParaRPr>
+          </a:p>
+          <a:p>
+            <a:r>
+              <a:rPr lang="es-ES" sz="1600" spc="-1" dirty="0">
+                <a:solidFill>
+                  <a:srgbClr val="582808"/>
+                </a:solidFill>
+                <a:latin typeface="Calibri"/>
+              </a:rPr>
+              <a:t>A pesar de los resultados obtenidos, el modelo presenta algunas limitaciones que deben tenerse en cuenta como que los datos utilizados corresponden a una fotografía temporal concreta del mercado, lo que puede limitar la capacidad de generalización a otros periodos. Otra limitación es que el mercado inmobiliario y turístico está influido por factores externos (regulación, turismo, economía local) que pueden cambiar con el tiempo.</a:t>
+            </a:r>
+          </a:p>
+        </p:txBody>
+      </p:sp>
+    </p:spTree>
+    <p:extLst>
+      <p:ext uri="{BB962C8B-B14F-4D97-AF65-F5344CB8AC3E}">
+        <p14:creationId xmlns:p14="http://schemas.microsoft.com/office/powerpoint/2010/main" val="3429694607"/>
+      </p:ext>
+    </p:extLst>
   </p:cSld>
   <p:clrMapOvr>
     <a:masterClrMapping/>
@@ -11230,7 +12870,7 @@
         </p:nvSpPr>
         <p:spPr>
           <a:xfrm>
-            <a:off x="0" y="0"/>
+            <a:off x="960" y="1080"/>
             <a:ext cx="12191040" cy="6856920"/>
           </a:xfrm>
           <a:prstGeom prst="rect">
@@ -11352,8 +12992,8 @@
         </p:nvSpPr>
         <p:spPr>
           <a:xfrm>
-            <a:off x="576000" y="2551680"/>
-            <a:ext cx="1716120" cy="668520"/>
+            <a:off x="713355" y="3620633"/>
+            <a:ext cx="3333820" cy="2383814"/>
           </a:xfrm>
           <a:prstGeom prst="rect">
             <a:avLst/>
@@ -11376,7 +13016,7 @@
           <a:fontRef idx="minor"/>
         </p:style>
         <p:txBody>
-          <a:bodyPr lIns="90000" tIns="45000" rIns="90000" bIns="45000" anchor="t">
+          <a:bodyPr wrap="square" lIns="90000" tIns="45000" rIns="90000" bIns="45000" anchor="t">
             <a:spAutoFit/>
           </a:bodyPr>
           <a:lstStyle/>
@@ -11387,7 +13027,7 @@
               </a:lnSpc>
             </a:pPr>
             <a:r>
-              <a:rPr lang="es-ES" sz="1900" b="1" strike="noStrike" spc="-1" dirty="0">
+              <a:rPr lang="es-ES" sz="2000" b="1" spc="-1" dirty="0">
                 <a:solidFill>
                   <a:schemeClr val="accent2">
                     <a:lumMod val="50000"/>
@@ -11395,27 +13035,250 @@
                 </a:solidFill>
                 <a:latin typeface="Calibri"/>
               </a:rPr>
-              <a:t>1.  Problema de negocio</a:t>
-            </a:r>
-            <a:endParaRPr lang="es-ES" sz="1900" b="0" strike="noStrike" spc="-1" dirty="0">
+              <a:t>1. EDA</a:t>
+            </a:r>
+            <a:br>
+              <a:rPr lang="es-ES" sz="1700" b="1" spc="-1" dirty="0">
+                <a:solidFill>
+                  <a:schemeClr val="accent2">
+                    <a:lumMod val="50000"/>
+                  </a:schemeClr>
+                </a:solidFill>
+                <a:latin typeface="Calibri"/>
+              </a:rPr>
+            </a:br>
+            <a:endParaRPr lang="es-ES" sz="1700" b="1" spc="-1" dirty="0">
               <a:solidFill>
                 <a:srgbClr val="000000"/>
               </a:solidFill>
               <a:latin typeface="Arial"/>
             </a:endParaRPr>
           </a:p>
+          <a:p>
+            <a:pPr defTabSz="914400">
+              <a:lnSpc>
+                <a:spcPct val="100000"/>
+              </a:lnSpc>
+            </a:pPr>
+            <a:r>
+              <a:rPr lang="es-ES" sz="1600" b="1" spc="-1" dirty="0">
+                <a:solidFill>
+                  <a:schemeClr val="accent2">
+                    <a:lumMod val="50000"/>
+                  </a:schemeClr>
+                </a:solidFill>
+              </a:rPr>
+              <a:t>  · Análisis de target y distribución</a:t>
+            </a:r>
+          </a:p>
+          <a:p>
+            <a:pPr defTabSz="914400">
+              <a:lnSpc>
+                <a:spcPct val="100000"/>
+              </a:lnSpc>
+            </a:pPr>
+            <a:r>
+              <a:rPr lang="es-ES" sz="1600" b="1" spc="-1" dirty="0">
+                <a:solidFill>
+                  <a:schemeClr val="accent2">
+                    <a:lumMod val="50000"/>
+                  </a:schemeClr>
+                </a:solidFill>
+              </a:rPr>
+              <a:t>  · Análisis de variables numéricas</a:t>
+            </a:r>
+          </a:p>
+          <a:p>
+            <a:pPr defTabSz="914400">
+              <a:lnSpc>
+                <a:spcPct val="100000"/>
+              </a:lnSpc>
+            </a:pPr>
+            <a:r>
+              <a:rPr lang="es-ES" sz="1600" b="1" spc="-1" dirty="0">
+                <a:solidFill>
+                  <a:schemeClr val="accent2">
+                    <a:lumMod val="50000"/>
+                  </a:schemeClr>
+                </a:solidFill>
+              </a:rPr>
+              <a:t>  · Correlación con el target</a:t>
+            </a:r>
+          </a:p>
+          <a:p>
+            <a:pPr defTabSz="914400">
+              <a:lnSpc>
+                <a:spcPct val="100000"/>
+              </a:lnSpc>
+            </a:pPr>
+            <a:r>
+              <a:rPr lang="es-ES" sz="1600" b="1" spc="-1" dirty="0">
+                <a:solidFill>
+                  <a:schemeClr val="accent2">
+                    <a:lumMod val="50000"/>
+                  </a:schemeClr>
+                </a:solidFill>
+              </a:rPr>
+              <a:t>  · Análisis variables categóricas</a:t>
+            </a:r>
+          </a:p>
+          <a:p>
+            <a:pPr defTabSz="914400">
+              <a:lnSpc>
+                <a:spcPct val="100000"/>
+              </a:lnSpc>
+            </a:pPr>
+            <a:r>
+              <a:rPr lang="es-ES" sz="1600" b="1" spc="-1" dirty="0">
+                <a:solidFill>
+                  <a:schemeClr val="accent2">
+                    <a:lumMod val="50000"/>
+                  </a:schemeClr>
+                </a:solidFill>
+              </a:rPr>
+              <a:t>  · Eliminación de </a:t>
+            </a:r>
+            <a:r>
+              <a:rPr lang="es-ES" sz="1600" b="1" spc="-1" dirty="0" err="1">
+                <a:solidFill>
+                  <a:schemeClr val="accent2">
+                    <a:lumMod val="50000"/>
+                  </a:schemeClr>
+                </a:solidFill>
+              </a:rPr>
+              <a:t>features</a:t>
+            </a:r>
+            <a:r>
+              <a:rPr lang="es-ES" sz="1600" b="1" spc="-1" dirty="0">
+                <a:solidFill>
+                  <a:schemeClr val="accent2">
+                    <a:lumMod val="50000"/>
+                  </a:schemeClr>
+                </a:solidFill>
+              </a:rPr>
+              <a:t> preliminar</a:t>
+            </a:r>
+          </a:p>
+          <a:p>
+            <a:pPr defTabSz="914400">
+              <a:lnSpc>
+                <a:spcPct val="100000"/>
+              </a:lnSpc>
+            </a:pPr>
+            <a:r>
+              <a:rPr lang="es-ES" sz="1600" b="1" spc="-1" dirty="0">
+                <a:solidFill>
+                  <a:schemeClr val="accent2">
+                    <a:lumMod val="50000"/>
+                  </a:schemeClr>
+                </a:solidFill>
+              </a:rPr>
+              <a:t>  · Duplicados, </a:t>
+            </a:r>
+            <a:r>
+              <a:rPr lang="es-ES" sz="1600" b="1" spc="-1" dirty="0" err="1">
+                <a:solidFill>
+                  <a:schemeClr val="accent2">
+                    <a:lumMod val="50000"/>
+                  </a:schemeClr>
+                </a:solidFill>
+              </a:rPr>
+              <a:t>missings</a:t>
+            </a:r>
+            <a:r>
+              <a:rPr lang="es-ES" sz="1600" b="1" spc="-1" dirty="0">
+                <a:solidFill>
+                  <a:schemeClr val="accent2">
+                    <a:lumMod val="50000"/>
+                  </a:schemeClr>
+                </a:solidFill>
+              </a:rPr>
+              <a:t> y </a:t>
+            </a:r>
+            <a:r>
+              <a:rPr lang="es-ES" sz="1600" b="1" spc="-1" dirty="0" err="1">
+                <a:solidFill>
+                  <a:schemeClr val="accent2">
+                    <a:lumMod val="50000"/>
+                  </a:schemeClr>
+                </a:solidFill>
+              </a:rPr>
+              <a:t>outliers</a:t>
+            </a:r>
+            <a:endParaRPr lang="es-ES" sz="1600" b="1" spc="-1" dirty="0">
+              <a:solidFill>
+                <a:schemeClr val="accent2">
+                  <a:lumMod val="50000"/>
+                </a:schemeClr>
+              </a:solidFill>
+            </a:endParaRPr>
+          </a:p>
+          <a:p>
+            <a:pPr defTabSz="914400">
+              <a:lnSpc>
+                <a:spcPct val="100000"/>
+              </a:lnSpc>
+            </a:pPr>
+            <a:r>
+              <a:rPr lang="es-ES" sz="1600" b="1" spc="-1" dirty="0">
+                <a:solidFill>
+                  <a:schemeClr val="accent2">
+                    <a:lumMod val="50000"/>
+                  </a:schemeClr>
+                </a:solidFill>
+              </a:rPr>
+              <a:t>  · </a:t>
+            </a:r>
+            <a:r>
+              <a:rPr lang="es-ES" sz="1600" b="1" spc="-1" dirty="0" err="1">
+                <a:solidFill>
+                  <a:schemeClr val="accent2">
+                    <a:lumMod val="50000"/>
+                  </a:schemeClr>
+                </a:solidFill>
+              </a:rPr>
+              <a:t>Feature</a:t>
+            </a:r>
+            <a:r>
+              <a:rPr lang="es-ES" sz="1600" b="1" spc="-1" dirty="0">
+                <a:solidFill>
+                  <a:schemeClr val="accent2">
+                    <a:lumMod val="50000"/>
+                  </a:schemeClr>
+                </a:solidFill>
+              </a:rPr>
+              <a:t> </a:t>
+            </a:r>
+            <a:r>
+              <a:rPr lang="es-ES" sz="1600" b="1" spc="-1" dirty="0" err="1">
+                <a:solidFill>
+                  <a:schemeClr val="accent2">
+                    <a:lumMod val="50000"/>
+                  </a:schemeClr>
+                </a:solidFill>
+              </a:rPr>
+              <a:t>Engineering</a:t>
+            </a:r>
+            <a:endParaRPr lang="es-ES" sz="1600" b="1" spc="-1" dirty="0">
+              <a:solidFill>
+                <a:schemeClr val="accent2">
+                  <a:lumMod val="50000"/>
+                </a:schemeClr>
+              </a:solidFill>
+            </a:endParaRPr>
+          </a:p>
         </p:txBody>
       </p:sp>
       <p:sp>
         <p:nvSpPr>
-          <p:cNvPr id="56" name="CuadroTexto 9"/>
+          <p:cNvPr id="58" name="CuadroTexto 11"/>
           <p:cNvSpPr/>
           <p:nvPr/>
         </p:nvSpPr>
         <p:spPr>
           <a:xfrm>
-            <a:off x="2819520" y="2551680"/>
-            <a:ext cx="1963440" cy="668520"/>
+            <a:off x="8143505" y="3570908"/>
+            <a:ext cx="3638460" cy="398655"/>
           </a:xfrm>
           <a:prstGeom prst="rect">
             <a:avLst/>
@@ -11438,7 +13301,7 @@
           <a:fontRef idx="minor"/>
         </p:style>
         <p:txBody>
-          <a:bodyPr lIns="90000" tIns="45000" rIns="90000" bIns="45000" anchor="t">
+          <a:bodyPr wrap="square" lIns="90000" tIns="45000" rIns="90000" bIns="45000" anchor="t">
             <a:spAutoFit/>
           </a:bodyPr>
           <a:lstStyle/>
@@ -11449,7 +13312,7 @@
               </a:lnSpc>
             </a:pPr>
             <a:r>
-              <a:rPr lang="es-ES" sz="1900" b="1" strike="noStrike" spc="-1" dirty="0">
+              <a:rPr lang="es-ES" sz="2000" b="1" spc="-1" dirty="0">
                 <a:solidFill>
                   <a:schemeClr val="accent2">
                     <a:lumMod val="50000"/>
@@ -11457,9 +13320,20 @@
                 </a:solidFill>
                 <a:latin typeface="Calibri"/>
               </a:rPr>
-              <a:t>2.  Planteamiento técnico</a:t>
-            </a:r>
-            <a:endParaRPr lang="es-ES" sz="1900" b="0" strike="noStrike" spc="-1" dirty="0">
+              <a:t>3</a:t>
+            </a:r>
+            <a:r>
+              <a:rPr lang="es-ES" sz="2000" b="1" strike="noStrike" spc="-1" dirty="0">
+                <a:solidFill>
+                  <a:schemeClr val="accent2">
+                    <a:lumMod val="50000"/>
+                  </a:schemeClr>
+                </a:solidFill>
+                <a:latin typeface="Calibri"/>
+              </a:rPr>
+              <a:t>.  Conclusiones</a:t>
+            </a:r>
+            <a:endParaRPr lang="es-ES" sz="2000" b="0" strike="noStrike" spc="-1" dirty="0">
               <a:solidFill>
                 <a:srgbClr val="000000"/>
               </a:solidFill>
@@ -11468,16 +13342,91 @@
           </a:p>
         </p:txBody>
       </p:sp>
+      <p:pic>
+        <p:nvPicPr>
+          <p:cNvPr id="59" name="Imagen 20">
+            <a:hlinkClick r:id="rId2" action="ppaction://hlinksldjump"/>
+          </p:cNvPr>
+          <p:cNvPicPr/>
+          <p:nvPr/>
+        </p:nvPicPr>
+        <p:blipFill>
+          <a:blip r:embed="rId3"/>
+          <a:stretch/>
+        </p:blipFill>
+        <p:spPr>
+          <a:xfrm>
+            <a:off x="1522205" y="2261551"/>
+            <a:ext cx="1716120" cy="1155960"/>
+          </a:xfrm>
+          <a:prstGeom prst="rect">
+            <a:avLst/>
+          </a:prstGeom>
+          <a:ln w="0">
+            <a:noFill/>
+          </a:ln>
+        </p:spPr>
+      </p:pic>
+      <p:pic>
+        <p:nvPicPr>
+          <p:cNvPr id="61" name="Imagen 26">
+            <a:hlinkClick r:id="rId4" action="ppaction://hlinksldjump"/>
+          </p:cNvPr>
+          <p:cNvPicPr/>
+          <p:nvPr/>
+        </p:nvPicPr>
+        <p:blipFill>
+          <a:blip r:embed="rId5"/>
+          <a:stretch/>
+        </p:blipFill>
+        <p:spPr>
+          <a:xfrm>
+            <a:off x="9302890" y="2326680"/>
+            <a:ext cx="1368360" cy="1102320"/>
+          </a:xfrm>
+          <a:prstGeom prst="rect">
+            <a:avLst/>
+          </a:prstGeom>
+          <a:ln w="0">
+            <a:noFill/>
+          </a:ln>
+        </p:spPr>
+      </p:pic>
+      <p:pic>
+        <p:nvPicPr>
+          <p:cNvPr id="62" name="Imagen 28">
+            <a:hlinkClick r:id="rId6" action="ppaction://hlinksldjump"/>
+          </p:cNvPr>
+          <p:cNvPicPr/>
+          <p:nvPr/>
+        </p:nvPicPr>
+        <p:blipFill>
+          <a:blip r:embed="rId7"/>
+          <a:stretch/>
+        </p:blipFill>
+        <p:spPr>
+          <a:xfrm>
+            <a:off x="5411160" y="2181451"/>
+            <a:ext cx="1368360" cy="1316160"/>
+          </a:xfrm>
+          <a:prstGeom prst="rect">
+            <a:avLst/>
+          </a:prstGeom>
+          <a:ln w="0">
+            <a:noFill/>
+          </a:ln>
+        </p:spPr>
+      </p:pic>
       <p:sp>
         <p:nvSpPr>
-          <p:cNvPr id="57" name="CuadroTexto 10"/>
+          <p:cNvPr id="63" name="CuadroTexto 10"/>
           <p:cNvSpPr/>
           <p:nvPr/>
         </p:nvSpPr>
         <p:spPr>
           <a:xfrm>
-            <a:off x="5310360" y="2551680"/>
-            <a:ext cx="1569600" cy="668520"/>
+            <a:off x="4276110" y="3601686"/>
+            <a:ext cx="3724890" cy="2137593"/>
           </a:xfrm>
           <a:prstGeom prst="rect">
             <a:avLst/>
@@ -11500,7 +13449,7 @@
           <a:fontRef idx="minor"/>
         </p:style>
         <p:txBody>
-          <a:bodyPr lIns="90000" tIns="45000" rIns="90000" bIns="45000" anchor="t">
+          <a:bodyPr wrap="square" lIns="90000" tIns="45000" rIns="90000" bIns="45000" anchor="t">
             <a:spAutoFit/>
           </a:bodyPr>
           <a:lstStyle/>
@@ -11511,7 +13460,7 @@
               </a:lnSpc>
             </a:pPr>
             <a:r>
-              <a:rPr lang="es-ES" sz="1900" b="1" strike="noStrike" spc="-1">
+              <a:rPr lang="es-ES" sz="2000" b="1" spc="-1" dirty="0">
                 <a:solidFill>
                   <a:schemeClr val="accent2">
                     <a:lumMod val="50000"/>
@@ -11519,9 +13468,200 @@
                 </a:solidFill>
                 <a:latin typeface="Calibri"/>
               </a:rPr>
-              <a:t>3.  Dataset y EDA</a:t>
-            </a:r>
-            <a:endParaRPr lang="es-ES" sz="1900" b="0" strike="noStrike" spc="-1">
+              <a:t>2</a:t>
+            </a:r>
+            <a:r>
+              <a:rPr lang="es-ES" sz="2000" b="1" strike="noStrike" spc="-1" dirty="0">
+                <a:solidFill>
+                  <a:schemeClr val="accent2">
+                    <a:lumMod val="50000"/>
+                  </a:schemeClr>
+                </a:solidFill>
+                <a:latin typeface="Calibri"/>
+              </a:rPr>
+              <a:t>. Modelado</a:t>
+            </a:r>
+          </a:p>
+          <a:p>
+            <a:pPr algn="ctr" defTabSz="914400">
+              <a:lnSpc>
+                <a:spcPct val="100000"/>
+              </a:lnSpc>
+            </a:pPr>
+            <a:endParaRPr lang="es-ES" sz="1700" b="1" spc="-1" dirty="0">
+              <a:solidFill>
+                <a:schemeClr val="accent2">
+                  <a:lumMod val="50000"/>
+                </a:schemeClr>
+              </a:solidFill>
+              <a:latin typeface="Calibri"/>
+            </a:endParaRPr>
+          </a:p>
+          <a:p>
+            <a:pPr defTabSz="914400">
+              <a:lnSpc>
+                <a:spcPct val="100000"/>
+              </a:lnSpc>
+            </a:pPr>
+            <a:r>
+              <a:rPr lang="es-ES" sz="1600" b="1" strike="noStrike" spc="-1" dirty="0">
+                <a:solidFill>
+                  <a:schemeClr val="accent2">
+                    <a:lumMod val="50000"/>
+                  </a:schemeClr>
+                </a:solidFill>
+                <a:latin typeface="Calibri"/>
+              </a:rPr>
+              <a:t>  · Selección de métricas y Cross </a:t>
+            </a:r>
+            <a:r>
+              <a:rPr lang="es-ES" sz="1600" b="1" strike="noStrike" spc="-1" dirty="0" err="1">
+                <a:solidFill>
+                  <a:schemeClr val="accent2">
+                    <a:lumMod val="50000"/>
+                  </a:schemeClr>
+                </a:solidFill>
+                <a:latin typeface="Calibri"/>
+              </a:rPr>
+              <a:t>validation</a:t>
+            </a:r>
+            <a:endParaRPr lang="es-ES" sz="1600" b="1" strike="noStrike" spc="-1" dirty="0">
+              <a:solidFill>
+                <a:schemeClr val="accent2">
+                  <a:lumMod val="50000"/>
+                </a:schemeClr>
+              </a:solidFill>
+              <a:latin typeface="Calibri"/>
+            </a:endParaRPr>
+          </a:p>
+          <a:p>
+            <a:pPr defTabSz="914400">
+              <a:lnSpc>
+                <a:spcPct val="100000"/>
+              </a:lnSpc>
+            </a:pPr>
+            <a:r>
+              <a:rPr lang="es-ES" sz="1600" b="1" spc="-1" dirty="0">
+                <a:solidFill>
+                  <a:schemeClr val="accent2">
+                    <a:lumMod val="50000"/>
+                  </a:schemeClr>
+                </a:solidFill>
+                <a:latin typeface="Calibri"/>
+              </a:rPr>
+              <a:t>  · </a:t>
+            </a:r>
+            <a:r>
+              <a:rPr lang="es-ES" sz="1600" b="1" spc="-1" dirty="0" err="1">
+                <a:solidFill>
+                  <a:schemeClr val="accent2">
+                    <a:lumMod val="50000"/>
+                  </a:schemeClr>
+                </a:solidFill>
+                <a:latin typeface="Calibri"/>
+              </a:rPr>
+              <a:t>Baselines</a:t>
+            </a:r>
+            <a:endParaRPr lang="es-ES" sz="1600" b="1" spc="-1" dirty="0">
+              <a:solidFill>
+                <a:schemeClr val="accent2">
+                  <a:lumMod val="50000"/>
+                </a:schemeClr>
+              </a:solidFill>
+              <a:latin typeface="Calibri"/>
+            </a:endParaRPr>
+          </a:p>
+          <a:p>
+            <a:pPr defTabSz="914400">
+              <a:lnSpc>
+                <a:spcPct val="100000"/>
+              </a:lnSpc>
+            </a:pPr>
+            <a:r>
+              <a:rPr lang="es-ES" sz="1600" b="1" strike="noStrike" spc="-1" dirty="0">
+                <a:solidFill>
+                  <a:schemeClr val="accent2">
+                    <a:lumMod val="50000"/>
+                  </a:schemeClr>
+                </a:solidFill>
+                <a:latin typeface="Calibri"/>
+              </a:rPr>
+              <a:t>  · Modelado y resultados</a:t>
+            </a:r>
+          </a:p>
+          <a:p>
+            <a:pPr defTabSz="914400">
+              <a:lnSpc>
+                <a:spcPct val="100000"/>
+              </a:lnSpc>
+            </a:pPr>
+            <a:r>
+              <a:rPr lang="es-ES" sz="1600" b="1" spc="-1" dirty="0">
+                <a:solidFill>
+                  <a:schemeClr val="accent2">
+                    <a:lumMod val="50000"/>
+                  </a:schemeClr>
+                </a:solidFill>
+                <a:latin typeface="Calibri"/>
+              </a:rPr>
+              <a:t>  · Optimización de </a:t>
+            </a:r>
+            <a:r>
+              <a:rPr lang="es-ES" sz="1600" b="1" spc="-1" dirty="0" err="1">
+                <a:solidFill>
+                  <a:schemeClr val="accent2">
+                    <a:lumMod val="50000"/>
+                  </a:schemeClr>
+                </a:solidFill>
+                <a:latin typeface="Calibri"/>
+              </a:rPr>
+              <a:t>hiperparámetros</a:t>
+            </a:r>
+            <a:endParaRPr lang="es-ES" sz="1600" b="1" spc="-1" dirty="0">
+              <a:solidFill>
+                <a:schemeClr val="accent2">
+                  <a:lumMod val="50000"/>
+                </a:schemeClr>
+              </a:solidFill>
+              <a:latin typeface="Calibri"/>
+            </a:endParaRPr>
+          </a:p>
+          <a:p>
+            <a:pPr defTabSz="914400">
+              <a:lnSpc>
+                <a:spcPct val="100000"/>
+              </a:lnSpc>
+            </a:pPr>
+            <a:r>
+              <a:rPr lang="es-ES" sz="1600" b="1" strike="noStrike" spc="-1" dirty="0">
+                <a:solidFill>
+                  <a:schemeClr val="accent2">
+                    <a:lumMod val="50000"/>
+                  </a:schemeClr>
+                </a:solidFill>
+                <a:latin typeface="Calibri"/>
+              </a:rPr>
+              <a:t>  · Evaluación final y test</a:t>
+            </a:r>
+          </a:p>
+          <a:p>
+            <a:pPr defTabSz="914400">
+              <a:lnSpc>
+                <a:spcPct val="100000"/>
+              </a:lnSpc>
+            </a:pPr>
+            <a:r>
+              <a:rPr lang="es-ES" sz="1600" b="1" spc="-1" dirty="0">
+                <a:solidFill>
+                  <a:schemeClr val="accent2">
+                    <a:lumMod val="50000"/>
+                  </a:schemeClr>
+                </a:solidFill>
+                <a:latin typeface="Calibri"/>
+              </a:rPr>
+              <a:t>  · Persistencia del modelo</a:t>
+            </a:r>
+            <a:endParaRPr lang="es-ES" sz="1600" b="1" strike="noStrike" spc="-1" dirty="0">
               <a:solidFill>
                 <a:srgbClr val="000000"/>
               </a:solidFill>
@@ -11530,255 +13670,6 @@
           </a:p>
         </p:txBody>
       </p:sp>
-      <p:sp>
-        <p:nvSpPr>
-          <p:cNvPr id="58" name="CuadroTexto 11"/>
-          <p:cNvSpPr/>
-          <p:nvPr/>
-        </p:nvSpPr>
-        <p:spPr>
-          <a:xfrm>
-            <a:off x="9504720" y="2551680"/>
-            <a:ext cx="2026080" cy="379080"/>
-          </a:xfrm>
-          <a:prstGeom prst="rect">
-            <a:avLst/>
-          </a:prstGeom>
-          <a:noFill/>
-          <a:ln w="0">
-            <a:noFill/>
-          </a:ln>
-        </p:spPr>
-        <p:style>
-          <a:lnRef idx="0">
-            <a:scrgbClr r="0" g="0" b="0"/>
-          </a:lnRef>
-          <a:fillRef idx="0">
-            <a:scrgbClr r="0" g="0" b="0"/>
-          </a:fillRef>
-          <a:effectRef idx="0">
-            <a:scrgbClr r="0" g="0" b="0"/>
-          </a:effectRef>
-          <a:fontRef idx="minor"/>
-        </p:style>
-        <p:txBody>
-          <a:bodyPr lIns="90000" tIns="45000" rIns="90000" bIns="45000" anchor="t">
-            <a:spAutoFit/>
-          </a:bodyPr>
-          <a:lstStyle/>
-          <a:p>
-            <a:pPr algn="ctr" defTabSz="914400">
-              <a:lnSpc>
-                <a:spcPct val="100000"/>
-              </a:lnSpc>
-            </a:pPr>
-            <a:r>
-              <a:rPr lang="es-ES" sz="1900" b="1" strike="noStrike" spc="-1">
-                <a:solidFill>
-                  <a:schemeClr val="accent2">
-                    <a:lumMod val="50000"/>
-                  </a:schemeClr>
-                </a:solidFill>
-                <a:latin typeface="Calibri"/>
-              </a:rPr>
-              <a:t>5.  Conclusiones</a:t>
-            </a:r>
-            <a:endParaRPr lang="es-ES" sz="1900" b="0" strike="noStrike" spc="-1">
-              <a:solidFill>
-                <a:srgbClr val="000000"/>
-              </a:solidFill>
-              <a:latin typeface="Arial"/>
-            </a:endParaRPr>
-          </a:p>
-        </p:txBody>
-      </p:sp>
-      <p:pic>
-        <p:nvPicPr>
-          <p:cNvPr id="59" name="Imagen 20">
-            <a:hlinkClick r:id="rId2" action="ppaction://hlinksldjump"/>
-          </p:cNvPr>
-          <p:cNvPicPr/>
-          <p:nvPr/>
-        </p:nvPicPr>
-        <p:blipFill>
-          <a:blip r:embed="rId3"/>
-          <a:stretch/>
-        </p:blipFill>
-        <p:spPr>
-          <a:xfrm>
-            <a:off x="667440" y="3847320"/>
-            <a:ext cx="1716120" cy="1155960"/>
-          </a:xfrm>
-          <a:prstGeom prst="rect">
-            <a:avLst/>
-          </a:prstGeom>
-          <a:ln w="0">
-            <a:noFill/>
-          </a:ln>
-        </p:spPr>
-      </p:pic>
-      <p:pic>
-        <p:nvPicPr>
-          <p:cNvPr id="60" name="Imagen 22">
-            <a:hlinkClick r:id="rId4" action="ppaction://hlinksldjump"/>
-          </p:cNvPr>
-          <p:cNvPicPr/>
-          <p:nvPr/>
-        </p:nvPicPr>
-        <p:blipFill>
-          <a:blip r:embed="rId5"/>
-          <a:stretch/>
-        </p:blipFill>
-        <p:spPr>
-          <a:xfrm>
-            <a:off x="3128760" y="3767040"/>
-            <a:ext cx="1492920" cy="1316160"/>
-          </a:xfrm>
-          <a:prstGeom prst="rect">
-            <a:avLst/>
-          </a:prstGeom>
-          <a:ln w="0">
-            <a:noFill/>
-          </a:ln>
-        </p:spPr>
-      </p:pic>
-      <p:pic>
-        <p:nvPicPr>
-          <p:cNvPr id="61" name="Imagen 26">
-            <a:hlinkClick r:id="rId6" action="ppaction://hlinksldjump"/>
-          </p:cNvPr>
-          <p:cNvPicPr/>
-          <p:nvPr/>
-        </p:nvPicPr>
-        <p:blipFill>
-          <a:blip r:embed="rId7"/>
-          <a:stretch/>
-        </p:blipFill>
-        <p:spPr>
-          <a:xfrm>
-            <a:off x="9886320" y="3793320"/>
-            <a:ext cx="1368360" cy="1102320"/>
-          </a:xfrm>
-          <a:prstGeom prst="rect">
-            <a:avLst/>
-          </a:prstGeom>
-          <a:ln w="0">
-            <a:noFill/>
-          </a:ln>
-        </p:spPr>
-      </p:pic>
-      <p:pic>
-        <p:nvPicPr>
-          <p:cNvPr id="62" name="Imagen 28">
-            <a:hlinkClick r:id="rId8" action="ppaction://hlinksldjump"/>
-          </p:cNvPr>
-          <p:cNvPicPr/>
-          <p:nvPr/>
-        </p:nvPicPr>
-        <p:blipFill>
-          <a:blip r:embed="rId9"/>
-          <a:stretch/>
-        </p:blipFill>
-        <p:spPr>
-          <a:xfrm>
-            <a:off x="7508160" y="3716640"/>
-            <a:ext cx="1368360" cy="1316160"/>
-          </a:xfrm>
-          <a:prstGeom prst="rect">
-            <a:avLst/>
-          </a:prstGeom>
-          <a:ln w="0">
-            <a:noFill/>
-          </a:ln>
-        </p:spPr>
-      </p:pic>
-      <p:sp>
-        <p:nvSpPr>
-          <p:cNvPr id="63" name="CuadroTexto 10"/>
-          <p:cNvSpPr/>
-          <p:nvPr/>
-        </p:nvSpPr>
-        <p:spPr>
-          <a:xfrm>
-            <a:off x="7407720" y="2551680"/>
-            <a:ext cx="1569600" cy="668520"/>
-          </a:xfrm>
-          <a:prstGeom prst="rect">
-            <a:avLst/>
-          </a:prstGeom>
-          <a:noFill/>
-          <a:ln w="0">
-            <a:noFill/>
-          </a:ln>
-        </p:spPr>
-        <p:style>
-          <a:lnRef idx="0">
-            <a:scrgbClr r="0" g="0" b="0"/>
-          </a:lnRef>
-          <a:fillRef idx="0">
-            <a:scrgbClr r="0" g="0" b="0"/>
-          </a:fillRef>
-          <a:effectRef idx="0">
-            <a:scrgbClr r="0" g="0" b="0"/>
-          </a:effectRef>
-          <a:fontRef idx="minor"/>
-        </p:style>
-        <p:txBody>
-          <a:bodyPr lIns="90000" tIns="45000" rIns="90000" bIns="45000" anchor="t">
-            <a:spAutoFit/>
-          </a:bodyPr>
-          <a:lstStyle/>
-          <a:p>
-            <a:pPr algn="ctr" defTabSz="914400">
-              <a:lnSpc>
-                <a:spcPct val="100000"/>
-              </a:lnSpc>
-            </a:pPr>
-            <a:r>
-              <a:rPr lang="es-ES" sz="1900" b="1" strike="noStrike" spc="-1" dirty="0">
-                <a:solidFill>
-                  <a:schemeClr val="accent2">
-                    <a:lumMod val="50000"/>
-                  </a:schemeClr>
-                </a:solidFill>
-                <a:latin typeface="Calibri"/>
-              </a:rPr>
-              <a:t>4.  Modelado y resultados</a:t>
-            </a:r>
-            <a:endParaRPr lang="es-ES" sz="1900" b="0" strike="noStrike" spc="-1" dirty="0">
-              <a:solidFill>
-                <a:srgbClr val="000000"/>
-              </a:solidFill>
-              <a:latin typeface="Arial"/>
-            </a:endParaRPr>
-          </a:p>
-        </p:txBody>
-      </p:sp>
-      <p:pic>
-        <p:nvPicPr>
-          <p:cNvPr id="64" name="Marcador de contenido 6">
-            <a:hlinkClick r:id="rId8" action="ppaction://hlinksldjump"/>
-          </p:cNvPr>
-          <p:cNvPicPr/>
-          <p:nvPr/>
-        </p:nvPicPr>
-        <p:blipFill>
-          <a:blip r:embed="rId10"/>
-          <a:stretch/>
-        </p:blipFill>
-        <p:spPr>
-          <a:xfrm>
-            <a:off x="5366520" y="3332880"/>
-            <a:ext cx="1699200" cy="2424600"/>
-          </a:xfrm>
-          <a:prstGeom prst="rect">
-            <a:avLst/>
-          </a:prstGeom>
-          <a:ln w="0">
-            <a:noFill/>
-          </a:ln>
-        </p:spPr>
-      </p:pic>
     </p:spTree>
   </p:cSld>
   <p:clrMapOvr>
@@ -11908,9 +13799,18 @@
                 </a:solidFill>
                 <a:latin typeface="Calibri Light"/>
               </a:rPr>
-              <a:t>EDA – Análisis de target y su distribución</a:t>
-            </a:r>
-            <a:endParaRPr lang="es-ES" sz="3500" b="0" strike="noStrike" spc="-1" dirty="0">
+              <a:t>EDA – </a:t>
+            </a:r>
+            <a:r>
+              <a:rPr lang="es-ES" sz="3000" b="1" strike="noStrike" spc="-1" dirty="0">
+                <a:solidFill>
+                  <a:srgbClr val="582808"/>
+                </a:solidFill>
+                <a:latin typeface="Calibri Light"/>
+              </a:rPr>
+              <a:t>Análisis de target y su distribución</a:t>
+            </a:r>
+            <a:endParaRPr lang="es-ES" sz="3000" b="0" strike="noStrike" spc="-1" dirty="0">
               <a:solidFill>
                 <a:srgbClr val="000000"/>
               </a:solidFill>
@@ -11919,29 +13819,6 @@
           </a:p>
         </p:txBody>
       </p:sp>
-      <p:pic>
-        <p:nvPicPr>
-          <p:cNvPr id="72" name="Imagen 7"/>
-          <p:cNvPicPr/>
-          <p:nvPr/>
-        </p:nvPicPr>
-        <p:blipFill>
-          <a:blip r:embed="rId2"/>
-          <a:stretch/>
-        </p:blipFill>
-        <p:spPr>
-          <a:xfrm>
-            <a:off x="10348920" y="479520"/>
-            <a:ext cx="1314000" cy="987840"/>
-          </a:xfrm>
-          <a:prstGeom prst="rect">
-            <a:avLst/>
-          </a:prstGeom>
-          <a:ln w="0">
-            <a:noFill/>
-          </a:ln>
-        </p:spPr>
-      </p:pic>
       <p:sp>
         <p:nvSpPr>
           <p:cNvPr id="3" name="CuadroTexto 2">
@@ -11957,7 +13834,7 @@
         <p:spPr>
           <a:xfrm>
             <a:off x="527760" y="1358900"/>
-            <a:ext cx="11537240" cy="3046988"/>
+            <a:ext cx="11537240" cy="2554545"/>
           </a:xfrm>
           <a:prstGeom prst="rect">
             <a:avLst/>
@@ -11970,63 +13847,131 @@
           </a:bodyPr>
           <a:lstStyle/>
           <a:p>
-            <a:r>
-              <a:rPr lang="es-ES" sz="1600" dirty="0"/>
+            <a:pPr algn="just"/>
+            <a:r>
+              <a:rPr lang="es-ES" sz="1600" dirty="0">
+                <a:solidFill>
+                  <a:schemeClr val="accent2">
+                    <a:lumMod val="50000"/>
+                  </a:schemeClr>
+                </a:solidFill>
+              </a:rPr>
               <a:t>Elegimos </a:t>
             </a:r>
             <a:r>
-              <a:rPr lang="es-ES" sz="1600" b="1" dirty="0"/>
+              <a:rPr lang="es-ES" sz="1600" b="1" dirty="0">
+                <a:solidFill>
+                  <a:schemeClr val="accent2">
+                    <a:lumMod val="50000"/>
+                  </a:schemeClr>
+                </a:solidFill>
+              </a:rPr>
               <a:t>estimated_revenue_l365d </a:t>
             </a:r>
             <a:r>
-              <a:rPr lang="es-ES" sz="1600" dirty="0"/>
-              <a:t>como variable objetivo, porque resume el ingreso o beneficio anual estimado que puede generar un anuncio.</a:t>
-            </a:r>
-          </a:p>
-          <a:p>
-            <a:br>
-              <a:rPr lang="es-ES" sz="1600" dirty="0"/>
-            </a:br>
-            <a:r>
-              <a:rPr lang="es-ES" sz="1600" dirty="0"/>
-              <a:t>Con esto, buscamos predecir cuánto dinero produce al año cada propiedad del </a:t>
-            </a:r>
-            <a:r>
-              <a:rPr lang="es-ES" sz="1600" dirty="0" err="1"/>
+              <a:rPr lang="es-ES" sz="1600" dirty="0">
+                <a:solidFill>
+                  <a:schemeClr val="accent2">
+                    <a:lumMod val="50000"/>
+                  </a:schemeClr>
+                </a:solidFill>
+              </a:rPr>
+              <a:t>como variable objetivo, porque resume el ingreso o beneficio anual estimado que puede generar un anuncio. Con esto, buscamos predecir cuánto dinero produce al año cada propiedad del </a:t>
+            </a:r>
+            <a:r>
+              <a:rPr lang="es-ES" sz="1600" dirty="0" err="1">
+                <a:solidFill>
+                  <a:schemeClr val="accent2">
+                    <a:lumMod val="50000"/>
+                  </a:schemeClr>
+                </a:solidFill>
+              </a:rPr>
               <a:t>dataset</a:t>
             </a:r>
             <a:r>
-              <a:rPr lang="es-ES" sz="1600" dirty="0"/>
+              <a:rPr lang="es-ES" sz="1600" dirty="0">
+                <a:solidFill>
+                  <a:schemeClr val="accent2">
+                    <a:lumMod val="50000"/>
+                  </a:schemeClr>
+                </a:solidFill>
+              </a:rPr>
               <a:t>, por lo que utilizaremos un </a:t>
             </a:r>
             <a:r>
-              <a:rPr lang="es-ES" sz="1600" b="1" dirty="0"/>
+              <a:rPr lang="es-ES" sz="1600" b="1" dirty="0">
+                <a:solidFill>
+                  <a:schemeClr val="accent2">
+                    <a:lumMod val="50000"/>
+                  </a:schemeClr>
+                </a:solidFill>
+              </a:rPr>
               <a:t>modelo supervisado de regresión.</a:t>
             </a:r>
           </a:p>
           <a:p>
-            <a:endParaRPr lang="es-ES" sz="1600" dirty="0"/>
-          </a:p>
-          <a:p>
-            <a:r>
-              <a:rPr lang="es-ES" sz="1600" dirty="0"/>
+            <a:pPr algn="just"/>
+            <a:endParaRPr lang="es-ES" sz="1600" dirty="0">
+              <a:solidFill>
+                <a:schemeClr val="accent2">
+                  <a:lumMod val="50000"/>
+                </a:schemeClr>
+              </a:solidFill>
+            </a:endParaRPr>
+          </a:p>
+          <a:p>
+            <a:pPr algn="just"/>
+            <a:r>
+              <a:rPr lang="es-ES" sz="1600" dirty="0">
+                <a:solidFill>
+                  <a:schemeClr val="accent2">
+                    <a:lumMod val="50000"/>
+                  </a:schemeClr>
+                </a:solidFill>
+              </a:rPr>
               <a:t>La variable objetivo presenta una distribución fuertemente sesgada a la derecha, con presencia de valores extremos muy elevados. La media es significativamente superior a la mediana, lo que confirma la asimetría. Además, existen valores 0 que deberán analizarse para determinar si corresponden a ausencia de actividad o a posibles errores.</a:t>
             </a:r>
           </a:p>
           <a:p>
-            <a:endParaRPr lang="es-ES" sz="1600" dirty="0"/>
-          </a:p>
-          <a:p>
-            <a:r>
-              <a:rPr lang="es-ES" sz="1600" dirty="0"/>
+            <a:pPr algn="just"/>
+            <a:endParaRPr lang="es-ES" sz="1600" dirty="0">
+              <a:solidFill>
+                <a:schemeClr val="accent2">
+                  <a:lumMod val="50000"/>
+                </a:schemeClr>
+              </a:solidFill>
+            </a:endParaRPr>
+          </a:p>
+          <a:p>
+            <a:pPr algn="just"/>
+            <a:r>
+              <a:rPr lang="es-ES" sz="1600" dirty="0">
+                <a:solidFill>
+                  <a:schemeClr val="accent2">
+                    <a:lumMod val="50000"/>
+                  </a:schemeClr>
+                </a:solidFill>
+              </a:rPr>
               <a:t>Con el fin de reducir la asimetría, hacer la distribución mas "normal" y reducir el impacto de los </a:t>
             </a:r>
             <a:r>
-              <a:rPr lang="es-ES" sz="1600" dirty="0" err="1"/>
+              <a:rPr lang="es-ES" sz="1600" dirty="0" err="1">
+                <a:solidFill>
+                  <a:schemeClr val="accent2">
+                    <a:lumMod val="50000"/>
+                  </a:schemeClr>
+                </a:solidFill>
+              </a:rPr>
               <a:t>outliers</a:t>
             </a:r>
             <a:r>
-              <a:rPr lang="es-ES" sz="1600" dirty="0"/>
+              <a:rPr lang="es-ES" sz="1600" dirty="0">
+                <a:solidFill>
+                  <a:schemeClr val="accent2">
+                    <a:lumMod val="50000"/>
+                  </a:schemeClr>
+                </a:solidFill>
+              </a:rPr>
               <a:t> vamos a hacer la función logarítmica.</a:t>
             </a:r>
           </a:p>
@@ -12047,7 +13992,7 @@
           <p:nvPr/>
         </p:nvPicPr>
         <p:blipFill>
-          <a:blip r:embed="rId3"/>
+          <a:blip r:embed="rId2"/>
           <a:srcRect l="1592" t="2524" r="1760" b="5573"/>
           <a:stretch>
             <a:fillRect/>
@@ -12055,7 +14000,7 @@
         </p:blipFill>
         <p:spPr>
           <a:xfrm>
-            <a:off x="2961077" y="4285382"/>
+            <a:off x="2669636" y="4163337"/>
             <a:ext cx="3017244" cy="2285148"/>
           </a:xfrm>
           <a:prstGeom prst="rect">
@@ -12078,7 +14023,7 @@
           <p:nvPr/>
         </p:nvPicPr>
         <p:blipFill>
-          <a:blip r:embed="rId4"/>
+          <a:blip r:embed="rId3"/>
           <a:srcRect l="3000" t="1486" r="2334" b="2722"/>
           <a:stretch>
             <a:fillRect/>
@@ -12086,12 +14031,42 @@
         </p:blipFill>
         <p:spPr>
           <a:xfrm>
-            <a:off x="6505121" y="4285382"/>
+            <a:off x="6505122" y="4163337"/>
             <a:ext cx="2923343" cy="2285149"/>
           </a:xfrm>
           <a:prstGeom prst="rect">
             <a:avLst/>
           </a:prstGeom>
+        </p:spPr>
+      </p:pic>
+      <p:pic>
+        <p:nvPicPr>
+          <p:cNvPr id="8" name="Imagen 20">
+            <a:hlinkClick r:id="rId4" action="ppaction://hlinksldjump"/>
+            <a:extLst>
+              <a:ext uri="{FF2B5EF4-FFF2-40B4-BE49-F238E27FC236}">
+                <a16:creationId xmlns:a16="http://schemas.microsoft.com/office/drawing/2014/main" id="{390606AA-A51B-42FC-AB34-E0ECCB639BDF}"/>
+              </a:ext>
+            </a:extLst>
+          </p:cNvPr>
+          <p:cNvPicPr/>
+          <p:nvPr/>
+        </p:nvPicPr>
+        <p:blipFill>
+          <a:blip r:embed="rId5"/>
+          <a:stretch/>
+        </p:blipFill>
+        <p:spPr>
+          <a:xfrm>
+            <a:off x="10706465" y="347264"/>
+            <a:ext cx="1220995" cy="664372"/>
+          </a:xfrm>
+          <a:prstGeom prst="rect">
+            <a:avLst/>
+          </a:prstGeom>
+          <a:ln w="0">
+            <a:noFill/>
+          </a:ln>
         </p:spPr>
       </p:pic>
     </p:spTree>
@@ -12241,9 +14216,18 @@
                 </a:solidFill>
                 <a:latin typeface="Calibri Light"/>
               </a:rPr>
-              <a:t>EDA – Análisis de las variables numéricas</a:t>
-            </a:r>
-            <a:endParaRPr lang="es-ES" sz="3500" b="0" strike="noStrike" spc="-1" dirty="0">
+              <a:t>EDA – </a:t>
+            </a:r>
+            <a:r>
+              <a:rPr lang="es-ES" sz="3000" b="1" strike="noStrike" spc="-1" dirty="0">
+                <a:solidFill>
+                  <a:srgbClr val="582808"/>
+                </a:solidFill>
+                <a:latin typeface="Calibri Light"/>
+              </a:rPr>
+              <a:t>Análisis de las variables numéricas</a:t>
+            </a:r>
+            <a:endParaRPr lang="es-ES" sz="3000" b="0" strike="noStrike" spc="-1" dirty="0">
               <a:solidFill>
                 <a:srgbClr val="000000"/>
               </a:solidFill>
@@ -12252,35 +14236,6 @@
           </a:p>
         </p:txBody>
       </p:sp>
-      <p:pic>
-        <p:nvPicPr>
-          <p:cNvPr id="72" name="Imagen 7">
-            <a:extLst>
-              <a:ext uri="{FF2B5EF4-FFF2-40B4-BE49-F238E27FC236}">
-                <a16:creationId xmlns:a16="http://schemas.microsoft.com/office/drawing/2014/main" id="{5A103033-EDD0-51E7-F3C1-1C8A8BFC6BD7}"/>
-              </a:ext>
-            </a:extLst>
-          </p:cNvPr>
-          <p:cNvPicPr/>
-          <p:nvPr/>
-        </p:nvPicPr>
-        <p:blipFill>
-          <a:blip r:embed="rId2"/>
-          <a:stretch/>
-        </p:blipFill>
-        <p:spPr>
-          <a:xfrm>
-            <a:off x="10348920" y="479520"/>
-            <a:ext cx="1314000" cy="987840"/>
-          </a:xfrm>
-          <a:prstGeom prst="rect">
-            <a:avLst/>
-          </a:prstGeom>
-          <a:ln w="0">
-            <a:noFill/>
-          </a:ln>
-        </p:spPr>
-      </p:pic>
       <p:sp>
         <p:nvSpPr>
           <p:cNvPr id="2" name="CuadroTexto 1">
@@ -12295,7 +14250,7 @@
         </p:nvSpPr>
         <p:spPr>
           <a:xfrm>
-            <a:off x="527760" y="1371600"/>
+            <a:off x="527760" y="1565889"/>
             <a:ext cx="11135160" cy="4278094"/>
           </a:xfrm>
           <a:prstGeom prst="rect">
@@ -12309,112 +14264,299 @@
           </a:bodyPr>
           <a:lstStyle/>
           <a:p>
-            <a:r>
-              <a:rPr lang="es-ES" sz="1600" dirty="0"/>
+            <a:pPr algn="just"/>
+            <a:r>
+              <a:rPr lang="es-ES" sz="1600" dirty="0">
+                <a:solidFill>
+                  <a:schemeClr val="accent2">
+                    <a:lumMod val="50000"/>
+                  </a:schemeClr>
+                </a:solidFill>
+              </a:rPr>
               <a:t>Durante el análisis univariante se observa que muchas de las variables numéricas presentan una fuerte asimetría, con distribuciones sesgadas hacia la derecha y presencia de valores extremos. Esto sugiere la necesidad de un tratamiento posterior de </a:t>
             </a:r>
             <a:r>
-              <a:rPr lang="es-ES" sz="1600" dirty="0" err="1"/>
+              <a:rPr lang="es-ES" sz="1600" dirty="0" err="1">
+                <a:solidFill>
+                  <a:schemeClr val="accent2">
+                    <a:lumMod val="50000"/>
+                  </a:schemeClr>
+                </a:solidFill>
+              </a:rPr>
               <a:t>outliers</a:t>
             </a:r>
             <a:r>
-              <a:rPr lang="es-ES" sz="1600" dirty="0"/>
+              <a:rPr lang="es-ES" sz="1600" dirty="0">
+                <a:solidFill>
+                  <a:schemeClr val="accent2">
+                    <a:lumMod val="50000"/>
+                  </a:schemeClr>
+                </a:solidFill>
+              </a:rPr>
               <a:t> y posibles transformaciones.</a:t>
             </a:r>
           </a:p>
           <a:p>
-            <a:endParaRPr lang="es-ES" sz="1600" dirty="0"/>
-          </a:p>
-          <a:p>
-            <a:r>
-              <a:rPr lang="es-ES" sz="1600" dirty="0"/>
+            <a:pPr algn="just"/>
+            <a:endParaRPr lang="es-ES" sz="1600" dirty="0">
+              <a:solidFill>
+                <a:schemeClr val="accent2">
+                  <a:lumMod val="50000"/>
+                </a:schemeClr>
+              </a:solidFill>
+            </a:endParaRPr>
+          </a:p>
+          <a:p>
+            <a:pPr algn="just"/>
+            <a:r>
+              <a:rPr lang="es-ES" sz="1600" dirty="0">
+                <a:solidFill>
+                  <a:schemeClr val="accent2">
+                    <a:lumMod val="50000"/>
+                  </a:schemeClr>
+                </a:solidFill>
+              </a:rPr>
               <a:t>Se identifican variables potencialmente redundantes, especialmente dentro de los bloques de disponibilidad (</a:t>
             </a:r>
             <a:r>
-              <a:rPr lang="es-ES" sz="1600" b="1" dirty="0"/>
+              <a:rPr lang="es-ES" sz="1600" b="1" dirty="0">
+                <a:solidFill>
+                  <a:schemeClr val="accent2">
+                    <a:lumMod val="50000"/>
+                  </a:schemeClr>
+                </a:solidFill>
+              </a:rPr>
               <a:t>availability_30, availability_60, availability_90, availability_365, </a:t>
             </a:r>
             <a:r>
-              <a:rPr lang="es-ES" sz="1600" b="1" dirty="0" err="1"/>
+              <a:rPr lang="es-ES" sz="1600" b="1" dirty="0" err="1">
+                <a:solidFill>
+                  <a:schemeClr val="accent2">
+                    <a:lumMod val="50000"/>
+                  </a:schemeClr>
+                </a:solidFill>
+              </a:rPr>
               <a:t>availability_eoy</a:t>
             </a:r>
             <a:r>
-              <a:rPr lang="es-ES" sz="1600" dirty="0"/>
+              <a:rPr lang="es-ES" sz="1600" dirty="0">
+                <a:solidFill>
+                  <a:schemeClr val="accent2">
+                    <a:lumMod val="50000"/>
+                  </a:schemeClr>
+                </a:solidFill>
+              </a:rPr>
               <a:t>) y de restricciones de estancia (</a:t>
             </a:r>
             <a:r>
-              <a:rPr lang="es-ES" sz="1600" b="1" dirty="0" err="1"/>
+              <a:rPr lang="es-ES" sz="1600" b="1" dirty="0" err="1">
+                <a:solidFill>
+                  <a:schemeClr val="accent2">
+                    <a:lumMod val="50000"/>
+                  </a:schemeClr>
+                </a:solidFill>
+              </a:rPr>
               <a:t>minimum_nights</a:t>
             </a:r>
             <a:r>
-              <a:rPr lang="es-ES" sz="1600" b="1" dirty="0"/>
+              <a:rPr lang="es-ES" sz="1600" b="1" dirty="0">
+                <a:solidFill>
+                  <a:schemeClr val="accent2">
+                    <a:lumMod val="50000"/>
+                  </a:schemeClr>
+                </a:solidFill>
+              </a:rPr>
               <a:t>, </a:t>
             </a:r>
             <a:r>
-              <a:rPr lang="es-ES" sz="1600" b="1" dirty="0" err="1"/>
+              <a:rPr lang="es-ES" sz="1600" b="1" dirty="0" err="1">
+                <a:solidFill>
+                  <a:schemeClr val="accent2">
+                    <a:lumMod val="50000"/>
+                  </a:schemeClr>
+                </a:solidFill>
+              </a:rPr>
               <a:t>maximum_nights</a:t>
             </a:r>
             <a:r>
-              <a:rPr lang="es-ES" sz="1600" b="1" dirty="0"/>
+              <a:rPr lang="es-ES" sz="1600" b="1" dirty="0">
+                <a:solidFill>
+                  <a:schemeClr val="accent2">
+                    <a:lumMod val="50000"/>
+                  </a:schemeClr>
+                </a:solidFill>
+              </a:rPr>
               <a:t> y sus derivados como </a:t>
             </a:r>
             <a:r>
-              <a:rPr lang="es-ES" sz="1600" b="1" dirty="0" err="1"/>
+              <a:rPr lang="es-ES" sz="1600" b="1" dirty="0" err="1">
+                <a:solidFill>
+                  <a:schemeClr val="accent2">
+                    <a:lumMod val="50000"/>
+                  </a:schemeClr>
+                </a:solidFill>
+              </a:rPr>
               <a:t>minimum_minimum_nights</a:t>
             </a:r>
             <a:r>
-              <a:rPr lang="es-ES" sz="1600" b="1" dirty="0"/>
+              <a:rPr lang="es-ES" sz="1600" b="1" dirty="0">
+                <a:solidFill>
+                  <a:schemeClr val="accent2">
+                    <a:lumMod val="50000"/>
+                  </a:schemeClr>
+                </a:solidFill>
+              </a:rPr>
               <a:t>, </a:t>
             </a:r>
             <a:r>
-              <a:rPr lang="es-ES" sz="1600" b="1" dirty="0" err="1"/>
+              <a:rPr lang="es-ES" sz="1600" b="1" dirty="0" err="1">
+                <a:solidFill>
+                  <a:schemeClr val="accent2">
+                    <a:lumMod val="50000"/>
+                  </a:schemeClr>
+                </a:solidFill>
+              </a:rPr>
               <a:t>maximum_maximum_nights</a:t>
             </a:r>
             <a:r>
-              <a:rPr lang="es-ES" sz="1600" dirty="0"/>
+              <a:rPr lang="es-ES" sz="1600" dirty="0">
+                <a:solidFill>
+                  <a:schemeClr val="accent2">
+                    <a:lumMod val="50000"/>
+                  </a:schemeClr>
+                </a:solidFill>
+              </a:rPr>
               <a:t>, etc.). Estas variables miden conceptos muy similares en distintos horizontes temporales o como agregaciones estadísticas, por lo que es esperable que presenten una alta correlación entre sí. Esto puede generar multicolinealidad en modelos lineales, por lo que posteriormente se evaluará la conveniencia de seleccionar únicamente las variables más representativas de cada bloque.</a:t>
             </a:r>
           </a:p>
           <a:p>
-            <a:endParaRPr lang="es-ES" sz="1600" dirty="0"/>
-          </a:p>
-          <a:p>
-            <a:r>
-              <a:rPr lang="es-ES" sz="1600" dirty="0"/>
+            <a:pPr algn="just"/>
+            <a:endParaRPr lang="es-ES" sz="1600" dirty="0">
+              <a:solidFill>
+                <a:schemeClr val="accent2">
+                  <a:lumMod val="50000"/>
+                </a:schemeClr>
+              </a:solidFill>
+            </a:endParaRPr>
+          </a:p>
+          <a:p>
+            <a:pPr algn="just"/>
+            <a:r>
+              <a:rPr lang="es-ES" sz="1600" dirty="0">
+                <a:solidFill>
+                  <a:schemeClr val="accent2">
+                    <a:lumMod val="50000"/>
+                  </a:schemeClr>
+                </a:solidFill>
+              </a:rPr>
               <a:t>Asimismo, se detectan variables que actúan como identificadores (por ejemplo, </a:t>
             </a:r>
             <a:r>
-              <a:rPr lang="es-ES" sz="1600" b="1" dirty="0" err="1"/>
+              <a:rPr lang="es-ES" sz="1600" b="1" dirty="0" err="1">
+                <a:solidFill>
+                  <a:schemeClr val="accent2">
+                    <a:lumMod val="50000"/>
+                  </a:schemeClr>
+                </a:solidFill>
+              </a:rPr>
               <a:t>host_id</a:t>
             </a:r>
             <a:r>
-              <a:rPr lang="es-ES" sz="1600" dirty="0"/>
+              <a:rPr lang="es-ES" sz="1600" dirty="0">
+                <a:solidFill>
+                  <a:schemeClr val="accent2">
+                    <a:lumMod val="50000"/>
+                  </a:schemeClr>
+                </a:solidFill>
+              </a:rPr>
               <a:t>), las cuales no aportan información predictiva real y deben ser eliminadas del modelado.</a:t>
             </a:r>
           </a:p>
           <a:p>
-            <a:endParaRPr lang="es-ES" sz="1600" dirty="0"/>
-          </a:p>
-          <a:p>
-            <a:r>
-              <a:rPr lang="es-ES" sz="1600" dirty="0"/>
+            <a:pPr algn="just"/>
+            <a:endParaRPr lang="es-ES" sz="1600" dirty="0">
+              <a:solidFill>
+                <a:schemeClr val="accent2">
+                  <a:lumMod val="50000"/>
+                </a:schemeClr>
+              </a:solidFill>
+            </a:endParaRPr>
+          </a:p>
+          <a:p>
+            <a:pPr algn="just"/>
+            <a:r>
+              <a:rPr lang="es-ES" sz="1600" dirty="0">
+                <a:solidFill>
+                  <a:schemeClr val="accent2">
+                    <a:lumMod val="50000"/>
+                  </a:schemeClr>
+                </a:solidFill>
+              </a:rPr>
               <a:t>Por último, algunas variables como los </a:t>
             </a:r>
             <a:r>
-              <a:rPr lang="es-ES" sz="1600" b="1" dirty="0" err="1"/>
+              <a:rPr lang="es-ES" sz="1600" b="1" dirty="0" err="1">
+                <a:solidFill>
+                  <a:schemeClr val="accent2">
+                    <a:lumMod val="50000"/>
+                  </a:schemeClr>
+                </a:solidFill>
+              </a:rPr>
               <a:t>review_scores</a:t>
             </a:r>
             <a:r>
-              <a:rPr lang="es-ES" sz="1600" b="1" dirty="0"/>
+              <a:rPr lang="es-ES" sz="1600" b="1" dirty="0">
+                <a:solidFill>
+                  <a:schemeClr val="accent2">
+                    <a:lumMod val="50000"/>
+                  </a:schemeClr>
+                </a:solidFill>
+              </a:rPr>
               <a:t> </a:t>
             </a:r>
             <a:r>
-              <a:rPr lang="es-ES" sz="1600" dirty="0"/>
+              <a:rPr lang="es-ES" sz="1600" dirty="0">
+                <a:solidFill>
+                  <a:schemeClr val="accent2">
+                    <a:lumMod val="50000"/>
+                  </a:schemeClr>
+                </a:solidFill>
+              </a:rPr>
               <a:t>presentan una variabilidad reducida, concentrándose en valores altos (entre 4 y 5), lo que puede limitar su capacidad explicativa. También se detectan valores extremos en varias variables que deberán analizarse y tratarse en etapas posteriores del preprocesamiento.</a:t>
             </a:r>
           </a:p>
         </p:txBody>
       </p:sp>
+      <p:pic>
+        <p:nvPicPr>
+          <p:cNvPr id="6" name="Imagen 20">
+            <a:hlinkClick r:id="rId2" action="ppaction://hlinksldjump"/>
+            <a:extLst>
+              <a:ext uri="{FF2B5EF4-FFF2-40B4-BE49-F238E27FC236}">
+                <a16:creationId xmlns:a16="http://schemas.microsoft.com/office/drawing/2014/main" id="{F4485107-CC72-40D6-B810-FAB89194C2F4}"/>
+              </a:ext>
+            </a:extLst>
+          </p:cNvPr>
+          <p:cNvPicPr/>
+          <p:nvPr/>
+        </p:nvPicPr>
+        <p:blipFill>
+          <a:blip r:embed="rId3"/>
+          <a:stretch/>
+        </p:blipFill>
+        <p:spPr>
+          <a:xfrm>
+            <a:off x="10706465" y="347264"/>
+            <a:ext cx="1220995" cy="664372"/>
+          </a:xfrm>
+          <a:prstGeom prst="rect">
+            <a:avLst/>
+          </a:prstGeom>
+          <a:ln w="0">
+            <a:noFill/>
+          </a:ln>
+        </p:spPr>
+      </p:pic>
     </p:spTree>
     <p:extLst>
       <p:ext uri="{BB962C8B-B14F-4D97-AF65-F5344CB8AC3E}">
@@ -12570,7 +14712,7 @@
               <a:t>EDA – </a:t>
             </a:r>
             <a:r>
-              <a:rPr lang="es-ES" sz="3500" b="1" spc="-1" dirty="0">
+              <a:rPr lang="es-ES" sz="3000" b="1" spc="-1" dirty="0">
                 <a:solidFill>
                   <a:srgbClr val="582808"/>
                 </a:solidFill>
@@ -12578,7 +14720,7 @@
               </a:rPr>
               <a:t>Correlación entre variables numéricas y target</a:t>
             </a:r>
-            <a:endParaRPr lang="es-ES" sz="3500" b="0" strike="noStrike" spc="-1" dirty="0">
+            <a:endParaRPr lang="es-ES" sz="3000" b="0" strike="noStrike" spc="-1" dirty="0">
               <a:solidFill>
                 <a:srgbClr val="000000"/>
               </a:solidFill>
@@ -12587,35 +14729,6 @@
           </a:p>
         </p:txBody>
       </p:sp>
-      <p:pic>
-        <p:nvPicPr>
-          <p:cNvPr id="72" name="Imagen 7">
-            <a:extLst>
-              <a:ext uri="{FF2B5EF4-FFF2-40B4-BE49-F238E27FC236}">
-                <a16:creationId xmlns:a16="http://schemas.microsoft.com/office/drawing/2014/main" id="{EA88FEB5-EB50-2480-BD28-FF58120819E8}"/>
-              </a:ext>
-            </a:extLst>
-          </p:cNvPr>
-          <p:cNvPicPr/>
-          <p:nvPr/>
-        </p:nvPicPr>
-        <p:blipFill>
-          <a:blip r:embed="rId2"/>
-          <a:stretch/>
-        </p:blipFill>
-        <p:spPr>
-          <a:xfrm>
-            <a:off x="10348920" y="479520"/>
-            <a:ext cx="1314000" cy="987840"/>
-          </a:xfrm>
-          <a:prstGeom prst="rect">
-            <a:avLst/>
-          </a:prstGeom>
-          <a:ln w="0">
-            <a:noFill/>
-          </a:ln>
-        </p:spPr>
-      </p:pic>
       <p:sp>
         <p:nvSpPr>
           <p:cNvPr id="2" name="CuadroTexto 1">
@@ -12630,7 +14743,7 @@
         </p:nvSpPr>
         <p:spPr>
           <a:xfrm>
-            <a:off x="615290" y="1588528"/>
+            <a:off x="615290" y="1781126"/>
             <a:ext cx="10960100" cy="3416320"/>
           </a:xfrm>
           <a:prstGeom prst="rect">
@@ -12644,104 +14757,279 @@
           </a:bodyPr>
           <a:lstStyle/>
           <a:p>
-            <a:r>
-              <a:rPr lang="es-ES" sz="1600" dirty="0"/>
+            <a:pPr algn="just"/>
+            <a:r>
+              <a:rPr lang="es-ES" sz="1600" dirty="0">
+                <a:solidFill>
+                  <a:schemeClr val="accent2">
+                    <a:lumMod val="50000"/>
+                  </a:schemeClr>
+                </a:solidFill>
+              </a:rPr>
               <a:t>Del análisis bivariante se observa que el bloque de variables con mayor relación con la variable objetivo es el compuesto por la ocupación estimada anual (</a:t>
             </a:r>
             <a:r>
-              <a:rPr lang="es-ES" sz="1600" b="1" dirty="0"/>
+              <a:rPr lang="es-ES" sz="1600" b="1" dirty="0">
+                <a:solidFill>
+                  <a:schemeClr val="accent2">
+                    <a:lumMod val="50000"/>
+                  </a:schemeClr>
+                </a:solidFill>
+              </a:rPr>
               <a:t>estimated_occupancy_l365d</a:t>
             </a:r>
             <a:r>
-              <a:rPr lang="es-ES" sz="1600" dirty="0"/>
+              <a:rPr lang="es-ES" sz="1600" dirty="0">
+                <a:solidFill>
+                  <a:schemeClr val="accent2">
+                    <a:lumMod val="50000"/>
+                  </a:schemeClr>
+                </a:solidFill>
+              </a:rPr>
               <a:t>) y las métricas asociadas al volumen de reseñas (</a:t>
             </a:r>
             <a:r>
-              <a:rPr lang="es-ES" sz="1600" b="1" dirty="0" err="1"/>
+              <a:rPr lang="es-ES" sz="1600" b="1" dirty="0" err="1">
+                <a:solidFill>
+                  <a:schemeClr val="accent2">
+                    <a:lumMod val="50000"/>
+                  </a:schemeClr>
+                </a:solidFill>
+              </a:rPr>
               <a:t>number_of_reviews_ltm</a:t>
             </a:r>
             <a:r>
-              <a:rPr lang="es-ES" sz="1600" b="1" dirty="0"/>
+              <a:rPr lang="es-ES" sz="1600" b="1" dirty="0">
+                <a:solidFill>
+                  <a:schemeClr val="accent2">
+                    <a:lumMod val="50000"/>
+                  </a:schemeClr>
+                </a:solidFill>
+              </a:rPr>
               <a:t>, </a:t>
             </a:r>
             <a:r>
-              <a:rPr lang="es-ES" sz="1600" b="1" dirty="0" err="1"/>
+              <a:rPr lang="es-ES" sz="1600" b="1" dirty="0" err="1">
+                <a:solidFill>
+                  <a:schemeClr val="accent2">
+                    <a:lumMod val="50000"/>
+                  </a:schemeClr>
+                </a:solidFill>
+              </a:rPr>
               <a:t>number_of_reviews_ly</a:t>
             </a:r>
             <a:r>
-              <a:rPr lang="es-ES" sz="1600" b="1" dirty="0"/>
+              <a:rPr lang="es-ES" sz="1600" b="1" dirty="0">
+                <a:solidFill>
+                  <a:schemeClr val="accent2">
+                    <a:lumMod val="50000"/>
+                  </a:schemeClr>
+                </a:solidFill>
+              </a:rPr>
               <a:t>, number_of_reviews_l30d, </a:t>
             </a:r>
             <a:r>
-              <a:rPr lang="es-ES" sz="1600" b="1" dirty="0" err="1"/>
+              <a:rPr lang="es-ES" sz="1600" b="1" dirty="0" err="1">
+                <a:solidFill>
+                  <a:schemeClr val="accent2">
+                    <a:lumMod val="50000"/>
+                  </a:schemeClr>
+                </a:solidFill>
+              </a:rPr>
               <a:t>reviews_per_month</a:t>
             </a:r>
             <a:r>
-              <a:rPr lang="es-ES" sz="1600" b="1" dirty="0"/>
+              <a:rPr lang="es-ES" sz="1600" b="1" dirty="0">
+                <a:solidFill>
+                  <a:schemeClr val="accent2">
+                    <a:lumMod val="50000"/>
+                  </a:schemeClr>
+                </a:solidFill>
+              </a:rPr>
               <a:t>, </a:t>
             </a:r>
             <a:r>
-              <a:rPr lang="es-ES" sz="1600" b="1" dirty="0" err="1"/>
+              <a:rPr lang="es-ES" sz="1600" b="1" dirty="0" err="1">
+                <a:solidFill>
+                  <a:schemeClr val="accent2">
+                    <a:lumMod val="50000"/>
+                  </a:schemeClr>
+                </a:solidFill>
+              </a:rPr>
               <a:t>number_of_reviews</a:t>
             </a:r>
             <a:r>
-              <a:rPr lang="es-ES" sz="1600" dirty="0"/>
+              <a:rPr lang="es-ES" sz="1600" dirty="0">
+                <a:solidFill>
+                  <a:schemeClr val="accent2">
+                    <a:lumMod val="50000"/>
+                  </a:schemeClr>
+                </a:solidFill>
+              </a:rPr>
               <a:t>).</a:t>
             </a:r>
           </a:p>
           <a:p>
-            <a:endParaRPr lang="es-ES" sz="1600" dirty="0"/>
-          </a:p>
-          <a:p>
-            <a:r>
-              <a:rPr lang="es-ES" sz="1600" dirty="0"/>
+            <a:pPr algn="just"/>
+            <a:endParaRPr lang="es-ES" sz="1600" dirty="0">
+              <a:solidFill>
+                <a:schemeClr val="accent2">
+                  <a:lumMod val="50000"/>
+                </a:schemeClr>
+              </a:solidFill>
+            </a:endParaRPr>
+          </a:p>
+          <a:p>
+            <a:pPr algn="just"/>
+            <a:r>
+              <a:rPr lang="es-ES" sz="1600" dirty="0">
+                <a:solidFill>
+                  <a:schemeClr val="accent2">
+                    <a:lumMod val="50000"/>
+                  </a:schemeClr>
+                </a:solidFill>
+              </a:rPr>
               <a:t>Estas variables presentan las correlaciones más elevadas con el </a:t>
             </a:r>
             <a:r>
-              <a:rPr lang="es-ES" sz="1600" dirty="0" err="1"/>
+              <a:rPr lang="es-ES" sz="1600" dirty="0" err="1">
+                <a:solidFill>
+                  <a:schemeClr val="accent2">
+                    <a:lumMod val="50000"/>
+                  </a:schemeClr>
+                </a:solidFill>
+              </a:rPr>
               <a:t>revenue</a:t>
             </a:r>
             <a:r>
-              <a:rPr lang="es-ES" sz="1600" dirty="0"/>
+              <a:rPr lang="es-ES" sz="1600" dirty="0">
+                <a:solidFill>
+                  <a:schemeClr val="accent2">
+                    <a:lumMod val="50000"/>
+                  </a:schemeClr>
+                </a:solidFill>
+              </a:rPr>
               <a:t> log-transformado, lo que sugiere que la intensidad de uso del alojamiento y su nivel de actividad están fuertemente vinculados con los ingresos generados.</a:t>
             </a:r>
           </a:p>
           <a:p>
-            <a:endParaRPr lang="es-ES" sz="1600" dirty="0"/>
-          </a:p>
-          <a:p>
-            <a:r>
-              <a:rPr lang="es-ES" sz="1600" dirty="0"/>
+            <a:pPr algn="just"/>
+            <a:endParaRPr lang="es-ES" sz="1600" dirty="0">
+              <a:solidFill>
+                <a:schemeClr val="accent2">
+                  <a:lumMod val="50000"/>
+                </a:schemeClr>
+              </a:solidFill>
+            </a:endParaRPr>
+          </a:p>
+          <a:p>
+            <a:pPr algn="just"/>
+            <a:r>
+              <a:rPr lang="es-ES" sz="1600" dirty="0">
+                <a:solidFill>
+                  <a:schemeClr val="accent2">
+                    <a:lumMod val="50000"/>
+                  </a:schemeClr>
+                </a:solidFill>
+              </a:rPr>
               <a:t>Por otro lado, las variables estructurales del alojamiento (como capacidad o características físicas) muestran una correlación moderada, indicando que influyen en el </a:t>
             </a:r>
             <a:r>
-              <a:rPr lang="es-ES" sz="1600" dirty="0" err="1"/>
+              <a:rPr lang="es-ES" sz="1600" dirty="0" err="1">
+                <a:solidFill>
+                  <a:schemeClr val="accent2">
+                    <a:lumMod val="50000"/>
+                  </a:schemeClr>
+                </a:solidFill>
+              </a:rPr>
               <a:t>revenue</a:t>
             </a:r>
             <a:r>
-              <a:rPr lang="es-ES" sz="1600" dirty="0"/>
+              <a:rPr lang="es-ES" sz="1600" dirty="0">
+                <a:solidFill>
+                  <a:schemeClr val="accent2">
+                    <a:lumMod val="50000"/>
+                  </a:schemeClr>
+                </a:solidFill>
+              </a:rPr>
               <a:t>, aunque en menor medida que las variables de actividad.</a:t>
             </a:r>
           </a:p>
           <a:p>
-            <a:endParaRPr lang="es-ES" sz="1600" dirty="0"/>
-          </a:p>
-          <a:p>
-            <a:r>
-              <a:rPr lang="es-ES" sz="1600" dirty="0"/>
+            <a:pPr algn="just"/>
+            <a:endParaRPr lang="es-ES" sz="1600" dirty="0">
+              <a:solidFill>
+                <a:schemeClr val="accent2">
+                  <a:lumMod val="50000"/>
+                </a:schemeClr>
+              </a:solidFill>
+            </a:endParaRPr>
+          </a:p>
+          <a:p>
+            <a:pPr algn="just"/>
+            <a:r>
+              <a:rPr lang="es-ES" sz="1600" dirty="0">
+                <a:solidFill>
+                  <a:schemeClr val="accent2">
+                    <a:lumMod val="50000"/>
+                  </a:schemeClr>
+                </a:solidFill>
+              </a:rPr>
               <a:t>Finalmente, las variables relacionadas con restricciones de estancia (bloque de “</a:t>
             </a:r>
             <a:r>
-              <a:rPr lang="es-ES" sz="1600" b="1" dirty="0" err="1"/>
+              <a:rPr lang="es-ES" sz="1600" b="1" dirty="0" err="1">
+                <a:solidFill>
+                  <a:schemeClr val="accent2">
+                    <a:lumMod val="50000"/>
+                  </a:schemeClr>
+                </a:solidFill>
+              </a:rPr>
               <a:t>nights</a:t>
             </a:r>
             <a:r>
-              <a:rPr lang="es-ES" sz="1600" dirty="0"/>
+              <a:rPr lang="es-ES" sz="1600" dirty="0">
+                <a:solidFill>
+                  <a:schemeClr val="accent2">
+                    <a:lumMod val="50000"/>
+                  </a:schemeClr>
+                </a:solidFill>
+              </a:rPr>
               <a:t>”) presentan una relación más débil y potencialmente redundante entre sí, por lo que será necesario evaluar su posible reducción para evitar problemas de multicolinealidad en modelos posteriores.</a:t>
             </a:r>
           </a:p>
         </p:txBody>
       </p:sp>
+      <p:pic>
+        <p:nvPicPr>
+          <p:cNvPr id="6" name="Imagen 20">
+            <a:hlinkClick r:id="rId2" action="ppaction://hlinksldjump"/>
+            <a:extLst>
+              <a:ext uri="{FF2B5EF4-FFF2-40B4-BE49-F238E27FC236}">
+                <a16:creationId xmlns:a16="http://schemas.microsoft.com/office/drawing/2014/main" id="{73797E09-C69C-467A-A7EF-1AE3739D76A4}"/>
+              </a:ext>
+            </a:extLst>
+          </p:cNvPr>
+          <p:cNvPicPr/>
+          <p:nvPr/>
+        </p:nvPicPr>
+        <p:blipFill>
+          <a:blip r:embed="rId3"/>
+          <a:stretch/>
+        </p:blipFill>
+        <p:spPr>
+          <a:xfrm>
+            <a:off x="10706465" y="347264"/>
+            <a:ext cx="1220995" cy="664372"/>
+          </a:xfrm>
+          <a:prstGeom prst="rect">
+            <a:avLst/>
+          </a:prstGeom>
+          <a:ln w="0">
+            <a:noFill/>
+          </a:ln>
+        </p:spPr>
+      </p:pic>
     </p:spTree>
     <p:extLst>
       <p:ext uri="{BB962C8B-B14F-4D97-AF65-F5344CB8AC3E}">
@@ -12897,7 +15185,7 @@
               <a:t>EDA – </a:t>
             </a:r>
             <a:r>
-              <a:rPr lang="es-ES" sz="3500" b="1" spc="-1" dirty="0">
+              <a:rPr lang="es-ES" sz="3000" b="1" spc="-1" dirty="0">
                 <a:solidFill>
                   <a:srgbClr val="582808"/>
                 </a:solidFill>
@@ -12905,7 +15193,7 @@
               </a:rPr>
               <a:t>Análisis de las variables categóricas</a:t>
             </a:r>
-            <a:endParaRPr lang="es-ES" sz="3500" b="0" strike="noStrike" spc="-1" dirty="0">
+            <a:endParaRPr lang="es-ES" sz="3000" b="0" strike="noStrike" spc="-1" dirty="0">
               <a:solidFill>
                 <a:srgbClr val="000000"/>
               </a:solidFill>
@@ -12914,35 +15202,6 @@
           </a:p>
         </p:txBody>
       </p:sp>
-      <p:pic>
-        <p:nvPicPr>
-          <p:cNvPr id="72" name="Imagen 7">
-            <a:extLst>
-              <a:ext uri="{FF2B5EF4-FFF2-40B4-BE49-F238E27FC236}">
-                <a16:creationId xmlns:a16="http://schemas.microsoft.com/office/drawing/2014/main" id="{5D01CF4C-F84E-49F7-49D0-9B8E11B09695}"/>
-              </a:ext>
-            </a:extLst>
-          </p:cNvPr>
-          <p:cNvPicPr/>
-          <p:nvPr/>
-        </p:nvPicPr>
-        <p:blipFill>
-          <a:blip r:embed="rId2"/>
-          <a:stretch/>
-        </p:blipFill>
-        <p:spPr>
-          <a:xfrm>
-            <a:off x="10348920" y="479520"/>
-            <a:ext cx="1314000" cy="987840"/>
-          </a:xfrm>
-          <a:prstGeom prst="rect">
-            <a:avLst/>
-          </a:prstGeom>
-          <a:ln w="0">
-            <a:noFill/>
-          </a:ln>
-        </p:spPr>
-      </p:pic>
       <p:sp>
         <p:nvSpPr>
           <p:cNvPr id="2" name="CuadroTexto 1">
@@ -12972,33 +15231,75 @@
           <a:lstStyle/>
           <a:p>
             <a:r>
-              <a:rPr lang="es-ES" sz="1600" dirty="0"/>
+              <a:rPr lang="es-ES" sz="1600" dirty="0">
+                <a:solidFill>
+                  <a:schemeClr val="accent2">
+                    <a:lumMod val="50000"/>
+                  </a:schemeClr>
+                </a:solidFill>
+              </a:rPr>
               <a:t>Tras el análisis univariante de las variables categóricas, se ha optado por seleccionar únicamente aquellas con baja o moderada cardinalidad y potencial capacidad explicativa respecto a la variable objetivo.</a:t>
             </a:r>
           </a:p>
           <a:p>
-            <a:endParaRPr lang="es-ES" sz="1600" dirty="0"/>
-          </a:p>
-          <a:p>
-            <a:r>
-              <a:rPr lang="es-ES" sz="1600" dirty="0"/>
+            <a:endParaRPr lang="es-ES" sz="1600" dirty="0">
+              <a:solidFill>
+                <a:schemeClr val="accent2">
+                  <a:lumMod val="50000"/>
+                </a:schemeClr>
+              </a:solidFill>
+            </a:endParaRPr>
+          </a:p>
+          <a:p>
+            <a:r>
+              <a:rPr lang="es-ES" sz="1600" dirty="0">
+                <a:solidFill>
+                  <a:schemeClr val="accent2">
+                    <a:lumMod val="50000"/>
+                  </a:schemeClr>
+                </a:solidFill>
+              </a:rPr>
               <a:t>Se descartan variables de texto libre, fechas técnicas o identificadores, así como aquellas con excesivo número de categorías que podrían generar un alto número de variables </a:t>
             </a:r>
             <a:r>
-              <a:rPr lang="es-ES" sz="1600" dirty="0" err="1"/>
+              <a:rPr lang="es-ES" sz="1600" dirty="0" err="1">
+                <a:solidFill>
+                  <a:schemeClr val="accent2">
+                    <a:lumMod val="50000"/>
+                  </a:schemeClr>
+                </a:solidFill>
+              </a:rPr>
               <a:t>dummy</a:t>
             </a:r>
             <a:r>
-              <a:rPr lang="es-ES" sz="1600" dirty="0"/>
+              <a:rPr lang="es-ES" sz="1600" dirty="0">
+                <a:solidFill>
+                  <a:schemeClr val="accent2">
+                    <a:lumMod val="50000"/>
+                  </a:schemeClr>
+                </a:solidFill>
+              </a:rPr>
               <a:t> y aumentar innecesariamente la complejidad del modelo.</a:t>
             </a:r>
           </a:p>
           <a:p>
-            <a:endParaRPr lang="es-ES" sz="1600" dirty="0"/>
-          </a:p>
-          <a:p>
-            <a:r>
-              <a:rPr lang="es-ES" sz="1600" dirty="0"/>
+            <a:endParaRPr lang="es-ES" sz="1600" dirty="0">
+              <a:solidFill>
+                <a:schemeClr val="accent2">
+                  <a:lumMod val="50000"/>
+                </a:schemeClr>
+              </a:solidFill>
+            </a:endParaRPr>
+          </a:p>
+          <a:p>
+            <a:r>
+              <a:rPr lang="es-ES" sz="1600" dirty="0">
+                <a:solidFill>
+                  <a:schemeClr val="accent2">
+                    <a:lumMod val="50000"/>
+                  </a:schemeClr>
+                </a:solidFill>
+              </a:rPr>
               <a:t>Las variables seleccionadas presentan una estructura interpretable, categorías bien definidas y relevancia conceptual en el contexto del negocio (tipo de alojamiento, características del anfitrión y disponibilidad), lo que las convierte en candidatas adecuadas para el análisis bivariante y su posible inclusión en modelos predictivos posteriores.</a:t>
             </a:r>
           </a:p>
@@ -13019,19 +15320,49 @@
           <p:nvPr/>
         </p:nvPicPr>
         <p:blipFill>
-          <a:blip r:embed="rId3"/>
+          <a:blip r:embed="rId2"/>
           <a:stretch>
             <a:fillRect/>
           </a:stretch>
         </p:blipFill>
         <p:spPr>
           <a:xfrm>
-            <a:off x="6215570" y="1648945"/>
-            <a:ext cx="5284280" cy="4405720"/>
+            <a:off x="6215570" y="1530350"/>
+            <a:ext cx="5284280" cy="4524315"/>
           </a:xfrm>
           <a:prstGeom prst="rect">
             <a:avLst/>
           </a:prstGeom>
+        </p:spPr>
+      </p:pic>
+      <p:pic>
+        <p:nvPicPr>
+          <p:cNvPr id="7" name="Imagen 20">
+            <a:hlinkClick r:id="rId3" action="ppaction://hlinksldjump"/>
+            <a:extLst>
+              <a:ext uri="{FF2B5EF4-FFF2-40B4-BE49-F238E27FC236}">
+                <a16:creationId xmlns:a16="http://schemas.microsoft.com/office/drawing/2014/main" id="{D1E1C61D-5A00-4393-8420-E224C4398F02}"/>
+              </a:ext>
+            </a:extLst>
+          </p:cNvPr>
+          <p:cNvPicPr/>
+          <p:nvPr/>
+        </p:nvPicPr>
+        <p:blipFill>
+          <a:blip r:embed="rId4"/>
+          <a:stretch/>
+        </p:blipFill>
+        <p:spPr>
+          <a:xfrm>
+            <a:off x="10706465" y="347264"/>
+            <a:ext cx="1220995" cy="664372"/>
+          </a:xfrm>
+          <a:prstGeom prst="rect">
+            <a:avLst/>
+          </a:prstGeom>
+          <a:ln w="0">
+            <a:noFill/>
+          </a:ln>
         </p:spPr>
       </p:pic>
     </p:spTree>
@@ -13189,7 +15520,7 @@
               <a:t>EDA – </a:t>
             </a:r>
             <a:r>
-              <a:rPr lang="es-ES" sz="3500" b="1" spc="-1" dirty="0">
+              <a:rPr lang="es-ES" sz="3000" b="1" spc="-1" dirty="0">
                 <a:solidFill>
                   <a:srgbClr val="582808"/>
                 </a:solidFill>
@@ -13197,7 +15528,7 @@
               </a:rPr>
               <a:t>Análisis de las variables categóricas</a:t>
             </a:r>
-            <a:endParaRPr lang="es-ES" sz="3500" b="0" strike="noStrike" spc="-1" dirty="0">
+            <a:endParaRPr lang="es-ES" sz="3000" b="0" strike="noStrike" spc="-1" dirty="0">
               <a:solidFill>
                 <a:srgbClr val="000000"/>
               </a:solidFill>
@@ -13206,35 +15537,6 @@
           </a:p>
         </p:txBody>
       </p:sp>
-      <p:pic>
-        <p:nvPicPr>
-          <p:cNvPr id="72" name="Imagen 7">
-            <a:extLst>
-              <a:ext uri="{FF2B5EF4-FFF2-40B4-BE49-F238E27FC236}">
-                <a16:creationId xmlns:a16="http://schemas.microsoft.com/office/drawing/2014/main" id="{78C1F89B-9138-11C5-29F5-5083C02EFFF5}"/>
-              </a:ext>
-            </a:extLst>
-          </p:cNvPr>
-          <p:cNvPicPr/>
-          <p:nvPr/>
-        </p:nvPicPr>
-        <p:blipFill>
-          <a:blip r:embed="rId2"/>
-          <a:stretch/>
-        </p:blipFill>
-        <p:spPr>
-          <a:xfrm>
-            <a:off x="10348920" y="479520"/>
-            <a:ext cx="1314000" cy="987840"/>
-          </a:xfrm>
-          <a:prstGeom prst="rect">
-            <a:avLst/>
-          </a:prstGeom>
-          <a:ln w="0">
-            <a:noFill/>
-          </a:ln>
-        </p:spPr>
-      </p:pic>
       <p:sp>
         <p:nvSpPr>
           <p:cNvPr id="2" name="CuadroTexto 1">
@@ -13249,7 +15551,7 @@
         </p:nvSpPr>
         <p:spPr>
           <a:xfrm>
-            <a:off x="692150" y="1530350"/>
+            <a:off x="692150" y="1588528"/>
             <a:ext cx="10970770" cy="4278094"/>
           </a:xfrm>
           <a:prstGeom prst="rect">
@@ -13263,157 +15565,412 @@
           </a:bodyPr>
           <a:lstStyle/>
           <a:p>
-            <a:r>
-              <a:rPr lang="es-ES" sz="1600" dirty="0"/>
+            <a:pPr algn="just"/>
+            <a:r>
+              <a:rPr lang="es-ES" sz="1600" dirty="0">
+                <a:solidFill>
+                  <a:schemeClr val="accent2">
+                    <a:lumMod val="50000"/>
+                  </a:schemeClr>
+                </a:solidFill>
+              </a:rPr>
               <a:t>En el análisis bivariante de variables categóricas se observan diferencias claras en la distribución del </a:t>
             </a:r>
             <a:r>
-              <a:rPr lang="es-ES" sz="1600" dirty="0" err="1"/>
+              <a:rPr lang="es-ES" sz="1600" dirty="0" err="1">
+                <a:solidFill>
+                  <a:schemeClr val="accent2">
+                    <a:lumMod val="50000"/>
+                  </a:schemeClr>
+                </a:solidFill>
+              </a:rPr>
               <a:t>revenue</a:t>
             </a:r>
             <a:r>
-              <a:rPr lang="es-ES" sz="1600" dirty="0"/>
+              <a:rPr lang="es-ES" sz="1600" dirty="0">
+                <a:solidFill>
+                  <a:schemeClr val="accent2">
+                    <a:lumMod val="50000"/>
+                  </a:schemeClr>
+                </a:solidFill>
+              </a:rPr>
               <a:t> según ciertas categorías.</a:t>
             </a:r>
           </a:p>
           <a:p>
-            <a:endParaRPr lang="es-ES" sz="1600" dirty="0"/>
-          </a:p>
-          <a:p>
-            <a:r>
-              <a:rPr lang="es-ES" sz="1600" dirty="0"/>
+            <a:pPr algn="just"/>
+            <a:endParaRPr lang="es-ES" sz="1600" dirty="0">
+              <a:solidFill>
+                <a:schemeClr val="accent2">
+                  <a:lumMod val="50000"/>
+                </a:schemeClr>
+              </a:solidFill>
+            </a:endParaRPr>
+          </a:p>
+          <a:p>
+            <a:pPr algn="just"/>
+            <a:r>
+              <a:rPr lang="es-ES" sz="1600" dirty="0">
+                <a:solidFill>
+                  <a:schemeClr val="accent2">
+                    <a:lumMod val="50000"/>
+                  </a:schemeClr>
+                </a:solidFill>
+              </a:rPr>
               <a:t>En esta fase se ha realizado un preprocesamiento específico de algunas variables categóricas con el objetivo de prepararlas para el modelado.</a:t>
             </a:r>
           </a:p>
           <a:p>
-            <a:endParaRPr lang="es-ES" sz="1600" dirty="0"/>
-          </a:p>
-          <a:p>
-            <a:r>
-              <a:rPr lang="es-ES" sz="1600" dirty="0"/>
+            <a:pPr algn="just"/>
+            <a:endParaRPr lang="es-ES" sz="1600" dirty="0">
+              <a:solidFill>
+                <a:schemeClr val="accent2">
+                  <a:lumMod val="50000"/>
+                </a:schemeClr>
+              </a:solidFill>
+            </a:endParaRPr>
+          </a:p>
+          <a:p>
+            <a:pPr algn="just"/>
+            <a:r>
+              <a:rPr lang="es-ES" sz="1600" dirty="0">
+                <a:solidFill>
+                  <a:schemeClr val="accent2">
+                    <a:lumMod val="50000"/>
+                  </a:schemeClr>
+                </a:solidFill>
+              </a:rPr>
               <a:t>En primer lugar, la variable </a:t>
             </a:r>
             <a:r>
-              <a:rPr lang="es-ES" sz="1600" b="1" dirty="0" err="1"/>
+              <a:rPr lang="es-ES" sz="1600" b="1" dirty="0" err="1">
+                <a:solidFill>
+                  <a:schemeClr val="accent2">
+                    <a:lumMod val="50000"/>
+                  </a:schemeClr>
+                </a:solidFill>
+              </a:rPr>
               <a:t>host_response_time</a:t>
             </a:r>
             <a:r>
-              <a:rPr lang="es-ES" sz="1600" dirty="0"/>
+              <a:rPr lang="es-ES" sz="1600" dirty="0">
+                <a:solidFill>
+                  <a:schemeClr val="accent2">
+                    <a:lumMod val="50000"/>
+                  </a:schemeClr>
+                </a:solidFill>
+              </a:rPr>
               <a:t>, que posee un orden natural en sus categorías, ha sido transformada en una variable ordinal numérica. Esta codificación permite preservar la jerarquía implícita en el tiempo de respuesta del anfitrión (desde respuestas más rápidas hasta más lentas), facilitando que los modelos puedan capturar mejor su posible relación con el </a:t>
             </a:r>
             <a:r>
-              <a:rPr lang="es-ES" sz="1600" dirty="0" err="1"/>
+              <a:rPr lang="es-ES" sz="1600" dirty="0" err="1">
+                <a:solidFill>
+                  <a:schemeClr val="accent2">
+                    <a:lumMod val="50000"/>
+                  </a:schemeClr>
+                </a:solidFill>
+              </a:rPr>
               <a:t>revenue</a:t>
             </a:r>
             <a:r>
-              <a:rPr lang="es-ES" sz="1600" dirty="0"/>
+              <a:rPr lang="es-ES" sz="1600" dirty="0">
+                <a:solidFill>
+                  <a:schemeClr val="accent2">
+                    <a:lumMod val="50000"/>
+                  </a:schemeClr>
+                </a:solidFill>
+              </a:rPr>
               <a:t>.</a:t>
             </a:r>
           </a:p>
           <a:p>
-            <a:endParaRPr lang="es-ES" sz="1600" dirty="0"/>
-          </a:p>
-          <a:p>
-            <a:r>
-              <a:rPr lang="es-ES" sz="1600" dirty="0"/>
+            <a:pPr algn="just"/>
+            <a:endParaRPr lang="es-ES" sz="1600" dirty="0">
+              <a:solidFill>
+                <a:schemeClr val="accent2">
+                  <a:lumMod val="50000"/>
+                </a:schemeClr>
+              </a:solidFill>
+            </a:endParaRPr>
+          </a:p>
+          <a:p>
+            <a:pPr algn="just"/>
+            <a:r>
+              <a:rPr lang="es-ES" sz="1600" dirty="0">
+                <a:solidFill>
+                  <a:schemeClr val="accent2">
+                    <a:lumMod val="50000"/>
+                  </a:schemeClr>
+                </a:solidFill>
+              </a:rPr>
               <a:t>Por otro lado, se ha simplificado la variable </a:t>
             </a:r>
             <a:r>
-              <a:rPr lang="es-ES" sz="1600" b="1" dirty="0" err="1"/>
+              <a:rPr lang="es-ES" sz="1600" b="1" dirty="0" err="1">
+                <a:solidFill>
+                  <a:schemeClr val="accent2">
+                    <a:lumMod val="50000"/>
+                  </a:schemeClr>
+                </a:solidFill>
+              </a:rPr>
               <a:t>room_type</a:t>
             </a:r>
             <a:r>
-              <a:rPr lang="es-ES" sz="1600" dirty="0"/>
+              <a:rPr lang="es-ES" sz="1600" dirty="0">
+                <a:solidFill>
+                  <a:schemeClr val="accent2">
+                    <a:lumMod val="50000"/>
+                  </a:schemeClr>
+                </a:solidFill>
+              </a:rPr>
               <a:t>, agrupando las categorías con muy baja representación ("</a:t>
             </a:r>
             <a:r>
-              <a:rPr lang="es-ES" sz="1600" dirty="0" err="1"/>
+              <a:rPr lang="es-ES" sz="1600" dirty="0" err="1">
+                <a:solidFill>
+                  <a:schemeClr val="accent2">
+                    <a:lumMod val="50000"/>
+                  </a:schemeClr>
+                </a:solidFill>
+              </a:rPr>
               <a:t>Shared</a:t>
             </a:r>
             <a:r>
-              <a:rPr lang="es-ES" sz="1600" dirty="0"/>
+              <a:rPr lang="es-ES" sz="1600" dirty="0">
+                <a:solidFill>
+                  <a:schemeClr val="accent2">
+                    <a:lumMod val="50000"/>
+                  </a:schemeClr>
+                </a:solidFill>
+              </a:rPr>
               <a:t> </a:t>
             </a:r>
             <a:r>
-              <a:rPr lang="es-ES" sz="1600" dirty="0" err="1"/>
+              <a:rPr lang="es-ES" sz="1600" dirty="0" err="1">
+                <a:solidFill>
+                  <a:schemeClr val="accent2">
+                    <a:lumMod val="50000"/>
+                  </a:schemeClr>
+                </a:solidFill>
+              </a:rPr>
               <a:t>room</a:t>
             </a:r>
             <a:r>
-              <a:rPr lang="es-ES" sz="1600" dirty="0"/>
+              <a:rPr lang="es-ES" sz="1600" dirty="0">
+                <a:solidFill>
+                  <a:schemeClr val="accent2">
+                    <a:lumMod val="50000"/>
+                  </a:schemeClr>
+                </a:solidFill>
+              </a:rPr>
               <a:t>" y "Hotel </a:t>
             </a:r>
             <a:r>
-              <a:rPr lang="es-ES" sz="1600" dirty="0" err="1"/>
+              <a:rPr lang="es-ES" sz="1600" dirty="0" err="1">
+                <a:solidFill>
+                  <a:schemeClr val="accent2">
+                    <a:lumMod val="50000"/>
+                  </a:schemeClr>
+                </a:solidFill>
+              </a:rPr>
               <a:t>room</a:t>
             </a:r>
             <a:r>
-              <a:rPr lang="es-ES" sz="1600" dirty="0"/>
+              <a:rPr lang="es-ES" sz="1600" dirty="0">
+                <a:solidFill>
+                  <a:schemeClr val="accent2">
+                    <a:lumMod val="50000"/>
+                  </a:schemeClr>
+                </a:solidFill>
+              </a:rPr>
               <a:t>") bajo una nueva categoría común ("</a:t>
             </a:r>
             <a:r>
-              <a:rPr lang="es-ES" sz="1600" dirty="0" err="1"/>
+              <a:rPr lang="es-ES" sz="1600" dirty="0" err="1">
+                <a:solidFill>
+                  <a:schemeClr val="accent2">
+                    <a:lumMod val="50000"/>
+                  </a:schemeClr>
+                </a:solidFill>
+              </a:rPr>
               <a:t>Other</a:t>
             </a:r>
             <a:r>
-              <a:rPr lang="es-ES" sz="1600" dirty="0"/>
+              <a:rPr lang="es-ES" sz="1600" dirty="0">
+                <a:solidFill>
+                  <a:schemeClr val="accent2">
+                    <a:lumMod val="50000"/>
+                  </a:schemeClr>
+                </a:solidFill>
+              </a:rPr>
               <a:t>"). Esta decisión reduce la dispersión de información y evita que categorías con pocos registros introduzcan ruido en el modelo.</a:t>
             </a:r>
           </a:p>
           <a:p>
-            <a:endParaRPr lang="es-ES" sz="1600" dirty="0"/>
-          </a:p>
-          <a:p>
-            <a:r>
-              <a:rPr lang="es-ES" sz="1600" dirty="0"/>
+            <a:pPr algn="just"/>
+            <a:endParaRPr lang="es-ES" sz="1600" dirty="0">
+              <a:solidFill>
+                <a:schemeClr val="accent2">
+                  <a:lumMod val="50000"/>
+                </a:schemeClr>
+              </a:solidFill>
+            </a:endParaRPr>
+          </a:p>
+          <a:p>
+            <a:pPr algn="just"/>
+            <a:r>
+              <a:rPr lang="es-ES" sz="1600" dirty="0">
+                <a:solidFill>
+                  <a:schemeClr val="accent2">
+                    <a:lumMod val="50000"/>
+                  </a:schemeClr>
+                </a:solidFill>
+              </a:rPr>
               <a:t>Finalmente, en las variables binarias relacionadas con características del anfitrión (</a:t>
             </a:r>
             <a:r>
-              <a:rPr lang="es-ES" sz="1600" b="1" dirty="0" err="1"/>
+              <a:rPr lang="es-ES" sz="1600" b="1" dirty="0" err="1">
+                <a:solidFill>
+                  <a:schemeClr val="accent2">
+                    <a:lumMod val="50000"/>
+                  </a:schemeClr>
+                </a:solidFill>
+              </a:rPr>
               <a:t>host_is_superhost</a:t>
             </a:r>
             <a:r>
-              <a:rPr lang="es-ES" sz="1600" dirty="0"/>
+              <a:rPr lang="es-ES" sz="1600" dirty="0">
+                <a:solidFill>
+                  <a:schemeClr val="accent2">
+                    <a:lumMod val="50000"/>
+                  </a:schemeClr>
+                </a:solidFill>
+              </a:rPr>
               <a:t>, </a:t>
             </a:r>
             <a:r>
-              <a:rPr lang="es-ES" sz="1600" b="1" dirty="0" err="1"/>
+              <a:rPr lang="es-ES" sz="1600" b="1" dirty="0" err="1">
+                <a:solidFill>
+                  <a:schemeClr val="accent2">
+                    <a:lumMod val="50000"/>
+                  </a:schemeClr>
+                </a:solidFill>
+              </a:rPr>
               <a:t>host_identity_verified</a:t>
             </a:r>
             <a:r>
-              <a:rPr lang="es-ES" sz="1600" dirty="0"/>
+              <a:rPr lang="es-ES" sz="1600" dirty="0">
+                <a:solidFill>
+                  <a:schemeClr val="accent2">
+                    <a:lumMod val="50000"/>
+                  </a:schemeClr>
+                </a:solidFill>
+              </a:rPr>
               <a:t>, </a:t>
             </a:r>
             <a:r>
-              <a:rPr lang="es-ES" sz="1600" b="1" dirty="0" err="1"/>
+              <a:rPr lang="es-ES" sz="1600" b="1" dirty="0" err="1">
+                <a:solidFill>
+                  <a:schemeClr val="accent2">
+                    <a:lumMod val="50000"/>
+                  </a:schemeClr>
+                </a:solidFill>
+              </a:rPr>
               <a:t>host_has_profile_pic</a:t>
             </a:r>
             <a:r>
-              <a:rPr lang="es-ES" sz="1600" b="1" dirty="0"/>
+              <a:rPr lang="es-ES" sz="1600" b="1" dirty="0">
+                <a:solidFill>
+                  <a:schemeClr val="accent2">
+                    <a:lumMod val="50000"/>
+                  </a:schemeClr>
+                </a:solidFill>
+              </a:rPr>
               <a:t> </a:t>
             </a:r>
             <a:r>
-              <a:rPr lang="es-ES" sz="1600" dirty="0"/>
+              <a:rPr lang="es-ES" sz="1600" dirty="0">
+                <a:solidFill>
+                  <a:schemeClr val="accent2">
+                    <a:lumMod val="50000"/>
+                  </a:schemeClr>
+                </a:solidFill>
+              </a:rPr>
               <a:t>e </a:t>
             </a:r>
             <a:r>
-              <a:rPr lang="es-ES" sz="1600" b="1" dirty="0" err="1"/>
+              <a:rPr lang="es-ES" sz="1600" b="1" dirty="0" err="1">
+                <a:solidFill>
+                  <a:schemeClr val="accent2">
+                    <a:lumMod val="50000"/>
+                  </a:schemeClr>
+                </a:solidFill>
+              </a:rPr>
               <a:t>instant_bookable</a:t>
             </a:r>
             <a:r>
-              <a:rPr lang="es-ES" sz="1600" dirty="0"/>
+              <a:rPr lang="es-ES" sz="1600" dirty="0">
+                <a:solidFill>
+                  <a:schemeClr val="accent2">
+                    <a:lumMod val="50000"/>
+                  </a:schemeClr>
+                </a:solidFill>
+              </a:rPr>
               <a:t>), se han imputado los valores faltantes con la categoría "</a:t>
             </a:r>
             <a:r>
-              <a:rPr lang="es-ES" sz="1600" dirty="0" err="1"/>
+              <a:rPr lang="es-ES" sz="1600" dirty="0" err="1">
+                <a:solidFill>
+                  <a:schemeClr val="accent2">
+                    <a:lumMod val="50000"/>
+                  </a:schemeClr>
+                </a:solidFill>
+              </a:rPr>
               <a:t>Unknown</a:t>
             </a:r>
             <a:r>
-              <a:rPr lang="es-ES" sz="1600" dirty="0"/>
+              <a:rPr lang="es-ES" sz="1600" dirty="0">
+                <a:solidFill>
+                  <a:schemeClr val="accent2">
+                    <a:lumMod val="50000"/>
+                  </a:schemeClr>
+                </a:solidFill>
+              </a:rPr>
               <a:t>", evitando la pérdida de observaciones y manteniendo la coherencia categórica para su posterior codificación.</a:t>
             </a:r>
           </a:p>
         </p:txBody>
       </p:sp>
+      <p:pic>
+        <p:nvPicPr>
+          <p:cNvPr id="6" name="Imagen 20">
+            <a:hlinkClick r:id="rId2" action="ppaction://hlinksldjump"/>
+            <a:extLst>
+              <a:ext uri="{FF2B5EF4-FFF2-40B4-BE49-F238E27FC236}">
+                <a16:creationId xmlns:a16="http://schemas.microsoft.com/office/drawing/2014/main" id="{ADE4AD4C-53FB-4BA7-BDA3-9AAEB0FD6C7C}"/>
+              </a:ext>
+            </a:extLst>
+          </p:cNvPr>
+          <p:cNvPicPr/>
+          <p:nvPr/>
+        </p:nvPicPr>
+        <p:blipFill>
+          <a:blip r:embed="rId3"/>
+          <a:stretch/>
+        </p:blipFill>
+        <p:spPr>
+          <a:xfrm>
+            <a:off x="10706465" y="347264"/>
+            <a:ext cx="1220995" cy="664372"/>
+          </a:xfrm>
+          <a:prstGeom prst="rect">
+            <a:avLst/>
+          </a:prstGeom>
+          <a:ln w="0">
+            <a:noFill/>
+          </a:ln>
+        </p:spPr>
+      </p:pic>
     </p:spTree>
     <p:extLst>
       <p:ext uri="{BB962C8B-B14F-4D97-AF65-F5344CB8AC3E}">
@@ -13566,19 +16123,28 @@
                 </a:solidFill>
                 <a:latin typeface="Calibri Light"/>
               </a:rPr>
-              <a:t>EDA – Eliminación de </a:t>
-            </a:r>
-            <a:r>
-              <a:rPr lang="es-ES" sz="3500" b="1" strike="noStrike" spc="-1" dirty="0" err="1">
+              <a:t>EDA – </a:t>
+            </a:r>
+            <a:r>
+              <a:rPr lang="es-ES" sz="3000" b="1" strike="noStrike" spc="-1" dirty="0">
                 <a:solidFill>
                   <a:srgbClr val="582808"/>
                 </a:solidFill>
                 <a:latin typeface="Calibri Light"/>
               </a:rPr>
+              <a:t>Eliminación de </a:t>
+            </a:r>
+            <a:r>
+              <a:rPr lang="es-ES" sz="3000" b="1" strike="noStrike" spc="-1" dirty="0" err="1">
+                <a:solidFill>
+                  <a:srgbClr val="582808"/>
+                </a:solidFill>
+                <a:latin typeface="Calibri Light"/>
+              </a:rPr>
               <a:t>features</a:t>
             </a:r>
             <a:r>
-              <a:rPr lang="es-ES" sz="3500" b="1" strike="noStrike" spc="-1" dirty="0">
+              <a:rPr lang="es-ES" sz="3000" b="1" strike="noStrike" spc="-1" dirty="0">
                 <a:solidFill>
                   <a:srgbClr val="582808"/>
                 </a:solidFill>
@@ -13586,7 +16152,7 @@
               </a:rPr>
               <a:t> preliminar</a:t>
             </a:r>
-            <a:endParaRPr lang="es-ES" sz="3500" b="0" strike="noStrike" spc="-1" dirty="0">
+            <a:endParaRPr lang="es-ES" sz="3000" b="0" strike="noStrike" spc="-1" dirty="0">
               <a:solidFill>
                 <a:srgbClr val="000000"/>
               </a:solidFill>
@@ -13595,35 +16161,6 @@
           </a:p>
         </p:txBody>
       </p:sp>
-      <p:pic>
-        <p:nvPicPr>
-          <p:cNvPr id="72" name="Imagen 7">
-            <a:extLst>
-              <a:ext uri="{FF2B5EF4-FFF2-40B4-BE49-F238E27FC236}">
-                <a16:creationId xmlns:a16="http://schemas.microsoft.com/office/drawing/2014/main" id="{32115E20-24D2-A54E-B56F-78A09657232E}"/>
-              </a:ext>
-            </a:extLst>
-          </p:cNvPr>
-          <p:cNvPicPr/>
-          <p:nvPr/>
-        </p:nvPicPr>
-        <p:blipFill>
-          <a:blip r:embed="rId2"/>
-          <a:stretch/>
-        </p:blipFill>
-        <p:spPr>
-          <a:xfrm>
-            <a:off x="10348920" y="479520"/>
-            <a:ext cx="1314000" cy="987840"/>
-          </a:xfrm>
-          <a:prstGeom prst="rect">
-            <a:avLst/>
-          </a:prstGeom>
-          <a:ln w="0">
-            <a:noFill/>
-          </a:ln>
-        </p:spPr>
-      </p:pic>
       <p:sp>
         <p:nvSpPr>
           <p:cNvPr id="2" name="CuadroTexto 1">
@@ -13638,8 +16175,8 @@
         </p:nvSpPr>
         <p:spPr>
           <a:xfrm>
-            <a:off x="711200" y="1377950"/>
-            <a:ext cx="4330700" cy="4031873"/>
+            <a:off x="967885" y="1491156"/>
+            <a:ext cx="4647724" cy="4031873"/>
           </a:xfrm>
           <a:prstGeom prst="rect">
             <a:avLst/>
@@ -13652,17 +16189,38 @@
           </a:bodyPr>
           <a:lstStyle/>
           <a:p>
-            <a:r>
-              <a:rPr lang="es-ES" sz="1600" dirty="0"/>
+            <a:pPr algn="just"/>
+            <a:r>
+              <a:rPr lang="es-ES" sz="1600" dirty="0">
+                <a:solidFill>
+                  <a:schemeClr val="accent2">
+                    <a:lumMod val="50000"/>
+                  </a:schemeClr>
+                </a:solidFill>
+              </a:rPr>
               <a:t>En esta fase se realiza una depuración moderada del conjunto de variables con el objetivo de eliminar información no estructurada y posibles identificadores sin capacidad predictiva, manteniendo, no obstante, aquellas variables potencialmente redundantes que podrían aportar valor en modelos no lineales.</a:t>
             </a:r>
           </a:p>
           <a:p>
-            <a:endParaRPr lang="es-ES" sz="1600" dirty="0"/>
-          </a:p>
-          <a:p>
-            <a:r>
-              <a:rPr lang="es-ES" sz="1600" dirty="0"/>
+            <a:pPr algn="just"/>
+            <a:endParaRPr lang="es-ES" sz="1600" dirty="0">
+              <a:solidFill>
+                <a:schemeClr val="accent2">
+                  <a:lumMod val="50000"/>
+                </a:schemeClr>
+              </a:solidFill>
+            </a:endParaRPr>
+          </a:p>
+          <a:p>
+            <a:pPr algn="just"/>
+            <a:r>
+              <a:rPr lang="es-ES" sz="1600" dirty="0">
+                <a:solidFill>
+                  <a:schemeClr val="accent2">
+                    <a:lumMod val="50000"/>
+                  </a:schemeClr>
+                </a:solidFill>
+              </a:rPr>
               <a:t>Dado que el análisis contempla tanto modelos lineales como modelos basados en árboles, se opta por una estrategia intermedia: reducir variables claramente irrelevantes sin aplicar una eliminación excesivamente restrictiva, permitiendo posteriormente comparar el comportamiento de distintos algoritmos frente a posibles problemas de multicolinealidad.</a:t>
             </a:r>
           </a:p>
@@ -13683,7 +16241,7 @@
           <p:nvPr/>
         </p:nvPicPr>
         <p:blipFill>
-          <a:blip r:embed="rId3"/>
+          <a:blip r:embed="rId2"/>
           <a:srcRect l="2384" t="760" r="38563" b="5444"/>
           <a:stretch>
             <a:fillRect/>
@@ -13691,12 +16249,42 @@
         </p:blipFill>
         <p:spPr>
           <a:xfrm>
-            <a:off x="5472119" y="1377950"/>
-            <a:ext cx="4876801" cy="5137150"/>
+            <a:off x="6576392" y="1491156"/>
+            <a:ext cx="4647724" cy="4561895"/>
           </a:xfrm>
           <a:prstGeom prst="rect">
             <a:avLst/>
           </a:prstGeom>
+        </p:spPr>
+      </p:pic>
+      <p:pic>
+        <p:nvPicPr>
+          <p:cNvPr id="7" name="Imagen 20">
+            <a:hlinkClick r:id="rId3" action="ppaction://hlinksldjump"/>
+            <a:extLst>
+              <a:ext uri="{FF2B5EF4-FFF2-40B4-BE49-F238E27FC236}">
+                <a16:creationId xmlns:a16="http://schemas.microsoft.com/office/drawing/2014/main" id="{E320297C-7EFF-4334-B591-9F41616C18E5}"/>
+              </a:ext>
+            </a:extLst>
+          </p:cNvPr>
+          <p:cNvPicPr/>
+          <p:nvPr/>
+        </p:nvPicPr>
+        <p:blipFill>
+          <a:blip r:embed="rId4"/>
+          <a:stretch/>
+        </p:blipFill>
+        <p:spPr>
+          <a:xfrm>
+            <a:off x="10706465" y="347264"/>
+            <a:ext cx="1220995" cy="664372"/>
+          </a:xfrm>
+          <a:prstGeom prst="rect">
+            <a:avLst/>
+          </a:prstGeom>
+          <a:ln w="0">
+            <a:noFill/>
+          </a:ln>
         </p:spPr>
       </p:pic>
     </p:spTree>
@@ -13749,7 +16337,7 @@
         </p:nvSpPr>
         <p:spPr>
           <a:xfrm>
-            <a:off x="1080" y="0"/>
+            <a:off x="-180" y="1080"/>
             <a:ext cx="12191040" cy="6856920"/>
           </a:xfrm>
           <a:prstGeom prst="rect">
@@ -13811,7 +16399,7 @@
         <p:spPr>
           <a:xfrm>
             <a:off x="527760" y="479520"/>
-            <a:ext cx="11135160" cy="623160"/>
+            <a:ext cx="11135160" cy="629488"/>
           </a:xfrm>
           <a:prstGeom prst="rect">
             <a:avLst/>
@@ -13845,15 +16433,51 @@
               </a:lnSpc>
             </a:pPr>
             <a:r>
-              <a:rPr lang="es-ES" sz="3500" b="1" strike="noStrike" spc="-1">
+              <a:rPr lang="es-ES" sz="3500" b="1" strike="noStrike" spc="-1" dirty="0">
                 <a:solidFill>
                   <a:srgbClr val="582808"/>
                 </a:solidFill>
                 <a:latin typeface="Calibri Light"/>
               </a:rPr>
-              <a:t>EDA – Duplicados, missings y outliers (JAVI)</a:t>
-            </a:r>
-            <a:endParaRPr lang="es-ES" sz="3500" b="0" strike="noStrike" spc="-1">
+              <a:t>EDA – </a:t>
+            </a:r>
+            <a:r>
+              <a:rPr lang="es-ES" sz="3000" b="1" strike="noStrike" spc="-1" dirty="0">
+                <a:solidFill>
+                  <a:srgbClr val="582808"/>
+                </a:solidFill>
+                <a:latin typeface="Calibri Light"/>
+              </a:rPr>
+              <a:t>Duplicados, </a:t>
+            </a:r>
+            <a:r>
+              <a:rPr lang="es-ES" sz="3000" b="1" strike="noStrike" spc="-1" dirty="0" err="1">
+                <a:solidFill>
+                  <a:srgbClr val="582808"/>
+                </a:solidFill>
+                <a:latin typeface="Calibri Light"/>
+              </a:rPr>
+              <a:t>missings</a:t>
+            </a:r>
+            <a:r>
+              <a:rPr lang="es-ES" sz="3000" b="1" strike="noStrike" spc="-1" dirty="0">
+                <a:solidFill>
+                  <a:srgbClr val="582808"/>
+                </a:solidFill>
+                <a:latin typeface="Calibri Light"/>
+              </a:rPr>
+              <a:t> y </a:t>
+            </a:r>
+            <a:r>
+              <a:rPr lang="es-ES" sz="3000" b="1" strike="noStrike" spc="-1" dirty="0" err="1">
+                <a:solidFill>
+                  <a:srgbClr val="582808"/>
+                </a:solidFill>
+                <a:latin typeface="Calibri Light"/>
+              </a:rPr>
+              <a:t>outliers</a:t>
+            </a:r>
+            <a:endParaRPr lang="es-ES" sz="3000" b="0" strike="noStrike" spc="-1" dirty="0">
               <a:solidFill>
                 <a:srgbClr val="000000"/>
               </a:solidFill>
@@ -13876,7 +16500,7 @@
         </p:nvSpPr>
         <p:spPr>
           <a:xfrm>
-            <a:off x="716400" y="1839960"/>
+            <a:off x="716400" y="1961880"/>
             <a:ext cx="10946520" cy="3537976"/>
           </a:xfrm>
           <a:prstGeom prst="rect">
@@ -13905,7 +16529,7 @@
           </a:bodyPr>
           <a:lstStyle/>
           <a:p>
-            <a:pPr marL="216000" indent="-216000" defTabSz="914400">
+            <a:pPr marL="216000" indent="-216000" algn="just" defTabSz="914400">
               <a:lnSpc>
                 <a:spcPct val="100000"/>
               </a:lnSpc>
@@ -13986,7 +16610,7 @@
             </a:endParaRPr>
           </a:p>
           <a:p>
-            <a:pPr marL="216000" indent="-216000" defTabSz="914400">
+            <a:pPr marL="216000" indent="-216000" algn="just" defTabSz="914400">
               <a:lnSpc>
                 <a:spcPct val="100000"/>
               </a:lnSpc>
@@ -14004,7 +16628,7 @@
             </a:endParaRPr>
           </a:p>
           <a:p>
-            <a:pPr marL="216000" indent="-216000" defTabSz="914400">
+            <a:pPr marL="216000" indent="-216000" algn="just" defTabSz="914400">
               <a:lnSpc>
                 <a:spcPct val="100000"/>
               </a:lnSpc>
@@ -14145,7 +16769,7 @@
             </a:endParaRPr>
           </a:p>
           <a:p>
-            <a:pPr marL="216000" indent="-216000" defTabSz="914400">
+            <a:pPr marL="216000" indent="-216000" algn="just" defTabSz="914400">
               <a:lnSpc>
                 <a:spcPct val="100000"/>
               </a:lnSpc>
@@ -14235,10 +16859,11 @@
       </p:sp>
       <p:pic>
         <p:nvPicPr>
-          <p:cNvPr id="72" name="Imagen 7">
+          <p:cNvPr id="6" name="Imagen 20">
+            <a:hlinkClick r:id="rId2" action="ppaction://hlinksldjump"/>
             <a:extLst>
               <a:ext uri="{FF2B5EF4-FFF2-40B4-BE49-F238E27FC236}">
-                <a16:creationId xmlns:a16="http://schemas.microsoft.com/office/drawing/2014/main" id="{EBC7D6D4-07E0-CC47-5617-19C0074BD8A4}"/>
+                <a16:creationId xmlns:a16="http://schemas.microsoft.com/office/drawing/2014/main" id="{2E8A3BE8-68B9-474E-9C4A-24ADC6DF38E3}"/>
               </a:ext>
             </a:extLst>
           </p:cNvPr>
@@ -14246,13 +16871,13 @@
           <p:nvPr/>
         </p:nvPicPr>
         <p:blipFill>
-          <a:blip r:embed="rId2"/>
+          <a:blip r:embed="rId3"/>
           <a:stretch/>
         </p:blipFill>
         <p:spPr>
           <a:xfrm>
-            <a:off x="10348920" y="479520"/>
-            <a:ext cx="1314000" cy="987840"/>
+            <a:off x="10706465" y="347264"/>
+            <a:ext cx="1220995" cy="664372"/>
           </a:xfrm>
           <a:prstGeom prst="rect">
             <a:avLst/>
